--- a/09/01__DATA515_09_AdvancedTesting.pptx
+++ b/09/01__DATA515_09_AdvancedTesting.pptx
@@ -1,50 +1,50 @@
 
 <file path=ppt/presentation.xml><?xml version="1.0" encoding="utf-8"?>
-<p:presentation xmlns:a="http://schemas.openxmlformats.org/drawingml/2006/main" xmlns:r="http://schemas.openxmlformats.org/officeDocument/2006/relationships" xmlns:mc="http://schemas.openxmlformats.org/markup-compatibility/2006" xmlns:mv="urn:schemas-microsoft-com:mac:vml" xmlns:p="http://schemas.openxmlformats.org/presentationml/2006/main" xmlns:c="http://schemas.openxmlformats.org/drawingml/2006/chart" xmlns:dgm="http://schemas.openxmlformats.org/drawingml/2006/diagram" xmlns:o="urn:schemas-microsoft-com:office:office" xmlns:v="urn:schemas-microsoft-com:vml" xmlns:pvml="urn:schemas-microsoft-com:office:powerpoint" xmlns:com="http://schemas.openxmlformats.org/drawingml/2006/compatibility" xmlns:p14="http://schemas.microsoft.com/office/powerpoint/2010/main" xmlns:p15="http://schemas.microsoft.com/office/powerpoint/2012/main" xmlns:ahyp="http://schemas.microsoft.com/office/drawing/2018/hyperlinkcolor" autoCompressPictures="0" embedTrueTypeFonts="1" strictFirstAndLastChars="0" saveSubsetFonts="1">
+<p:presentation xmlns:a="http://schemas.openxmlformats.org/drawingml/2006/main" xmlns:r="http://schemas.openxmlformats.org/officeDocument/2006/relationships" xmlns:p="http://schemas.openxmlformats.org/presentationml/2006/main" strictFirstAndLastChars="0" embedTrueTypeFonts="1" saveSubsetFonts="1" autoCompressPictures="0">
   <p:sldMasterIdLst>
-    <p:sldMasterId id="2147483659" r:id="rId4"/>
+    <p:sldMasterId id="2147483659" r:id="rId1"/>
   </p:sldMasterIdLst>
   <p:notesMasterIdLst>
-    <p:notesMasterId r:id="rId5"/>
+    <p:notesMasterId r:id="rId25"/>
   </p:notesMasterIdLst>
   <p:sldIdLst>
-    <p:sldId id="256" r:id="rId6"/>
-    <p:sldId id="257" r:id="rId7"/>
-    <p:sldId id="258" r:id="rId8"/>
-    <p:sldId id="259" r:id="rId9"/>
-    <p:sldId id="260" r:id="rId10"/>
-    <p:sldId id="261" r:id="rId11"/>
-    <p:sldId id="262" r:id="rId12"/>
-    <p:sldId id="263" r:id="rId13"/>
-    <p:sldId id="264" r:id="rId14"/>
-    <p:sldId id="265" r:id="rId15"/>
-    <p:sldId id="266" r:id="rId16"/>
-    <p:sldId id="267" r:id="rId17"/>
-    <p:sldId id="268" r:id="rId18"/>
-    <p:sldId id="269" r:id="rId19"/>
-    <p:sldId id="270" r:id="rId20"/>
-    <p:sldId id="271" r:id="rId21"/>
-    <p:sldId id="272" r:id="rId22"/>
-    <p:sldId id="273" r:id="rId23"/>
-    <p:sldId id="274" r:id="rId24"/>
-    <p:sldId id="275" r:id="rId25"/>
-    <p:sldId id="276" r:id="rId26"/>
-    <p:sldId id="277" r:id="rId27"/>
-    <p:sldId id="278" r:id="rId28"/>
+    <p:sldId id="256" r:id="rId2"/>
+    <p:sldId id="257" r:id="rId3"/>
+    <p:sldId id="258" r:id="rId4"/>
+    <p:sldId id="259" r:id="rId5"/>
+    <p:sldId id="260" r:id="rId6"/>
+    <p:sldId id="261" r:id="rId7"/>
+    <p:sldId id="262" r:id="rId8"/>
+    <p:sldId id="263" r:id="rId9"/>
+    <p:sldId id="264" r:id="rId10"/>
+    <p:sldId id="265" r:id="rId11"/>
+    <p:sldId id="266" r:id="rId12"/>
+    <p:sldId id="267" r:id="rId13"/>
+    <p:sldId id="268" r:id="rId14"/>
+    <p:sldId id="269" r:id="rId15"/>
+    <p:sldId id="270" r:id="rId16"/>
+    <p:sldId id="271" r:id="rId17"/>
+    <p:sldId id="272" r:id="rId18"/>
+    <p:sldId id="273" r:id="rId19"/>
+    <p:sldId id="274" r:id="rId20"/>
+    <p:sldId id="275" r:id="rId21"/>
+    <p:sldId id="276" r:id="rId22"/>
+    <p:sldId id="277" r:id="rId23"/>
+    <p:sldId id="278" r:id="rId24"/>
   </p:sldIdLst>
-  <p:sldSz cy="5143500" cx="9144000"/>
+  <p:sldSz cx="9144000" cy="5143500" type="screen16x9"/>
   <p:notesSz cx="6858000" cy="9144000"/>
   <p:embeddedFontLst>
     <p:embeddedFont>
-      <p:font typeface="Roboto Mono"/>
-      <p:regular r:id="rId29"/>
-      <p:bold r:id="rId30"/>
-      <p:italic r:id="rId31"/>
-      <p:boldItalic r:id="rId32"/>
+      <p:font typeface="Roboto Mono" panose="00000009000000000000" pitchFamily="49" charset="0"/>
+      <p:regular r:id="rId26"/>
+      <p:bold r:id="rId27"/>
+      <p:italic r:id="rId28"/>
+      <p:boldItalic r:id="rId29"/>
     </p:embeddedFont>
   </p:embeddedFontLst>
   <p:defaultTextStyle>
-    <a:defPPr lvl="0" marR="0" rtl="0" algn="l">
+    <a:defPPr marR="0" lvl="0" algn="l" rtl="0">
       <a:lnSpc>
         <a:spcPct val="100000"/>
       </a:lnSpc>
@@ -55,7 +55,7 @@
         <a:spcPts val="0"/>
       </a:spcAft>
     </a:defPPr>
-    <a:lvl1pPr lvl="0" marR="0" rtl="0" algn="l">
+    <a:lvl1pPr marR="0" lvl="0" algn="l" rtl="0">
       <a:lnSpc>
         <a:spcPct val="100000"/>
       </a:lnSpc>
@@ -69,7 +69,7 @@
         <a:srgbClr val="000000"/>
       </a:buClr>
       <a:buFont typeface="Arial"/>
-      <a:defRPr b="0" i="0" sz="1400" u="none" cap="none" strike="noStrike">
+      <a:defRPr sz="1400" b="0" i="0" u="none" strike="noStrike" cap="none">
         <a:solidFill>
           <a:srgbClr val="000000"/>
         </a:solidFill>
@@ -79,7 +79,7 @@
         <a:sym typeface="Arial"/>
       </a:defRPr>
     </a:lvl1pPr>
-    <a:lvl2pPr lvl="1" marR="0" rtl="0" algn="l">
+    <a:lvl2pPr marR="0" lvl="1" algn="l" rtl="0">
       <a:lnSpc>
         <a:spcPct val="100000"/>
       </a:lnSpc>
@@ -93,7 +93,7 @@
         <a:srgbClr val="000000"/>
       </a:buClr>
       <a:buFont typeface="Arial"/>
-      <a:defRPr b="0" i="0" sz="1400" u="none" cap="none" strike="noStrike">
+      <a:defRPr sz="1400" b="0" i="0" u="none" strike="noStrike" cap="none">
         <a:solidFill>
           <a:srgbClr val="000000"/>
         </a:solidFill>
@@ -103,7 +103,7 @@
         <a:sym typeface="Arial"/>
       </a:defRPr>
     </a:lvl2pPr>
-    <a:lvl3pPr lvl="2" marR="0" rtl="0" algn="l">
+    <a:lvl3pPr marR="0" lvl="2" algn="l" rtl="0">
       <a:lnSpc>
         <a:spcPct val="100000"/>
       </a:lnSpc>
@@ -117,7 +117,7 @@
         <a:srgbClr val="000000"/>
       </a:buClr>
       <a:buFont typeface="Arial"/>
-      <a:defRPr b="0" i="0" sz="1400" u="none" cap="none" strike="noStrike">
+      <a:defRPr sz="1400" b="0" i="0" u="none" strike="noStrike" cap="none">
         <a:solidFill>
           <a:srgbClr val="000000"/>
         </a:solidFill>
@@ -127,7 +127,7 @@
         <a:sym typeface="Arial"/>
       </a:defRPr>
     </a:lvl3pPr>
-    <a:lvl4pPr lvl="3" marR="0" rtl="0" algn="l">
+    <a:lvl4pPr marR="0" lvl="3" algn="l" rtl="0">
       <a:lnSpc>
         <a:spcPct val="100000"/>
       </a:lnSpc>
@@ -141,7 +141,7 @@
         <a:srgbClr val="000000"/>
       </a:buClr>
       <a:buFont typeface="Arial"/>
-      <a:defRPr b="0" i="0" sz="1400" u="none" cap="none" strike="noStrike">
+      <a:defRPr sz="1400" b="0" i="0" u="none" strike="noStrike" cap="none">
         <a:solidFill>
           <a:srgbClr val="000000"/>
         </a:solidFill>
@@ -151,7 +151,7 @@
         <a:sym typeface="Arial"/>
       </a:defRPr>
     </a:lvl4pPr>
-    <a:lvl5pPr lvl="4" marR="0" rtl="0" algn="l">
+    <a:lvl5pPr marR="0" lvl="4" algn="l" rtl="0">
       <a:lnSpc>
         <a:spcPct val="100000"/>
       </a:lnSpc>
@@ -165,7 +165,7 @@
         <a:srgbClr val="000000"/>
       </a:buClr>
       <a:buFont typeface="Arial"/>
-      <a:defRPr b="0" i="0" sz="1400" u="none" cap="none" strike="noStrike">
+      <a:defRPr sz="1400" b="0" i="0" u="none" strike="noStrike" cap="none">
         <a:solidFill>
           <a:srgbClr val="000000"/>
         </a:solidFill>
@@ -175,7 +175,7 @@
         <a:sym typeface="Arial"/>
       </a:defRPr>
     </a:lvl5pPr>
-    <a:lvl6pPr lvl="5" marR="0" rtl="0" algn="l">
+    <a:lvl6pPr marR="0" lvl="5" algn="l" rtl="0">
       <a:lnSpc>
         <a:spcPct val="100000"/>
       </a:lnSpc>
@@ -189,7 +189,7 @@
         <a:srgbClr val="000000"/>
       </a:buClr>
       <a:buFont typeface="Arial"/>
-      <a:defRPr b="0" i="0" sz="1400" u="none" cap="none" strike="noStrike">
+      <a:defRPr sz="1400" b="0" i="0" u="none" strike="noStrike" cap="none">
         <a:solidFill>
           <a:srgbClr val="000000"/>
         </a:solidFill>
@@ -199,7 +199,7 @@
         <a:sym typeface="Arial"/>
       </a:defRPr>
     </a:lvl6pPr>
-    <a:lvl7pPr lvl="6" marR="0" rtl="0" algn="l">
+    <a:lvl7pPr marR="0" lvl="6" algn="l" rtl="0">
       <a:lnSpc>
         <a:spcPct val="100000"/>
       </a:lnSpc>
@@ -213,7 +213,7 @@
         <a:srgbClr val="000000"/>
       </a:buClr>
       <a:buFont typeface="Arial"/>
-      <a:defRPr b="0" i="0" sz="1400" u="none" cap="none" strike="noStrike">
+      <a:defRPr sz="1400" b="0" i="0" u="none" strike="noStrike" cap="none">
         <a:solidFill>
           <a:srgbClr val="000000"/>
         </a:solidFill>
@@ -223,7 +223,7 @@
         <a:sym typeface="Arial"/>
       </a:defRPr>
     </a:lvl7pPr>
-    <a:lvl8pPr lvl="7" marR="0" rtl="0" algn="l">
+    <a:lvl8pPr marR="0" lvl="7" algn="l" rtl="0">
       <a:lnSpc>
         <a:spcPct val="100000"/>
       </a:lnSpc>
@@ -237,7 +237,7 @@
         <a:srgbClr val="000000"/>
       </a:buClr>
       <a:buFont typeface="Arial"/>
-      <a:defRPr b="0" i="0" sz="1400" u="none" cap="none" strike="noStrike">
+      <a:defRPr sz="1400" b="0" i="0" u="none" strike="noStrike" cap="none">
         <a:solidFill>
           <a:srgbClr val="000000"/>
         </a:solidFill>
@@ -247,7 +247,7 @@
         <a:sym typeface="Arial"/>
       </a:defRPr>
     </a:lvl8pPr>
-    <a:lvl9pPr lvl="8" marR="0" rtl="0" algn="l">
+    <a:lvl9pPr marR="0" lvl="8" algn="l" rtl="0">
       <a:lnSpc>
         <a:spcPct val="100000"/>
       </a:lnSpc>
@@ -261,7 +261,7 @@
         <a:srgbClr val="000000"/>
       </a:buClr>
       <a:buFont typeface="Arial"/>
-      <a:defRPr b="0" i="0" sz="1400" u="none" cap="none" strike="noStrike">
+      <a:defRPr sz="1400" b="0" i="0" u="none" strike="noStrike" cap="none">
         <a:solidFill>
           <a:srgbClr val="000000"/>
         </a:solidFill>
@@ -274,7 +274,7 @@
   </p:defaultTextStyle>
   <p:extLst>
     <p:ext uri="{EFAFB233-063F-42B5-8137-9DF3F51BA10A}">
-      <p15:sldGuideLst>
+      <p15:sldGuideLst xmlns:p15="http://schemas.microsoft.com/office/powerpoint/2012/main">
         <p15:guide id="1" orient="horz" pos="1620">
           <p15:clr>
             <a:srgbClr val="A4A3A4"/>
@@ -292,11 +292,16 @@
 </file>
 
 <file path=ppt/notesMasters/notesMaster1.xml><?xml version="1.0" encoding="utf-8"?>
-<p:notesMaster xmlns:a="http://schemas.openxmlformats.org/drawingml/2006/main" xmlns:r="http://schemas.openxmlformats.org/officeDocument/2006/relationships" xmlns:mc="http://schemas.openxmlformats.org/markup-compatibility/2006" xmlns:mv="urn:schemas-microsoft-com:mac:vml" xmlns:p="http://schemas.openxmlformats.org/presentationml/2006/main" xmlns:c="http://schemas.openxmlformats.org/drawingml/2006/chart" xmlns:dgm="http://schemas.openxmlformats.org/drawingml/2006/diagram" xmlns:o="urn:schemas-microsoft-com:office:office" xmlns:v="urn:schemas-microsoft-com:vml" xmlns:pvml="urn:schemas-microsoft-com:office:powerpoint" xmlns:com="http://schemas.openxmlformats.org/drawingml/2006/compatibility" xmlns:p14="http://schemas.microsoft.com/office/powerpoint/2010/main" xmlns:p15="http://schemas.microsoft.com/office/powerpoint/2012/main" xmlns:ahyp="http://schemas.microsoft.com/office/drawing/2018/hyperlinkcolor">
+<p:notesMaster xmlns:a="http://schemas.openxmlformats.org/drawingml/2006/main" xmlns:r="http://schemas.openxmlformats.org/officeDocument/2006/relationships" xmlns:p="http://schemas.openxmlformats.org/presentationml/2006/main">
   <p:cSld>
+    <p:bg>
+      <p:bgRef idx="1001">
+        <a:schemeClr val="bg1"/>
+      </p:bgRef>
+    </p:bg>
     <p:spTree>
       <p:nvGrpSpPr>
-        <p:cNvPr id="2" name="Shape 2"/>
+        <p:cNvPr id="1" name="Shape 2"/>
         <p:cNvGrpSpPr/>
         <p:nvPr/>
       </p:nvGrpSpPr>
@@ -311,9 +316,11 @@
       <p:sp>
         <p:nvSpPr>
           <p:cNvPr id="3" name="Google Shape;3;n"/>
-          <p:cNvSpPr/>
+          <p:cNvSpPr>
+            <a:spLocks noGrp="1" noRot="1" noChangeAspect="1"/>
+          </p:cNvSpPr>
           <p:nvPr>
-            <p:ph idx="2" type="sldImg"/>
+            <p:ph type="sldImg" idx="2"/>
           </p:nvPr>
         </p:nvSpPr>
         <p:spPr>
@@ -322,9 +329,13 @@
             <a:ext cx="6096075" cy="3429000"/>
           </a:xfrm>
           <a:custGeom>
-            <a:rect b="b" l="l" r="r" t="t"/>
+            <a:avLst/>
+            <a:gdLst/>
+            <a:ahLst/>
+            <a:cxnLst/>
+            <a:rect l="l" t="t" r="r" b="b"/>
             <a:pathLst>
-              <a:path extrusionOk="0" h="120000" w="120000">
+              <a:path w="120000" h="120000" extrusionOk="0">
                 <a:moveTo>
                   <a:pt x="0" y="0"/>
                 </a:moveTo>
@@ -342,23 +353,25 @@
             </a:pathLst>
           </a:custGeom>
           <a:noFill/>
-          <a:ln cap="flat" cmpd="sng" w="9525">
+          <a:ln w="9525" cap="flat" cmpd="sng">
             <a:solidFill>
               <a:srgbClr val="000000"/>
             </a:solidFill>
             <a:prstDash val="solid"/>
             <a:round/>
-            <a:headEnd len="sm" w="sm" type="none"/>
-            <a:tailEnd len="sm" w="sm" type="none"/>
+            <a:headEnd type="none" w="sm" len="sm"/>
+            <a:tailEnd type="none" w="sm" len="sm"/>
           </a:ln>
         </p:spPr>
       </p:sp>
       <p:sp>
         <p:nvSpPr>
           <p:cNvPr id="4" name="Google Shape;4;n"/>
-          <p:cNvSpPr txBox="1"/>
+          <p:cNvSpPr txBox="1">
+            <a:spLocks noGrp="1"/>
+          </p:cNvSpPr>
           <p:nvPr>
-            <p:ph idx="1" type="body"/>
+            <p:ph type="body" idx="1"/>
           </p:nvPr>
         </p:nvSpPr>
         <p:spPr>
@@ -375,11 +388,11 @@
           </a:ln>
         </p:spPr>
         <p:txBody>
-          <a:bodyPr anchorCtr="0" anchor="t" bIns="91425" lIns="91425" spcFirstLastPara="1" rIns="91425" wrap="square" tIns="91425">
+          <a:bodyPr spcFirstLastPara="1" wrap="square" lIns="91425" tIns="91425" rIns="91425" bIns="91425" anchor="t" anchorCtr="0">
             <a:noAutofit/>
           </a:bodyPr>
           <a:lstStyle>
-            <a:lvl1pPr indent="-298450" lvl="0" marL="457200">
+            <a:lvl1pPr marL="457200" lvl="0" indent="-298450">
               <a:spcBef>
                 <a:spcPts val="0"/>
               </a:spcBef>
@@ -390,7 +403,7 @@
               <a:buChar char="●"/>
               <a:defRPr sz="1100"/>
             </a:lvl1pPr>
-            <a:lvl2pPr indent="-298450" lvl="1" marL="914400">
+            <a:lvl2pPr marL="914400" lvl="1" indent="-298450">
               <a:spcBef>
                 <a:spcPts val="0"/>
               </a:spcBef>
@@ -401,7 +414,7 @@
               <a:buChar char="○"/>
               <a:defRPr sz="1100"/>
             </a:lvl2pPr>
-            <a:lvl3pPr indent="-298450" lvl="2" marL="1371600">
+            <a:lvl3pPr marL="1371600" lvl="2" indent="-298450">
               <a:spcBef>
                 <a:spcPts val="0"/>
               </a:spcBef>
@@ -412,7 +425,7 @@
               <a:buChar char="■"/>
               <a:defRPr sz="1100"/>
             </a:lvl3pPr>
-            <a:lvl4pPr indent="-298450" lvl="3" marL="1828800">
+            <a:lvl4pPr marL="1828800" lvl="3" indent="-298450">
               <a:spcBef>
                 <a:spcPts val="0"/>
               </a:spcBef>
@@ -423,7 +436,7 @@
               <a:buChar char="●"/>
               <a:defRPr sz="1100"/>
             </a:lvl4pPr>
-            <a:lvl5pPr indent="-298450" lvl="4" marL="2286000">
+            <a:lvl5pPr marL="2286000" lvl="4" indent="-298450">
               <a:spcBef>
                 <a:spcPts val="0"/>
               </a:spcBef>
@@ -434,7 +447,7 @@
               <a:buChar char="○"/>
               <a:defRPr sz="1100"/>
             </a:lvl5pPr>
-            <a:lvl6pPr indent="-298450" lvl="5" marL="2743200">
+            <a:lvl6pPr marL="2743200" lvl="5" indent="-298450">
               <a:spcBef>
                 <a:spcPts val="0"/>
               </a:spcBef>
@@ -445,7 +458,7 @@
               <a:buChar char="■"/>
               <a:defRPr sz="1100"/>
             </a:lvl6pPr>
-            <a:lvl7pPr indent="-298450" lvl="6" marL="3200400">
+            <a:lvl7pPr marL="3200400" lvl="6" indent="-298450">
               <a:spcBef>
                 <a:spcPts val="0"/>
               </a:spcBef>
@@ -456,7 +469,7 @@
               <a:buChar char="●"/>
               <a:defRPr sz="1100"/>
             </a:lvl7pPr>
-            <a:lvl8pPr indent="-298450" lvl="7" marL="3657600">
+            <a:lvl8pPr marL="3657600" lvl="7" indent="-298450">
               <a:spcBef>
                 <a:spcPts val="0"/>
               </a:spcBef>
@@ -467,7 +480,7 @@
               <a:buChar char="○"/>
               <a:defRPr sz="1100"/>
             </a:lvl8pPr>
-            <a:lvl9pPr indent="-298450" lvl="8" marL="4114800">
+            <a:lvl9pPr marL="4114800" lvl="8" indent="-298450">
               <a:spcBef>
                 <a:spcPts val="0"/>
               </a:spcBef>
@@ -479,14 +492,16 @@
               <a:defRPr sz="1100"/>
             </a:lvl9pPr>
           </a:lstStyle>
-          <a:p/>
+          <a:p>
+            <a:endParaRPr/>
+          </a:p>
         </p:txBody>
       </p:sp>
     </p:spTree>
   </p:cSld>
-  <p:clrMap accent1="accent1" accent2="accent2" accent3="accent3" accent4="accent4" accent5="accent5" accent6="accent6" bg1="lt1" bg2="dk2" tx1="dk1" tx2="lt2" folHlink="folHlink" hlink="hlink"/>
+  <p:clrMap bg1="lt1" tx1="dk1" bg2="dk2" tx2="lt2" accent1="accent1" accent2="accent2" accent3="accent3" accent4="accent4" accent5="accent5" accent6="accent6" hlink="hlink" folHlink="folHlink"/>
   <p:notesStyle>
-    <a:defPPr lvl="0" marR="0" rtl="0" algn="l">
+    <a:defPPr marR="0" lvl="0" algn="l" rtl="0">
       <a:lnSpc>
         <a:spcPct val="100000"/>
       </a:lnSpc>
@@ -497,7 +512,7 @@
         <a:spcPts val="0"/>
       </a:spcAft>
     </a:defPPr>
-    <a:lvl1pPr lvl="0" marR="0" rtl="0" algn="l">
+    <a:lvl1pPr marR="0" lvl="0" algn="l" rtl="0">
       <a:lnSpc>
         <a:spcPct val="100000"/>
       </a:lnSpc>
@@ -511,7 +526,7 @@
         <a:srgbClr val="000000"/>
       </a:buClr>
       <a:buFont typeface="Arial"/>
-      <a:defRPr b="0" i="0" sz="1400" u="none" cap="none" strike="noStrike">
+      <a:defRPr sz="1400" b="0" i="0" u="none" strike="noStrike" cap="none">
         <a:solidFill>
           <a:srgbClr val="000000"/>
         </a:solidFill>
@@ -521,7 +536,7 @@
         <a:sym typeface="Arial"/>
       </a:defRPr>
     </a:lvl1pPr>
-    <a:lvl2pPr lvl="1" marR="0" rtl="0" algn="l">
+    <a:lvl2pPr marR="0" lvl="1" algn="l" rtl="0">
       <a:lnSpc>
         <a:spcPct val="100000"/>
       </a:lnSpc>
@@ -535,7 +550,7 @@
         <a:srgbClr val="000000"/>
       </a:buClr>
       <a:buFont typeface="Arial"/>
-      <a:defRPr b="0" i="0" sz="1400" u="none" cap="none" strike="noStrike">
+      <a:defRPr sz="1400" b="0" i="0" u="none" strike="noStrike" cap="none">
         <a:solidFill>
           <a:srgbClr val="000000"/>
         </a:solidFill>
@@ -545,7 +560,7 @@
         <a:sym typeface="Arial"/>
       </a:defRPr>
     </a:lvl2pPr>
-    <a:lvl3pPr lvl="2" marR="0" rtl="0" algn="l">
+    <a:lvl3pPr marR="0" lvl="2" algn="l" rtl="0">
       <a:lnSpc>
         <a:spcPct val="100000"/>
       </a:lnSpc>
@@ -559,7 +574,7 @@
         <a:srgbClr val="000000"/>
       </a:buClr>
       <a:buFont typeface="Arial"/>
-      <a:defRPr b="0" i="0" sz="1400" u="none" cap="none" strike="noStrike">
+      <a:defRPr sz="1400" b="0" i="0" u="none" strike="noStrike" cap="none">
         <a:solidFill>
           <a:srgbClr val="000000"/>
         </a:solidFill>
@@ -569,7 +584,7 @@
         <a:sym typeface="Arial"/>
       </a:defRPr>
     </a:lvl3pPr>
-    <a:lvl4pPr lvl="3" marR="0" rtl="0" algn="l">
+    <a:lvl4pPr marR="0" lvl="3" algn="l" rtl="0">
       <a:lnSpc>
         <a:spcPct val="100000"/>
       </a:lnSpc>
@@ -583,7 +598,7 @@
         <a:srgbClr val="000000"/>
       </a:buClr>
       <a:buFont typeface="Arial"/>
-      <a:defRPr b="0" i="0" sz="1400" u="none" cap="none" strike="noStrike">
+      <a:defRPr sz="1400" b="0" i="0" u="none" strike="noStrike" cap="none">
         <a:solidFill>
           <a:srgbClr val="000000"/>
         </a:solidFill>
@@ -593,7 +608,7 @@
         <a:sym typeface="Arial"/>
       </a:defRPr>
     </a:lvl4pPr>
-    <a:lvl5pPr lvl="4" marR="0" rtl="0" algn="l">
+    <a:lvl5pPr marR="0" lvl="4" algn="l" rtl="0">
       <a:lnSpc>
         <a:spcPct val="100000"/>
       </a:lnSpc>
@@ -607,7 +622,7 @@
         <a:srgbClr val="000000"/>
       </a:buClr>
       <a:buFont typeface="Arial"/>
-      <a:defRPr b="0" i="0" sz="1400" u="none" cap="none" strike="noStrike">
+      <a:defRPr sz="1400" b="0" i="0" u="none" strike="noStrike" cap="none">
         <a:solidFill>
           <a:srgbClr val="000000"/>
         </a:solidFill>
@@ -617,7 +632,7 @@
         <a:sym typeface="Arial"/>
       </a:defRPr>
     </a:lvl5pPr>
-    <a:lvl6pPr lvl="5" marR="0" rtl="0" algn="l">
+    <a:lvl6pPr marR="0" lvl="5" algn="l" rtl="0">
       <a:lnSpc>
         <a:spcPct val="100000"/>
       </a:lnSpc>
@@ -631,7 +646,7 @@
         <a:srgbClr val="000000"/>
       </a:buClr>
       <a:buFont typeface="Arial"/>
-      <a:defRPr b="0" i="0" sz="1400" u="none" cap="none" strike="noStrike">
+      <a:defRPr sz="1400" b="0" i="0" u="none" strike="noStrike" cap="none">
         <a:solidFill>
           <a:srgbClr val="000000"/>
         </a:solidFill>
@@ -641,7 +656,7 @@
         <a:sym typeface="Arial"/>
       </a:defRPr>
     </a:lvl6pPr>
-    <a:lvl7pPr lvl="6" marR="0" rtl="0" algn="l">
+    <a:lvl7pPr marR="0" lvl="6" algn="l" rtl="0">
       <a:lnSpc>
         <a:spcPct val="100000"/>
       </a:lnSpc>
@@ -655,7 +670,7 @@
         <a:srgbClr val="000000"/>
       </a:buClr>
       <a:buFont typeface="Arial"/>
-      <a:defRPr b="0" i="0" sz="1400" u="none" cap="none" strike="noStrike">
+      <a:defRPr sz="1400" b="0" i="0" u="none" strike="noStrike" cap="none">
         <a:solidFill>
           <a:srgbClr val="000000"/>
         </a:solidFill>
@@ -665,7 +680,7 @@
         <a:sym typeface="Arial"/>
       </a:defRPr>
     </a:lvl7pPr>
-    <a:lvl8pPr lvl="7" marR="0" rtl="0" algn="l">
+    <a:lvl8pPr marR="0" lvl="7" algn="l" rtl="0">
       <a:lnSpc>
         <a:spcPct val="100000"/>
       </a:lnSpc>
@@ -679,7 +694,7 @@
         <a:srgbClr val="000000"/>
       </a:buClr>
       <a:buFont typeface="Arial"/>
-      <a:defRPr b="0" i="0" sz="1400" u="none" cap="none" strike="noStrike">
+      <a:defRPr sz="1400" b="0" i="0" u="none" strike="noStrike" cap="none">
         <a:solidFill>
           <a:srgbClr val="000000"/>
         </a:solidFill>
@@ -689,7 +704,7 @@
         <a:sym typeface="Arial"/>
       </a:defRPr>
     </a:lvl8pPr>
-    <a:lvl9pPr lvl="8" marR="0" rtl="0" algn="l">
+    <a:lvl9pPr marR="0" lvl="8" algn="l" rtl="0">
       <a:lnSpc>
         <a:spcPct val="100000"/>
       </a:lnSpc>
@@ -703,7 +718,7 @@
         <a:srgbClr val="000000"/>
       </a:buClr>
       <a:buFont typeface="Arial"/>
-      <a:defRPr b="0" i="0" sz="1400" u="none" cap="none" strike="noStrike">
+      <a:defRPr sz="1400" b="0" i="0" u="none" strike="noStrike" cap="none">
         <a:solidFill>
           <a:srgbClr val="000000"/>
         </a:solidFill>
@@ -718,11 +733,11 @@
 </file>
 
 <file path=ppt/notesSlides/notesSlide1.xml><?xml version="1.0" encoding="utf-8"?>
-<p:notes xmlns:a="http://schemas.openxmlformats.org/drawingml/2006/main" xmlns:r="http://schemas.openxmlformats.org/officeDocument/2006/relationships" xmlns:mc="http://schemas.openxmlformats.org/markup-compatibility/2006" xmlns:mv="urn:schemas-microsoft-com:mac:vml" xmlns:p="http://schemas.openxmlformats.org/presentationml/2006/main" xmlns:c="http://schemas.openxmlformats.org/drawingml/2006/chart" xmlns:dgm="http://schemas.openxmlformats.org/drawingml/2006/diagram" xmlns:o="urn:schemas-microsoft-com:office:office" xmlns:v="urn:schemas-microsoft-com:vml" xmlns:pvml="urn:schemas-microsoft-com:office:powerpoint" xmlns:com="http://schemas.openxmlformats.org/drawingml/2006/compatibility" xmlns:p14="http://schemas.microsoft.com/office/powerpoint/2010/main" xmlns:p15="http://schemas.microsoft.com/office/powerpoint/2012/main" xmlns:ahyp="http://schemas.microsoft.com/office/drawing/2018/hyperlinkcolor" showMasterPhAnim="0" showMasterSp="0">
+<p:notes xmlns:a="http://schemas.openxmlformats.org/drawingml/2006/main" xmlns:r="http://schemas.openxmlformats.org/officeDocument/2006/relationships" xmlns:p="http://schemas.openxmlformats.org/presentationml/2006/main" showMasterSp="0" showMasterPhAnim="0">
   <p:cSld>
     <p:spTree>
       <p:nvGrpSpPr>
-        <p:cNvPr id="58" name="Shape 58"/>
+        <p:cNvPr id="1" name="Shape 58"/>
         <p:cNvGrpSpPr/>
         <p:nvPr/>
       </p:nvGrpSpPr>
@@ -737,20 +752,26 @@
       <p:sp>
         <p:nvSpPr>
           <p:cNvPr id="59" name="Google Shape;59;p:notes"/>
-          <p:cNvSpPr/>
+          <p:cNvSpPr>
+            <a:spLocks noGrp="1" noRot="1" noChangeAspect="1"/>
+          </p:cNvSpPr>
           <p:nvPr>
-            <p:ph idx="2" type="sldImg"/>
+            <p:ph type="sldImg" idx="2"/>
           </p:nvPr>
         </p:nvSpPr>
         <p:spPr>
           <a:xfrm>
-            <a:off x="381300" y="685800"/>
-            <a:ext cx="6096075" cy="3429000"/>
+            <a:off x="381000" y="685800"/>
+            <a:ext cx="6096000" cy="3429000"/>
           </a:xfrm>
           <a:custGeom>
-            <a:rect b="b" l="l" r="r" t="t"/>
+            <a:avLst/>
+            <a:gdLst/>
+            <a:ahLst/>
+            <a:cxnLst/>
+            <a:rect l="l" t="t" r="r" b="b"/>
             <a:pathLst>
-              <a:path extrusionOk="0" h="120000" w="120000">
+              <a:path w="120000" h="120000" extrusionOk="0">
                 <a:moveTo>
                   <a:pt x="0" y="0"/>
                 </a:moveTo>
@@ -772,9 +793,11 @@
       <p:sp>
         <p:nvSpPr>
           <p:cNvPr id="60" name="Google Shape;60;p:notes"/>
-          <p:cNvSpPr txBox="1"/>
+          <p:cNvSpPr txBox="1">
+            <a:spLocks noGrp="1"/>
+          </p:cNvSpPr>
           <p:nvPr>
-            <p:ph idx="1" type="body"/>
+            <p:ph type="body" idx="1"/>
           </p:nvPr>
         </p:nvSpPr>
         <p:spPr>
@@ -787,12 +810,12 @@
           </a:prstGeom>
         </p:spPr>
         <p:txBody>
-          <a:bodyPr anchorCtr="0" anchor="t" bIns="91425" lIns="91425" spcFirstLastPara="1" rIns="91425" wrap="square" tIns="91425">
+          <a:bodyPr spcFirstLastPara="1" wrap="square" lIns="91425" tIns="91425" rIns="91425" bIns="91425" anchor="t" anchorCtr="0">
             <a:noAutofit/>
           </a:bodyPr>
           <a:lstStyle/>
           <a:p>
-            <a:pPr indent="0" lvl="0" marL="0" rtl="0" algn="l">
+            <a:pPr marL="0" lvl="0" indent="0" algn="l" rtl="0">
               <a:spcBef>
                 <a:spcPts val="0"/>
               </a:spcBef>
@@ -801,9 +824,6 @@
               </a:spcAft>
               <a:buNone/>
             </a:pPr>
-            <a:r>
-              <a:t/>
-            </a:r>
             <a:endParaRPr/>
           </a:p>
         </p:txBody>
@@ -817,11 +837,11 @@
 </file>
 
 <file path=ppt/notesSlides/notesSlide10.xml><?xml version="1.0" encoding="utf-8"?>
-<p:notes xmlns:a="http://schemas.openxmlformats.org/drawingml/2006/main" xmlns:r="http://schemas.openxmlformats.org/officeDocument/2006/relationships" xmlns:mc="http://schemas.openxmlformats.org/markup-compatibility/2006" xmlns:mv="urn:schemas-microsoft-com:mac:vml" xmlns:p="http://schemas.openxmlformats.org/presentationml/2006/main" xmlns:c="http://schemas.openxmlformats.org/drawingml/2006/chart" xmlns:dgm="http://schemas.openxmlformats.org/drawingml/2006/diagram" xmlns:o="urn:schemas-microsoft-com:office:office" xmlns:v="urn:schemas-microsoft-com:vml" xmlns:pvml="urn:schemas-microsoft-com:office:powerpoint" xmlns:com="http://schemas.openxmlformats.org/drawingml/2006/compatibility" xmlns:p14="http://schemas.microsoft.com/office/powerpoint/2010/main" xmlns:p15="http://schemas.microsoft.com/office/powerpoint/2012/main" xmlns:ahyp="http://schemas.microsoft.com/office/drawing/2018/hyperlinkcolor" showMasterPhAnim="0" showMasterSp="0">
+<p:notes xmlns:a="http://schemas.openxmlformats.org/drawingml/2006/main" xmlns:r="http://schemas.openxmlformats.org/officeDocument/2006/relationships" xmlns:p="http://schemas.openxmlformats.org/presentationml/2006/main" showMasterSp="0" showMasterPhAnim="0">
   <p:cSld>
     <p:spTree>
       <p:nvGrpSpPr>
-        <p:cNvPr id="118" name="Shape 118"/>
+        <p:cNvPr id="1" name="Shape 118"/>
         <p:cNvGrpSpPr/>
         <p:nvPr/>
       </p:nvGrpSpPr>
@@ -836,9 +856,11 @@
       <p:sp>
         <p:nvSpPr>
           <p:cNvPr id="119" name="Google Shape;119;g2698beb87a1_0_45:notes"/>
-          <p:cNvSpPr/>
+          <p:cNvSpPr>
+            <a:spLocks noGrp="1" noRot="1" noChangeAspect="1"/>
+          </p:cNvSpPr>
           <p:nvPr>
-            <p:ph idx="2" type="sldImg"/>
+            <p:ph type="sldImg" idx="2"/>
           </p:nvPr>
         </p:nvSpPr>
         <p:spPr>
@@ -847,9 +869,13 @@
             <a:ext cx="6096000" cy="3429000"/>
           </a:xfrm>
           <a:custGeom>
-            <a:rect b="b" l="l" r="r" t="t"/>
+            <a:avLst/>
+            <a:gdLst/>
+            <a:ahLst/>
+            <a:cxnLst/>
+            <a:rect l="l" t="t" r="r" b="b"/>
             <a:pathLst>
-              <a:path extrusionOk="0" h="120000" w="120000">
+              <a:path w="120000" h="120000" extrusionOk="0">
                 <a:moveTo>
                   <a:pt x="0" y="0"/>
                 </a:moveTo>
@@ -871,9 +897,11 @@
       <p:sp>
         <p:nvSpPr>
           <p:cNvPr id="120" name="Google Shape;120;g2698beb87a1_0_45:notes"/>
-          <p:cNvSpPr txBox="1"/>
+          <p:cNvSpPr txBox="1">
+            <a:spLocks noGrp="1"/>
+          </p:cNvSpPr>
           <p:nvPr>
-            <p:ph idx="1" type="body"/>
+            <p:ph type="body" idx="1"/>
           </p:nvPr>
         </p:nvSpPr>
         <p:spPr>
@@ -886,12 +914,12 @@
           </a:prstGeom>
         </p:spPr>
         <p:txBody>
-          <a:bodyPr anchorCtr="0" anchor="t" bIns="91425" lIns="91425" spcFirstLastPara="1" rIns="91425" wrap="square" tIns="91425">
+          <a:bodyPr spcFirstLastPara="1" wrap="square" lIns="91425" tIns="91425" rIns="91425" bIns="91425" anchor="t" anchorCtr="0">
             <a:noAutofit/>
           </a:bodyPr>
           <a:lstStyle/>
           <a:p>
-            <a:pPr indent="0" lvl="0" marL="0" rtl="0" algn="l">
+            <a:pPr marL="0" lvl="0" indent="0" algn="l" rtl="0">
               <a:spcBef>
                 <a:spcPts val="0"/>
               </a:spcBef>
@@ -900,9 +928,6 @@
               </a:spcAft>
               <a:buNone/>
             </a:pPr>
-            <a:r>
-              <a:t/>
-            </a:r>
             <a:endParaRPr/>
           </a:p>
         </p:txBody>
@@ -916,11 +941,11 @@
 </file>
 
 <file path=ppt/notesSlides/notesSlide11.xml><?xml version="1.0" encoding="utf-8"?>
-<p:notes xmlns:a="http://schemas.openxmlformats.org/drawingml/2006/main" xmlns:r="http://schemas.openxmlformats.org/officeDocument/2006/relationships" xmlns:mc="http://schemas.openxmlformats.org/markup-compatibility/2006" xmlns:mv="urn:schemas-microsoft-com:mac:vml" xmlns:p="http://schemas.openxmlformats.org/presentationml/2006/main" xmlns:c="http://schemas.openxmlformats.org/drawingml/2006/chart" xmlns:dgm="http://schemas.openxmlformats.org/drawingml/2006/diagram" xmlns:o="urn:schemas-microsoft-com:office:office" xmlns:v="urn:schemas-microsoft-com:vml" xmlns:pvml="urn:schemas-microsoft-com:office:powerpoint" xmlns:com="http://schemas.openxmlformats.org/drawingml/2006/compatibility" xmlns:p14="http://schemas.microsoft.com/office/powerpoint/2010/main" xmlns:p15="http://schemas.microsoft.com/office/powerpoint/2012/main" xmlns:ahyp="http://schemas.microsoft.com/office/drawing/2018/hyperlinkcolor" showMasterPhAnim="0" showMasterSp="0">
+<p:notes xmlns:a="http://schemas.openxmlformats.org/drawingml/2006/main" xmlns:r="http://schemas.openxmlformats.org/officeDocument/2006/relationships" xmlns:p="http://schemas.openxmlformats.org/presentationml/2006/main" showMasterSp="0" showMasterPhAnim="0">
   <p:cSld>
     <p:spTree>
       <p:nvGrpSpPr>
-        <p:cNvPr id="124" name="Shape 124"/>
+        <p:cNvPr id="1" name="Shape 124"/>
         <p:cNvGrpSpPr/>
         <p:nvPr/>
       </p:nvGrpSpPr>
@@ -935,9 +960,11 @@
       <p:sp>
         <p:nvSpPr>
           <p:cNvPr id="125" name="Google Shape;125;g2698beb87a1_0_51:notes"/>
-          <p:cNvSpPr/>
+          <p:cNvSpPr>
+            <a:spLocks noGrp="1" noRot="1" noChangeAspect="1"/>
+          </p:cNvSpPr>
           <p:nvPr>
-            <p:ph idx="2" type="sldImg"/>
+            <p:ph type="sldImg" idx="2"/>
           </p:nvPr>
         </p:nvSpPr>
         <p:spPr>
@@ -946,9 +973,13 @@
             <a:ext cx="6096000" cy="3429000"/>
           </a:xfrm>
           <a:custGeom>
-            <a:rect b="b" l="l" r="r" t="t"/>
+            <a:avLst/>
+            <a:gdLst/>
+            <a:ahLst/>
+            <a:cxnLst/>
+            <a:rect l="l" t="t" r="r" b="b"/>
             <a:pathLst>
-              <a:path extrusionOk="0" h="120000" w="120000">
+              <a:path w="120000" h="120000" extrusionOk="0">
                 <a:moveTo>
                   <a:pt x="0" y="0"/>
                 </a:moveTo>
@@ -970,9 +1001,11 @@
       <p:sp>
         <p:nvSpPr>
           <p:cNvPr id="126" name="Google Shape;126;g2698beb87a1_0_51:notes"/>
-          <p:cNvSpPr txBox="1"/>
+          <p:cNvSpPr txBox="1">
+            <a:spLocks noGrp="1"/>
+          </p:cNvSpPr>
           <p:nvPr>
-            <p:ph idx="1" type="body"/>
+            <p:ph type="body" idx="1"/>
           </p:nvPr>
         </p:nvSpPr>
         <p:spPr>
@@ -985,12 +1018,12 @@
           </a:prstGeom>
         </p:spPr>
         <p:txBody>
-          <a:bodyPr anchorCtr="0" anchor="t" bIns="91425" lIns="91425" spcFirstLastPara="1" rIns="91425" wrap="square" tIns="91425">
+          <a:bodyPr spcFirstLastPara="1" wrap="square" lIns="91425" tIns="91425" rIns="91425" bIns="91425" anchor="t" anchorCtr="0">
             <a:noAutofit/>
           </a:bodyPr>
           <a:lstStyle/>
           <a:p>
-            <a:pPr indent="0" lvl="0" marL="0" rtl="0" algn="l">
+            <a:pPr marL="0" lvl="0" indent="0" algn="l" rtl="0">
               <a:spcBef>
                 <a:spcPts val="0"/>
               </a:spcBef>
@@ -999,9 +1032,6 @@
               </a:spcAft>
               <a:buNone/>
             </a:pPr>
-            <a:r>
-              <a:t/>
-            </a:r>
             <a:endParaRPr/>
           </a:p>
         </p:txBody>
@@ -1015,11 +1045,11 @@
 </file>
 
 <file path=ppt/notesSlides/notesSlide12.xml><?xml version="1.0" encoding="utf-8"?>
-<p:notes xmlns:a="http://schemas.openxmlformats.org/drawingml/2006/main" xmlns:r="http://schemas.openxmlformats.org/officeDocument/2006/relationships" xmlns:mc="http://schemas.openxmlformats.org/markup-compatibility/2006" xmlns:mv="urn:schemas-microsoft-com:mac:vml" xmlns:p="http://schemas.openxmlformats.org/presentationml/2006/main" xmlns:c="http://schemas.openxmlformats.org/drawingml/2006/chart" xmlns:dgm="http://schemas.openxmlformats.org/drawingml/2006/diagram" xmlns:o="urn:schemas-microsoft-com:office:office" xmlns:v="urn:schemas-microsoft-com:vml" xmlns:pvml="urn:schemas-microsoft-com:office:powerpoint" xmlns:com="http://schemas.openxmlformats.org/drawingml/2006/compatibility" xmlns:p14="http://schemas.microsoft.com/office/powerpoint/2010/main" xmlns:p15="http://schemas.microsoft.com/office/powerpoint/2012/main" xmlns:ahyp="http://schemas.microsoft.com/office/drawing/2018/hyperlinkcolor" showMasterPhAnim="0" showMasterSp="0">
+<p:notes xmlns:a="http://schemas.openxmlformats.org/drawingml/2006/main" xmlns:r="http://schemas.openxmlformats.org/officeDocument/2006/relationships" xmlns:p="http://schemas.openxmlformats.org/presentationml/2006/main" showMasterSp="0" showMasterPhAnim="0">
   <p:cSld>
     <p:spTree>
       <p:nvGrpSpPr>
-        <p:cNvPr id="131" name="Shape 131"/>
+        <p:cNvPr id="1" name="Shape 131"/>
         <p:cNvGrpSpPr/>
         <p:nvPr/>
       </p:nvGrpSpPr>
@@ -1034,9 +1064,11 @@
       <p:sp>
         <p:nvSpPr>
           <p:cNvPr id="132" name="Google Shape;132;g2698beb87a1_0_61:notes"/>
-          <p:cNvSpPr/>
+          <p:cNvSpPr>
+            <a:spLocks noGrp="1" noRot="1" noChangeAspect="1"/>
+          </p:cNvSpPr>
           <p:nvPr>
-            <p:ph idx="2" type="sldImg"/>
+            <p:ph type="sldImg" idx="2"/>
           </p:nvPr>
         </p:nvSpPr>
         <p:spPr>
@@ -1045,9 +1077,13 @@
             <a:ext cx="6096000" cy="3429000"/>
           </a:xfrm>
           <a:custGeom>
-            <a:rect b="b" l="l" r="r" t="t"/>
+            <a:avLst/>
+            <a:gdLst/>
+            <a:ahLst/>
+            <a:cxnLst/>
+            <a:rect l="l" t="t" r="r" b="b"/>
             <a:pathLst>
-              <a:path extrusionOk="0" h="120000" w="120000">
+              <a:path w="120000" h="120000" extrusionOk="0">
                 <a:moveTo>
                   <a:pt x="0" y="0"/>
                 </a:moveTo>
@@ -1069,9 +1105,11 @@
       <p:sp>
         <p:nvSpPr>
           <p:cNvPr id="133" name="Google Shape;133;g2698beb87a1_0_61:notes"/>
-          <p:cNvSpPr txBox="1"/>
+          <p:cNvSpPr txBox="1">
+            <a:spLocks noGrp="1"/>
+          </p:cNvSpPr>
           <p:nvPr>
-            <p:ph idx="1" type="body"/>
+            <p:ph type="body" idx="1"/>
           </p:nvPr>
         </p:nvSpPr>
         <p:spPr>
@@ -1084,12 +1122,12 @@
           </a:prstGeom>
         </p:spPr>
         <p:txBody>
-          <a:bodyPr anchorCtr="0" anchor="t" bIns="91425" lIns="91425" spcFirstLastPara="1" rIns="91425" wrap="square" tIns="91425">
+          <a:bodyPr spcFirstLastPara="1" wrap="square" lIns="91425" tIns="91425" rIns="91425" bIns="91425" anchor="t" anchorCtr="0">
             <a:noAutofit/>
           </a:bodyPr>
           <a:lstStyle/>
           <a:p>
-            <a:pPr indent="0" lvl="0" marL="0" rtl="0" algn="l">
+            <a:pPr marL="0" lvl="0" indent="0" algn="l" rtl="0">
               <a:spcBef>
                 <a:spcPts val="0"/>
               </a:spcBef>
@@ -1098,9 +1136,6 @@
               </a:spcAft>
               <a:buNone/>
             </a:pPr>
-            <a:r>
-              <a:t/>
-            </a:r>
             <a:endParaRPr/>
           </a:p>
         </p:txBody>
@@ -1114,11 +1149,11 @@
 </file>
 
 <file path=ppt/notesSlides/notesSlide13.xml><?xml version="1.0" encoding="utf-8"?>
-<p:notes xmlns:a="http://schemas.openxmlformats.org/drawingml/2006/main" xmlns:r="http://schemas.openxmlformats.org/officeDocument/2006/relationships" xmlns:mc="http://schemas.openxmlformats.org/markup-compatibility/2006" xmlns:mv="urn:schemas-microsoft-com:mac:vml" xmlns:p="http://schemas.openxmlformats.org/presentationml/2006/main" xmlns:c="http://schemas.openxmlformats.org/drawingml/2006/chart" xmlns:dgm="http://schemas.openxmlformats.org/drawingml/2006/diagram" xmlns:o="urn:schemas-microsoft-com:office:office" xmlns:v="urn:schemas-microsoft-com:vml" xmlns:pvml="urn:schemas-microsoft-com:office:powerpoint" xmlns:com="http://schemas.openxmlformats.org/drawingml/2006/compatibility" xmlns:p14="http://schemas.microsoft.com/office/powerpoint/2010/main" xmlns:p15="http://schemas.microsoft.com/office/powerpoint/2012/main" xmlns:ahyp="http://schemas.microsoft.com/office/drawing/2018/hyperlinkcolor" showMasterPhAnim="0" showMasterSp="0">
+<p:notes xmlns:a="http://schemas.openxmlformats.org/drawingml/2006/main" xmlns:r="http://schemas.openxmlformats.org/officeDocument/2006/relationships" xmlns:p="http://schemas.openxmlformats.org/presentationml/2006/main" showMasterSp="0" showMasterPhAnim="0">
   <p:cSld>
     <p:spTree>
       <p:nvGrpSpPr>
-        <p:cNvPr id="141" name="Shape 141"/>
+        <p:cNvPr id="1" name="Shape 141"/>
         <p:cNvGrpSpPr/>
         <p:nvPr/>
       </p:nvGrpSpPr>
@@ -1133,9 +1168,11 @@
       <p:sp>
         <p:nvSpPr>
           <p:cNvPr id="142" name="Google Shape;142;g2698beb87a1_0_85:notes"/>
-          <p:cNvSpPr/>
+          <p:cNvSpPr>
+            <a:spLocks noGrp="1" noRot="1" noChangeAspect="1"/>
+          </p:cNvSpPr>
           <p:nvPr>
-            <p:ph idx="2" type="sldImg"/>
+            <p:ph type="sldImg" idx="2"/>
           </p:nvPr>
         </p:nvSpPr>
         <p:spPr>
@@ -1144,9 +1181,13 @@
             <a:ext cx="6096000" cy="3429000"/>
           </a:xfrm>
           <a:custGeom>
-            <a:rect b="b" l="l" r="r" t="t"/>
+            <a:avLst/>
+            <a:gdLst/>
+            <a:ahLst/>
+            <a:cxnLst/>
+            <a:rect l="l" t="t" r="r" b="b"/>
             <a:pathLst>
-              <a:path extrusionOk="0" h="120000" w="120000">
+              <a:path w="120000" h="120000" extrusionOk="0">
                 <a:moveTo>
                   <a:pt x="0" y="0"/>
                 </a:moveTo>
@@ -1168,9 +1209,11 @@
       <p:sp>
         <p:nvSpPr>
           <p:cNvPr id="143" name="Google Shape;143;g2698beb87a1_0_85:notes"/>
-          <p:cNvSpPr txBox="1"/>
+          <p:cNvSpPr txBox="1">
+            <a:spLocks noGrp="1"/>
+          </p:cNvSpPr>
           <p:nvPr>
-            <p:ph idx="1" type="body"/>
+            <p:ph type="body" idx="1"/>
           </p:nvPr>
         </p:nvSpPr>
         <p:spPr>
@@ -1183,12 +1226,12 @@
           </a:prstGeom>
         </p:spPr>
         <p:txBody>
-          <a:bodyPr anchorCtr="0" anchor="t" bIns="91425" lIns="91425" spcFirstLastPara="1" rIns="91425" wrap="square" tIns="91425">
+          <a:bodyPr spcFirstLastPara="1" wrap="square" lIns="91425" tIns="91425" rIns="91425" bIns="91425" anchor="t" anchorCtr="0">
             <a:noAutofit/>
           </a:bodyPr>
           <a:lstStyle/>
           <a:p>
-            <a:pPr indent="0" lvl="0" marL="0" rtl="0" algn="l">
+            <a:pPr marL="0" lvl="0" indent="0" algn="l" rtl="0">
               <a:spcBef>
                 <a:spcPts val="0"/>
               </a:spcBef>
@@ -1197,9 +1240,6 @@
               </a:spcAft>
               <a:buNone/>
             </a:pPr>
-            <a:r>
-              <a:t/>
-            </a:r>
             <a:endParaRPr/>
           </a:p>
         </p:txBody>
@@ -1213,11 +1253,11 @@
 </file>
 
 <file path=ppt/notesSlides/notesSlide14.xml><?xml version="1.0" encoding="utf-8"?>
-<p:notes xmlns:a="http://schemas.openxmlformats.org/drawingml/2006/main" xmlns:r="http://schemas.openxmlformats.org/officeDocument/2006/relationships" xmlns:mc="http://schemas.openxmlformats.org/markup-compatibility/2006" xmlns:mv="urn:schemas-microsoft-com:mac:vml" xmlns:p="http://schemas.openxmlformats.org/presentationml/2006/main" xmlns:c="http://schemas.openxmlformats.org/drawingml/2006/chart" xmlns:dgm="http://schemas.openxmlformats.org/drawingml/2006/diagram" xmlns:o="urn:schemas-microsoft-com:office:office" xmlns:v="urn:schemas-microsoft-com:vml" xmlns:pvml="urn:schemas-microsoft-com:office:powerpoint" xmlns:com="http://schemas.openxmlformats.org/drawingml/2006/compatibility" xmlns:p14="http://schemas.microsoft.com/office/powerpoint/2010/main" xmlns:p15="http://schemas.microsoft.com/office/powerpoint/2012/main" xmlns:ahyp="http://schemas.microsoft.com/office/drawing/2018/hyperlinkcolor" showMasterPhAnim="0" showMasterSp="0">
+<p:notes xmlns:a="http://schemas.openxmlformats.org/drawingml/2006/main" xmlns:r="http://schemas.openxmlformats.org/officeDocument/2006/relationships" xmlns:p="http://schemas.openxmlformats.org/presentationml/2006/main" showMasterSp="0" showMasterPhAnim="0">
   <p:cSld>
     <p:spTree>
       <p:nvGrpSpPr>
-        <p:cNvPr id="149" name="Shape 149"/>
+        <p:cNvPr id="1" name="Shape 149"/>
         <p:cNvGrpSpPr/>
         <p:nvPr/>
       </p:nvGrpSpPr>
@@ -1232,9 +1272,11 @@
       <p:sp>
         <p:nvSpPr>
           <p:cNvPr id="150" name="Google Shape;150;g2698beb87a1_0_76:notes"/>
-          <p:cNvSpPr/>
+          <p:cNvSpPr>
+            <a:spLocks noGrp="1" noRot="1" noChangeAspect="1"/>
+          </p:cNvSpPr>
           <p:nvPr>
-            <p:ph idx="2" type="sldImg"/>
+            <p:ph type="sldImg" idx="2"/>
           </p:nvPr>
         </p:nvSpPr>
         <p:spPr>
@@ -1243,9 +1285,13 @@
             <a:ext cx="6096000" cy="3429000"/>
           </a:xfrm>
           <a:custGeom>
-            <a:rect b="b" l="l" r="r" t="t"/>
+            <a:avLst/>
+            <a:gdLst/>
+            <a:ahLst/>
+            <a:cxnLst/>
+            <a:rect l="l" t="t" r="r" b="b"/>
             <a:pathLst>
-              <a:path extrusionOk="0" h="120000" w="120000">
+              <a:path w="120000" h="120000" extrusionOk="0">
                 <a:moveTo>
                   <a:pt x="0" y="0"/>
                 </a:moveTo>
@@ -1267,9 +1313,11 @@
       <p:sp>
         <p:nvSpPr>
           <p:cNvPr id="151" name="Google Shape;151;g2698beb87a1_0_76:notes"/>
-          <p:cNvSpPr txBox="1"/>
+          <p:cNvSpPr txBox="1">
+            <a:spLocks noGrp="1"/>
+          </p:cNvSpPr>
           <p:nvPr>
-            <p:ph idx="1" type="body"/>
+            <p:ph type="body" idx="1"/>
           </p:nvPr>
         </p:nvSpPr>
         <p:spPr>
@@ -1282,12 +1330,12 @@
           </a:prstGeom>
         </p:spPr>
         <p:txBody>
-          <a:bodyPr anchorCtr="0" anchor="t" bIns="91425" lIns="91425" spcFirstLastPara="1" rIns="91425" wrap="square" tIns="91425">
+          <a:bodyPr spcFirstLastPara="1" wrap="square" lIns="91425" tIns="91425" rIns="91425" bIns="91425" anchor="t" anchorCtr="0">
             <a:noAutofit/>
           </a:bodyPr>
           <a:lstStyle/>
           <a:p>
-            <a:pPr indent="0" lvl="0" marL="0" rtl="0" algn="l">
+            <a:pPr marL="0" lvl="0" indent="0" algn="l" rtl="0">
               <a:spcBef>
                 <a:spcPts val="0"/>
               </a:spcBef>
@@ -1296,9 +1344,6 @@
               </a:spcAft>
               <a:buNone/>
             </a:pPr>
-            <a:r>
-              <a:t/>
-            </a:r>
             <a:endParaRPr/>
           </a:p>
         </p:txBody>
@@ -1312,11 +1357,11 @@
 </file>
 
 <file path=ppt/notesSlides/notesSlide15.xml><?xml version="1.0" encoding="utf-8"?>
-<p:notes xmlns:a="http://schemas.openxmlformats.org/drawingml/2006/main" xmlns:r="http://schemas.openxmlformats.org/officeDocument/2006/relationships" xmlns:mc="http://schemas.openxmlformats.org/markup-compatibility/2006" xmlns:mv="urn:schemas-microsoft-com:mac:vml" xmlns:p="http://schemas.openxmlformats.org/presentationml/2006/main" xmlns:c="http://schemas.openxmlformats.org/drawingml/2006/chart" xmlns:dgm="http://schemas.openxmlformats.org/drawingml/2006/diagram" xmlns:o="urn:schemas-microsoft-com:office:office" xmlns:v="urn:schemas-microsoft-com:vml" xmlns:pvml="urn:schemas-microsoft-com:office:powerpoint" xmlns:com="http://schemas.openxmlformats.org/drawingml/2006/compatibility" xmlns:p14="http://schemas.microsoft.com/office/powerpoint/2010/main" xmlns:p15="http://schemas.microsoft.com/office/powerpoint/2012/main" xmlns:ahyp="http://schemas.microsoft.com/office/drawing/2018/hyperlinkcolor" showMasterPhAnim="0" showMasterSp="0">
+<p:notes xmlns:a="http://schemas.openxmlformats.org/drawingml/2006/main" xmlns:r="http://schemas.openxmlformats.org/officeDocument/2006/relationships" xmlns:p="http://schemas.openxmlformats.org/presentationml/2006/main" showMasterSp="0" showMasterPhAnim="0">
   <p:cSld>
     <p:spTree>
       <p:nvGrpSpPr>
-        <p:cNvPr id="157" name="Shape 157"/>
+        <p:cNvPr id="1" name="Shape 157"/>
         <p:cNvGrpSpPr/>
         <p:nvPr/>
       </p:nvGrpSpPr>
@@ -1331,9 +1376,11 @@
       <p:sp>
         <p:nvSpPr>
           <p:cNvPr id="158" name="Google Shape;158;g2698beb87a1_0_66:notes"/>
-          <p:cNvSpPr/>
+          <p:cNvSpPr>
+            <a:spLocks noGrp="1" noRot="1" noChangeAspect="1"/>
+          </p:cNvSpPr>
           <p:nvPr>
-            <p:ph idx="2" type="sldImg"/>
+            <p:ph type="sldImg" idx="2"/>
           </p:nvPr>
         </p:nvSpPr>
         <p:spPr>
@@ -1342,9 +1389,13 @@
             <a:ext cx="6096000" cy="3429000"/>
           </a:xfrm>
           <a:custGeom>
-            <a:rect b="b" l="l" r="r" t="t"/>
+            <a:avLst/>
+            <a:gdLst/>
+            <a:ahLst/>
+            <a:cxnLst/>
+            <a:rect l="l" t="t" r="r" b="b"/>
             <a:pathLst>
-              <a:path extrusionOk="0" h="120000" w="120000">
+              <a:path w="120000" h="120000" extrusionOk="0">
                 <a:moveTo>
                   <a:pt x="0" y="0"/>
                 </a:moveTo>
@@ -1366,9 +1417,11 @@
       <p:sp>
         <p:nvSpPr>
           <p:cNvPr id="159" name="Google Shape;159;g2698beb87a1_0_66:notes"/>
-          <p:cNvSpPr txBox="1"/>
+          <p:cNvSpPr txBox="1">
+            <a:spLocks noGrp="1"/>
+          </p:cNvSpPr>
           <p:nvPr>
-            <p:ph idx="1" type="body"/>
+            <p:ph type="body" idx="1"/>
           </p:nvPr>
         </p:nvSpPr>
         <p:spPr>
@@ -1381,12 +1434,12 @@
           </a:prstGeom>
         </p:spPr>
         <p:txBody>
-          <a:bodyPr anchorCtr="0" anchor="t" bIns="91425" lIns="91425" spcFirstLastPara="1" rIns="91425" wrap="square" tIns="91425">
+          <a:bodyPr spcFirstLastPara="1" wrap="square" lIns="91425" tIns="91425" rIns="91425" bIns="91425" anchor="t" anchorCtr="0">
             <a:noAutofit/>
           </a:bodyPr>
           <a:lstStyle/>
           <a:p>
-            <a:pPr indent="0" lvl="0" marL="0" rtl="0" algn="l">
+            <a:pPr marL="0" lvl="0" indent="0" algn="l" rtl="0">
               <a:spcBef>
                 <a:spcPts val="0"/>
               </a:spcBef>
@@ -1395,9 +1448,6 @@
               </a:spcAft>
               <a:buNone/>
             </a:pPr>
-            <a:r>
-              <a:t/>
-            </a:r>
             <a:endParaRPr/>
           </a:p>
         </p:txBody>
@@ -1411,11 +1461,11 @@
 </file>
 
 <file path=ppt/notesSlides/notesSlide16.xml><?xml version="1.0" encoding="utf-8"?>
-<p:notes xmlns:a="http://schemas.openxmlformats.org/drawingml/2006/main" xmlns:r="http://schemas.openxmlformats.org/officeDocument/2006/relationships" xmlns:mc="http://schemas.openxmlformats.org/markup-compatibility/2006" xmlns:mv="urn:schemas-microsoft-com:mac:vml" xmlns:p="http://schemas.openxmlformats.org/presentationml/2006/main" xmlns:c="http://schemas.openxmlformats.org/drawingml/2006/chart" xmlns:dgm="http://schemas.openxmlformats.org/drawingml/2006/diagram" xmlns:o="urn:schemas-microsoft-com:office:office" xmlns:v="urn:schemas-microsoft-com:vml" xmlns:pvml="urn:schemas-microsoft-com:office:powerpoint" xmlns:com="http://schemas.openxmlformats.org/drawingml/2006/compatibility" xmlns:p14="http://schemas.microsoft.com/office/powerpoint/2010/main" xmlns:p15="http://schemas.microsoft.com/office/powerpoint/2012/main" xmlns:ahyp="http://schemas.microsoft.com/office/drawing/2018/hyperlinkcolor" showMasterPhAnim="0" showMasterSp="0">
+<p:notes xmlns:a="http://schemas.openxmlformats.org/drawingml/2006/main" xmlns:r="http://schemas.openxmlformats.org/officeDocument/2006/relationships" xmlns:p="http://schemas.openxmlformats.org/presentationml/2006/main" showMasterSp="0" showMasterPhAnim="0">
   <p:cSld>
     <p:spTree>
       <p:nvGrpSpPr>
-        <p:cNvPr id="165" name="Shape 165"/>
+        <p:cNvPr id="1" name="Shape 165"/>
         <p:cNvGrpSpPr/>
         <p:nvPr/>
       </p:nvGrpSpPr>
@@ -1430,9 +1480,11 @@
       <p:sp>
         <p:nvSpPr>
           <p:cNvPr id="166" name="Google Shape;166;g2698beb87a1_0_71:notes"/>
-          <p:cNvSpPr/>
+          <p:cNvSpPr>
+            <a:spLocks noGrp="1" noRot="1" noChangeAspect="1"/>
+          </p:cNvSpPr>
           <p:nvPr>
-            <p:ph idx="2" type="sldImg"/>
+            <p:ph type="sldImg" idx="2"/>
           </p:nvPr>
         </p:nvSpPr>
         <p:spPr>
@@ -1441,9 +1493,13 @@
             <a:ext cx="6096000" cy="3429000"/>
           </a:xfrm>
           <a:custGeom>
-            <a:rect b="b" l="l" r="r" t="t"/>
+            <a:avLst/>
+            <a:gdLst/>
+            <a:ahLst/>
+            <a:cxnLst/>
+            <a:rect l="l" t="t" r="r" b="b"/>
             <a:pathLst>
-              <a:path extrusionOk="0" h="120000" w="120000">
+              <a:path w="120000" h="120000" extrusionOk="0">
                 <a:moveTo>
                   <a:pt x="0" y="0"/>
                 </a:moveTo>
@@ -1465,9 +1521,11 @@
       <p:sp>
         <p:nvSpPr>
           <p:cNvPr id="167" name="Google Shape;167;g2698beb87a1_0_71:notes"/>
-          <p:cNvSpPr txBox="1"/>
+          <p:cNvSpPr txBox="1">
+            <a:spLocks noGrp="1"/>
+          </p:cNvSpPr>
           <p:nvPr>
-            <p:ph idx="1" type="body"/>
+            <p:ph type="body" idx="1"/>
           </p:nvPr>
         </p:nvSpPr>
         <p:spPr>
@@ -1480,12 +1538,12 @@
           </a:prstGeom>
         </p:spPr>
         <p:txBody>
-          <a:bodyPr anchorCtr="0" anchor="t" bIns="91425" lIns="91425" spcFirstLastPara="1" rIns="91425" wrap="square" tIns="91425">
+          <a:bodyPr spcFirstLastPara="1" wrap="square" lIns="91425" tIns="91425" rIns="91425" bIns="91425" anchor="t" anchorCtr="0">
             <a:noAutofit/>
           </a:bodyPr>
           <a:lstStyle/>
           <a:p>
-            <a:pPr indent="0" lvl="0" marL="0" rtl="0" algn="l">
+            <a:pPr marL="0" lvl="0" indent="0" algn="l" rtl="0">
               <a:spcBef>
                 <a:spcPts val="0"/>
               </a:spcBef>
@@ -1494,9 +1552,6 @@
               </a:spcAft>
               <a:buNone/>
             </a:pPr>
-            <a:r>
-              <a:t/>
-            </a:r>
             <a:endParaRPr/>
           </a:p>
         </p:txBody>
@@ -1510,11 +1565,11 @@
 </file>
 
 <file path=ppt/notesSlides/notesSlide17.xml><?xml version="1.0" encoding="utf-8"?>
-<p:notes xmlns:a="http://schemas.openxmlformats.org/drawingml/2006/main" xmlns:r="http://schemas.openxmlformats.org/officeDocument/2006/relationships" xmlns:mc="http://schemas.openxmlformats.org/markup-compatibility/2006" xmlns:mv="urn:schemas-microsoft-com:mac:vml" xmlns:p="http://schemas.openxmlformats.org/presentationml/2006/main" xmlns:c="http://schemas.openxmlformats.org/drawingml/2006/chart" xmlns:dgm="http://schemas.openxmlformats.org/drawingml/2006/diagram" xmlns:o="urn:schemas-microsoft-com:office:office" xmlns:v="urn:schemas-microsoft-com:vml" xmlns:pvml="urn:schemas-microsoft-com:office:powerpoint" xmlns:com="http://schemas.openxmlformats.org/drawingml/2006/compatibility" xmlns:p14="http://schemas.microsoft.com/office/powerpoint/2010/main" xmlns:p15="http://schemas.microsoft.com/office/powerpoint/2012/main" xmlns:ahyp="http://schemas.microsoft.com/office/drawing/2018/hyperlinkcolor" showMasterPhAnim="0" showMasterSp="0">
+<p:notes xmlns:a="http://schemas.openxmlformats.org/drawingml/2006/main" xmlns:r="http://schemas.openxmlformats.org/officeDocument/2006/relationships" xmlns:p="http://schemas.openxmlformats.org/presentationml/2006/main" showMasterSp="0" showMasterPhAnim="0">
   <p:cSld>
     <p:spTree>
       <p:nvGrpSpPr>
-        <p:cNvPr id="174" name="Shape 174"/>
+        <p:cNvPr id="1" name="Shape 174"/>
         <p:cNvGrpSpPr/>
         <p:nvPr/>
       </p:nvGrpSpPr>
@@ -1529,9 +1584,11 @@
       <p:sp>
         <p:nvSpPr>
           <p:cNvPr id="175" name="Google Shape;175;g2698beb87a1_0_118:notes"/>
-          <p:cNvSpPr/>
+          <p:cNvSpPr>
+            <a:spLocks noGrp="1" noRot="1" noChangeAspect="1"/>
+          </p:cNvSpPr>
           <p:nvPr>
-            <p:ph idx="2" type="sldImg"/>
+            <p:ph type="sldImg" idx="2"/>
           </p:nvPr>
         </p:nvSpPr>
         <p:spPr>
@@ -1540,9 +1597,13 @@
             <a:ext cx="6096000" cy="3429000"/>
           </a:xfrm>
           <a:custGeom>
-            <a:rect b="b" l="l" r="r" t="t"/>
+            <a:avLst/>
+            <a:gdLst/>
+            <a:ahLst/>
+            <a:cxnLst/>
+            <a:rect l="l" t="t" r="r" b="b"/>
             <a:pathLst>
-              <a:path extrusionOk="0" h="120000" w="120000">
+              <a:path w="120000" h="120000" extrusionOk="0">
                 <a:moveTo>
                   <a:pt x="0" y="0"/>
                 </a:moveTo>
@@ -1564,9 +1625,11 @@
       <p:sp>
         <p:nvSpPr>
           <p:cNvPr id="176" name="Google Shape;176;g2698beb87a1_0_118:notes"/>
-          <p:cNvSpPr txBox="1"/>
+          <p:cNvSpPr txBox="1">
+            <a:spLocks noGrp="1"/>
+          </p:cNvSpPr>
           <p:nvPr>
-            <p:ph idx="1" type="body"/>
+            <p:ph type="body" idx="1"/>
           </p:nvPr>
         </p:nvSpPr>
         <p:spPr>
@@ -1579,12 +1642,12 @@
           </a:prstGeom>
         </p:spPr>
         <p:txBody>
-          <a:bodyPr anchorCtr="0" anchor="t" bIns="91425" lIns="91425" spcFirstLastPara="1" rIns="91425" wrap="square" tIns="91425">
+          <a:bodyPr spcFirstLastPara="1" wrap="square" lIns="91425" tIns="91425" rIns="91425" bIns="91425" anchor="t" anchorCtr="0">
             <a:noAutofit/>
           </a:bodyPr>
           <a:lstStyle/>
           <a:p>
-            <a:pPr indent="0" lvl="0" marL="0" rtl="0" algn="l">
+            <a:pPr marL="0" lvl="0" indent="0" algn="l" rtl="0">
               <a:spcBef>
                 <a:spcPts val="0"/>
               </a:spcBef>
@@ -1593,9 +1656,6 @@
               </a:spcAft>
               <a:buNone/>
             </a:pPr>
-            <a:r>
-              <a:t/>
-            </a:r>
             <a:endParaRPr/>
           </a:p>
         </p:txBody>
@@ -1609,11 +1669,11 @@
 </file>
 
 <file path=ppt/notesSlides/notesSlide18.xml><?xml version="1.0" encoding="utf-8"?>
-<p:notes xmlns:a="http://schemas.openxmlformats.org/drawingml/2006/main" xmlns:r="http://schemas.openxmlformats.org/officeDocument/2006/relationships" xmlns:mc="http://schemas.openxmlformats.org/markup-compatibility/2006" xmlns:mv="urn:schemas-microsoft-com:mac:vml" xmlns:p="http://schemas.openxmlformats.org/presentationml/2006/main" xmlns:c="http://schemas.openxmlformats.org/drawingml/2006/chart" xmlns:dgm="http://schemas.openxmlformats.org/drawingml/2006/diagram" xmlns:o="urn:schemas-microsoft-com:office:office" xmlns:v="urn:schemas-microsoft-com:vml" xmlns:pvml="urn:schemas-microsoft-com:office:powerpoint" xmlns:com="http://schemas.openxmlformats.org/drawingml/2006/compatibility" xmlns:p14="http://schemas.microsoft.com/office/powerpoint/2010/main" xmlns:p15="http://schemas.microsoft.com/office/powerpoint/2012/main" xmlns:ahyp="http://schemas.microsoft.com/office/drawing/2018/hyperlinkcolor" showMasterPhAnim="0" showMasterSp="0">
+<p:notes xmlns:a="http://schemas.openxmlformats.org/drawingml/2006/main" xmlns:r="http://schemas.openxmlformats.org/officeDocument/2006/relationships" xmlns:p="http://schemas.openxmlformats.org/presentationml/2006/main" showMasterSp="0" showMasterPhAnim="0">
   <p:cSld>
     <p:spTree>
       <p:nvGrpSpPr>
-        <p:cNvPr id="179" name="Shape 179"/>
+        <p:cNvPr id="1" name="Shape 179"/>
         <p:cNvGrpSpPr/>
         <p:nvPr/>
       </p:nvGrpSpPr>
@@ -1628,9 +1688,11 @@
       <p:sp>
         <p:nvSpPr>
           <p:cNvPr id="180" name="Google Shape;180;g2698beb87a1_0_104:notes"/>
-          <p:cNvSpPr/>
+          <p:cNvSpPr>
+            <a:spLocks noGrp="1" noRot="1" noChangeAspect="1"/>
+          </p:cNvSpPr>
           <p:nvPr>
-            <p:ph idx="2" type="sldImg"/>
+            <p:ph type="sldImg" idx="2"/>
           </p:nvPr>
         </p:nvSpPr>
         <p:spPr>
@@ -1639,9 +1701,13 @@
             <a:ext cx="6096000" cy="3429000"/>
           </a:xfrm>
           <a:custGeom>
-            <a:rect b="b" l="l" r="r" t="t"/>
+            <a:avLst/>
+            <a:gdLst/>
+            <a:ahLst/>
+            <a:cxnLst/>
+            <a:rect l="l" t="t" r="r" b="b"/>
             <a:pathLst>
-              <a:path extrusionOk="0" h="120000" w="120000">
+              <a:path w="120000" h="120000" extrusionOk="0">
                 <a:moveTo>
                   <a:pt x="0" y="0"/>
                 </a:moveTo>
@@ -1663,9 +1729,11 @@
       <p:sp>
         <p:nvSpPr>
           <p:cNvPr id="181" name="Google Shape;181;g2698beb87a1_0_104:notes"/>
-          <p:cNvSpPr txBox="1"/>
+          <p:cNvSpPr txBox="1">
+            <a:spLocks noGrp="1"/>
+          </p:cNvSpPr>
           <p:nvPr>
-            <p:ph idx="1" type="body"/>
+            <p:ph type="body" idx="1"/>
           </p:nvPr>
         </p:nvSpPr>
         <p:spPr>
@@ -1678,12 +1746,12 @@
           </a:prstGeom>
         </p:spPr>
         <p:txBody>
-          <a:bodyPr anchorCtr="0" anchor="t" bIns="91425" lIns="91425" spcFirstLastPara="1" rIns="91425" wrap="square" tIns="91425">
+          <a:bodyPr spcFirstLastPara="1" wrap="square" lIns="91425" tIns="91425" rIns="91425" bIns="91425" anchor="t" anchorCtr="0">
             <a:noAutofit/>
           </a:bodyPr>
           <a:lstStyle/>
           <a:p>
-            <a:pPr indent="0" lvl="0" marL="0" rtl="0" algn="l">
+            <a:pPr marL="0" lvl="0" indent="0" algn="l" rtl="0">
               <a:spcBef>
                 <a:spcPts val="0"/>
               </a:spcBef>
@@ -1692,9 +1760,6 @@
               </a:spcAft>
               <a:buNone/>
             </a:pPr>
-            <a:r>
-              <a:t/>
-            </a:r>
             <a:endParaRPr/>
           </a:p>
         </p:txBody>
@@ -1708,11 +1773,11 @@
 </file>
 
 <file path=ppt/notesSlides/notesSlide19.xml><?xml version="1.0" encoding="utf-8"?>
-<p:notes xmlns:a="http://schemas.openxmlformats.org/drawingml/2006/main" xmlns:r="http://schemas.openxmlformats.org/officeDocument/2006/relationships" xmlns:mc="http://schemas.openxmlformats.org/markup-compatibility/2006" xmlns:mv="urn:schemas-microsoft-com:mac:vml" xmlns:p="http://schemas.openxmlformats.org/presentationml/2006/main" xmlns:c="http://schemas.openxmlformats.org/drawingml/2006/chart" xmlns:dgm="http://schemas.openxmlformats.org/drawingml/2006/diagram" xmlns:o="urn:schemas-microsoft-com:office:office" xmlns:v="urn:schemas-microsoft-com:vml" xmlns:pvml="urn:schemas-microsoft-com:office:powerpoint" xmlns:com="http://schemas.openxmlformats.org/drawingml/2006/compatibility" xmlns:p14="http://schemas.microsoft.com/office/powerpoint/2010/main" xmlns:p15="http://schemas.microsoft.com/office/powerpoint/2012/main" xmlns:ahyp="http://schemas.microsoft.com/office/drawing/2018/hyperlinkcolor" showMasterPhAnim="0" showMasterSp="0">
+<p:notes xmlns:a="http://schemas.openxmlformats.org/drawingml/2006/main" xmlns:r="http://schemas.openxmlformats.org/officeDocument/2006/relationships" xmlns:p="http://schemas.openxmlformats.org/presentationml/2006/main" showMasterSp="0" showMasterPhAnim="0">
   <p:cSld>
     <p:spTree>
       <p:nvGrpSpPr>
-        <p:cNvPr id="185" name="Shape 185"/>
+        <p:cNvPr id="1" name="Shape 185"/>
         <p:cNvGrpSpPr/>
         <p:nvPr/>
       </p:nvGrpSpPr>
@@ -1727,9 +1792,11 @@
       <p:sp>
         <p:nvSpPr>
           <p:cNvPr id="186" name="Google Shape;186;g2698beb87a1_0_122:notes"/>
-          <p:cNvSpPr/>
+          <p:cNvSpPr>
+            <a:spLocks noGrp="1" noRot="1" noChangeAspect="1"/>
+          </p:cNvSpPr>
           <p:nvPr>
-            <p:ph idx="2" type="sldImg"/>
+            <p:ph type="sldImg" idx="2"/>
           </p:nvPr>
         </p:nvSpPr>
         <p:spPr>
@@ -1738,9 +1805,13 @@
             <a:ext cx="6096000" cy="3429000"/>
           </a:xfrm>
           <a:custGeom>
-            <a:rect b="b" l="l" r="r" t="t"/>
+            <a:avLst/>
+            <a:gdLst/>
+            <a:ahLst/>
+            <a:cxnLst/>
+            <a:rect l="l" t="t" r="r" b="b"/>
             <a:pathLst>
-              <a:path extrusionOk="0" h="120000" w="120000">
+              <a:path w="120000" h="120000" extrusionOk="0">
                 <a:moveTo>
                   <a:pt x="0" y="0"/>
                 </a:moveTo>
@@ -1762,9 +1833,11 @@
       <p:sp>
         <p:nvSpPr>
           <p:cNvPr id="187" name="Google Shape;187;g2698beb87a1_0_122:notes"/>
-          <p:cNvSpPr txBox="1"/>
+          <p:cNvSpPr txBox="1">
+            <a:spLocks noGrp="1"/>
+          </p:cNvSpPr>
           <p:nvPr>
-            <p:ph idx="1" type="body"/>
+            <p:ph type="body" idx="1"/>
           </p:nvPr>
         </p:nvSpPr>
         <p:spPr>
@@ -1777,12 +1850,12 @@
           </a:prstGeom>
         </p:spPr>
         <p:txBody>
-          <a:bodyPr anchorCtr="0" anchor="t" bIns="91425" lIns="91425" spcFirstLastPara="1" rIns="91425" wrap="square" tIns="91425">
+          <a:bodyPr spcFirstLastPara="1" wrap="square" lIns="91425" tIns="91425" rIns="91425" bIns="91425" anchor="t" anchorCtr="0">
             <a:noAutofit/>
           </a:bodyPr>
           <a:lstStyle/>
           <a:p>
-            <a:pPr indent="0" lvl="0" marL="0" rtl="0" algn="l">
+            <a:pPr marL="0" lvl="0" indent="0" algn="l" rtl="0">
               <a:spcBef>
                 <a:spcPts val="0"/>
               </a:spcBef>
@@ -1791,9 +1864,6 @@
               </a:spcAft>
               <a:buNone/>
             </a:pPr>
-            <a:r>
-              <a:t/>
-            </a:r>
             <a:endParaRPr/>
           </a:p>
         </p:txBody>
@@ -1807,11 +1877,11 @@
 </file>
 
 <file path=ppt/notesSlides/notesSlide2.xml><?xml version="1.0" encoding="utf-8"?>
-<p:notes xmlns:a="http://schemas.openxmlformats.org/drawingml/2006/main" xmlns:r="http://schemas.openxmlformats.org/officeDocument/2006/relationships" xmlns:mc="http://schemas.openxmlformats.org/markup-compatibility/2006" xmlns:mv="urn:schemas-microsoft-com:mac:vml" xmlns:p="http://schemas.openxmlformats.org/presentationml/2006/main" xmlns:c="http://schemas.openxmlformats.org/drawingml/2006/chart" xmlns:dgm="http://schemas.openxmlformats.org/drawingml/2006/diagram" xmlns:o="urn:schemas-microsoft-com:office:office" xmlns:v="urn:schemas-microsoft-com:vml" xmlns:pvml="urn:schemas-microsoft-com:office:powerpoint" xmlns:com="http://schemas.openxmlformats.org/drawingml/2006/compatibility" xmlns:p14="http://schemas.microsoft.com/office/powerpoint/2010/main" xmlns:p15="http://schemas.microsoft.com/office/powerpoint/2012/main" xmlns:ahyp="http://schemas.microsoft.com/office/drawing/2018/hyperlinkcolor" showMasterPhAnim="0" showMasterSp="0">
+<p:notes xmlns:a="http://schemas.openxmlformats.org/drawingml/2006/main" xmlns:r="http://schemas.openxmlformats.org/officeDocument/2006/relationships" xmlns:p="http://schemas.openxmlformats.org/presentationml/2006/main" showMasterSp="0" showMasterPhAnim="0">
   <p:cSld>
     <p:spTree>
       <p:nvGrpSpPr>
-        <p:cNvPr id="65" name="Shape 65"/>
+        <p:cNvPr id="1" name="Shape 65"/>
         <p:cNvGrpSpPr/>
         <p:nvPr/>
       </p:nvGrpSpPr>
@@ -1826,9 +1896,11 @@
       <p:sp>
         <p:nvSpPr>
           <p:cNvPr id="66" name="Google Shape;66;g2698beb87a1_0_13:notes"/>
-          <p:cNvSpPr/>
+          <p:cNvSpPr>
+            <a:spLocks noGrp="1" noRot="1" noChangeAspect="1"/>
+          </p:cNvSpPr>
           <p:nvPr>
-            <p:ph idx="2" type="sldImg"/>
+            <p:ph type="sldImg" idx="2"/>
           </p:nvPr>
         </p:nvSpPr>
         <p:spPr>
@@ -1837,9 +1909,13 @@
             <a:ext cx="6096000" cy="3429000"/>
           </a:xfrm>
           <a:custGeom>
-            <a:rect b="b" l="l" r="r" t="t"/>
+            <a:avLst/>
+            <a:gdLst/>
+            <a:ahLst/>
+            <a:cxnLst/>
+            <a:rect l="l" t="t" r="r" b="b"/>
             <a:pathLst>
-              <a:path extrusionOk="0" h="120000" w="120000">
+              <a:path w="120000" h="120000" extrusionOk="0">
                 <a:moveTo>
                   <a:pt x="0" y="0"/>
                 </a:moveTo>
@@ -1861,9 +1937,11 @@
       <p:sp>
         <p:nvSpPr>
           <p:cNvPr id="67" name="Google Shape;67;g2698beb87a1_0_13:notes"/>
-          <p:cNvSpPr txBox="1"/>
+          <p:cNvSpPr txBox="1">
+            <a:spLocks noGrp="1"/>
+          </p:cNvSpPr>
           <p:nvPr>
-            <p:ph idx="1" type="body"/>
+            <p:ph type="body" idx="1"/>
           </p:nvPr>
         </p:nvSpPr>
         <p:spPr>
@@ -1876,12 +1954,12 @@
           </a:prstGeom>
         </p:spPr>
         <p:txBody>
-          <a:bodyPr anchorCtr="0" anchor="t" bIns="91425" lIns="91425" spcFirstLastPara="1" rIns="91425" wrap="square" tIns="91425">
+          <a:bodyPr spcFirstLastPara="1" wrap="square" lIns="91425" tIns="91425" rIns="91425" bIns="91425" anchor="t" anchorCtr="0">
             <a:noAutofit/>
           </a:bodyPr>
           <a:lstStyle/>
           <a:p>
-            <a:pPr indent="0" lvl="0" marL="0" rtl="0" algn="l">
+            <a:pPr marL="0" lvl="0" indent="0" algn="l" rtl="0">
               <a:spcBef>
                 <a:spcPts val="0"/>
               </a:spcBef>
@@ -1890,9 +1968,6 @@
               </a:spcAft>
               <a:buNone/>
             </a:pPr>
-            <a:r>
-              <a:t/>
-            </a:r>
             <a:endParaRPr/>
           </a:p>
         </p:txBody>
@@ -1906,11 +1981,11 @@
 </file>
 
 <file path=ppt/notesSlides/notesSlide20.xml><?xml version="1.0" encoding="utf-8"?>
-<p:notes xmlns:a="http://schemas.openxmlformats.org/drawingml/2006/main" xmlns:r="http://schemas.openxmlformats.org/officeDocument/2006/relationships" xmlns:mc="http://schemas.openxmlformats.org/markup-compatibility/2006" xmlns:mv="urn:schemas-microsoft-com:mac:vml" xmlns:p="http://schemas.openxmlformats.org/presentationml/2006/main" xmlns:c="http://schemas.openxmlformats.org/drawingml/2006/chart" xmlns:dgm="http://schemas.openxmlformats.org/drawingml/2006/diagram" xmlns:o="urn:schemas-microsoft-com:office:office" xmlns:v="urn:schemas-microsoft-com:vml" xmlns:pvml="urn:schemas-microsoft-com:office:powerpoint" xmlns:com="http://schemas.openxmlformats.org/drawingml/2006/compatibility" xmlns:p14="http://schemas.microsoft.com/office/powerpoint/2010/main" xmlns:p15="http://schemas.microsoft.com/office/powerpoint/2012/main" xmlns:ahyp="http://schemas.microsoft.com/office/drawing/2018/hyperlinkcolor" showMasterPhAnim="0" showMasterSp="0">
+<p:notes xmlns:a="http://schemas.openxmlformats.org/drawingml/2006/main" xmlns:r="http://schemas.openxmlformats.org/officeDocument/2006/relationships" xmlns:p="http://schemas.openxmlformats.org/presentationml/2006/main" showMasterSp="0" showMasterPhAnim="0">
   <p:cSld>
     <p:spTree>
       <p:nvGrpSpPr>
-        <p:cNvPr id="192" name="Shape 192"/>
+        <p:cNvPr id="1" name="Shape 192"/>
         <p:cNvGrpSpPr/>
         <p:nvPr/>
       </p:nvGrpSpPr>
@@ -1925,9 +2000,11 @@
       <p:sp>
         <p:nvSpPr>
           <p:cNvPr id="193" name="Google Shape;193;g2698beb87a1_0_129:notes"/>
-          <p:cNvSpPr/>
+          <p:cNvSpPr>
+            <a:spLocks noGrp="1" noRot="1" noChangeAspect="1"/>
+          </p:cNvSpPr>
           <p:nvPr>
-            <p:ph idx="2" type="sldImg"/>
+            <p:ph type="sldImg" idx="2"/>
           </p:nvPr>
         </p:nvSpPr>
         <p:spPr>
@@ -1936,9 +2013,13 @@
             <a:ext cx="6096000" cy="3429000"/>
           </a:xfrm>
           <a:custGeom>
-            <a:rect b="b" l="l" r="r" t="t"/>
+            <a:avLst/>
+            <a:gdLst/>
+            <a:ahLst/>
+            <a:cxnLst/>
+            <a:rect l="l" t="t" r="r" b="b"/>
             <a:pathLst>
-              <a:path extrusionOk="0" h="120000" w="120000">
+              <a:path w="120000" h="120000" extrusionOk="0">
                 <a:moveTo>
                   <a:pt x="0" y="0"/>
                 </a:moveTo>
@@ -1960,9 +2041,11 @@
       <p:sp>
         <p:nvSpPr>
           <p:cNvPr id="194" name="Google Shape;194;g2698beb87a1_0_129:notes"/>
-          <p:cNvSpPr txBox="1"/>
+          <p:cNvSpPr txBox="1">
+            <a:spLocks noGrp="1"/>
+          </p:cNvSpPr>
           <p:nvPr>
-            <p:ph idx="1" type="body"/>
+            <p:ph type="body" idx="1"/>
           </p:nvPr>
         </p:nvSpPr>
         <p:spPr>
@@ -1975,12 +2058,12 @@
           </a:prstGeom>
         </p:spPr>
         <p:txBody>
-          <a:bodyPr anchorCtr="0" anchor="t" bIns="91425" lIns="91425" spcFirstLastPara="1" rIns="91425" wrap="square" tIns="91425">
+          <a:bodyPr spcFirstLastPara="1" wrap="square" lIns="91425" tIns="91425" rIns="91425" bIns="91425" anchor="t" anchorCtr="0">
             <a:noAutofit/>
           </a:bodyPr>
           <a:lstStyle/>
           <a:p>
-            <a:pPr indent="0" lvl="0" marL="0" rtl="0" algn="l">
+            <a:pPr marL="0" lvl="0" indent="0" algn="l" rtl="0">
               <a:spcBef>
                 <a:spcPts val="0"/>
               </a:spcBef>
@@ -1989,9 +2072,6 @@
               </a:spcAft>
               <a:buNone/>
             </a:pPr>
-            <a:r>
-              <a:t/>
-            </a:r>
             <a:endParaRPr/>
           </a:p>
         </p:txBody>
@@ -2005,11 +2085,11 @@
 </file>
 
 <file path=ppt/notesSlides/notesSlide21.xml><?xml version="1.0" encoding="utf-8"?>
-<p:notes xmlns:a="http://schemas.openxmlformats.org/drawingml/2006/main" xmlns:r="http://schemas.openxmlformats.org/officeDocument/2006/relationships" xmlns:mc="http://schemas.openxmlformats.org/markup-compatibility/2006" xmlns:mv="urn:schemas-microsoft-com:mac:vml" xmlns:p="http://schemas.openxmlformats.org/presentationml/2006/main" xmlns:c="http://schemas.openxmlformats.org/drawingml/2006/chart" xmlns:dgm="http://schemas.openxmlformats.org/drawingml/2006/diagram" xmlns:o="urn:schemas-microsoft-com:office:office" xmlns:v="urn:schemas-microsoft-com:vml" xmlns:pvml="urn:schemas-microsoft-com:office:powerpoint" xmlns:com="http://schemas.openxmlformats.org/drawingml/2006/compatibility" xmlns:p14="http://schemas.microsoft.com/office/powerpoint/2010/main" xmlns:p15="http://schemas.microsoft.com/office/powerpoint/2012/main" xmlns:ahyp="http://schemas.microsoft.com/office/drawing/2018/hyperlinkcolor" showMasterPhAnim="0" showMasterSp="0">
+<p:notes xmlns:a="http://schemas.openxmlformats.org/drawingml/2006/main" xmlns:r="http://schemas.openxmlformats.org/officeDocument/2006/relationships" xmlns:p="http://schemas.openxmlformats.org/presentationml/2006/main" showMasterSp="0" showMasterPhAnim="0">
   <p:cSld>
     <p:spTree>
       <p:nvGrpSpPr>
-        <p:cNvPr id="199" name="Shape 199"/>
+        <p:cNvPr id="1" name="Shape 199"/>
         <p:cNvGrpSpPr/>
         <p:nvPr/>
       </p:nvGrpSpPr>
@@ -2024,9 +2104,11 @@
       <p:sp>
         <p:nvSpPr>
           <p:cNvPr id="200" name="Google Shape;200;g2698beb87a1_0_140:notes"/>
-          <p:cNvSpPr/>
+          <p:cNvSpPr>
+            <a:spLocks noGrp="1" noRot="1" noChangeAspect="1"/>
+          </p:cNvSpPr>
           <p:nvPr>
-            <p:ph idx="2" type="sldImg"/>
+            <p:ph type="sldImg" idx="2"/>
           </p:nvPr>
         </p:nvSpPr>
         <p:spPr>
@@ -2035,9 +2117,13 @@
             <a:ext cx="6096000" cy="3429000"/>
           </a:xfrm>
           <a:custGeom>
-            <a:rect b="b" l="l" r="r" t="t"/>
+            <a:avLst/>
+            <a:gdLst/>
+            <a:ahLst/>
+            <a:cxnLst/>
+            <a:rect l="l" t="t" r="r" b="b"/>
             <a:pathLst>
-              <a:path extrusionOk="0" h="120000" w="120000">
+              <a:path w="120000" h="120000" extrusionOk="0">
                 <a:moveTo>
                   <a:pt x="0" y="0"/>
                 </a:moveTo>
@@ -2059,9 +2145,11 @@
       <p:sp>
         <p:nvSpPr>
           <p:cNvPr id="201" name="Google Shape;201;g2698beb87a1_0_140:notes"/>
-          <p:cNvSpPr txBox="1"/>
+          <p:cNvSpPr txBox="1">
+            <a:spLocks noGrp="1"/>
+          </p:cNvSpPr>
           <p:nvPr>
-            <p:ph idx="1" type="body"/>
+            <p:ph type="body" idx="1"/>
           </p:nvPr>
         </p:nvSpPr>
         <p:spPr>
@@ -2074,12 +2162,12 @@
           </a:prstGeom>
         </p:spPr>
         <p:txBody>
-          <a:bodyPr anchorCtr="0" anchor="t" bIns="91425" lIns="91425" spcFirstLastPara="1" rIns="91425" wrap="square" tIns="91425">
+          <a:bodyPr spcFirstLastPara="1" wrap="square" lIns="91425" tIns="91425" rIns="91425" bIns="91425" anchor="t" anchorCtr="0">
             <a:noAutofit/>
           </a:bodyPr>
           <a:lstStyle/>
           <a:p>
-            <a:pPr indent="0" lvl="0" marL="0" rtl="0" algn="l">
+            <a:pPr marL="0" lvl="0" indent="0" algn="l" rtl="0">
               <a:spcBef>
                 <a:spcPts val="0"/>
               </a:spcBef>
@@ -2088,9 +2176,6 @@
               </a:spcAft>
               <a:buNone/>
             </a:pPr>
-            <a:r>
-              <a:t/>
-            </a:r>
             <a:endParaRPr/>
           </a:p>
         </p:txBody>
@@ -2104,11 +2189,11 @@
 </file>
 
 <file path=ppt/notesSlides/notesSlide22.xml><?xml version="1.0" encoding="utf-8"?>
-<p:notes xmlns:a="http://schemas.openxmlformats.org/drawingml/2006/main" xmlns:r="http://schemas.openxmlformats.org/officeDocument/2006/relationships" xmlns:mc="http://schemas.openxmlformats.org/markup-compatibility/2006" xmlns:mv="urn:schemas-microsoft-com:mac:vml" xmlns:p="http://schemas.openxmlformats.org/presentationml/2006/main" xmlns:c="http://schemas.openxmlformats.org/drawingml/2006/chart" xmlns:dgm="http://schemas.openxmlformats.org/drawingml/2006/diagram" xmlns:o="urn:schemas-microsoft-com:office:office" xmlns:v="urn:schemas-microsoft-com:vml" xmlns:pvml="urn:schemas-microsoft-com:office:powerpoint" xmlns:com="http://schemas.openxmlformats.org/drawingml/2006/compatibility" xmlns:p14="http://schemas.microsoft.com/office/powerpoint/2010/main" xmlns:p15="http://schemas.microsoft.com/office/powerpoint/2012/main" xmlns:ahyp="http://schemas.microsoft.com/office/drawing/2018/hyperlinkcolor" showMasterPhAnim="0" showMasterSp="0">
+<p:notes xmlns:a="http://schemas.openxmlformats.org/drawingml/2006/main" xmlns:r="http://schemas.openxmlformats.org/officeDocument/2006/relationships" xmlns:p="http://schemas.openxmlformats.org/presentationml/2006/main" showMasterSp="0" showMasterPhAnim="0">
   <p:cSld>
     <p:spTree>
       <p:nvGrpSpPr>
-        <p:cNvPr id="217" name="Shape 217"/>
+        <p:cNvPr id="1" name="Shape 217"/>
         <p:cNvGrpSpPr/>
         <p:nvPr/>
       </p:nvGrpSpPr>
@@ -2123,9 +2208,11 @@
       <p:sp>
         <p:nvSpPr>
           <p:cNvPr id="218" name="Google Shape;218;g2698beb87a1_0_91:notes"/>
-          <p:cNvSpPr/>
+          <p:cNvSpPr>
+            <a:spLocks noGrp="1" noRot="1" noChangeAspect="1"/>
+          </p:cNvSpPr>
           <p:nvPr>
-            <p:ph idx="2" type="sldImg"/>
+            <p:ph type="sldImg" idx="2"/>
           </p:nvPr>
         </p:nvSpPr>
         <p:spPr>
@@ -2134,9 +2221,13 @@
             <a:ext cx="6096000" cy="3429000"/>
           </a:xfrm>
           <a:custGeom>
-            <a:rect b="b" l="l" r="r" t="t"/>
+            <a:avLst/>
+            <a:gdLst/>
+            <a:ahLst/>
+            <a:cxnLst/>
+            <a:rect l="l" t="t" r="r" b="b"/>
             <a:pathLst>
-              <a:path extrusionOk="0" h="120000" w="120000">
+              <a:path w="120000" h="120000" extrusionOk="0">
                 <a:moveTo>
                   <a:pt x="0" y="0"/>
                 </a:moveTo>
@@ -2158,9 +2249,11 @@
       <p:sp>
         <p:nvSpPr>
           <p:cNvPr id="219" name="Google Shape;219;g2698beb87a1_0_91:notes"/>
-          <p:cNvSpPr txBox="1"/>
+          <p:cNvSpPr txBox="1">
+            <a:spLocks noGrp="1"/>
+          </p:cNvSpPr>
           <p:nvPr>
-            <p:ph idx="1" type="body"/>
+            <p:ph type="body" idx="1"/>
           </p:nvPr>
         </p:nvSpPr>
         <p:spPr>
@@ -2173,12 +2266,12 @@
           </a:prstGeom>
         </p:spPr>
         <p:txBody>
-          <a:bodyPr anchorCtr="0" anchor="t" bIns="91425" lIns="91425" spcFirstLastPara="1" rIns="91425" wrap="square" tIns="91425">
+          <a:bodyPr spcFirstLastPara="1" wrap="square" lIns="91425" tIns="91425" rIns="91425" bIns="91425" anchor="t" anchorCtr="0">
             <a:noAutofit/>
           </a:bodyPr>
           <a:lstStyle/>
           <a:p>
-            <a:pPr indent="0" lvl="0" marL="0" rtl="0" algn="l">
+            <a:pPr marL="0" lvl="0" indent="0" algn="l" rtl="0">
               <a:spcBef>
                 <a:spcPts val="0"/>
               </a:spcBef>
@@ -2187,9 +2280,6 @@
               </a:spcAft>
               <a:buNone/>
             </a:pPr>
-            <a:r>
-              <a:t/>
-            </a:r>
             <a:endParaRPr/>
           </a:p>
         </p:txBody>
@@ -2203,11 +2293,11 @@
 </file>
 
 <file path=ppt/notesSlides/notesSlide23.xml><?xml version="1.0" encoding="utf-8"?>
-<p:notes xmlns:a="http://schemas.openxmlformats.org/drawingml/2006/main" xmlns:r="http://schemas.openxmlformats.org/officeDocument/2006/relationships" xmlns:mc="http://schemas.openxmlformats.org/markup-compatibility/2006" xmlns:mv="urn:schemas-microsoft-com:mac:vml" xmlns:p="http://schemas.openxmlformats.org/presentationml/2006/main" xmlns:c="http://schemas.openxmlformats.org/drawingml/2006/chart" xmlns:dgm="http://schemas.openxmlformats.org/drawingml/2006/diagram" xmlns:o="urn:schemas-microsoft-com:office:office" xmlns:v="urn:schemas-microsoft-com:vml" xmlns:pvml="urn:schemas-microsoft-com:office:powerpoint" xmlns:com="http://schemas.openxmlformats.org/drawingml/2006/compatibility" xmlns:p14="http://schemas.microsoft.com/office/powerpoint/2010/main" xmlns:p15="http://schemas.microsoft.com/office/powerpoint/2012/main" xmlns:ahyp="http://schemas.microsoft.com/office/drawing/2018/hyperlinkcolor" showMasterPhAnim="0" showMasterSp="0">
+<p:notes xmlns:a="http://schemas.openxmlformats.org/drawingml/2006/main" xmlns:r="http://schemas.openxmlformats.org/officeDocument/2006/relationships" xmlns:p="http://schemas.openxmlformats.org/presentationml/2006/main" showMasterSp="0" showMasterPhAnim="0">
   <p:cSld>
     <p:spTree>
       <p:nvGrpSpPr>
-        <p:cNvPr id="223" name="Shape 223"/>
+        <p:cNvPr id="1" name="Shape 223"/>
         <p:cNvGrpSpPr/>
         <p:nvPr/>
       </p:nvGrpSpPr>
@@ -2222,9 +2312,11 @@
       <p:sp>
         <p:nvSpPr>
           <p:cNvPr id="224" name="Google Shape;224;g2698beb87a1_0_134:notes"/>
-          <p:cNvSpPr/>
+          <p:cNvSpPr>
+            <a:spLocks noGrp="1" noRot="1" noChangeAspect="1"/>
+          </p:cNvSpPr>
           <p:nvPr>
-            <p:ph idx="2" type="sldImg"/>
+            <p:ph type="sldImg" idx="2"/>
           </p:nvPr>
         </p:nvSpPr>
         <p:spPr>
@@ -2233,9 +2325,13 @@
             <a:ext cx="6096000" cy="3429000"/>
           </a:xfrm>
           <a:custGeom>
-            <a:rect b="b" l="l" r="r" t="t"/>
+            <a:avLst/>
+            <a:gdLst/>
+            <a:ahLst/>
+            <a:cxnLst/>
+            <a:rect l="l" t="t" r="r" b="b"/>
             <a:pathLst>
-              <a:path extrusionOk="0" h="120000" w="120000">
+              <a:path w="120000" h="120000" extrusionOk="0">
                 <a:moveTo>
                   <a:pt x="0" y="0"/>
                 </a:moveTo>
@@ -2257,9 +2353,11 @@
       <p:sp>
         <p:nvSpPr>
           <p:cNvPr id="225" name="Google Shape;225;g2698beb87a1_0_134:notes"/>
-          <p:cNvSpPr txBox="1"/>
+          <p:cNvSpPr txBox="1">
+            <a:spLocks noGrp="1"/>
+          </p:cNvSpPr>
           <p:nvPr>
-            <p:ph idx="1" type="body"/>
+            <p:ph type="body" idx="1"/>
           </p:nvPr>
         </p:nvSpPr>
         <p:spPr>
@@ -2272,12 +2370,12 @@
           </a:prstGeom>
         </p:spPr>
         <p:txBody>
-          <a:bodyPr anchorCtr="0" anchor="t" bIns="91425" lIns="91425" spcFirstLastPara="1" rIns="91425" wrap="square" tIns="91425">
+          <a:bodyPr spcFirstLastPara="1" wrap="square" lIns="91425" tIns="91425" rIns="91425" bIns="91425" anchor="t" anchorCtr="0">
             <a:noAutofit/>
           </a:bodyPr>
           <a:lstStyle/>
           <a:p>
-            <a:pPr indent="0" lvl="0" marL="0" rtl="0" algn="l">
+            <a:pPr marL="0" lvl="0" indent="0" algn="l" rtl="0">
               <a:spcBef>
                 <a:spcPts val="0"/>
               </a:spcBef>
@@ -2286,9 +2384,6 @@
               </a:spcAft>
               <a:buNone/>
             </a:pPr>
-            <a:r>
-              <a:t/>
-            </a:r>
             <a:endParaRPr/>
           </a:p>
         </p:txBody>
@@ -2302,11 +2397,11 @@
 </file>
 
 <file path=ppt/notesSlides/notesSlide3.xml><?xml version="1.0" encoding="utf-8"?>
-<p:notes xmlns:a="http://schemas.openxmlformats.org/drawingml/2006/main" xmlns:r="http://schemas.openxmlformats.org/officeDocument/2006/relationships" xmlns:mc="http://schemas.openxmlformats.org/markup-compatibility/2006" xmlns:mv="urn:schemas-microsoft-com:mac:vml" xmlns:p="http://schemas.openxmlformats.org/presentationml/2006/main" xmlns:c="http://schemas.openxmlformats.org/drawingml/2006/chart" xmlns:dgm="http://schemas.openxmlformats.org/drawingml/2006/diagram" xmlns:o="urn:schemas-microsoft-com:office:office" xmlns:v="urn:schemas-microsoft-com:vml" xmlns:pvml="urn:schemas-microsoft-com:office:powerpoint" xmlns:com="http://schemas.openxmlformats.org/drawingml/2006/compatibility" xmlns:p14="http://schemas.microsoft.com/office/powerpoint/2010/main" xmlns:p15="http://schemas.microsoft.com/office/powerpoint/2012/main" xmlns:ahyp="http://schemas.microsoft.com/office/drawing/2018/hyperlinkcolor" showMasterPhAnim="0" showMasterSp="0">
+<p:notes xmlns:a="http://schemas.openxmlformats.org/drawingml/2006/main" xmlns:r="http://schemas.openxmlformats.org/officeDocument/2006/relationships" xmlns:p="http://schemas.openxmlformats.org/presentationml/2006/main" showMasterSp="0" showMasterPhAnim="0">
   <p:cSld>
     <p:spTree>
       <p:nvGrpSpPr>
-        <p:cNvPr id="71" name="Shape 71"/>
+        <p:cNvPr id="1" name="Shape 71"/>
         <p:cNvGrpSpPr/>
         <p:nvPr/>
       </p:nvGrpSpPr>
@@ -2321,9 +2416,11 @@
       <p:sp>
         <p:nvSpPr>
           <p:cNvPr id="72" name="Google Shape;72;g2698beb87a1_0_18:notes"/>
-          <p:cNvSpPr/>
+          <p:cNvSpPr>
+            <a:spLocks noGrp="1" noRot="1" noChangeAspect="1"/>
+          </p:cNvSpPr>
           <p:nvPr>
-            <p:ph idx="2" type="sldImg"/>
+            <p:ph type="sldImg" idx="2"/>
           </p:nvPr>
         </p:nvSpPr>
         <p:spPr>
@@ -2332,9 +2429,13 @@
             <a:ext cx="6096000" cy="3429000"/>
           </a:xfrm>
           <a:custGeom>
-            <a:rect b="b" l="l" r="r" t="t"/>
+            <a:avLst/>
+            <a:gdLst/>
+            <a:ahLst/>
+            <a:cxnLst/>
+            <a:rect l="l" t="t" r="r" b="b"/>
             <a:pathLst>
-              <a:path extrusionOk="0" h="120000" w="120000">
+              <a:path w="120000" h="120000" extrusionOk="0">
                 <a:moveTo>
                   <a:pt x="0" y="0"/>
                 </a:moveTo>
@@ -2356,9 +2457,11 @@
       <p:sp>
         <p:nvSpPr>
           <p:cNvPr id="73" name="Google Shape;73;g2698beb87a1_0_18:notes"/>
-          <p:cNvSpPr txBox="1"/>
+          <p:cNvSpPr txBox="1">
+            <a:spLocks noGrp="1"/>
+          </p:cNvSpPr>
           <p:nvPr>
-            <p:ph idx="1" type="body"/>
+            <p:ph type="body" idx="1"/>
           </p:nvPr>
         </p:nvSpPr>
         <p:spPr>
@@ -2371,12 +2474,12 @@
           </a:prstGeom>
         </p:spPr>
         <p:txBody>
-          <a:bodyPr anchorCtr="0" anchor="t" bIns="91425" lIns="91425" spcFirstLastPara="1" rIns="91425" wrap="square" tIns="91425">
+          <a:bodyPr spcFirstLastPara="1" wrap="square" lIns="91425" tIns="91425" rIns="91425" bIns="91425" anchor="t" anchorCtr="0">
             <a:noAutofit/>
           </a:bodyPr>
           <a:lstStyle/>
           <a:p>
-            <a:pPr indent="0" lvl="0" marL="0" rtl="0" algn="l">
+            <a:pPr marL="0" lvl="0" indent="0" algn="l" rtl="0">
               <a:spcBef>
                 <a:spcPts val="0"/>
               </a:spcBef>
@@ -2385,9 +2488,6 @@
               </a:spcAft>
               <a:buNone/>
             </a:pPr>
-            <a:r>
-              <a:t/>
-            </a:r>
             <a:endParaRPr/>
           </a:p>
         </p:txBody>
@@ -2401,11 +2501,11 @@
 </file>
 
 <file path=ppt/notesSlides/notesSlide4.xml><?xml version="1.0" encoding="utf-8"?>
-<p:notes xmlns:a="http://schemas.openxmlformats.org/drawingml/2006/main" xmlns:r="http://schemas.openxmlformats.org/officeDocument/2006/relationships" xmlns:mc="http://schemas.openxmlformats.org/markup-compatibility/2006" xmlns:mv="urn:schemas-microsoft-com:mac:vml" xmlns:p="http://schemas.openxmlformats.org/presentationml/2006/main" xmlns:c="http://schemas.openxmlformats.org/drawingml/2006/chart" xmlns:dgm="http://schemas.openxmlformats.org/drawingml/2006/diagram" xmlns:o="urn:schemas-microsoft-com:office:office" xmlns:v="urn:schemas-microsoft-com:vml" xmlns:pvml="urn:schemas-microsoft-com:office:powerpoint" xmlns:com="http://schemas.openxmlformats.org/drawingml/2006/compatibility" xmlns:p14="http://schemas.microsoft.com/office/powerpoint/2010/main" xmlns:p15="http://schemas.microsoft.com/office/powerpoint/2012/main" xmlns:ahyp="http://schemas.microsoft.com/office/drawing/2018/hyperlinkcolor" showMasterPhAnim="0" showMasterSp="0">
+<p:notes xmlns:a="http://schemas.openxmlformats.org/drawingml/2006/main" xmlns:r="http://schemas.openxmlformats.org/officeDocument/2006/relationships" xmlns:p="http://schemas.openxmlformats.org/presentationml/2006/main" showMasterSp="0" showMasterPhAnim="0">
   <p:cSld>
     <p:spTree>
       <p:nvGrpSpPr>
-        <p:cNvPr id="77" name="Shape 77"/>
+        <p:cNvPr id="1" name="Shape 77"/>
         <p:cNvGrpSpPr/>
         <p:nvPr/>
       </p:nvGrpSpPr>
@@ -2420,9 +2520,11 @@
       <p:sp>
         <p:nvSpPr>
           <p:cNvPr id="78" name="Google Shape;78;g2698beb87a1_0_23:notes"/>
-          <p:cNvSpPr/>
+          <p:cNvSpPr>
+            <a:spLocks noGrp="1" noRot="1" noChangeAspect="1"/>
+          </p:cNvSpPr>
           <p:nvPr>
-            <p:ph idx="2" type="sldImg"/>
+            <p:ph type="sldImg" idx="2"/>
           </p:nvPr>
         </p:nvSpPr>
         <p:spPr>
@@ -2431,9 +2533,13 @@
             <a:ext cx="6096000" cy="3429000"/>
           </a:xfrm>
           <a:custGeom>
-            <a:rect b="b" l="l" r="r" t="t"/>
+            <a:avLst/>
+            <a:gdLst/>
+            <a:ahLst/>
+            <a:cxnLst/>
+            <a:rect l="l" t="t" r="r" b="b"/>
             <a:pathLst>
-              <a:path extrusionOk="0" h="120000" w="120000">
+              <a:path w="120000" h="120000" extrusionOk="0">
                 <a:moveTo>
                   <a:pt x="0" y="0"/>
                 </a:moveTo>
@@ -2455,9 +2561,11 @@
       <p:sp>
         <p:nvSpPr>
           <p:cNvPr id="79" name="Google Shape;79;g2698beb87a1_0_23:notes"/>
-          <p:cNvSpPr txBox="1"/>
+          <p:cNvSpPr txBox="1">
+            <a:spLocks noGrp="1"/>
+          </p:cNvSpPr>
           <p:nvPr>
-            <p:ph idx="1" type="body"/>
+            <p:ph type="body" idx="1"/>
           </p:nvPr>
         </p:nvSpPr>
         <p:spPr>
@@ -2470,12 +2578,12 @@
           </a:prstGeom>
         </p:spPr>
         <p:txBody>
-          <a:bodyPr anchorCtr="0" anchor="t" bIns="91425" lIns="91425" spcFirstLastPara="1" rIns="91425" wrap="square" tIns="91425">
+          <a:bodyPr spcFirstLastPara="1" wrap="square" lIns="91425" tIns="91425" rIns="91425" bIns="91425" anchor="t" anchorCtr="0">
             <a:noAutofit/>
           </a:bodyPr>
           <a:lstStyle/>
           <a:p>
-            <a:pPr indent="0" lvl="0" marL="0" rtl="0" algn="l">
+            <a:pPr marL="0" lvl="0" indent="0" algn="l" rtl="0">
               <a:spcBef>
                 <a:spcPts val="0"/>
               </a:spcBef>
@@ -2484,9 +2592,6 @@
               </a:spcAft>
               <a:buNone/>
             </a:pPr>
-            <a:r>
-              <a:t/>
-            </a:r>
             <a:endParaRPr/>
           </a:p>
         </p:txBody>
@@ -2500,11 +2605,11 @@
 </file>
 
 <file path=ppt/notesSlides/notesSlide5.xml><?xml version="1.0" encoding="utf-8"?>
-<p:notes xmlns:a="http://schemas.openxmlformats.org/drawingml/2006/main" xmlns:r="http://schemas.openxmlformats.org/officeDocument/2006/relationships" xmlns:mc="http://schemas.openxmlformats.org/markup-compatibility/2006" xmlns:mv="urn:schemas-microsoft-com:mac:vml" xmlns:p="http://schemas.openxmlformats.org/presentationml/2006/main" xmlns:c="http://schemas.openxmlformats.org/drawingml/2006/chart" xmlns:dgm="http://schemas.openxmlformats.org/drawingml/2006/diagram" xmlns:o="urn:schemas-microsoft-com:office:office" xmlns:v="urn:schemas-microsoft-com:vml" xmlns:pvml="urn:schemas-microsoft-com:office:powerpoint" xmlns:com="http://schemas.openxmlformats.org/drawingml/2006/compatibility" xmlns:p14="http://schemas.microsoft.com/office/powerpoint/2010/main" xmlns:p15="http://schemas.microsoft.com/office/powerpoint/2012/main" xmlns:ahyp="http://schemas.microsoft.com/office/drawing/2018/hyperlinkcolor" showMasterPhAnim="0" showMasterSp="0">
+<p:notes xmlns:a="http://schemas.openxmlformats.org/drawingml/2006/main" xmlns:r="http://schemas.openxmlformats.org/officeDocument/2006/relationships" xmlns:p="http://schemas.openxmlformats.org/presentationml/2006/main" showMasterSp="0" showMasterPhAnim="0">
   <p:cSld>
     <p:spTree>
       <p:nvGrpSpPr>
-        <p:cNvPr id="83" name="Shape 83"/>
+        <p:cNvPr id="1" name="Shape 83"/>
         <p:cNvGrpSpPr/>
         <p:nvPr/>
       </p:nvGrpSpPr>
@@ -2519,9 +2624,11 @@
       <p:sp>
         <p:nvSpPr>
           <p:cNvPr id="84" name="Google Shape;84;g2698beb87a1_0_114:notes"/>
-          <p:cNvSpPr/>
+          <p:cNvSpPr>
+            <a:spLocks noGrp="1" noRot="1" noChangeAspect="1"/>
+          </p:cNvSpPr>
           <p:nvPr>
-            <p:ph idx="2" type="sldImg"/>
+            <p:ph type="sldImg" idx="2"/>
           </p:nvPr>
         </p:nvSpPr>
         <p:spPr>
@@ -2530,9 +2637,13 @@
             <a:ext cx="6096000" cy="3429000"/>
           </a:xfrm>
           <a:custGeom>
-            <a:rect b="b" l="l" r="r" t="t"/>
+            <a:avLst/>
+            <a:gdLst/>
+            <a:ahLst/>
+            <a:cxnLst/>
+            <a:rect l="l" t="t" r="r" b="b"/>
             <a:pathLst>
-              <a:path extrusionOk="0" h="120000" w="120000">
+              <a:path w="120000" h="120000" extrusionOk="0">
                 <a:moveTo>
                   <a:pt x="0" y="0"/>
                 </a:moveTo>
@@ -2554,9 +2665,11 @@
       <p:sp>
         <p:nvSpPr>
           <p:cNvPr id="85" name="Google Shape;85;g2698beb87a1_0_114:notes"/>
-          <p:cNvSpPr txBox="1"/>
+          <p:cNvSpPr txBox="1">
+            <a:spLocks noGrp="1"/>
+          </p:cNvSpPr>
           <p:nvPr>
-            <p:ph idx="1" type="body"/>
+            <p:ph type="body" idx="1"/>
           </p:nvPr>
         </p:nvSpPr>
         <p:spPr>
@@ -2569,12 +2682,12 @@
           </a:prstGeom>
         </p:spPr>
         <p:txBody>
-          <a:bodyPr anchorCtr="0" anchor="t" bIns="91425" lIns="91425" spcFirstLastPara="1" rIns="91425" wrap="square" tIns="91425">
+          <a:bodyPr spcFirstLastPara="1" wrap="square" lIns="91425" tIns="91425" rIns="91425" bIns="91425" anchor="t" anchorCtr="0">
             <a:noAutofit/>
           </a:bodyPr>
           <a:lstStyle/>
           <a:p>
-            <a:pPr indent="0" lvl="0" marL="0" rtl="0" algn="l">
+            <a:pPr marL="0" lvl="0" indent="0" algn="l" rtl="0">
               <a:spcBef>
                 <a:spcPts val="0"/>
               </a:spcBef>
@@ -2583,9 +2696,6 @@
               </a:spcAft>
               <a:buNone/>
             </a:pPr>
-            <a:r>
-              <a:t/>
-            </a:r>
             <a:endParaRPr/>
           </a:p>
         </p:txBody>
@@ -2599,11 +2709,11 @@
 </file>
 
 <file path=ppt/notesSlides/notesSlide6.xml><?xml version="1.0" encoding="utf-8"?>
-<p:notes xmlns:a="http://schemas.openxmlformats.org/drawingml/2006/main" xmlns:r="http://schemas.openxmlformats.org/officeDocument/2006/relationships" xmlns:mc="http://schemas.openxmlformats.org/markup-compatibility/2006" xmlns:mv="urn:schemas-microsoft-com:mac:vml" xmlns:p="http://schemas.openxmlformats.org/presentationml/2006/main" xmlns:c="http://schemas.openxmlformats.org/drawingml/2006/chart" xmlns:dgm="http://schemas.openxmlformats.org/drawingml/2006/diagram" xmlns:o="urn:schemas-microsoft-com:office:office" xmlns:v="urn:schemas-microsoft-com:vml" xmlns:pvml="urn:schemas-microsoft-com:office:powerpoint" xmlns:com="http://schemas.openxmlformats.org/drawingml/2006/compatibility" xmlns:p14="http://schemas.microsoft.com/office/powerpoint/2010/main" xmlns:p15="http://schemas.microsoft.com/office/powerpoint/2012/main" xmlns:ahyp="http://schemas.microsoft.com/office/drawing/2018/hyperlinkcolor" showMasterPhAnim="0" showMasterSp="0">
+<p:notes xmlns:a="http://schemas.openxmlformats.org/drawingml/2006/main" xmlns:r="http://schemas.openxmlformats.org/officeDocument/2006/relationships" xmlns:p="http://schemas.openxmlformats.org/presentationml/2006/main" showMasterSp="0" showMasterPhAnim="0">
   <p:cSld>
     <p:spTree>
       <p:nvGrpSpPr>
-        <p:cNvPr id="88" name="Shape 88"/>
+        <p:cNvPr id="1" name="Shape 88"/>
         <p:cNvGrpSpPr/>
         <p:nvPr/>
       </p:nvGrpSpPr>
@@ -2618,9 +2728,11 @@
       <p:sp>
         <p:nvSpPr>
           <p:cNvPr id="89" name="Google Shape;89;g2698beb87a1_0_0:notes"/>
-          <p:cNvSpPr/>
+          <p:cNvSpPr>
+            <a:spLocks noGrp="1" noRot="1" noChangeAspect="1"/>
+          </p:cNvSpPr>
           <p:nvPr>
-            <p:ph idx="2" type="sldImg"/>
+            <p:ph type="sldImg" idx="2"/>
           </p:nvPr>
         </p:nvSpPr>
         <p:spPr>
@@ -2629,9 +2741,13 @@
             <a:ext cx="6096000" cy="3429000"/>
           </a:xfrm>
           <a:custGeom>
-            <a:rect b="b" l="l" r="r" t="t"/>
+            <a:avLst/>
+            <a:gdLst/>
+            <a:ahLst/>
+            <a:cxnLst/>
+            <a:rect l="l" t="t" r="r" b="b"/>
             <a:pathLst>
-              <a:path extrusionOk="0" h="120000" w="120000">
+              <a:path w="120000" h="120000" extrusionOk="0">
                 <a:moveTo>
                   <a:pt x="0" y="0"/>
                 </a:moveTo>
@@ -2653,9 +2769,11 @@
       <p:sp>
         <p:nvSpPr>
           <p:cNvPr id="90" name="Google Shape;90;g2698beb87a1_0_0:notes"/>
-          <p:cNvSpPr txBox="1"/>
+          <p:cNvSpPr txBox="1">
+            <a:spLocks noGrp="1"/>
+          </p:cNvSpPr>
           <p:nvPr>
-            <p:ph idx="1" type="body"/>
+            <p:ph type="body" idx="1"/>
           </p:nvPr>
         </p:nvSpPr>
         <p:spPr>
@@ -2668,12 +2786,12 @@
           </a:prstGeom>
         </p:spPr>
         <p:txBody>
-          <a:bodyPr anchorCtr="0" anchor="t" bIns="91425" lIns="91425" spcFirstLastPara="1" rIns="91425" wrap="square" tIns="91425">
+          <a:bodyPr spcFirstLastPara="1" wrap="square" lIns="91425" tIns="91425" rIns="91425" bIns="91425" anchor="t" anchorCtr="0">
             <a:noAutofit/>
           </a:bodyPr>
           <a:lstStyle/>
           <a:p>
-            <a:pPr indent="0" lvl="0" marL="0" rtl="0" algn="l">
+            <a:pPr marL="0" lvl="0" indent="0" algn="l" rtl="0">
               <a:spcBef>
                 <a:spcPts val="0"/>
               </a:spcBef>
@@ -2682,9 +2800,6 @@
               </a:spcAft>
               <a:buNone/>
             </a:pPr>
-            <a:r>
-              <a:t/>
-            </a:r>
             <a:endParaRPr/>
           </a:p>
         </p:txBody>
@@ -2698,11 +2813,11 @@
 </file>
 
 <file path=ppt/notesSlides/notesSlide7.xml><?xml version="1.0" encoding="utf-8"?>
-<p:notes xmlns:a="http://schemas.openxmlformats.org/drawingml/2006/main" xmlns:r="http://schemas.openxmlformats.org/officeDocument/2006/relationships" xmlns:mc="http://schemas.openxmlformats.org/markup-compatibility/2006" xmlns:mv="urn:schemas-microsoft-com:mac:vml" xmlns:p="http://schemas.openxmlformats.org/presentationml/2006/main" xmlns:c="http://schemas.openxmlformats.org/drawingml/2006/chart" xmlns:dgm="http://schemas.openxmlformats.org/drawingml/2006/diagram" xmlns:o="urn:schemas-microsoft-com:office:office" xmlns:v="urn:schemas-microsoft-com:vml" xmlns:pvml="urn:schemas-microsoft-com:office:powerpoint" xmlns:com="http://schemas.openxmlformats.org/drawingml/2006/compatibility" xmlns:p14="http://schemas.microsoft.com/office/powerpoint/2010/main" xmlns:p15="http://schemas.microsoft.com/office/powerpoint/2012/main" xmlns:ahyp="http://schemas.microsoft.com/office/drawing/2018/hyperlinkcolor" showMasterPhAnim="0" showMasterSp="0">
+<p:notes xmlns:a="http://schemas.openxmlformats.org/drawingml/2006/main" xmlns:r="http://schemas.openxmlformats.org/officeDocument/2006/relationships" xmlns:p="http://schemas.openxmlformats.org/presentationml/2006/main" showMasterSp="0" showMasterPhAnim="0">
   <p:cSld>
     <p:spTree>
       <p:nvGrpSpPr>
-        <p:cNvPr id="94" name="Shape 94"/>
+        <p:cNvPr id="1" name="Shape 94"/>
         <p:cNvGrpSpPr/>
         <p:nvPr/>
       </p:nvGrpSpPr>
@@ -2717,9 +2832,11 @@
       <p:sp>
         <p:nvSpPr>
           <p:cNvPr id="95" name="Google Shape;95;g2698beb87a1_0_5:notes"/>
-          <p:cNvSpPr/>
+          <p:cNvSpPr>
+            <a:spLocks noGrp="1" noRot="1" noChangeAspect="1"/>
+          </p:cNvSpPr>
           <p:nvPr>
-            <p:ph idx="2" type="sldImg"/>
+            <p:ph type="sldImg" idx="2"/>
           </p:nvPr>
         </p:nvSpPr>
         <p:spPr>
@@ -2728,9 +2845,13 @@
             <a:ext cx="6096000" cy="3429000"/>
           </a:xfrm>
           <a:custGeom>
-            <a:rect b="b" l="l" r="r" t="t"/>
+            <a:avLst/>
+            <a:gdLst/>
+            <a:ahLst/>
+            <a:cxnLst/>
+            <a:rect l="l" t="t" r="r" b="b"/>
             <a:pathLst>
-              <a:path extrusionOk="0" h="120000" w="120000">
+              <a:path w="120000" h="120000" extrusionOk="0">
                 <a:moveTo>
                   <a:pt x="0" y="0"/>
                 </a:moveTo>
@@ -2752,9 +2873,11 @@
       <p:sp>
         <p:nvSpPr>
           <p:cNvPr id="96" name="Google Shape;96;g2698beb87a1_0_5:notes"/>
-          <p:cNvSpPr txBox="1"/>
+          <p:cNvSpPr txBox="1">
+            <a:spLocks noGrp="1"/>
+          </p:cNvSpPr>
           <p:nvPr>
-            <p:ph idx="1" type="body"/>
+            <p:ph type="body" idx="1"/>
           </p:nvPr>
         </p:nvSpPr>
         <p:spPr>
@@ -2767,12 +2890,12 @@
           </a:prstGeom>
         </p:spPr>
         <p:txBody>
-          <a:bodyPr anchorCtr="0" anchor="t" bIns="91425" lIns="91425" spcFirstLastPara="1" rIns="91425" wrap="square" tIns="91425">
+          <a:bodyPr spcFirstLastPara="1" wrap="square" lIns="91425" tIns="91425" rIns="91425" bIns="91425" anchor="t" anchorCtr="0">
             <a:noAutofit/>
           </a:bodyPr>
           <a:lstStyle/>
           <a:p>
-            <a:pPr indent="0" lvl="0" marL="0" rtl="0" algn="l">
+            <a:pPr marL="0" lvl="0" indent="0" algn="l" rtl="0">
               <a:spcBef>
                 <a:spcPts val="0"/>
               </a:spcBef>
@@ -2781,9 +2904,6 @@
               </a:spcAft>
               <a:buNone/>
             </a:pPr>
-            <a:r>
-              <a:t/>
-            </a:r>
             <a:endParaRPr/>
           </a:p>
         </p:txBody>
@@ -2797,11 +2917,11 @@
 </file>
 
 <file path=ppt/notesSlides/notesSlide8.xml><?xml version="1.0" encoding="utf-8"?>
-<p:notes xmlns:a="http://schemas.openxmlformats.org/drawingml/2006/main" xmlns:r="http://schemas.openxmlformats.org/officeDocument/2006/relationships" xmlns:mc="http://schemas.openxmlformats.org/markup-compatibility/2006" xmlns:mv="urn:schemas-microsoft-com:mac:vml" xmlns:p="http://schemas.openxmlformats.org/presentationml/2006/main" xmlns:c="http://schemas.openxmlformats.org/drawingml/2006/chart" xmlns:dgm="http://schemas.openxmlformats.org/drawingml/2006/diagram" xmlns:o="urn:schemas-microsoft-com:office:office" xmlns:v="urn:schemas-microsoft-com:vml" xmlns:pvml="urn:schemas-microsoft-com:office:powerpoint" xmlns:com="http://schemas.openxmlformats.org/drawingml/2006/compatibility" xmlns:p14="http://schemas.microsoft.com/office/powerpoint/2010/main" xmlns:p15="http://schemas.microsoft.com/office/powerpoint/2012/main" xmlns:ahyp="http://schemas.microsoft.com/office/drawing/2018/hyperlinkcolor" showMasterPhAnim="0" showMasterSp="0">
+<p:notes xmlns:a="http://schemas.openxmlformats.org/drawingml/2006/main" xmlns:r="http://schemas.openxmlformats.org/officeDocument/2006/relationships" xmlns:p="http://schemas.openxmlformats.org/presentationml/2006/main" showMasterSp="0" showMasterPhAnim="0">
   <p:cSld>
     <p:spTree>
       <p:nvGrpSpPr>
-        <p:cNvPr id="100" name="Shape 100"/>
+        <p:cNvPr id="1" name="Shape 100"/>
         <p:cNvGrpSpPr/>
         <p:nvPr/>
       </p:nvGrpSpPr>
@@ -2816,9 +2936,11 @@
       <p:sp>
         <p:nvSpPr>
           <p:cNvPr id="101" name="Google Shape;101;g2698beb87a1_0_33:notes"/>
-          <p:cNvSpPr/>
+          <p:cNvSpPr>
+            <a:spLocks noGrp="1" noRot="1" noChangeAspect="1"/>
+          </p:cNvSpPr>
           <p:nvPr>
-            <p:ph idx="2" type="sldImg"/>
+            <p:ph type="sldImg" idx="2"/>
           </p:nvPr>
         </p:nvSpPr>
         <p:spPr>
@@ -2827,9 +2949,13 @@
             <a:ext cx="6096000" cy="3429000"/>
           </a:xfrm>
           <a:custGeom>
-            <a:rect b="b" l="l" r="r" t="t"/>
+            <a:avLst/>
+            <a:gdLst/>
+            <a:ahLst/>
+            <a:cxnLst/>
+            <a:rect l="l" t="t" r="r" b="b"/>
             <a:pathLst>
-              <a:path extrusionOk="0" h="120000" w="120000">
+              <a:path w="120000" h="120000" extrusionOk="0">
                 <a:moveTo>
                   <a:pt x="0" y="0"/>
                 </a:moveTo>
@@ -2851,9 +2977,11 @@
       <p:sp>
         <p:nvSpPr>
           <p:cNvPr id="102" name="Google Shape;102;g2698beb87a1_0_33:notes"/>
-          <p:cNvSpPr txBox="1"/>
+          <p:cNvSpPr txBox="1">
+            <a:spLocks noGrp="1"/>
+          </p:cNvSpPr>
           <p:nvPr>
-            <p:ph idx="1" type="body"/>
+            <p:ph type="body" idx="1"/>
           </p:nvPr>
         </p:nvSpPr>
         <p:spPr>
@@ -2866,12 +2994,12 @@
           </a:prstGeom>
         </p:spPr>
         <p:txBody>
-          <a:bodyPr anchorCtr="0" anchor="t" bIns="91425" lIns="91425" spcFirstLastPara="1" rIns="91425" wrap="square" tIns="91425">
+          <a:bodyPr spcFirstLastPara="1" wrap="square" lIns="91425" tIns="91425" rIns="91425" bIns="91425" anchor="t" anchorCtr="0">
             <a:noAutofit/>
           </a:bodyPr>
           <a:lstStyle/>
           <a:p>
-            <a:pPr indent="0" lvl="0" marL="0" rtl="0" algn="l">
+            <a:pPr marL="0" lvl="0" indent="0" algn="l" rtl="0">
               <a:spcBef>
                 <a:spcPts val="0"/>
               </a:spcBef>
@@ -2880,9 +3008,6 @@
               </a:spcAft>
               <a:buNone/>
             </a:pPr>
-            <a:r>
-              <a:t/>
-            </a:r>
             <a:endParaRPr/>
           </a:p>
         </p:txBody>
@@ -2896,11 +3021,11 @@
 </file>
 
 <file path=ppt/notesSlides/notesSlide9.xml><?xml version="1.0" encoding="utf-8"?>
-<p:notes xmlns:a="http://schemas.openxmlformats.org/drawingml/2006/main" xmlns:r="http://schemas.openxmlformats.org/officeDocument/2006/relationships" xmlns:mc="http://schemas.openxmlformats.org/markup-compatibility/2006" xmlns:mv="urn:schemas-microsoft-com:mac:vml" xmlns:p="http://schemas.openxmlformats.org/presentationml/2006/main" xmlns:c="http://schemas.openxmlformats.org/drawingml/2006/chart" xmlns:dgm="http://schemas.openxmlformats.org/drawingml/2006/diagram" xmlns:o="urn:schemas-microsoft-com:office:office" xmlns:v="urn:schemas-microsoft-com:vml" xmlns:pvml="urn:schemas-microsoft-com:office:powerpoint" xmlns:com="http://schemas.openxmlformats.org/drawingml/2006/compatibility" xmlns:p14="http://schemas.microsoft.com/office/powerpoint/2010/main" xmlns:p15="http://schemas.microsoft.com/office/powerpoint/2012/main" xmlns:ahyp="http://schemas.microsoft.com/office/drawing/2018/hyperlinkcolor" showMasterPhAnim="0" showMasterSp="0">
+<p:notes xmlns:a="http://schemas.openxmlformats.org/drawingml/2006/main" xmlns:r="http://schemas.openxmlformats.org/officeDocument/2006/relationships" xmlns:p="http://schemas.openxmlformats.org/presentationml/2006/main" showMasterSp="0" showMasterPhAnim="0">
   <p:cSld>
     <p:spTree>
       <p:nvGrpSpPr>
-        <p:cNvPr id="107" name="Shape 107"/>
+        <p:cNvPr id="1" name="Shape 107"/>
         <p:cNvGrpSpPr/>
         <p:nvPr/>
       </p:nvGrpSpPr>
@@ -2915,9 +3040,11 @@
       <p:sp>
         <p:nvSpPr>
           <p:cNvPr id="108" name="Google Shape;108;g2698beb87a1_0_28:notes"/>
-          <p:cNvSpPr/>
+          <p:cNvSpPr>
+            <a:spLocks noGrp="1" noRot="1" noChangeAspect="1"/>
+          </p:cNvSpPr>
           <p:nvPr>
-            <p:ph idx="2" type="sldImg"/>
+            <p:ph type="sldImg" idx="2"/>
           </p:nvPr>
         </p:nvSpPr>
         <p:spPr>
@@ -2926,9 +3053,13 @@
             <a:ext cx="6096000" cy="3429000"/>
           </a:xfrm>
           <a:custGeom>
-            <a:rect b="b" l="l" r="r" t="t"/>
+            <a:avLst/>
+            <a:gdLst/>
+            <a:ahLst/>
+            <a:cxnLst/>
+            <a:rect l="l" t="t" r="r" b="b"/>
             <a:pathLst>
-              <a:path extrusionOk="0" h="120000" w="120000">
+              <a:path w="120000" h="120000" extrusionOk="0">
                 <a:moveTo>
                   <a:pt x="0" y="0"/>
                 </a:moveTo>
@@ -2950,9 +3081,11 @@
       <p:sp>
         <p:nvSpPr>
           <p:cNvPr id="109" name="Google Shape;109;g2698beb87a1_0_28:notes"/>
-          <p:cNvSpPr txBox="1"/>
+          <p:cNvSpPr txBox="1">
+            <a:spLocks noGrp="1"/>
+          </p:cNvSpPr>
           <p:nvPr>
-            <p:ph idx="1" type="body"/>
+            <p:ph type="body" idx="1"/>
           </p:nvPr>
         </p:nvSpPr>
         <p:spPr>
@@ -2965,12 +3098,12 @@
           </a:prstGeom>
         </p:spPr>
         <p:txBody>
-          <a:bodyPr anchorCtr="0" anchor="t" bIns="91425" lIns="91425" spcFirstLastPara="1" rIns="91425" wrap="square" tIns="91425">
+          <a:bodyPr spcFirstLastPara="1" wrap="square" lIns="91425" tIns="91425" rIns="91425" bIns="91425" anchor="t" anchorCtr="0">
             <a:noAutofit/>
           </a:bodyPr>
           <a:lstStyle/>
           <a:p>
-            <a:pPr indent="0" lvl="0" marL="0" rtl="0" algn="l">
+            <a:pPr marL="0" lvl="0" indent="0" algn="l" rtl="0">
               <a:spcBef>
                 <a:spcPts val="0"/>
               </a:spcBef>
@@ -2979,9 +3112,6 @@
               </a:spcAft>
               <a:buNone/>
             </a:pPr>
-            <a:r>
-              <a:t/>
-            </a:r>
             <a:endParaRPr/>
           </a:p>
         </p:txBody>
@@ -2995,11 +3125,11 @@
 </file>
 
 <file path=ppt/slideLayouts/slideLayout1.xml><?xml version="1.0" encoding="utf-8"?>
-<p:sldLayout xmlns:a="http://schemas.openxmlformats.org/drawingml/2006/main" xmlns:r="http://schemas.openxmlformats.org/officeDocument/2006/relationships" xmlns:mc="http://schemas.openxmlformats.org/markup-compatibility/2006" xmlns:mv="urn:schemas-microsoft-com:mac:vml" xmlns:p="http://schemas.openxmlformats.org/presentationml/2006/main" xmlns:c="http://schemas.openxmlformats.org/drawingml/2006/chart" xmlns:dgm="http://schemas.openxmlformats.org/drawingml/2006/diagram" xmlns:o="urn:schemas-microsoft-com:office:office" xmlns:v="urn:schemas-microsoft-com:vml" xmlns:pvml="urn:schemas-microsoft-com:office:powerpoint" xmlns:com="http://schemas.openxmlformats.org/drawingml/2006/compatibility" xmlns:p14="http://schemas.microsoft.com/office/powerpoint/2010/main" xmlns:p15="http://schemas.microsoft.com/office/powerpoint/2012/main" xmlns:ahyp="http://schemas.microsoft.com/office/drawing/2018/hyperlinkcolor" matchingName="Title slide" type="title">
+<p:sldLayout xmlns:a="http://schemas.openxmlformats.org/drawingml/2006/main" xmlns:r="http://schemas.openxmlformats.org/officeDocument/2006/relationships" xmlns:p="http://schemas.openxmlformats.org/presentationml/2006/main" matchingName="Title slide" type="title">
   <p:cSld name="TITLE">
     <p:spTree>
       <p:nvGrpSpPr>
-        <p:cNvPr id="10" name="Shape 10"/>
+        <p:cNvPr id="1" name="Shape 10"/>
         <p:cNvGrpSpPr/>
         <p:nvPr/>
       </p:nvGrpSpPr>
@@ -3021,7 +3151,7 @@
           <a:blip r:embed="rId2">
             <a:alphaModFix/>
           </a:blip>
-          <a:srcRect b="22311" l="0" r="0" t="0"/>
+          <a:srcRect b="22311"/>
           <a:stretch/>
         </p:blipFill>
         <p:spPr>
@@ -3041,7 +3171,9 @@
       <p:sp>
         <p:nvSpPr>
           <p:cNvPr id="12" name="Google Shape;12;p2"/>
-          <p:cNvSpPr txBox="1"/>
+          <p:cNvSpPr txBox="1">
+            <a:spLocks noGrp="1"/>
+          </p:cNvSpPr>
           <p:nvPr>
             <p:ph type="ctrTitle"/>
           </p:nvPr>
@@ -3056,7 +3188,7 @@
           </a:prstGeom>
         </p:spPr>
         <p:txBody>
-          <a:bodyPr anchorCtr="0" anchor="b" bIns="91425" lIns="91425" spcFirstLastPara="1" rIns="91425" wrap="square" tIns="91425">
+          <a:bodyPr spcFirstLastPara="1" wrap="square" lIns="91425" tIns="91425" rIns="91425" bIns="91425" anchor="b" anchorCtr="0">
             <a:normAutofit/>
           </a:bodyPr>
           <a:lstStyle>
@@ -3223,15 +3355,19 @@
               </a:defRPr>
             </a:lvl9pPr>
           </a:lstStyle>
-          <a:p/>
+          <a:p>
+            <a:endParaRPr/>
+          </a:p>
         </p:txBody>
       </p:sp>
       <p:sp>
         <p:nvSpPr>
           <p:cNvPr id="13" name="Google Shape;13;p2"/>
-          <p:cNvSpPr txBox="1"/>
+          <p:cNvSpPr txBox="1">
+            <a:spLocks noGrp="1"/>
+          </p:cNvSpPr>
           <p:nvPr>
-            <p:ph idx="1" type="subTitle"/>
+            <p:ph type="subTitle" idx="1"/>
           </p:nvPr>
         </p:nvSpPr>
         <p:spPr>
@@ -3244,7 +3380,7 @@
           </a:prstGeom>
         </p:spPr>
         <p:txBody>
-          <a:bodyPr anchorCtr="0" anchor="t" bIns="91425" lIns="91425" spcFirstLastPara="1" rIns="91425" wrap="square" tIns="91425">
+          <a:bodyPr spcFirstLastPara="1" wrap="square" lIns="91425" tIns="91425" rIns="91425" bIns="91425" anchor="t" anchorCtr="0">
             <a:normAutofit/>
           </a:bodyPr>
           <a:lstStyle>
@@ -3382,15 +3518,19 @@
               <a:defRPr sz="2800"/>
             </a:lvl9pPr>
           </a:lstStyle>
-          <a:p/>
+          <a:p>
+            <a:endParaRPr/>
+          </a:p>
         </p:txBody>
       </p:sp>
       <p:sp>
         <p:nvSpPr>
           <p:cNvPr id="14" name="Google Shape;14;p2"/>
-          <p:cNvSpPr txBox="1"/>
+          <p:cNvSpPr txBox="1">
+            <a:spLocks noGrp="1"/>
+          </p:cNvSpPr>
           <p:nvPr>
-            <p:ph idx="12" type="sldNum"/>
+            <p:ph type="sldNum" idx="12"/>
           </p:nvPr>
         </p:nvSpPr>
         <p:spPr>
@@ -3403,7 +3543,7 @@
           </a:prstGeom>
         </p:spPr>
         <p:txBody>
-          <a:bodyPr anchorCtr="0" anchor="ctr" bIns="91425" lIns="91425" spcFirstLastPara="1" rIns="91425" wrap="square" tIns="91425">
+          <a:bodyPr spcFirstLastPara="1" wrap="square" lIns="91425" tIns="91425" rIns="91425" bIns="91425" anchor="ctr" anchorCtr="0">
             <a:normAutofit/>
           </a:bodyPr>
           <a:lstStyle>
@@ -3445,7 +3585,7 @@
             </a:lvl9pPr>
           </a:lstStyle>
           <a:p>
-            <a:pPr indent="0" lvl="0" marL="0" rtl="0" algn="r">
+            <a:pPr marL="0" lvl="0" indent="0" algn="r" rtl="0">
               <a:spcBef>
                 <a:spcPts val="0"/>
               </a:spcBef>
@@ -3521,9 +3661,11 @@
       <p:sp>
         <p:nvSpPr>
           <p:cNvPr id="17" name="Google Shape;17;p2"/>
-          <p:cNvSpPr txBox="1"/>
+          <p:cNvSpPr txBox="1">
+            <a:spLocks noGrp="1"/>
+          </p:cNvSpPr>
           <p:nvPr>
-            <p:ph idx="2" type="subTitle"/>
+            <p:ph type="subTitle" idx="2"/>
           </p:nvPr>
         </p:nvSpPr>
         <p:spPr>
@@ -3536,11 +3678,11 @@
           </a:prstGeom>
         </p:spPr>
         <p:txBody>
-          <a:bodyPr anchorCtr="0" anchor="t" bIns="91425" lIns="91425" spcFirstLastPara="1" rIns="91425" wrap="square" tIns="91425">
+          <a:bodyPr spcFirstLastPara="1" wrap="square" lIns="91425" tIns="91425" rIns="91425" bIns="91425" anchor="t" anchorCtr="0">
             <a:normAutofit/>
           </a:bodyPr>
           <a:lstStyle>
-            <a:lvl1pPr lvl="0" rtl="0" algn="ctr">
+            <a:lvl1pPr lvl="0" algn="ctr" rtl="0">
               <a:lnSpc>
                 <a:spcPct val="100000"/>
               </a:lnSpc>
@@ -3555,13 +3697,13 @@
               </a:buClr>
               <a:buSzPts val="2000"/>
               <a:buNone/>
-              <a:defRPr i="1" sz="2000">
+              <a:defRPr sz="2000" i="1">
                 <a:solidFill>
                   <a:schemeClr val="lt1"/>
                 </a:solidFill>
               </a:defRPr>
             </a:lvl1pPr>
-            <a:lvl2pPr lvl="1" rtl="0" algn="ctr">
+            <a:lvl2pPr lvl="1" algn="ctr" rtl="0">
               <a:lnSpc>
                 <a:spcPct val="100000"/>
               </a:lnSpc>
@@ -3575,7 +3717,7 @@
               <a:buNone/>
               <a:defRPr sz="2800"/>
             </a:lvl2pPr>
-            <a:lvl3pPr lvl="2" rtl="0" algn="ctr">
+            <a:lvl3pPr lvl="2" algn="ctr" rtl="0">
               <a:lnSpc>
                 <a:spcPct val="100000"/>
               </a:lnSpc>
@@ -3589,7 +3731,7 @@
               <a:buNone/>
               <a:defRPr sz="2800"/>
             </a:lvl3pPr>
-            <a:lvl4pPr lvl="3" rtl="0" algn="ctr">
+            <a:lvl4pPr lvl="3" algn="ctr" rtl="0">
               <a:lnSpc>
                 <a:spcPct val="100000"/>
               </a:lnSpc>
@@ -3603,7 +3745,7 @@
               <a:buNone/>
               <a:defRPr sz="2800"/>
             </a:lvl4pPr>
-            <a:lvl5pPr lvl="4" rtl="0" algn="ctr">
+            <a:lvl5pPr lvl="4" algn="ctr" rtl="0">
               <a:lnSpc>
                 <a:spcPct val="100000"/>
               </a:lnSpc>
@@ -3617,7 +3759,7 @@
               <a:buNone/>
               <a:defRPr sz="2800"/>
             </a:lvl5pPr>
-            <a:lvl6pPr lvl="5" rtl="0" algn="ctr">
+            <a:lvl6pPr lvl="5" algn="ctr" rtl="0">
               <a:lnSpc>
                 <a:spcPct val="100000"/>
               </a:lnSpc>
@@ -3631,7 +3773,7 @@
               <a:buNone/>
               <a:defRPr sz="2800"/>
             </a:lvl6pPr>
-            <a:lvl7pPr lvl="6" rtl="0" algn="ctr">
+            <a:lvl7pPr lvl="6" algn="ctr" rtl="0">
               <a:lnSpc>
                 <a:spcPct val="100000"/>
               </a:lnSpc>
@@ -3645,7 +3787,7 @@
               <a:buNone/>
               <a:defRPr sz="2800"/>
             </a:lvl7pPr>
-            <a:lvl8pPr lvl="7" rtl="0" algn="ctr">
+            <a:lvl8pPr lvl="7" algn="ctr" rtl="0">
               <a:lnSpc>
                 <a:spcPct val="100000"/>
               </a:lnSpc>
@@ -3659,7 +3801,7 @@
               <a:buNone/>
               <a:defRPr sz="2800"/>
             </a:lvl8pPr>
-            <a:lvl9pPr lvl="8" rtl="0" algn="ctr">
+            <a:lvl9pPr lvl="8" algn="ctr" rtl="0">
               <a:lnSpc>
                 <a:spcPct val="100000"/>
               </a:lnSpc>
@@ -3674,7 +3816,9 @@
               <a:defRPr sz="2800"/>
             </a:lvl9pPr>
           </a:lstStyle>
-          <a:p/>
+          <a:p>
+            <a:endParaRPr/>
+          </a:p>
         </p:txBody>
       </p:sp>
     </p:spTree>
@@ -3686,11 +3830,11 @@
 </file>
 
 <file path=ppt/slideLayouts/slideLayout10.xml><?xml version="1.0" encoding="utf-8"?>
-<p:sldLayout xmlns:a="http://schemas.openxmlformats.org/drawingml/2006/main" xmlns:r="http://schemas.openxmlformats.org/officeDocument/2006/relationships" xmlns:mc="http://schemas.openxmlformats.org/markup-compatibility/2006" xmlns:mv="urn:schemas-microsoft-com:mac:vml" xmlns:p="http://schemas.openxmlformats.org/presentationml/2006/main" xmlns:c="http://schemas.openxmlformats.org/drawingml/2006/chart" xmlns:dgm="http://schemas.openxmlformats.org/drawingml/2006/diagram" xmlns:o="urn:schemas-microsoft-com:office:office" xmlns:v="urn:schemas-microsoft-com:vml" xmlns:pvml="urn:schemas-microsoft-com:office:powerpoint" xmlns:com="http://schemas.openxmlformats.org/drawingml/2006/compatibility" xmlns:p14="http://schemas.microsoft.com/office/powerpoint/2010/main" xmlns:p15="http://schemas.microsoft.com/office/powerpoint/2012/main" xmlns:ahyp="http://schemas.microsoft.com/office/drawing/2018/hyperlinkcolor" matchingName="Big number">
+<p:sldLayout xmlns:a="http://schemas.openxmlformats.org/drawingml/2006/main" xmlns:r="http://schemas.openxmlformats.org/officeDocument/2006/relationships" xmlns:p="http://schemas.openxmlformats.org/presentationml/2006/main" matchingName="Big number">
   <p:cSld name="BIG_NUMBER">
     <p:spTree>
       <p:nvGrpSpPr>
-        <p:cNvPr id="52" name="Shape 52"/>
+        <p:cNvPr id="1" name="Shape 52"/>
         <p:cNvGrpSpPr/>
         <p:nvPr/>
       </p:nvGrpSpPr>
@@ -3705,9 +3849,11 @@
       <p:sp>
         <p:nvSpPr>
           <p:cNvPr id="53" name="Google Shape;53;p11"/>
-          <p:cNvSpPr txBox="1"/>
+          <p:cNvSpPr txBox="1">
+            <a:spLocks noGrp="1"/>
+          </p:cNvSpPr>
           <p:nvPr>
-            <p:ph hasCustomPrompt="1" type="title"/>
+            <p:ph type="title" hasCustomPrompt="1"/>
           </p:nvPr>
         </p:nvSpPr>
         <p:spPr>
@@ -3720,7 +3866,7 @@
           </a:prstGeom>
         </p:spPr>
         <p:txBody>
-          <a:bodyPr anchorCtr="0" anchor="b" bIns="91425" lIns="91425" spcFirstLastPara="1" rIns="91425" wrap="square" tIns="91425">
+          <a:bodyPr spcFirstLastPara="1" wrap="square" lIns="91425" tIns="91425" rIns="91425" bIns="91425" anchor="b" anchorCtr="0">
             <a:normAutofit/>
           </a:bodyPr>
           <a:lstStyle>
@@ -3834,9 +3980,11 @@
       <p:sp>
         <p:nvSpPr>
           <p:cNvPr id="54" name="Google Shape;54;p11"/>
-          <p:cNvSpPr txBox="1"/>
+          <p:cNvSpPr txBox="1">
+            <a:spLocks noGrp="1"/>
+          </p:cNvSpPr>
           <p:nvPr>
-            <p:ph idx="1" type="body"/>
+            <p:ph type="body" idx="1"/>
           </p:nvPr>
         </p:nvSpPr>
         <p:spPr>
@@ -3849,11 +3997,11 @@
           </a:prstGeom>
         </p:spPr>
         <p:txBody>
-          <a:bodyPr anchorCtr="0" anchor="t" bIns="91425" lIns="91425" spcFirstLastPara="1" rIns="91425" wrap="square" tIns="91425">
+          <a:bodyPr spcFirstLastPara="1" wrap="square" lIns="91425" tIns="91425" rIns="91425" bIns="91425" anchor="t" anchorCtr="0">
             <a:normAutofit/>
           </a:bodyPr>
           <a:lstStyle>
-            <a:lvl1pPr indent="-342900" lvl="0" marL="457200" algn="ctr">
+            <a:lvl1pPr marL="457200" lvl="0" indent="-342900" algn="ctr">
               <a:spcBef>
                 <a:spcPts val="0"/>
               </a:spcBef>
@@ -3864,7 +4012,7 @@
               <a:buChar char="●"/>
               <a:defRPr/>
             </a:lvl1pPr>
-            <a:lvl2pPr indent="-317500" lvl="1" marL="914400" algn="ctr">
+            <a:lvl2pPr marL="914400" lvl="1" indent="-317500" algn="ctr">
               <a:spcBef>
                 <a:spcPts val="0"/>
               </a:spcBef>
@@ -3875,7 +4023,7 @@
               <a:buChar char="○"/>
               <a:defRPr/>
             </a:lvl2pPr>
-            <a:lvl3pPr indent="-317500" lvl="2" marL="1371600" algn="ctr">
+            <a:lvl3pPr marL="1371600" lvl="2" indent="-317500" algn="ctr">
               <a:spcBef>
                 <a:spcPts val="0"/>
               </a:spcBef>
@@ -3886,7 +4034,7 @@
               <a:buChar char="■"/>
               <a:defRPr/>
             </a:lvl3pPr>
-            <a:lvl4pPr indent="-317500" lvl="3" marL="1828800" algn="ctr">
+            <a:lvl4pPr marL="1828800" lvl="3" indent="-317500" algn="ctr">
               <a:spcBef>
                 <a:spcPts val="0"/>
               </a:spcBef>
@@ -3897,7 +4045,7 @@
               <a:buChar char="●"/>
               <a:defRPr/>
             </a:lvl4pPr>
-            <a:lvl5pPr indent="-317500" lvl="4" marL="2286000" algn="ctr">
+            <a:lvl5pPr marL="2286000" lvl="4" indent="-317500" algn="ctr">
               <a:spcBef>
                 <a:spcPts val="0"/>
               </a:spcBef>
@@ -3908,7 +4056,7 @@
               <a:buChar char="○"/>
               <a:defRPr/>
             </a:lvl5pPr>
-            <a:lvl6pPr indent="-317500" lvl="5" marL="2743200" algn="ctr">
+            <a:lvl6pPr marL="2743200" lvl="5" indent="-317500" algn="ctr">
               <a:spcBef>
                 <a:spcPts val="0"/>
               </a:spcBef>
@@ -3919,7 +4067,7 @@
               <a:buChar char="■"/>
               <a:defRPr/>
             </a:lvl6pPr>
-            <a:lvl7pPr indent="-317500" lvl="6" marL="3200400" algn="ctr">
+            <a:lvl7pPr marL="3200400" lvl="6" indent="-317500" algn="ctr">
               <a:spcBef>
                 <a:spcPts val="0"/>
               </a:spcBef>
@@ -3930,7 +4078,7 @@
               <a:buChar char="●"/>
               <a:defRPr/>
             </a:lvl7pPr>
-            <a:lvl8pPr indent="-317500" lvl="7" marL="3657600" algn="ctr">
+            <a:lvl8pPr marL="3657600" lvl="7" indent="-317500" algn="ctr">
               <a:spcBef>
                 <a:spcPts val="0"/>
               </a:spcBef>
@@ -3941,7 +4089,7 @@
               <a:buChar char="○"/>
               <a:defRPr/>
             </a:lvl8pPr>
-            <a:lvl9pPr indent="-317500" lvl="8" marL="4114800" algn="ctr">
+            <a:lvl9pPr marL="4114800" lvl="8" indent="-317500" algn="ctr">
               <a:spcBef>
                 <a:spcPts val="0"/>
               </a:spcBef>
@@ -3953,15 +4101,19 @@
               <a:defRPr/>
             </a:lvl9pPr>
           </a:lstStyle>
-          <a:p/>
+          <a:p>
+            <a:endParaRPr/>
+          </a:p>
         </p:txBody>
       </p:sp>
       <p:sp>
         <p:nvSpPr>
           <p:cNvPr id="55" name="Google Shape;55;p11"/>
-          <p:cNvSpPr txBox="1"/>
+          <p:cNvSpPr txBox="1">
+            <a:spLocks noGrp="1"/>
+          </p:cNvSpPr>
           <p:nvPr>
-            <p:ph idx="12" type="sldNum"/>
+            <p:ph type="sldNum" idx="12"/>
           </p:nvPr>
         </p:nvSpPr>
         <p:spPr>
@@ -3974,7 +4126,7 @@
           </a:prstGeom>
         </p:spPr>
         <p:txBody>
-          <a:bodyPr anchorCtr="0" anchor="ctr" bIns="91425" lIns="91425" spcFirstLastPara="1" rIns="91425" wrap="square" tIns="91425">
+          <a:bodyPr spcFirstLastPara="1" wrap="square" lIns="91425" tIns="91425" rIns="91425" bIns="91425" anchor="ctr" anchorCtr="0">
             <a:normAutofit/>
           </a:bodyPr>
           <a:lstStyle>
@@ -4016,7 +4168,7 @@
             </a:lvl9pPr>
           </a:lstStyle>
           <a:p>
-            <a:pPr indent="0" lvl="0" marL="0" rtl="0" algn="r">
+            <a:pPr marL="0" lvl="0" indent="0" algn="r" rtl="0">
               <a:spcBef>
                 <a:spcPts val="0"/>
               </a:spcBef>
@@ -4042,11 +4194,11 @@
 </file>
 
 <file path=ppt/slideLayouts/slideLayout11.xml><?xml version="1.0" encoding="utf-8"?>
-<p:sldLayout xmlns:a="http://schemas.openxmlformats.org/drawingml/2006/main" xmlns:r="http://schemas.openxmlformats.org/officeDocument/2006/relationships" xmlns:mc="http://schemas.openxmlformats.org/markup-compatibility/2006" xmlns:mv="urn:schemas-microsoft-com:mac:vml" xmlns:p="http://schemas.openxmlformats.org/presentationml/2006/main" xmlns:c="http://schemas.openxmlformats.org/drawingml/2006/chart" xmlns:dgm="http://schemas.openxmlformats.org/drawingml/2006/diagram" xmlns:o="urn:schemas-microsoft-com:office:office" xmlns:v="urn:schemas-microsoft-com:vml" xmlns:pvml="urn:schemas-microsoft-com:office:powerpoint" xmlns:com="http://schemas.openxmlformats.org/drawingml/2006/compatibility" xmlns:p14="http://schemas.microsoft.com/office/powerpoint/2010/main" xmlns:p15="http://schemas.microsoft.com/office/powerpoint/2012/main" xmlns:ahyp="http://schemas.microsoft.com/office/drawing/2018/hyperlinkcolor" matchingName="Blank" type="blank">
+<p:sldLayout xmlns:a="http://schemas.openxmlformats.org/drawingml/2006/main" xmlns:r="http://schemas.openxmlformats.org/officeDocument/2006/relationships" xmlns:p="http://schemas.openxmlformats.org/presentationml/2006/main" matchingName="Blank" type="blank">
   <p:cSld name="BLANK">
     <p:spTree>
       <p:nvGrpSpPr>
-        <p:cNvPr id="56" name="Shape 56"/>
+        <p:cNvPr id="1" name="Shape 56"/>
         <p:cNvGrpSpPr/>
         <p:nvPr/>
       </p:nvGrpSpPr>
@@ -4061,9 +4213,11 @@
       <p:sp>
         <p:nvSpPr>
           <p:cNvPr id="57" name="Google Shape;57;p12"/>
-          <p:cNvSpPr txBox="1"/>
+          <p:cNvSpPr txBox="1">
+            <a:spLocks noGrp="1"/>
+          </p:cNvSpPr>
           <p:nvPr>
-            <p:ph idx="12" type="sldNum"/>
+            <p:ph type="sldNum" idx="12"/>
           </p:nvPr>
         </p:nvSpPr>
         <p:spPr>
@@ -4076,7 +4230,7 @@
           </a:prstGeom>
         </p:spPr>
         <p:txBody>
-          <a:bodyPr anchorCtr="0" anchor="ctr" bIns="91425" lIns="91425" spcFirstLastPara="1" rIns="91425" wrap="square" tIns="91425">
+          <a:bodyPr spcFirstLastPara="1" wrap="square" lIns="91425" tIns="91425" rIns="91425" bIns="91425" anchor="ctr" anchorCtr="0">
             <a:normAutofit/>
           </a:bodyPr>
           <a:lstStyle>
@@ -4118,7 +4272,7 @@
             </a:lvl9pPr>
           </a:lstStyle>
           <a:p>
-            <a:pPr indent="0" lvl="0" marL="0" rtl="0" algn="r">
+            <a:pPr marL="0" lvl="0" indent="0" algn="r" rtl="0">
               <a:spcBef>
                 <a:spcPts val="0"/>
               </a:spcBef>
@@ -4144,18 +4298,19 @@
 </file>
 
 <file path=ppt/slideLayouts/slideLayout2.xml><?xml version="1.0" encoding="utf-8"?>
-<p:sldLayout xmlns:a="http://schemas.openxmlformats.org/drawingml/2006/main" xmlns:r="http://schemas.openxmlformats.org/officeDocument/2006/relationships" xmlns:mc="http://schemas.openxmlformats.org/markup-compatibility/2006" xmlns:mv="urn:schemas-microsoft-com:mac:vml" xmlns:p="http://schemas.openxmlformats.org/presentationml/2006/main" xmlns:c="http://schemas.openxmlformats.org/drawingml/2006/chart" xmlns:dgm="http://schemas.openxmlformats.org/drawingml/2006/diagram" xmlns:o="urn:schemas-microsoft-com:office:office" xmlns:v="urn:schemas-microsoft-com:vml" xmlns:pvml="urn:schemas-microsoft-com:office:powerpoint" xmlns:com="http://schemas.openxmlformats.org/drawingml/2006/compatibility" xmlns:p14="http://schemas.microsoft.com/office/powerpoint/2010/main" xmlns:p15="http://schemas.microsoft.com/office/powerpoint/2012/main" xmlns:ahyp="http://schemas.microsoft.com/office/drawing/2018/hyperlinkcolor" matchingName="Section header" type="secHead">
+<p:sldLayout xmlns:a="http://schemas.openxmlformats.org/drawingml/2006/main" xmlns:r="http://schemas.openxmlformats.org/officeDocument/2006/relationships" xmlns:p="http://schemas.openxmlformats.org/presentationml/2006/main" matchingName="Section header" type="secHead">
   <p:cSld name="SECTION_HEADER">
     <p:bg>
       <p:bgPr>
         <a:solidFill>
           <a:schemeClr val="lt1"/>
         </a:solidFill>
+        <a:effectLst/>
       </p:bgPr>
     </p:bg>
     <p:spTree>
       <p:nvGrpSpPr>
-        <p:cNvPr id="18" name="Shape 18"/>
+        <p:cNvPr id="1" name="Shape 18"/>
         <p:cNvGrpSpPr/>
         <p:nvPr/>
       </p:nvGrpSpPr>
@@ -4177,7 +4332,7 @@
           <a:blip r:embed="rId2">
             <a:alphaModFix/>
           </a:blip>
-          <a:srcRect b="22311" l="0" r="0" t="0"/>
+          <a:srcRect b="22311"/>
           <a:stretch/>
         </p:blipFill>
         <p:spPr>
@@ -4197,7 +4352,9 @@
       <p:sp>
         <p:nvSpPr>
           <p:cNvPr id="20" name="Google Shape;20;p3"/>
-          <p:cNvSpPr txBox="1"/>
+          <p:cNvSpPr txBox="1">
+            <a:spLocks noGrp="1"/>
+          </p:cNvSpPr>
           <p:nvPr>
             <p:ph type="title"/>
           </p:nvPr>
@@ -4212,7 +4369,7 @@
           </a:prstGeom>
         </p:spPr>
         <p:txBody>
-          <a:bodyPr anchorCtr="0" anchor="ctr" bIns="91425" lIns="91425" spcFirstLastPara="1" rIns="91425" wrap="square" tIns="91425">
+          <a:bodyPr spcFirstLastPara="1" wrap="square" lIns="91425" tIns="91425" rIns="91425" bIns="91425" anchor="ctr" anchorCtr="0">
             <a:normAutofit/>
           </a:bodyPr>
           <a:lstStyle>
@@ -4228,7 +4385,7 @@
               </a:buClr>
               <a:buSzPts val="3600"/>
               <a:buNone/>
-              <a:defRPr b="1" sz="3600">
+              <a:defRPr sz="3600" b="1">
                 <a:solidFill>
                   <a:schemeClr val="lt1"/>
                 </a:solidFill>
@@ -4323,15 +4480,19 @@
               <a:defRPr sz="3600"/>
             </a:lvl9pPr>
           </a:lstStyle>
-          <a:p/>
+          <a:p>
+            <a:endParaRPr/>
+          </a:p>
         </p:txBody>
       </p:sp>
       <p:sp>
         <p:nvSpPr>
           <p:cNvPr id="21" name="Google Shape;21;p3"/>
-          <p:cNvSpPr txBox="1"/>
+          <p:cNvSpPr txBox="1">
+            <a:spLocks noGrp="1"/>
+          </p:cNvSpPr>
           <p:nvPr>
-            <p:ph idx="12" type="sldNum"/>
+            <p:ph type="sldNum" idx="12"/>
           </p:nvPr>
         </p:nvSpPr>
         <p:spPr>
@@ -4344,7 +4505,7 @@
           </a:prstGeom>
         </p:spPr>
         <p:txBody>
-          <a:bodyPr anchorCtr="0" anchor="ctr" bIns="91425" lIns="91425" spcFirstLastPara="1" rIns="91425" wrap="square" tIns="91425">
+          <a:bodyPr spcFirstLastPara="1" wrap="square" lIns="91425" tIns="91425" rIns="91425" bIns="91425" anchor="ctr" anchorCtr="0">
             <a:normAutofit/>
           </a:bodyPr>
           <a:lstStyle>
@@ -4386,7 +4547,7 @@
             </a:lvl9pPr>
           </a:lstStyle>
           <a:p>
-            <a:pPr indent="0" lvl="0" marL="0" rtl="0" algn="r">
+            <a:pPr marL="0" lvl="0" indent="0" algn="r" rtl="0">
               <a:spcBef>
                 <a:spcPts val="0"/>
               </a:spcBef>
@@ -4468,11 +4629,11 @@
 </file>
 
 <file path=ppt/slideLayouts/slideLayout3.xml><?xml version="1.0" encoding="utf-8"?>
-<p:sldLayout xmlns:a="http://schemas.openxmlformats.org/drawingml/2006/main" xmlns:r="http://schemas.openxmlformats.org/officeDocument/2006/relationships" xmlns:mc="http://schemas.openxmlformats.org/markup-compatibility/2006" xmlns:mv="urn:schemas-microsoft-com:mac:vml" xmlns:p="http://schemas.openxmlformats.org/presentationml/2006/main" xmlns:c="http://schemas.openxmlformats.org/drawingml/2006/chart" xmlns:dgm="http://schemas.openxmlformats.org/drawingml/2006/diagram" xmlns:o="urn:schemas-microsoft-com:office:office" xmlns:v="urn:schemas-microsoft-com:vml" xmlns:pvml="urn:schemas-microsoft-com:office:powerpoint" xmlns:com="http://schemas.openxmlformats.org/drawingml/2006/compatibility" xmlns:p14="http://schemas.microsoft.com/office/powerpoint/2010/main" xmlns:p15="http://schemas.microsoft.com/office/powerpoint/2012/main" xmlns:ahyp="http://schemas.microsoft.com/office/drawing/2018/hyperlinkcolor" matchingName="Title and body" type="tx">
+<p:sldLayout xmlns:a="http://schemas.openxmlformats.org/drawingml/2006/main" xmlns:r="http://schemas.openxmlformats.org/officeDocument/2006/relationships" xmlns:p="http://schemas.openxmlformats.org/presentationml/2006/main" matchingName="Title and body" type="tx">
   <p:cSld name="TITLE_AND_BODY">
     <p:spTree>
       <p:nvGrpSpPr>
-        <p:cNvPr id="24" name="Shape 24"/>
+        <p:cNvPr id="1" name="Shape 24"/>
         <p:cNvGrpSpPr/>
         <p:nvPr/>
       </p:nvGrpSpPr>
@@ -4487,7 +4648,9 @@
       <p:sp>
         <p:nvSpPr>
           <p:cNvPr id="25" name="Google Shape;25;p4"/>
-          <p:cNvSpPr txBox="1"/>
+          <p:cNvSpPr txBox="1">
+            <a:spLocks noGrp="1"/>
+          </p:cNvSpPr>
           <p:nvPr>
             <p:ph type="title"/>
           </p:nvPr>
@@ -4502,7 +4665,7 @@
           </a:prstGeom>
         </p:spPr>
         <p:txBody>
-          <a:bodyPr anchorCtr="0" anchor="t" bIns="91425" lIns="91425" spcFirstLastPara="1" rIns="91425" wrap="square" tIns="91425">
+          <a:bodyPr spcFirstLastPara="1" wrap="square" lIns="91425" tIns="91425" rIns="91425" bIns="91425" anchor="t" anchorCtr="0">
             <a:normAutofit/>
           </a:bodyPr>
           <a:lstStyle>
@@ -4606,15 +4769,19 @@
               <a:defRPr/>
             </a:lvl9pPr>
           </a:lstStyle>
-          <a:p/>
+          <a:p>
+            <a:endParaRPr/>
+          </a:p>
         </p:txBody>
       </p:sp>
       <p:sp>
         <p:nvSpPr>
           <p:cNvPr id="26" name="Google Shape;26;p4"/>
-          <p:cNvSpPr txBox="1"/>
+          <p:cNvSpPr txBox="1">
+            <a:spLocks noGrp="1"/>
+          </p:cNvSpPr>
           <p:nvPr>
-            <p:ph idx="1" type="body"/>
+            <p:ph type="body" idx="1"/>
           </p:nvPr>
         </p:nvSpPr>
         <p:spPr>
@@ -4627,11 +4794,11 @@
           </a:prstGeom>
         </p:spPr>
         <p:txBody>
-          <a:bodyPr anchorCtr="0" anchor="t" bIns="91425" lIns="91425" spcFirstLastPara="1" rIns="91425" wrap="square" tIns="91425">
+          <a:bodyPr spcFirstLastPara="1" wrap="square" lIns="91425" tIns="91425" rIns="91425" bIns="91425" anchor="t" anchorCtr="0">
             <a:normAutofit/>
           </a:bodyPr>
           <a:lstStyle>
-            <a:lvl1pPr indent="-342900" lvl="0" marL="457200">
+            <a:lvl1pPr marL="457200" lvl="0" indent="-342900">
               <a:spcBef>
                 <a:spcPts val="0"/>
               </a:spcBef>
@@ -4642,7 +4809,7 @@
               <a:buChar char="●"/>
               <a:defRPr/>
             </a:lvl1pPr>
-            <a:lvl2pPr indent="-317500" lvl="1" marL="914400">
+            <a:lvl2pPr marL="914400" lvl="1" indent="-317500">
               <a:spcBef>
                 <a:spcPts val="0"/>
               </a:spcBef>
@@ -4653,7 +4820,7 @@
               <a:buChar char="○"/>
               <a:defRPr/>
             </a:lvl2pPr>
-            <a:lvl3pPr indent="-317500" lvl="2" marL="1371600">
+            <a:lvl3pPr marL="1371600" lvl="2" indent="-317500">
               <a:spcBef>
                 <a:spcPts val="0"/>
               </a:spcBef>
@@ -4664,7 +4831,7 @@
               <a:buChar char="■"/>
               <a:defRPr/>
             </a:lvl3pPr>
-            <a:lvl4pPr indent="-317500" lvl="3" marL="1828800">
+            <a:lvl4pPr marL="1828800" lvl="3" indent="-317500">
               <a:spcBef>
                 <a:spcPts val="0"/>
               </a:spcBef>
@@ -4675,7 +4842,7 @@
               <a:buChar char="●"/>
               <a:defRPr/>
             </a:lvl4pPr>
-            <a:lvl5pPr indent="-317500" lvl="4" marL="2286000">
+            <a:lvl5pPr marL="2286000" lvl="4" indent="-317500">
               <a:spcBef>
                 <a:spcPts val="0"/>
               </a:spcBef>
@@ -4686,7 +4853,7 @@
               <a:buChar char="○"/>
               <a:defRPr/>
             </a:lvl5pPr>
-            <a:lvl6pPr indent="-317500" lvl="5" marL="2743200">
+            <a:lvl6pPr marL="2743200" lvl="5" indent="-317500">
               <a:spcBef>
                 <a:spcPts val="0"/>
               </a:spcBef>
@@ -4697,7 +4864,7 @@
               <a:buChar char="■"/>
               <a:defRPr/>
             </a:lvl6pPr>
-            <a:lvl7pPr indent="-317500" lvl="6" marL="3200400">
+            <a:lvl7pPr marL="3200400" lvl="6" indent="-317500">
               <a:spcBef>
                 <a:spcPts val="0"/>
               </a:spcBef>
@@ -4708,7 +4875,7 @@
               <a:buChar char="●"/>
               <a:defRPr/>
             </a:lvl7pPr>
-            <a:lvl8pPr indent="-317500" lvl="7" marL="3657600">
+            <a:lvl8pPr marL="3657600" lvl="7" indent="-317500">
               <a:spcBef>
                 <a:spcPts val="0"/>
               </a:spcBef>
@@ -4719,7 +4886,7 @@
               <a:buChar char="○"/>
               <a:defRPr/>
             </a:lvl8pPr>
-            <a:lvl9pPr indent="-317500" lvl="8" marL="4114800">
+            <a:lvl9pPr marL="4114800" lvl="8" indent="-317500">
               <a:spcBef>
                 <a:spcPts val="0"/>
               </a:spcBef>
@@ -4731,15 +4898,19 @@
               <a:defRPr/>
             </a:lvl9pPr>
           </a:lstStyle>
-          <a:p/>
+          <a:p>
+            <a:endParaRPr/>
+          </a:p>
         </p:txBody>
       </p:sp>
       <p:sp>
         <p:nvSpPr>
           <p:cNvPr id="27" name="Google Shape;27;p4"/>
-          <p:cNvSpPr txBox="1"/>
+          <p:cNvSpPr txBox="1">
+            <a:spLocks noGrp="1"/>
+          </p:cNvSpPr>
           <p:nvPr>
-            <p:ph idx="12" type="sldNum"/>
+            <p:ph type="sldNum" idx="12"/>
           </p:nvPr>
         </p:nvSpPr>
         <p:spPr>
@@ -4752,7 +4923,7 @@
           </a:prstGeom>
         </p:spPr>
         <p:txBody>
-          <a:bodyPr anchorCtr="0" anchor="ctr" bIns="91425" lIns="91425" spcFirstLastPara="1" rIns="91425" wrap="square" tIns="91425">
+          <a:bodyPr spcFirstLastPara="1" wrap="square" lIns="91425" tIns="91425" rIns="91425" bIns="91425" anchor="ctr" anchorCtr="0">
             <a:normAutofit/>
           </a:bodyPr>
           <a:lstStyle>
@@ -4794,7 +4965,7 @@
             </a:lvl9pPr>
           </a:lstStyle>
           <a:p>
-            <a:pPr indent="0" lvl="0" marL="0" rtl="0" algn="r">
+            <a:pPr marL="0" lvl="0" indent="0" algn="r" rtl="0">
               <a:spcBef>
                 <a:spcPts val="0"/>
               </a:spcBef>
@@ -4820,11 +4991,11 @@
 </file>
 
 <file path=ppt/slideLayouts/slideLayout4.xml><?xml version="1.0" encoding="utf-8"?>
-<p:sldLayout xmlns:a="http://schemas.openxmlformats.org/drawingml/2006/main" xmlns:r="http://schemas.openxmlformats.org/officeDocument/2006/relationships" xmlns:mc="http://schemas.openxmlformats.org/markup-compatibility/2006" xmlns:mv="urn:schemas-microsoft-com:mac:vml" xmlns:p="http://schemas.openxmlformats.org/presentationml/2006/main" xmlns:c="http://schemas.openxmlformats.org/drawingml/2006/chart" xmlns:dgm="http://schemas.openxmlformats.org/drawingml/2006/diagram" xmlns:o="urn:schemas-microsoft-com:office:office" xmlns:v="urn:schemas-microsoft-com:vml" xmlns:pvml="urn:schemas-microsoft-com:office:powerpoint" xmlns:com="http://schemas.openxmlformats.org/drawingml/2006/compatibility" xmlns:p14="http://schemas.microsoft.com/office/powerpoint/2010/main" xmlns:p15="http://schemas.microsoft.com/office/powerpoint/2012/main" xmlns:ahyp="http://schemas.microsoft.com/office/drawing/2018/hyperlinkcolor" matchingName="Title and two columns" type="twoColTx">
+<p:sldLayout xmlns:a="http://schemas.openxmlformats.org/drawingml/2006/main" xmlns:r="http://schemas.openxmlformats.org/officeDocument/2006/relationships" xmlns:p="http://schemas.openxmlformats.org/presentationml/2006/main" matchingName="Title and two columns" type="twoColTx">
   <p:cSld name="TITLE_AND_TWO_COLUMNS">
     <p:spTree>
       <p:nvGrpSpPr>
-        <p:cNvPr id="28" name="Shape 28"/>
+        <p:cNvPr id="1" name="Shape 28"/>
         <p:cNvGrpSpPr/>
         <p:nvPr/>
       </p:nvGrpSpPr>
@@ -4839,7 +5010,9 @@
       <p:sp>
         <p:nvSpPr>
           <p:cNvPr id="29" name="Google Shape;29;p5"/>
-          <p:cNvSpPr txBox="1"/>
+          <p:cNvSpPr txBox="1">
+            <a:spLocks noGrp="1"/>
+          </p:cNvSpPr>
           <p:nvPr>
             <p:ph type="title"/>
           </p:nvPr>
@@ -4854,7 +5027,7 @@
           </a:prstGeom>
         </p:spPr>
         <p:txBody>
-          <a:bodyPr anchorCtr="0" anchor="t" bIns="91425" lIns="91425" spcFirstLastPara="1" rIns="91425" wrap="square" tIns="91425">
+          <a:bodyPr spcFirstLastPara="1" wrap="square" lIns="91425" tIns="91425" rIns="91425" bIns="91425" anchor="t" anchorCtr="0">
             <a:normAutofit/>
           </a:bodyPr>
           <a:lstStyle>
@@ -4958,15 +5131,19 @@
               <a:defRPr/>
             </a:lvl9pPr>
           </a:lstStyle>
-          <a:p/>
+          <a:p>
+            <a:endParaRPr/>
+          </a:p>
         </p:txBody>
       </p:sp>
       <p:sp>
         <p:nvSpPr>
           <p:cNvPr id="30" name="Google Shape;30;p5"/>
-          <p:cNvSpPr txBox="1"/>
+          <p:cNvSpPr txBox="1">
+            <a:spLocks noGrp="1"/>
+          </p:cNvSpPr>
           <p:nvPr>
-            <p:ph idx="1" type="body"/>
+            <p:ph type="body" idx="1"/>
           </p:nvPr>
         </p:nvSpPr>
         <p:spPr>
@@ -4979,11 +5156,11 @@
           </a:prstGeom>
         </p:spPr>
         <p:txBody>
-          <a:bodyPr anchorCtr="0" anchor="t" bIns="91425" lIns="91425" spcFirstLastPara="1" rIns="91425" wrap="square" tIns="91425">
+          <a:bodyPr spcFirstLastPara="1" wrap="square" lIns="91425" tIns="91425" rIns="91425" bIns="91425" anchor="t" anchorCtr="0">
             <a:normAutofit/>
           </a:bodyPr>
           <a:lstStyle>
-            <a:lvl1pPr indent="-317500" lvl="0" marL="457200">
+            <a:lvl1pPr marL="457200" lvl="0" indent="-317500">
               <a:spcBef>
                 <a:spcPts val="0"/>
               </a:spcBef>
@@ -4994,7 +5171,7 @@
               <a:buChar char="●"/>
               <a:defRPr sz="1400"/>
             </a:lvl1pPr>
-            <a:lvl2pPr indent="-304800" lvl="1" marL="914400">
+            <a:lvl2pPr marL="914400" lvl="1" indent="-304800">
               <a:spcBef>
                 <a:spcPts val="0"/>
               </a:spcBef>
@@ -5005,7 +5182,7 @@
               <a:buChar char="○"/>
               <a:defRPr sz="1200"/>
             </a:lvl2pPr>
-            <a:lvl3pPr indent="-304800" lvl="2" marL="1371600">
+            <a:lvl3pPr marL="1371600" lvl="2" indent="-304800">
               <a:spcBef>
                 <a:spcPts val="0"/>
               </a:spcBef>
@@ -5016,7 +5193,7 @@
               <a:buChar char="■"/>
               <a:defRPr sz="1200"/>
             </a:lvl3pPr>
-            <a:lvl4pPr indent="-304800" lvl="3" marL="1828800">
+            <a:lvl4pPr marL="1828800" lvl="3" indent="-304800">
               <a:spcBef>
                 <a:spcPts val="0"/>
               </a:spcBef>
@@ -5027,7 +5204,7 @@
               <a:buChar char="●"/>
               <a:defRPr sz="1200"/>
             </a:lvl4pPr>
-            <a:lvl5pPr indent="-304800" lvl="4" marL="2286000">
+            <a:lvl5pPr marL="2286000" lvl="4" indent="-304800">
               <a:spcBef>
                 <a:spcPts val="0"/>
               </a:spcBef>
@@ -5038,7 +5215,7 @@
               <a:buChar char="○"/>
               <a:defRPr sz="1200"/>
             </a:lvl5pPr>
-            <a:lvl6pPr indent="-304800" lvl="5" marL="2743200">
+            <a:lvl6pPr marL="2743200" lvl="5" indent="-304800">
               <a:spcBef>
                 <a:spcPts val="0"/>
               </a:spcBef>
@@ -5049,7 +5226,7 @@
               <a:buChar char="■"/>
               <a:defRPr sz="1200"/>
             </a:lvl6pPr>
-            <a:lvl7pPr indent="-304800" lvl="6" marL="3200400">
+            <a:lvl7pPr marL="3200400" lvl="6" indent="-304800">
               <a:spcBef>
                 <a:spcPts val="0"/>
               </a:spcBef>
@@ -5060,7 +5237,7 @@
               <a:buChar char="●"/>
               <a:defRPr sz="1200"/>
             </a:lvl7pPr>
-            <a:lvl8pPr indent="-304800" lvl="7" marL="3657600">
+            <a:lvl8pPr marL="3657600" lvl="7" indent="-304800">
               <a:spcBef>
                 <a:spcPts val="0"/>
               </a:spcBef>
@@ -5071,7 +5248,7 @@
               <a:buChar char="○"/>
               <a:defRPr sz="1200"/>
             </a:lvl8pPr>
-            <a:lvl9pPr indent="-304800" lvl="8" marL="4114800">
+            <a:lvl9pPr marL="4114800" lvl="8" indent="-304800">
               <a:spcBef>
                 <a:spcPts val="0"/>
               </a:spcBef>
@@ -5083,15 +5260,19 @@
               <a:defRPr sz="1200"/>
             </a:lvl9pPr>
           </a:lstStyle>
-          <a:p/>
+          <a:p>
+            <a:endParaRPr/>
+          </a:p>
         </p:txBody>
       </p:sp>
       <p:sp>
         <p:nvSpPr>
           <p:cNvPr id="31" name="Google Shape;31;p5"/>
-          <p:cNvSpPr txBox="1"/>
+          <p:cNvSpPr txBox="1">
+            <a:spLocks noGrp="1"/>
+          </p:cNvSpPr>
           <p:nvPr>
-            <p:ph idx="2" type="body"/>
+            <p:ph type="body" idx="2"/>
           </p:nvPr>
         </p:nvSpPr>
         <p:spPr>
@@ -5104,11 +5285,11 @@
           </a:prstGeom>
         </p:spPr>
         <p:txBody>
-          <a:bodyPr anchorCtr="0" anchor="t" bIns="91425" lIns="91425" spcFirstLastPara="1" rIns="91425" wrap="square" tIns="91425">
+          <a:bodyPr spcFirstLastPara="1" wrap="square" lIns="91425" tIns="91425" rIns="91425" bIns="91425" anchor="t" anchorCtr="0">
             <a:normAutofit/>
           </a:bodyPr>
           <a:lstStyle>
-            <a:lvl1pPr indent="-317500" lvl="0" marL="457200">
+            <a:lvl1pPr marL="457200" lvl="0" indent="-317500">
               <a:spcBef>
                 <a:spcPts val="0"/>
               </a:spcBef>
@@ -5119,7 +5300,7 @@
               <a:buChar char="●"/>
               <a:defRPr sz="1400"/>
             </a:lvl1pPr>
-            <a:lvl2pPr indent="-304800" lvl="1" marL="914400">
+            <a:lvl2pPr marL="914400" lvl="1" indent="-304800">
               <a:spcBef>
                 <a:spcPts val="0"/>
               </a:spcBef>
@@ -5130,7 +5311,7 @@
               <a:buChar char="○"/>
               <a:defRPr sz="1200"/>
             </a:lvl2pPr>
-            <a:lvl3pPr indent="-304800" lvl="2" marL="1371600">
+            <a:lvl3pPr marL="1371600" lvl="2" indent="-304800">
               <a:spcBef>
                 <a:spcPts val="0"/>
               </a:spcBef>
@@ -5141,7 +5322,7 @@
               <a:buChar char="■"/>
               <a:defRPr sz="1200"/>
             </a:lvl3pPr>
-            <a:lvl4pPr indent="-304800" lvl="3" marL="1828800">
+            <a:lvl4pPr marL="1828800" lvl="3" indent="-304800">
               <a:spcBef>
                 <a:spcPts val="0"/>
               </a:spcBef>
@@ -5152,7 +5333,7 @@
               <a:buChar char="●"/>
               <a:defRPr sz="1200"/>
             </a:lvl4pPr>
-            <a:lvl5pPr indent="-304800" lvl="4" marL="2286000">
+            <a:lvl5pPr marL="2286000" lvl="4" indent="-304800">
               <a:spcBef>
                 <a:spcPts val="0"/>
               </a:spcBef>
@@ -5163,7 +5344,7 @@
               <a:buChar char="○"/>
               <a:defRPr sz="1200"/>
             </a:lvl5pPr>
-            <a:lvl6pPr indent="-304800" lvl="5" marL="2743200">
+            <a:lvl6pPr marL="2743200" lvl="5" indent="-304800">
               <a:spcBef>
                 <a:spcPts val="0"/>
               </a:spcBef>
@@ -5174,7 +5355,7 @@
               <a:buChar char="■"/>
               <a:defRPr sz="1200"/>
             </a:lvl6pPr>
-            <a:lvl7pPr indent="-304800" lvl="6" marL="3200400">
+            <a:lvl7pPr marL="3200400" lvl="6" indent="-304800">
               <a:spcBef>
                 <a:spcPts val="0"/>
               </a:spcBef>
@@ -5185,7 +5366,7 @@
               <a:buChar char="●"/>
               <a:defRPr sz="1200"/>
             </a:lvl7pPr>
-            <a:lvl8pPr indent="-304800" lvl="7" marL="3657600">
+            <a:lvl8pPr marL="3657600" lvl="7" indent="-304800">
               <a:spcBef>
                 <a:spcPts val="0"/>
               </a:spcBef>
@@ -5196,7 +5377,7 @@
               <a:buChar char="○"/>
               <a:defRPr sz="1200"/>
             </a:lvl8pPr>
-            <a:lvl9pPr indent="-304800" lvl="8" marL="4114800">
+            <a:lvl9pPr marL="4114800" lvl="8" indent="-304800">
               <a:spcBef>
                 <a:spcPts val="0"/>
               </a:spcBef>
@@ -5208,15 +5389,19 @@
               <a:defRPr sz="1200"/>
             </a:lvl9pPr>
           </a:lstStyle>
-          <a:p/>
+          <a:p>
+            <a:endParaRPr/>
+          </a:p>
         </p:txBody>
       </p:sp>
       <p:sp>
         <p:nvSpPr>
           <p:cNvPr id="32" name="Google Shape;32;p5"/>
-          <p:cNvSpPr txBox="1"/>
+          <p:cNvSpPr txBox="1">
+            <a:spLocks noGrp="1"/>
+          </p:cNvSpPr>
           <p:nvPr>
-            <p:ph idx="12" type="sldNum"/>
+            <p:ph type="sldNum" idx="12"/>
           </p:nvPr>
         </p:nvSpPr>
         <p:spPr>
@@ -5229,7 +5414,7 @@
           </a:prstGeom>
         </p:spPr>
         <p:txBody>
-          <a:bodyPr anchorCtr="0" anchor="ctr" bIns="91425" lIns="91425" spcFirstLastPara="1" rIns="91425" wrap="square" tIns="91425">
+          <a:bodyPr spcFirstLastPara="1" wrap="square" lIns="91425" tIns="91425" rIns="91425" bIns="91425" anchor="ctr" anchorCtr="0">
             <a:normAutofit/>
           </a:bodyPr>
           <a:lstStyle>
@@ -5271,7 +5456,7 @@
             </a:lvl9pPr>
           </a:lstStyle>
           <a:p>
-            <a:pPr indent="0" lvl="0" marL="0" rtl="0" algn="r">
+            <a:pPr marL="0" lvl="0" indent="0" algn="r" rtl="0">
               <a:spcBef>
                 <a:spcPts val="0"/>
               </a:spcBef>
@@ -5297,11 +5482,11 @@
 </file>
 
 <file path=ppt/slideLayouts/slideLayout5.xml><?xml version="1.0" encoding="utf-8"?>
-<p:sldLayout xmlns:a="http://schemas.openxmlformats.org/drawingml/2006/main" xmlns:r="http://schemas.openxmlformats.org/officeDocument/2006/relationships" xmlns:mc="http://schemas.openxmlformats.org/markup-compatibility/2006" xmlns:mv="urn:schemas-microsoft-com:mac:vml" xmlns:p="http://schemas.openxmlformats.org/presentationml/2006/main" xmlns:c="http://schemas.openxmlformats.org/drawingml/2006/chart" xmlns:dgm="http://schemas.openxmlformats.org/drawingml/2006/diagram" xmlns:o="urn:schemas-microsoft-com:office:office" xmlns:v="urn:schemas-microsoft-com:vml" xmlns:pvml="urn:schemas-microsoft-com:office:powerpoint" xmlns:com="http://schemas.openxmlformats.org/drawingml/2006/compatibility" xmlns:p14="http://schemas.microsoft.com/office/powerpoint/2010/main" xmlns:p15="http://schemas.microsoft.com/office/powerpoint/2012/main" xmlns:ahyp="http://schemas.microsoft.com/office/drawing/2018/hyperlinkcolor" matchingName="Title only" type="titleOnly">
+<p:sldLayout xmlns:a="http://schemas.openxmlformats.org/drawingml/2006/main" xmlns:r="http://schemas.openxmlformats.org/officeDocument/2006/relationships" xmlns:p="http://schemas.openxmlformats.org/presentationml/2006/main" matchingName="Title only" type="titleOnly">
   <p:cSld name="TITLE_ONLY">
     <p:spTree>
       <p:nvGrpSpPr>
-        <p:cNvPr id="33" name="Shape 33"/>
+        <p:cNvPr id="1" name="Shape 33"/>
         <p:cNvGrpSpPr/>
         <p:nvPr/>
       </p:nvGrpSpPr>
@@ -5316,7 +5501,9 @@
       <p:sp>
         <p:nvSpPr>
           <p:cNvPr id="34" name="Google Shape;34;p6"/>
-          <p:cNvSpPr txBox="1"/>
+          <p:cNvSpPr txBox="1">
+            <a:spLocks noGrp="1"/>
+          </p:cNvSpPr>
           <p:nvPr>
             <p:ph type="title"/>
           </p:nvPr>
@@ -5331,7 +5518,7 @@
           </a:prstGeom>
         </p:spPr>
         <p:txBody>
-          <a:bodyPr anchorCtr="0" anchor="t" bIns="91425" lIns="91425" spcFirstLastPara="1" rIns="91425" wrap="square" tIns="91425">
+          <a:bodyPr spcFirstLastPara="1" wrap="square" lIns="91425" tIns="91425" rIns="91425" bIns="91425" anchor="t" anchorCtr="0">
             <a:normAutofit/>
           </a:bodyPr>
           <a:lstStyle>
@@ -5435,15 +5622,19 @@
               <a:defRPr/>
             </a:lvl9pPr>
           </a:lstStyle>
-          <a:p/>
+          <a:p>
+            <a:endParaRPr/>
+          </a:p>
         </p:txBody>
       </p:sp>
       <p:sp>
         <p:nvSpPr>
           <p:cNvPr id="35" name="Google Shape;35;p6"/>
-          <p:cNvSpPr txBox="1"/>
+          <p:cNvSpPr txBox="1">
+            <a:spLocks noGrp="1"/>
+          </p:cNvSpPr>
           <p:nvPr>
-            <p:ph idx="12" type="sldNum"/>
+            <p:ph type="sldNum" idx="12"/>
           </p:nvPr>
         </p:nvSpPr>
         <p:spPr>
@@ -5456,7 +5647,7 @@
           </a:prstGeom>
         </p:spPr>
         <p:txBody>
-          <a:bodyPr anchorCtr="0" anchor="ctr" bIns="91425" lIns="91425" spcFirstLastPara="1" rIns="91425" wrap="square" tIns="91425">
+          <a:bodyPr spcFirstLastPara="1" wrap="square" lIns="91425" tIns="91425" rIns="91425" bIns="91425" anchor="ctr" anchorCtr="0">
             <a:normAutofit/>
           </a:bodyPr>
           <a:lstStyle>
@@ -5498,7 +5689,7 @@
             </a:lvl9pPr>
           </a:lstStyle>
           <a:p>
-            <a:pPr indent="0" lvl="0" marL="0" rtl="0" algn="r">
+            <a:pPr marL="0" lvl="0" indent="0" algn="r" rtl="0">
               <a:spcBef>
                 <a:spcPts val="0"/>
               </a:spcBef>
@@ -5524,11 +5715,11 @@
 </file>
 
 <file path=ppt/slideLayouts/slideLayout6.xml><?xml version="1.0" encoding="utf-8"?>
-<p:sldLayout xmlns:a="http://schemas.openxmlformats.org/drawingml/2006/main" xmlns:r="http://schemas.openxmlformats.org/officeDocument/2006/relationships" xmlns:mc="http://schemas.openxmlformats.org/markup-compatibility/2006" xmlns:mv="urn:schemas-microsoft-com:mac:vml" xmlns:p="http://schemas.openxmlformats.org/presentationml/2006/main" xmlns:c="http://schemas.openxmlformats.org/drawingml/2006/chart" xmlns:dgm="http://schemas.openxmlformats.org/drawingml/2006/diagram" xmlns:o="urn:schemas-microsoft-com:office:office" xmlns:v="urn:schemas-microsoft-com:vml" xmlns:pvml="urn:schemas-microsoft-com:office:powerpoint" xmlns:com="http://schemas.openxmlformats.org/drawingml/2006/compatibility" xmlns:p14="http://schemas.microsoft.com/office/powerpoint/2010/main" xmlns:p15="http://schemas.microsoft.com/office/powerpoint/2012/main" xmlns:ahyp="http://schemas.microsoft.com/office/drawing/2018/hyperlinkcolor" matchingName="One column text">
+<p:sldLayout xmlns:a="http://schemas.openxmlformats.org/drawingml/2006/main" xmlns:r="http://schemas.openxmlformats.org/officeDocument/2006/relationships" xmlns:p="http://schemas.openxmlformats.org/presentationml/2006/main" matchingName="One column text">
   <p:cSld name="ONE_COLUMN_TEXT">
     <p:spTree>
       <p:nvGrpSpPr>
-        <p:cNvPr id="36" name="Shape 36"/>
+        <p:cNvPr id="1" name="Shape 36"/>
         <p:cNvGrpSpPr/>
         <p:nvPr/>
       </p:nvGrpSpPr>
@@ -5543,7 +5734,9 @@
       <p:sp>
         <p:nvSpPr>
           <p:cNvPr id="37" name="Google Shape;37;p7"/>
-          <p:cNvSpPr txBox="1"/>
+          <p:cNvSpPr txBox="1">
+            <a:spLocks noGrp="1"/>
+          </p:cNvSpPr>
           <p:nvPr>
             <p:ph type="title"/>
           </p:nvPr>
@@ -5558,7 +5751,7 @@
           </a:prstGeom>
         </p:spPr>
         <p:txBody>
-          <a:bodyPr anchorCtr="0" anchor="b" bIns="91425" lIns="91425" spcFirstLastPara="1" rIns="91425" wrap="square" tIns="91425">
+          <a:bodyPr spcFirstLastPara="1" wrap="square" lIns="91425" tIns="91425" rIns="91425" bIns="91425" anchor="b" anchorCtr="0">
             <a:normAutofit/>
           </a:bodyPr>
           <a:lstStyle>
@@ -5571,7 +5764,7 @@
               </a:spcAft>
               <a:buSzPts val="2400"/>
               <a:buNone/>
-              <a:defRPr b="1" sz="2400"/>
+              <a:defRPr sz="2400" b="1"/>
             </a:lvl1pPr>
             <a:lvl2pPr lvl="1">
               <a:spcBef>
@@ -5662,15 +5855,19 @@
               <a:defRPr sz="2400"/>
             </a:lvl9pPr>
           </a:lstStyle>
-          <a:p/>
+          <a:p>
+            <a:endParaRPr/>
+          </a:p>
         </p:txBody>
       </p:sp>
       <p:sp>
         <p:nvSpPr>
           <p:cNvPr id="38" name="Google Shape;38;p7"/>
-          <p:cNvSpPr txBox="1"/>
+          <p:cNvSpPr txBox="1">
+            <a:spLocks noGrp="1"/>
+          </p:cNvSpPr>
           <p:nvPr>
-            <p:ph idx="1" type="body"/>
+            <p:ph type="body" idx="1"/>
           </p:nvPr>
         </p:nvSpPr>
         <p:spPr>
@@ -5683,11 +5880,11 @@
           </a:prstGeom>
         </p:spPr>
         <p:txBody>
-          <a:bodyPr anchorCtr="0" anchor="t" bIns="91425" lIns="91425" spcFirstLastPara="1" rIns="91425" wrap="square" tIns="91425">
+          <a:bodyPr spcFirstLastPara="1" wrap="square" lIns="91425" tIns="91425" rIns="91425" bIns="91425" anchor="t" anchorCtr="0">
             <a:normAutofit/>
           </a:bodyPr>
           <a:lstStyle>
-            <a:lvl1pPr indent="-304800" lvl="0" marL="457200">
+            <a:lvl1pPr marL="457200" lvl="0" indent="-304800">
               <a:spcBef>
                 <a:spcPts val="0"/>
               </a:spcBef>
@@ -5698,7 +5895,7 @@
               <a:buChar char="●"/>
               <a:defRPr sz="1200"/>
             </a:lvl1pPr>
-            <a:lvl2pPr indent="-304800" lvl="1" marL="914400">
+            <a:lvl2pPr marL="914400" lvl="1" indent="-304800">
               <a:spcBef>
                 <a:spcPts val="0"/>
               </a:spcBef>
@@ -5709,7 +5906,7 @@
               <a:buChar char="○"/>
               <a:defRPr sz="1200"/>
             </a:lvl2pPr>
-            <a:lvl3pPr indent="-304800" lvl="2" marL="1371600">
+            <a:lvl3pPr marL="1371600" lvl="2" indent="-304800">
               <a:spcBef>
                 <a:spcPts val="0"/>
               </a:spcBef>
@@ -5720,7 +5917,7 @@
               <a:buChar char="■"/>
               <a:defRPr sz="1200"/>
             </a:lvl3pPr>
-            <a:lvl4pPr indent="-304800" lvl="3" marL="1828800">
+            <a:lvl4pPr marL="1828800" lvl="3" indent="-304800">
               <a:spcBef>
                 <a:spcPts val="0"/>
               </a:spcBef>
@@ -5731,7 +5928,7 @@
               <a:buChar char="●"/>
               <a:defRPr sz="1200"/>
             </a:lvl4pPr>
-            <a:lvl5pPr indent="-304800" lvl="4" marL="2286000">
+            <a:lvl5pPr marL="2286000" lvl="4" indent="-304800">
               <a:spcBef>
                 <a:spcPts val="0"/>
               </a:spcBef>
@@ -5742,7 +5939,7 @@
               <a:buChar char="○"/>
               <a:defRPr sz="1200"/>
             </a:lvl5pPr>
-            <a:lvl6pPr indent="-304800" lvl="5" marL="2743200">
+            <a:lvl6pPr marL="2743200" lvl="5" indent="-304800">
               <a:spcBef>
                 <a:spcPts val="0"/>
               </a:spcBef>
@@ -5753,7 +5950,7 @@
               <a:buChar char="■"/>
               <a:defRPr sz="1200"/>
             </a:lvl6pPr>
-            <a:lvl7pPr indent="-304800" lvl="6" marL="3200400">
+            <a:lvl7pPr marL="3200400" lvl="6" indent="-304800">
               <a:spcBef>
                 <a:spcPts val="0"/>
               </a:spcBef>
@@ -5764,7 +5961,7 @@
               <a:buChar char="●"/>
               <a:defRPr sz="1200"/>
             </a:lvl7pPr>
-            <a:lvl8pPr indent="-304800" lvl="7" marL="3657600">
+            <a:lvl8pPr marL="3657600" lvl="7" indent="-304800">
               <a:spcBef>
                 <a:spcPts val="0"/>
               </a:spcBef>
@@ -5775,7 +5972,7 @@
               <a:buChar char="○"/>
               <a:defRPr sz="1200"/>
             </a:lvl8pPr>
-            <a:lvl9pPr indent="-304800" lvl="8" marL="4114800">
+            <a:lvl9pPr marL="4114800" lvl="8" indent="-304800">
               <a:spcBef>
                 <a:spcPts val="0"/>
               </a:spcBef>
@@ -5787,15 +5984,19 @@
               <a:defRPr sz="1200"/>
             </a:lvl9pPr>
           </a:lstStyle>
-          <a:p/>
+          <a:p>
+            <a:endParaRPr/>
+          </a:p>
         </p:txBody>
       </p:sp>
       <p:sp>
         <p:nvSpPr>
           <p:cNvPr id="39" name="Google Shape;39;p7"/>
-          <p:cNvSpPr txBox="1"/>
+          <p:cNvSpPr txBox="1">
+            <a:spLocks noGrp="1"/>
+          </p:cNvSpPr>
           <p:nvPr>
-            <p:ph idx="12" type="sldNum"/>
+            <p:ph type="sldNum" idx="12"/>
           </p:nvPr>
         </p:nvSpPr>
         <p:spPr>
@@ -5808,7 +6009,7 @@
           </a:prstGeom>
         </p:spPr>
         <p:txBody>
-          <a:bodyPr anchorCtr="0" anchor="ctr" bIns="91425" lIns="91425" spcFirstLastPara="1" rIns="91425" wrap="square" tIns="91425">
+          <a:bodyPr spcFirstLastPara="1" wrap="square" lIns="91425" tIns="91425" rIns="91425" bIns="91425" anchor="ctr" anchorCtr="0">
             <a:normAutofit/>
           </a:bodyPr>
           <a:lstStyle>
@@ -5850,7 +6051,7 @@
             </a:lvl9pPr>
           </a:lstStyle>
           <a:p>
-            <a:pPr indent="0" lvl="0" marL="0" rtl="0" algn="r">
+            <a:pPr marL="0" lvl="0" indent="0" algn="r" rtl="0">
               <a:spcBef>
                 <a:spcPts val="0"/>
               </a:spcBef>
@@ -5876,11 +6077,11 @@
 </file>
 
 <file path=ppt/slideLayouts/slideLayout7.xml><?xml version="1.0" encoding="utf-8"?>
-<p:sldLayout xmlns:a="http://schemas.openxmlformats.org/drawingml/2006/main" xmlns:r="http://schemas.openxmlformats.org/officeDocument/2006/relationships" xmlns:mc="http://schemas.openxmlformats.org/markup-compatibility/2006" xmlns:mv="urn:schemas-microsoft-com:mac:vml" xmlns:p="http://schemas.openxmlformats.org/presentationml/2006/main" xmlns:c="http://schemas.openxmlformats.org/drawingml/2006/chart" xmlns:dgm="http://schemas.openxmlformats.org/drawingml/2006/diagram" xmlns:o="urn:schemas-microsoft-com:office:office" xmlns:v="urn:schemas-microsoft-com:vml" xmlns:pvml="urn:schemas-microsoft-com:office:powerpoint" xmlns:com="http://schemas.openxmlformats.org/drawingml/2006/compatibility" xmlns:p14="http://schemas.microsoft.com/office/powerpoint/2010/main" xmlns:p15="http://schemas.microsoft.com/office/powerpoint/2012/main" xmlns:ahyp="http://schemas.microsoft.com/office/drawing/2018/hyperlinkcolor" matchingName="Main point">
+<p:sldLayout xmlns:a="http://schemas.openxmlformats.org/drawingml/2006/main" xmlns:r="http://schemas.openxmlformats.org/officeDocument/2006/relationships" xmlns:p="http://schemas.openxmlformats.org/presentationml/2006/main" matchingName="Main point">
   <p:cSld name="MAIN_POINT">
     <p:spTree>
       <p:nvGrpSpPr>
-        <p:cNvPr id="40" name="Shape 40"/>
+        <p:cNvPr id="1" name="Shape 40"/>
         <p:cNvGrpSpPr/>
         <p:nvPr/>
       </p:nvGrpSpPr>
@@ -5895,7 +6096,9 @@
       <p:sp>
         <p:nvSpPr>
           <p:cNvPr id="41" name="Google Shape;41;p8"/>
-          <p:cNvSpPr txBox="1"/>
+          <p:cNvSpPr txBox="1">
+            <a:spLocks noGrp="1"/>
+          </p:cNvSpPr>
           <p:nvPr>
             <p:ph type="title"/>
           </p:nvPr>
@@ -5910,7 +6113,7 @@
           </a:prstGeom>
         </p:spPr>
         <p:txBody>
-          <a:bodyPr anchorCtr="0" anchor="ctr" bIns="91425" lIns="91425" spcFirstLastPara="1" rIns="91425" wrap="square" tIns="91425">
+          <a:bodyPr spcFirstLastPara="1" wrap="square" lIns="91425" tIns="91425" rIns="91425" bIns="91425" anchor="ctr" anchorCtr="0">
             <a:normAutofit/>
           </a:bodyPr>
           <a:lstStyle>
@@ -6014,15 +6217,19 @@
               <a:defRPr sz="4800"/>
             </a:lvl9pPr>
           </a:lstStyle>
-          <a:p/>
+          <a:p>
+            <a:endParaRPr/>
+          </a:p>
         </p:txBody>
       </p:sp>
       <p:sp>
         <p:nvSpPr>
           <p:cNvPr id="42" name="Google Shape;42;p8"/>
-          <p:cNvSpPr txBox="1"/>
+          <p:cNvSpPr txBox="1">
+            <a:spLocks noGrp="1"/>
+          </p:cNvSpPr>
           <p:nvPr>
-            <p:ph idx="12" type="sldNum"/>
+            <p:ph type="sldNum" idx="12"/>
           </p:nvPr>
         </p:nvSpPr>
         <p:spPr>
@@ -6035,7 +6242,7 @@
           </a:prstGeom>
         </p:spPr>
         <p:txBody>
-          <a:bodyPr anchorCtr="0" anchor="ctr" bIns="91425" lIns="91425" spcFirstLastPara="1" rIns="91425" wrap="square" tIns="91425">
+          <a:bodyPr spcFirstLastPara="1" wrap="square" lIns="91425" tIns="91425" rIns="91425" bIns="91425" anchor="ctr" anchorCtr="0">
             <a:normAutofit/>
           </a:bodyPr>
           <a:lstStyle>
@@ -6077,7 +6284,7 @@
             </a:lvl9pPr>
           </a:lstStyle>
           <a:p>
-            <a:pPr indent="0" lvl="0" marL="0" rtl="0" algn="r">
+            <a:pPr marL="0" lvl="0" indent="0" algn="r" rtl="0">
               <a:spcBef>
                 <a:spcPts val="0"/>
               </a:spcBef>
@@ -6103,11 +6310,11 @@
 </file>
 
 <file path=ppt/slideLayouts/slideLayout8.xml><?xml version="1.0" encoding="utf-8"?>
-<p:sldLayout xmlns:a="http://schemas.openxmlformats.org/drawingml/2006/main" xmlns:r="http://schemas.openxmlformats.org/officeDocument/2006/relationships" xmlns:mc="http://schemas.openxmlformats.org/markup-compatibility/2006" xmlns:mv="urn:schemas-microsoft-com:mac:vml" xmlns:p="http://schemas.openxmlformats.org/presentationml/2006/main" xmlns:c="http://schemas.openxmlformats.org/drawingml/2006/chart" xmlns:dgm="http://schemas.openxmlformats.org/drawingml/2006/diagram" xmlns:o="urn:schemas-microsoft-com:office:office" xmlns:v="urn:schemas-microsoft-com:vml" xmlns:pvml="urn:schemas-microsoft-com:office:powerpoint" xmlns:com="http://schemas.openxmlformats.org/drawingml/2006/compatibility" xmlns:p14="http://schemas.microsoft.com/office/powerpoint/2010/main" xmlns:p15="http://schemas.microsoft.com/office/powerpoint/2012/main" xmlns:ahyp="http://schemas.microsoft.com/office/drawing/2018/hyperlinkcolor" matchingName="Section title and description">
+<p:sldLayout xmlns:a="http://schemas.openxmlformats.org/drawingml/2006/main" xmlns:r="http://schemas.openxmlformats.org/officeDocument/2006/relationships" xmlns:p="http://schemas.openxmlformats.org/presentationml/2006/main" matchingName="Section title and description">
   <p:cSld name="SECTION_TITLE_AND_DESCRIPTION">
     <p:spTree>
       <p:nvGrpSpPr>
-        <p:cNvPr id="43" name="Shape 43"/>
+        <p:cNvPr id="1" name="Shape 43"/>
         <p:cNvGrpSpPr/>
         <p:nvPr/>
       </p:nvGrpSpPr>
@@ -6141,12 +6348,12 @@
           </a:ln>
         </p:spPr>
         <p:txBody>
-          <a:bodyPr anchorCtr="0" anchor="ctr" bIns="91425" lIns="91425" spcFirstLastPara="1" rIns="91425" wrap="square" tIns="91425">
+          <a:bodyPr spcFirstLastPara="1" wrap="square" lIns="91425" tIns="91425" rIns="91425" bIns="91425" anchor="ctr" anchorCtr="0">
             <a:noAutofit/>
           </a:bodyPr>
           <a:lstStyle/>
           <a:p>
-            <a:pPr indent="0" lvl="0" marL="0" rtl="0" algn="l">
+            <a:pPr marL="0" lvl="0" indent="0" algn="l" rtl="0">
               <a:spcBef>
                 <a:spcPts val="0"/>
               </a:spcBef>
@@ -6155,9 +6362,6 @@
               </a:spcAft>
               <a:buNone/>
             </a:pPr>
-            <a:r>
-              <a:t/>
-            </a:r>
             <a:endParaRPr/>
           </a:p>
         </p:txBody>
@@ -6165,7 +6369,9 @@
       <p:sp>
         <p:nvSpPr>
           <p:cNvPr id="45" name="Google Shape;45;p9"/>
-          <p:cNvSpPr txBox="1"/>
+          <p:cNvSpPr txBox="1">
+            <a:spLocks noGrp="1"/>
+          </p:cNvSpPr>
           <p:nvPr>
             <p:ph type="title"/>
           </p:nvPr>
@@ -6180,7 +6386,7 @@
           </a:prstGeom>
         </p:spPr>
         <p:txBody>
-          <a:bodyPr anchorCtr="0" anchor="b" bIns="91425" lIns="91425" spcFirstLastPara="1" rIns="91425" wrap="square" tIns="91425">
+          <a:bodyPr spcFirstLastPara="1" wrap="square" lIns="91425" tIns="91425" rIns="91425" bIns="91425" anchor="b" anchorCtr="0">
             <a:normAutofit/>
           </a:bodyPr>
           <a:lstStyle>
@@ -6284,15 +6490,19 @@
               <a:defRPr sz="4200"/>
             </a:lvl9pPr>
           </a:lstStyle>
-          <a:p/>
+          <a:p>
+            <a:endParaRPr/>
+          </a:p>
         </p:txBody>
       </p:sp>
       <p:sp>
         <p:nvSpPr>
           <p:cNvPr id="46" name="Google Shape;46;p9"/>
-          <p:cNvSpPr txBox="1"/>
+          <p:cNvSpPr txBox="1">
+            <a:spLocks noGrp="1"/>
+          </p:cNvSpPr>
           <p:nvPr>
-            <p:ph idx="1" type="subTitle"/>
+            <p:ph type="subTitle" idx="1"/>
           </p:nvPr>
         </p:nvSpPr>
         <p:spPr>
@@ -6305,7 +6515,7 @@
           </a:prstGeom>
         </p:spPr>
         <p:txBody>
-          <a:bodyPr anchorCtr="0" anchor="t" bIns="91425" lIns="91425" spcFirstLastPara="1" rIns="91425" wrap="square" tIns="91425">
+          <a:bodyPr spcFirstLastPara="1" wrap="square" lIns="91425" tIns="91425" rIns="91425" bIns="91425" anchor="t" anchorCtr="0">
             <a:normAutofit/>
           </a:bodyPr>
           <a:lstStyle>
@@ -6436,15 +6646,19 @@
               <a:defRPr sz="2100"/>
             </a:lvl9pPr>
           </a:lstStyle>
-          <a:p/>
+          <a:p>
+            <a:endParaRPr/>
+          </a:p>
         </p:txBody>
       </p:sp>
       <p:sp>
         <p:nvSpPr>
           <p:cNvPr id="47" name="Google Shape;47;p9"/>
-          <p:cNvSpPr txBox="1"/>
+          <p:cNvSpPr txBox="1">
+            <a:spLocks noGrp="1"/>
+          </p:cNvSpPr>
           <p:nvPr>
-            <p:ph idx="2" type="body"/>
+            <p:ph type="body" idx="2"/>
           </p:nvPr>
         </p:nvSpPr>
         <p:spPr>
@@ -6457,11 +6671,11 @@
           </a:prstGeom>
         </p:spPr>
         <p:txBody>
-          <a:bodyPr anchorCtr="0" anchor="ctr" bIns="91425" lIns="91425" spcFirstLastPara="1" rIns="91425" wrap="square" tIns="91425">
+          <a:bodyPr spcFirstLastPara="1" wrap="square" lIns="91425" tIns="91425" rIns="91425" bIns="91425" anchor="ctr" anchorCtr="0">
             <a:normAutofit/>
           </a:bodyPr>
           <a:lstStyle>
-            <a:lvl1pPr indent="-342900" lvl="0" marL="457200">
+            <a:lvl1pPr marL="457200" lvl="0" indent="-342900">
               <a:spcBef>
                 <a:spcPts val="0"/>
               </a:spcBef>
@@ -6472,7 +6686,7 @@
               <a:buChar char="●"/>
               <a:defRPr/>
             </a:lvl1pPr>
-            <a:lvl2pPr indent="-317500" lvl="1" marL="914400">
+            <a:lvl2pPr marL="914400" lvl="1" indent="-317500">
               <a:spcBef>
                 <a:spcPts val="0"/>
               </a:spcBef>
@@ -6483,7 +6697,7 @@
               <a:buChar char="○"/>
               <a:defRPr/>
             </a:lvl2pPr>
-            <a:lvl3pPr indent="-317500" lvl="2" marL="1371600">
+            <a:lvl3pPr marL="1371600" lvl="2" indent="-317500">
               <a:spcBef>
                 <a:spcPts val="0"/>
               </a:spcBef>
@@ -6494,7 +6708,7 @@
               <a:buChar char="■"/>
               <a:defRPr/>
             </a:lvl3pPr>
-            <a:lvl4pPr indent="-317500" lvl="3" marL="1828800">
+            <a:lvl4pPr marL="1828800" lvl="3" indent="-317500">
               <a:spcBef>
                 <a:spcPts val="0"/>
               </a:spcBef>
@@ -6505,7 +6719,7 @@
               <a:buChar char="●"/>
               <a:defRPr/>
             </a:lvl4pPr>
-            <a:lvl5pPr indent="-317500" lvl="4" marL="2286000">
+            <a:lvl5pPr marL="2286000" lvl="4" indent="-317500">
               <a:spcBef>
                 <a:spcPts val="0"/>
               </a:spcBef>
@@ -6516,7 +6730,7 @@
               <a:buChar char="○"/>
               <a:defRPr/>
             </a:lvl5pPr>
-            <a:lvl6pPr indent="-317500" lvl="5" marL="2743200">
+            <a:lvl6pPr marL="2743200" lvl="5" indent="-317500">
               <a:spcBef>
                 <a:spcPts val="0"/>
               </a:spcBef>
@@ -6527,7 +6741,7 @@
               <a:buChar char="■"/>
               <a:defRPr/>
             </a:lvl6pPr>
-            <a:lvl7pPr indent="-317500" lvl="6" marL="3200400">
+            <a:lvl7pPr marL="3200400" lvl="6" indent="-317500">
               <a:spcBef>
                 <a:spcPts val="0"/>
               </a:spcBef>
@@ -6538,7 +6752,7 @@
               <a:buChar char="●"/>
               <a:defRPr/>
             </a:lvl7pPr>
-            <a:lvl8pPr indent="-317500" lvl="7" marL="3657600">
+            <a:lvl8pPr marL="3657600" lvl="7" indent="-317500">
               <a:spcBef>
                 <a:spcPts val="0"/>
               </a:spcBef>
@@ -6549,7 +6763,7 @@
               <a:buChar char="○"/>
               <a:defRPr/>
             </a:lvl8pPr>
-            <a:lvl9pPr indent="-317500" lvl="8" marL="4114800">
+            <a:lvl9pPr marL="4114800" lvl="8" indent="-317500">
               <a:spcBef>
                 <a:spcPts val="0"/>
               </a:spcBef>
@@ -6561,15 +6775,19 @@
               <a:defRPr/>
             </a:lvl9pPr>
           </a:lstStyle>
-          <a:p/>
+          <a:p>
+            <a:endParaRPr/>
+          </a:p>
         </p:txBody>
       </p:sp>
       <p:sp>
         <p:nvSpPr>
           <p:cNvPr id="48" name="Google Shape;48;p9"/>
-          <p:cNvSpPr txBox="1"/>
+          <p:cNvSpPr txBox="1">
+            <a:spLocks noGrp="1"/>
+          </p:cNvSpPr>
           <p:nvPr>
-            <p:ph idx="12" type="sldNum"/>
+            <p:ph type="sldNum" idx="12"/>
           </p:nvPr>
         </p:nvSpPr>
         <p:spPr>
@@ -6582,7 +6800,7 @@
           </a:prstGeom>
         </p:spPr>
         <p:txBody>
-          <a:bodyPr anchorCtr="0" anchor="ctr" bIns="91425" lIns="91425" spcFirstLastPara="1" rIns="91425" wrap="square" tIns="91425">
+          <a:bodyPr spcFirstLastPara="1" wrap="square" lIns="91425" tIns="91425" rIns="91425" bIns="91425" anchor="ctr" anchorCtr="0">
             <a:normAutofit/>
           </a:bodyPr>
           <a:lstStyle>
@@ -6624,7 +6842,7 @@
             </a:lvl9pPr>
           </a:lstStyle>
           <a:p>
-            <a:pPr indent="0" lvl="0" marL="0" rtl="0" algn="r">
+            <a:pPr marL="0" lvl="0" indent="0" algn="r" rtl="0">
               <a:spcBef>
                 <a:spcPts val="0"/>
               </a:spcBef>
@@ -6650,11 +6868,11 @@
 </file>
 
 <file path=ppt/slideLayouts/slideLayout9.xml><?xml version="1.0" encoding="utf-8"?>
-<p:sldLayout xmlns:a="http://schemas.openxmlformats.org/drawingml/2006/main" xmlns:r="http://schemas.openxmlformats.org/officeDocument/2006/relationships" xmlns:mc="http://schemas.openxmlformats.org/markup-compatibility/2006" xmlns:mv="urn:schemas-microsoft-com:mac:vml" xmlns:p="http://schemas.openxmlformats.org/presentationml/2006/main" xmlns:c="http://schemas.openxmlformats.org/drawingml/2006/chart" xmlns:dgm="http://schemas.openxmlformats.org/drawingml/2006/diagram" xmlns:o="urn:schemas-microsoft-com:office:office" xmlns:v="urn:schemas-microsoft-com:vml" xmlns:pvml="urn:schemas-microsoft-com:office:powerpoint" xmlns:com="http://schemas.openxmlformats.org/drawingml/2006/compatibility" xmlns:p14="http://schemas.microsoft.com/office/powerpoint/2010/main" xmlns:p15="http://schemas.microsoft.com/office/powerpoint/2012/main" xmlns:ahyp="http://schemas.microsoft.com/office/drawing/2018/hyperlinkcolor" matchingName="Caption">
+<p:sldLayout xmlns:a="http://schemas.openxmlformats.org/drawingml/2006/main" xmlns:r="http://schemas.openxmlformats.org/officeDocument/2006/relationships" xmlns:p="http://schemas.openxmlformats.org/presentationml/2006/main" matchingName="Caption">
   <p:cSld name="CAPTION_ONLY">
     <p:spTree>
       <p:nvGrpSpPr>
-        <p:cNvPr id="49" name="Shape 49"/>
+        <p:cNvPr id="1" name="Shape 49"/>
         <p:cNvGrpSpPr/>
         <p:nvPr/>
       </p:nvGrpSpPr>
@@ -6669,9 +6887,11 @@
       <p:sp>
         <p:nvSpPr>
           <p:cNvPr id="50" name="Google Shape;50;p10"/>
-          <p:cNvSpPr txBox="1"/>
+          <p:cNvSpPr txBox="1">
+            <a:spLocks noGrp="1"/>
+          </p:cNvSpPr>
           <p:nvPr>
-            <p:ph idx="1" type="body"/>
+            <p:ph type="body" idx="1"/>
           </p:nvPr>
         </p:nvSpPr>
         <p:spPr>
@@ -6684,11 +6904,11 @@
           </a:prstGeom>
         </p:spPr>
         <p:txBody>
-          <a:bodyPr anchorCtr="0" anchor="ctr" bIns="91425" lIns="91425" spcFirstLastPara="1" rIns="91425" wrap="square" tIns="91425">
+          <a:bodyPr spcFirstLastPara="1" wrap="square" lIns="91425" tIns="91425" rIns="91425" bIns="91425" anchor="ctr" anchorCtr="0">
             <a:normAutofit/>
           </a:bodyPr>
           <a:lstStyle>
-            <a:lvl1pPr indent="-228600" lvl="0" marL="457200">
+            <a:lvl1pPr marL="457200" lvl="0" indent="-228600">
               <a:lnSpc>
                 <a:spcPct val="100000"/>
               </a:lnSpc>
@@ -6703,15 +6923,19 @@
               <a:defRPr/>
             </a:lvl1pPr>
           </a:lstStyle>
-          <a:p/>
+          <a:p>
+            <a:endParaRPr/>
+          </a:p>
         </p:txBody>
       </p:sp>
       <p:sp>
         <p:nvSpPr>
           <p:cNvPr id="51" name="Google Shape;51;p10"/>
-          <p:cNvSpPr txBox="1"/>
+          <p:cNvSpPr txBox="1">
+            <a:spLocks noGrp="1"/>
+          </p:cNvSpPr>
           <p:nvPr>
-            <p:ph idx="12" type="sldNum"/>
+            <p:ph type="sldNum" idx="12"/>
           </p:nvPr>
         </p:nvSpPr>
         <p:spPr>
@@ -6724,7 +6948,7 @@
           </a:prstGeom>
         </p:spPr>
         <p:txBody>
-          <a:bodyPr anchorCtr="0" anchor="ctr" bIns="91425" lIns="91425" spcFirstLastPara="1" rIns="91425" wrap="square" tIns="91425">
+          <a:bodyPr spcFirstLastPara="1" wrap="square" lIns="91425" tIns="91425" rIns="91425" bIns="91425" anchor="ctr" anchorCtr="0">
             <a:normAutofit/>
           </a:bodyPr>
           <a:lstStyle>
@@ -6766,7 +6990,7 @@
             </a:lvl9pPr>
           </a:lstStyle>
           <a:p>
-            <a:pPr indent="0" lvl="0" marL="0" rtl="0" algn="r">
+            <a:pPr marL="0" lvl="0" indent="0" algn="r" rtl="0">
               <a:spcBef>
                 <a:spcPts val="0"/>
               </a:spcBef>
@@ -6792,18 +7016,19 @@
 </file>
 
 <file path=ppt/slideMasters/slideMaster1.xml><?xml version="1.0" encoding="utf-8"?>
-<p:sldMaster xmlns:a="http://schemas.openxmlformats.org/drawingml/2006/main" xmlns:r="http://schemas.openxmlformats.org/officeDocument/2006/relationships" xmlns:mc="http://schemas.openxmlformats.org/markup-compatibility/2006" xmlns:mv="urn:schemas-microsoft-com:mac:vml" xmlns:p="http://schemas.openxmlformats.org/presentationml/2006/main" xmlns:c="http://schemas.openxmlformats.org/drawingml/2006/chart" xmlns:dgm="http://schemas.openxmlformats.org/drawingml/2006/diagram" xmlns:o="urn:schemas-microsoft-com:office:office" xmlns:v="urn:schemas-microsoft-com:vml" xmlns:pvml="urn:schemas-microsoft-com:office:powerpoint" xmlns:com="http://schemas.openxmlformats.org/drawingml/2006/compatibility" xmlns:p14="http://schemas.microsoft.com/office/powerpoint/2010/main" xmlns:p15="http://schemas.microsoft.com/office/powerpoint/2012/main" xmlns:ahyp="http://schemas.microsoft.com/office/drawing/2018/hyperlinkcolor">
+<p:sldMaster xmlns:a="http://schemas.openxmlformats.org/drawingml/2006/main" xmlns:r="http://schemas.openxmlformats.org/officeDocument/2006/relationships" xmlns:p="http://schemas.openxmlformats.org/presentationml/2006/main">
   <p:cSld name="simple-light-2">
     <p:bg>
       <p:bgPr>
         <a:solidFill>
           <a:schemeClr val="lt1"/>
         </a:solidFill>
+        <a:effectLst/>
       </p:bgPr>
     </p:bg>
     <p:spTree>
       <p:nvGrpSpPr>
-        <p:cNvPr id="5" name="Shape 5"/>
+        <p:cNvPr id="1" name="Shape 5"/>
         <p:cNvGrpSpPr/>
         <p:nvPr/>
       </p:nvGrpSpPr>
@@ -6818,7 +7043,9 @@
       <p:sp>
         <p:nvSpPr>
           <p:cNvPr id="6" name="Google Shape;6;p1"/>
-          <p:cNvSpPr txBox="1"/>
+          <p:cNvSpPr txBox="1">
+            <a:spLocks noGrp="1"/>
+          </p:cNvSpPr>
           <p:nvPr>
             <p:ph type="title"/>
           </p:nvPr>
@@ -6837,7 +7064,7 @@
           </a:ln>
         </p:spPr>
         <p:txBody>
-          <a:bodyPr anchorCtr="0" anchor="t" bIns="91425" lIns="91425" spcFirstLastPara="1" rIns="91425" wrap="square" tIns="91425">
+          <a:bodyPr spcFirstLastPara="1" wrap="square" lIns="91425" tIns="91425" rIns="91425" bIns="91425" anchor="t" anchorCtr="0">
             <a:normAutofit/>
           </a:bodyPr>
           <a:lstStyle>
@@ -7004,15 +7231,19 @@
               </a:defRPr>
             </a:lvl9pPr>
           </a:lstStyle>
-          <a:p/>
+          <a:p>
+            <a:endParaRPr/>
+          </a:p>
         </p:txBody>
       </p:sp>
       <p:sp>
         <p:nvSpPr>
           <p:cNvPr id="7" name="Google Shape;7;p1"/>
-          <p:cNvSpPr txBox="1"/>
+          <p:cNvSpPr txBox="1">
+            <a:spLocks noGrp="1"/>
+          </p:cNvSpPr>
           <p:nvPr>
-            <p:ph idx="1" type="body"/>
+            <p:ph type="body" idx="1"/>
           </p:nvPr>
         </p:nvSpPr>
         <p:spPr>
@@ -7029,11 +7260,11 @@
           </a:ln>
         </p:spPr>
         <p:txBody>
-          <a:bodyPr anchorCtr="0" anchor="t" bIns="91425" lIns="91425" spcFirstLastPara="1" rIns="91425" wrap="square" tIns="91425">
+          <a:bodyPr spcFirstLastPara="1" wrap="square" lIns="91425" tIns="91425" rIns="91425" bIns="91425" anchor="t" anchorCtr="0">
             <a:normAutofit/>
           </a:bodyPr>
           <a:lstStyle>
-            <a:lvl1pPr indent="-342900" lvl="0" marL="457200">
+            <a:lvl1pPr marL="457200" lvl="0" indent="-342900">
               <a:lnSpc>
                 <a:spcPct val="115000"/>
               </a:lnSpc>
@@ -7054,7 +7285,7 @@
                 </a:solidFill>
               </a:defRPr>
             </a:lvl1pPr>
-            <a:lvl2pPr indent="-317500" lvl="1" marL="914400">
+            <a:lvl2pPr marL="914400" lvl="1" indent="-317500">
               <a:lnSpc>
                 <a:spcPct val="115000"/>
               </a:lnSpc>
@@ -7075,7 +7306,7 @@
                 </a:solidFill>
               </a:defRPr>
             </a:lvl2pPr>
-            <a:lvl3pPr indent="-317500" lvl="2" marL="1371600">
+            <a:lvl3pPr marL="1371600" lvl="2" indent="-317500">
               <a:lnSpc>
                 <a:spcPct val="115000"/>
               </a:lnSpc>
@@ -7096,7 +7327,7 @@
                 </a:solidFill>
               </a:defRPr>
             </a:lvl3pPr>
-            <a:lvl4pPr indent="-317500" lvl="3" marL="1828800">
+            <a:lvl4pPr marL="1828800" lvl="3" indent="-317500">
               <a:lnSpc>
                 <a:spcPct val="115000"/>
               </a:lnSpc>
@@ -7117,7 +7348,7 @@
                 </a:solidFill>
               </a:defRPr>
             </a:lvl4pPr>
-            <a:lvl5pPr indent="-317500" lvl="4" marL="2286000">
+            <a:lvl5pPr marL="2286000" lvl="4" indent="-317500">
               <a:lnSpc>
                 <a:spcPct val="115000"/>
               </a:lnSpc>
@@ -7138,7 +7369,7 @@
                 </a:solidFill>
               </a:defRPr>
             </a:lvl5pPr>
-            <a:lvl6pPr indent="-317500" lvl="5" marL="2743200">
+            <a:lvl6pPr marL="2743200" lvl="5" indent="-317500">
               <a:lnSpc>
                 <a:spcPct val="115000"/>
               </a:lnSpc>
@@ -7159,7 +7390,7 @@
                 </a:solidFill>
               </a:defRPr>
             </a:lvl6pPr>
-            <a:lvl7pPr indent="-317500" lvl="6" marL="3200400">
+            <a:lvl7pPr marL="3200400" lvl="6" indent="-317500">
               <a:lnSpc>
                 <a:spcPct val="115000"/>
               </a:lnSpc>
@@ -7180,7 +7411,7 @@
                 </a:solidFill>
               </a:defRPr>
             </a:lvl7pPr>
-            <a:lvl8pPr indent="-317500" lvl="7" marL="3657600">
+            <a:lvl8pPr marL="3657600" lvl="7" indent="-317500">
               <a:lnSpc>
                 <a:spcPct val="115000"/>
               </a:lnSpc>
@@ -7201,7 +7432,7 @@
                 </a:solidFill>
               </a:defRPr>
             </a:lvl8pPr>
-            <a:lvl9pPr indent="-317500" lvl="8" marL="4114800">
+            <a:lvl9pPr marL="4114800" lvl="8" indent="-317500">
               <a:lnSpc>
                 <a:spcPct val="115000"/>
               </a:lnSpc>
@@ -7223,15 +7454,19 @@
               </a:defRPr>
             </a:lvl9pPr>
           </a:lstStyle>
-          <a:p/>
+          <a:p>
+            <a:endParaRPr/>
+          </a:p>
         </p:txBody>
       </p:sp>
       <p:sp>
         <p:nvSpPr>
           <p:cNvPr id="8" name="Google Shape;8;p1"/>
-          <p:cNvSpPr txBox="1"/>
+          <p:cNvSpPr txBox="1">
+            <a:spLocks noGrp="1"/>
+          </p:cNvSpPr>
           <p:nvPr>
-            <p:ph idx="12" type="sldNum"/>
+            <p:ph type="sldNum" idx="12"/>
           </p:nvPr>
         </p:nvSpPr>
         <p:spPr>
@@ -7248,7 +7483,7 @@
           </a:ln>
         </p:spPr>
         <p:txBody>
-          <a:bodyPr anchorCtr="0" anchor="ctr" bIns="91425" lIns="91425" spcFirstLastPara="1" rIns="91425" wrap="square" tIns="91425">
+          <a:bodyPr spcFirstLastPara="1" wrap="square" lIns="91425" tIns="91425" rIns="91425" bIns="91425" anchor="ctr" anchorCtr="0">
             <a:normAutofit/>
           </a:bodyPr>
           <a:lstStyle>
@@ -7326,7 +7561,7 @@
             </a:lvl9pPr>
           </a:lstStyle>
           <a:p>
-            <a:pPr indent="0" lvl="0" marL="0" rtl="0" algn="r">
+            <a:pPr marL="0" lvl="0" indent="0" algn="r" rtl="0">
               <a:spcBef>
                 <a:spcPts val="0"/>
               </a:spcBef>
@@ -7350,7 +7585,7 @@
           <p:nvPr/>
         </p:nvPicPr>
         <p:blipFill>
-          <a:blip r:embed="rId1">
+          <a:blip r:embed="rId13">
             <a:alphaModFix/>
           </a:blip>
           <a:stretch>
@@ -7373,24 +7608,24 @@
       </p:pic>
     </p:spTree>
   </p:cSld>
-  <p:clrMap accent1="accent1" accent2="accent2" accent3="accent3" accent4="accent4" accent5="accent5" accent6="accent6" bg1="lt1" bg2="dk2" tx1="dk1" tx2="lt2" folHlink="folHlink" hlink="hlink"/>
+  <p:clrMap bg1="lt1" tx1="dk1" bg2="dk2" tx2="lt2" accent1="accent1" accent2="accent2" accent3="accent3" accent4="accent4" accent5="accent5" accent6="accent6" hlink="hlink" folHlink="folHlink"/>
   <p:sldLayoutIdLst>
-    <p:sldLayoutId id="2147483648" r:id="rId2"/>
-    <p:sldLayoutId id="2147483649" r:id="rId3"/>
-    <p:sldLayoutId id="2147483650" r:id="rId4"/>
-    <p:sldLayoutId id="2147483651" r:id="rId5"/>
-    <p:sldLayoutId id="2147483652" r:id="rId6"/>
-    <p:sldLayoutId id="2147483653" r:id="rId7"/>
-    <p:sldLayoutId id="2147483654" r:id="rId8"/>
-    <p:sldLayoutId id="2147483655" r:id="rId9"/>
-    <p:sldLayoutId id="2147483656" r:id="rId10"/>
-    <p:sldLayoutId id="2147483657" r:id="rId11"/>
-    <p:sldLayoutId id="2147483658" r:id="rId12"/>
+    <p:sldLayoutId id="2147483648" r:id="rId1"/>
+    <p:sldLayoutId id="2147483649" r:id="rId2"/>
+    <p:sldLayoutId id="2147483650" r:id="rId3"/>
+    <p:sldLayoutId id="2147483651" r:id="rId4"/>
+    <p:sldLayoutId id="2147483652" r:id="rId5"/>
+    <p:sldLayoutId id="2147483653" r:id="rId6"/>
+    <p:sldLayoutId id="2147483654" r:id="rId7"/>
+    <p:sldLayoutId id="2147483655" r:id="rId8"/>
+    <p:sldLayoutId id="2147483656" r:id="rId9"/>
+    <p:sldLayoutId id="2147483657" r:id="rId10"/>
+    <p:sldLayoutId id="2147483658" r:id="rId11"/>
   </p:sldLayoutIdLst>
-  <p:hf dt="0" ftr="0" hdr="0" sldNum="0"/>
+  <p:hf sldNum="0" hdr="0" ftr="0" dt="0"/>
   <p:txStyles>
     <p:titleStyle>
-      <a:defPPr lvl="0" marR="0" rtl="0" algn="l">
+      <a:defPPr marR="0" lvl="0" algn="l" rtl="0">
         <a:lnSpc>
           <a:spcPct val="100000"/>
         </a:lnSpc>
@@ -7401,7 +7636,7 @@
           <a:spcPts val="0"/>
         </a:spcAft>
       </a:defPPr>
-      <a:lvl1pPr lvl="0" marR="0" rtl="0" algn="l">
+      <a:lvl1pPr marR="0" lvl="0" algn="l" rtl="0">
         <a:lnSpc>
           <a:spcPct val="100000"/>
         </a:lnSpc>
@@ -7415,7 +7650,7 @@
           <a:srgbClr val="000000"/>
         </a:buClr>
         <a:buFont typeface="Arial"/>
-        <a:defRPr b="0" i="0" sz="1400" u="none" cap="none" strike="noStrike">
+        <a:defRPr sz="1400" b="0" i="0" u="none" strike="noStrike" cap="none">
           <a:solidFill>
             <a:srgbClr val="000000"/>
           </a:solidFill>
@@ -7425,7 +7660,7 @@
           <a:sym typeface="Arial"/>
         </a:defRPr>
       </a:lvl1pPr>
-      <a:lvl2pPr lvl="1" marR="0" rtl="0" algn="l">
+      <a:lvl2pPr marR="0" lvl="1" algn="l" rtl="0">
         <a:lnSpc>
           <a:spcPct val="100000"/>
         </a:lnSpc>
@@ -7439,7 +7674,7 @@
           <a:srgbClr val="000000"/>
         </a:buClr>
         <a:buFont typeface="Arial"/>
-        <a:defRPr b="0" i="0" sz="1400" u="none" cap="none" strike="noStrike">
+        <a:defRPr sz="1400" b="0" i="0" u="none" strike="noStrike" cap="none">
           <a:solidFill>
             <a:srgbClr val="000000"/>
           </a:solidFill>
@@ -7449,7 +7684,7 @@
           <a:sym typeface="Arial"/>
         </a:defRPr>
       </a:lvl2pPr>
-      <a:lvl3pPr lvl="2" marR="0" rtl="0" algn="l">
+      <a:lvl3pPr marR="0" lvl="2" algn="l" rtl="0">
         <a:lnSpc>
           <a:spcPct val="100000"/>
         </a:lnSpc>
@@ -7463,7 +7698,7 @@
           <a:srgbClr val="000000"/>
         </a:buClr>
         <a:buFont typeface="Arial"/>
-        <a:defRPr b="0" i="0" sz="1400" u="none" cap="none" strike="noStrike">
+        <a:defRPr sz="1400" b="0" i="0" u="none" strike="noStrike" cap="none">
           <a:solidFill>
             <a:srgbClr val="000000"/>
           </a:solidFill>
@@ -7473,7 +7708,7 @@
           <a:sym typeface="Arial"/>
         </a:defRPr>
       </a:lvl3pPr>
-      <a:lvl4pPr lvl="3" marR="0" rtl="0" algn="l">
+      <a:lvl4pPr marR="0" lvl="3" algn="l" rtl="0">
         <a:lnSpc>
           <a:spcPct val="100000"/>
         </a:lnSpc>
@@ -7487,7 +7722,7 @@
           <a:srgbClr val="000000"/>
         </a:buClr>
         <a:buFont typeface="Arial"/>
-        <a:defRPr b="0" i="0" sz="1400" u="none" cap="none" strike="noStrike">
+        <a:defRPr sz="1400" b="0" i="0" u="none" strike="noStrike" cap="none">
           <a:solidFill>
             <a:srgbClr val="000000"/>
           </a:solidFill>
@@ -7497,7 +7732,7 @@
           <a:sym typeface="Arial"/>
         </a:defRPr>
       </a:lvl4pPr>
-      <a:lvl5pPr lvl="4" marR="0" rtl="0" algn="l">
+      <a:lvl5pPr marR="0" lvl="4" algn="l" rtl="0">
         <a:lnSpc>
           <a:spcPct val="100000"/>
         </a:lnSpc>
@@ -7511,7 +7746,7 @@
           <a:srgbClr val="000000"/>
         </a:buClr>
         <a:buFont typeface="Arial"/>
-        <a:defRPr b="0" i="0" sz="1400" u="none" cap="none" strike="noStrike">
+        <a:defRPr sz="1400" b="0" i="0" u="none" strike="noStrike" cap="none">
           <a:solidFill>
             <a:srgbClr val="000000"/>
           </a:solidFill>
@@ -7521,7 +7756,7 @@
           <a:sym typeface="Arial"/>
         </a:defRPr>
       </a:lvl5pPr>
-      <a:lvl6pPr lvl="5" marR="0" rtl="0" algn="l">
+      <a:lvl6pPr marR="0" lvl="5" algn="l" rtl="0">
         <a:lnSpc>
           <a:spcPct val="100000"/>
         </a:lnSpc>
@@ -7535,7 +7770,7 @@
           <a:srgbClr val="000000"/>
         </a:buClr>
         <a:buFont typeface="Arial"/>
-        <a:defRPr b="0" i="0" sz="1400" u="none" cap="none" strike="noStrike">
+        <a:defRPr sz="1400" b="0" i="0" u="none" strike="noStrike" cap="none">
           <a:solidFill>
             <a:srgbClr val="000000"/>
           </a:solidFill>
@@ -7545,7 +7780,7 @@
           <a:sym typeface="Arial"/>
         </a:defRPr>
       </a:lvl6pPr>
-      <a:lvl7pPr lvl="6" marR="0" rtl="0" algn="l">
+      <a:lvl7pPr marR="0" lvl="6" algn="l" rtl="0">
         <a:lnSpc>
           <a:spcPct val="100000"/>
         </a:lnSpc>
@@ -7559,7 +7794,7 @@
           <a:srgbClr val="000000"/>
         </a:buClr>
         <a:buFont typeface="Arial"/>
-        <a:defRPr b="0" i="0" sz="1400" u="none" cap="none" strike="noStrike">
+        <a:defRPr sz="1400" b="0" i="0" u="none" strike="noStrike" cap="none">
           <a:solidFill>
             <a:srgbClr val="000000"/>
           </a:solidFill>
@@ -7569,7 +7804,7 @@
           <a:sym typeface="Arial"/>
         </a:defRPr>
       </a:lvl7pPr>
-      <a:lvl8pPr lvl="7" marR="0" rtl="0" algn="l">
+      <a:lvl8pPr marR="0" lvl="7" algn="l" rtl="0">
         <a:lnSpc>
           <a:spcPct val="100000"/>
         </a:lnSpc>
@@ -7583,7 +7818,7 @@
           <a:srgbClr val="000000"/>
         </a:buClr>
         <a:buFont typeface="Arial"/>
-        <a:defRPr b="0" i="0" sz="1400" u="none" cap="none" strike="noStrike">
+        <a:defRPr sz="1400" b="0" i="0" u="none" strike="noStrike" cap="none">
           <a:solidFill>
             <a:srgbClr val="000000"/>
           </a:solidFill>
@@ -7593,7 +7828,7 @@
           <a:sym typeface="Arial"/>
         </a:defRPr>
       </a:lvl8pPr>
-      <a:lvl9pPr lvl="8" marR="0" rtl="0" algn="l">
+      <a:lvl9pPr marR="0" lvl="8" algn="l" rtl="0">
         <a:lnSpc>
           <a:spcPct val="100000"/>
         </a:lnSpc>
@@ -7607,7 +7842,7 @@
           <a:srgbClr val="000000"/>
         </a:buClr>
         <a:buFont typeface="Arial"/>
-        <a:defRPr b="0" i="0" sz="1400" u="none" cap="none" strike="noStrike">
+        <a:defRPr sz="1400" b="0" i="0" u="none" strike="noStrike" cap="none">
           <a:solidFill>
             <a:srgbClr val="000000"/>
           </a:solidFill>
@@ -7619,7 +7854,7 @@
       </a:lvl9pPr>
     </p:titleStyle>
     <p:bodyStyle>
-      <a:defPPr lvl="0" marR="0" rtl="0" algn="l">
+      <a:defPPr marR="0" lvl="0" algn="l" rtl="0">
         <a:lnSpc>
           <a:spcPct val="100000"/>
         </a:lnSpc>
@@ -7630,7 +7865,7 @@
           <a:spcPts val="0"/>
         </a:spcAft>
       </a:defPPr>
-      <a:lvl1pPr lvl="0" marR="0" rtl="0" algn="l">
+      <a:lvl1pPr marR="0" lvl="0" algn="l" rtl="0">
         <a:lnSpc>
           <a:spcPct val="100000"/>
         </a:lnSpc>
@@ -7644,7 +7879,7 @@
           <a:srgbClr val="000000"/>
         </a:buClr>
         <a:buFont typeface="Arial"/>
-        <a:defRPr b="0" i="0" sz="1400" u="none" cap="none" strike="noStrike">
+        <a:defRPr sz="1400" b="0" i="0" u="none" strike="noStrike" cap="none">
           <a:solidFill>
             <a:srgbClr val="000000"/>
           </a:solidFill>
@@ -7654,7 +7889,7 @@
           <a:sym typeface="Arial"/>
         </a:defRPr>
       </a:lvl1pPr>
-      <a:lvl2pPr lvl="1" marR="0" rtl="0" algn="l">
+      <a:lvl2pPr marR="0" lvl="1" algn="l" rtl="0">
         <a:lnSpc>
           <a:spcPct val="100000"/>
         </a:lnSpc>
@@ -7668,7 +7903,7 @@
           <a:srgbClr val="000000"/>
         </a:buClr>
         <a:buFont typeface="Arial"/>
-        <a:defRPr b="0" i="0" sz="1400" u="none" cap="none" strike="noStrike">
+        <a:defRPr sz="1400" b="0" i="0" u="none" strike="noStrike" cap="none">
           <a:solidFill>
             <a:srgbClr val="000000"/>
           </a:solidFill>
@@ -7678,7 +7913,7 @@
           <a:sym typeface="Arial"/>
         </a:defRPr>
       </a:lvl2pPr>
-      <a:lvl3pPr lvl="2" marR="0" rtl="0" algn="l">
+      <a:lvl3pPr marR="0" lvl="2" algn="l" rtl="0">
         <a:lnSpc>
           <a:spcPct val="100000"/>
         </a:lnSpc>
@@ -7692,7 +7927,7 @@
           <a:srgbClr val="000000"/>
         </a:buClr>
         <a:buFont typeface="Arial"/>
-        <a:defRPr b="0" i="0" sz="1400" u="none" cap="none" strike="noStrike">
+        <a:defRPr sz="1400" b="0" i="0" u="none" strike="noStrike" cap="none">
           <a:solidFill>
             <a:srgbClr val="000000"/>
           </a:solidFill>
@@ -7702,7 +7937,7 @@
           <a:sym typeface="Arial"/>
         </a:defRPr>
       </a:lvl3pPr>
-      <a:lvl4pPr lvl="3" marR="0" rtl="0" algn="l">
+      <a:lvl4pPr marR="0" lvl="3" algn="l" rtl="0">
         <a:lnSpc>
           <a:spcPct val="100000"/>
         </a:lnSpc>
@@ -7716,7 +7951,7 @@
           <a:srgbClr val="000000"/>
         </a:buClr>
         <a:buFont typeface="Arial"/>
-        <a:defRPr b="0" i="0" sz="1400" u="none" cap="none" strike="noStrike">
+        <a:defRPr sz="1400" b="0" i="0" u="none" strike="noStrike" cap="none">
           <a:solidFill>
             <a:srgbClr val="000000"/>
           </a:solidFill>
@@ -7726,7 +7961,7 @@
           <a:sym typeface="Arial"/>
         </a:defRPr>
       </a:lvl4pPr>
-      <a:lvl5pPr lvl="4" marR="0" rtl="0" algn="l">
+      <a:lvl5pPr marR="0" lvl="4" algn="l" rtl="0">
         <a:lnSpc>
           <a:spcPct val="100000"/>
         </a:lnSpc>
@@ -7740,7 +7975,7 @@
           <a:srgbClr val="000000"/>
         </a:buClr>
         <a:buFont typeface="Arial"/>
-        <a:defRPr b="0" i="0" sz="1400" u="none" cap="none" strike="noStrike">
+        <a:defRPr sz="1400" b="0" i="0" u="none" strike="noStrike" cap="none">
           <a:solidFill>
             <a:srgbClr val="000000"/>
           </a:solidFill>
@@ -7750,7 +7985,7 @@
           <a:sym typeface="Arial"/>
         </a:defRPr>
       </a:lvl5pPr>
-      <a:lvl6pPr lvl="5" marR="0" rtl="0" algn="l">
+      <a:lvl6pPr marR="0" lvl="5" algn="l" rtl="0">
         <a:lnSpc>
           <a:spcPct val="100000"/>
         </a:lnSpc>
@@ -7764,7 +7999,7 @@
           <a:srgbClr val="000000"/>
         </a:buClr>
         <a:buFont typeface="Arial"/>
-        <a:defRPr b="0" i="0" sz="1400" u="none" cap="none" strike="noStrike">
+        <a:defRPr sz="1400" b="0" i="0" u="none" strike="noStrike" cap="none">
           <a:solidFill>
             <a:srgbClr val="000000"/>
           </a:solidFill>
@@ -7774,7 +8009,7 @@
           <a:sym typeface="Arial"/>
         </a:defRPr>
       </a:lvl6pPr>
-      <a:lvl7pPr lvl="6" marR="0" rtl="0" algn="l">
+      <a:lvl7pPr marR="0" lvl="6" algn="l" rtl="0">
         <a:lnSpc>
           <a:spcPct val="100000"/>
         </a:lnSpc>
@@ -7788,7 +8023,7 @@
           <a:srgbClr val="000000"/>
         </a:buClr>
         <a:buFont typeface="Arial"/>
-        <a:defRPr b="0" i="0" sz="1400" u="none" cap="none" strike="noStrike">
+        <a:defRPr sz="1400" b="0" i="0" u="none" strike="noStrike" cap="none">
           <a:solidFill>
             <a:srgbClr val="000000"/>
           </a:solidFill>
@@ -7798,7 +8033,7 @@
           <a:sym typeface="Arial"/>
         </a:defRPr>
       </a:lvl7pPr>
-      <a:lvl8pPr lvl="7" marR="0" rtl="0" algn="l">
+      <a:lvl8pPr marR="0" lvl="7" algn="l" rtl="0">
         <a:lnSpc>
           <a:spcPct val="100000"/>
         </a:lnSpc>
@@ -7812,7 +8047,7 @@
           <a:srgbClr val="000000"/>
         </a:buClr>
         <a:buFont typeface="Arial"/>
-        <a:defRPr b="0" i="0" sz="1400" u="none" cap="none" strike="noStrike">
+        <a:defRPr sz="1400" b="0" i="0" u="none" strike="noStrike" cap="none">
           <a:solidFill>
             <a:srgbClr val="000000"/>
           </a:solidFill>
@@ -7822,7 +8057,7 @@
           <a:sym typeface="Arial"/>
         </a:defRPr>
       </a:lvl8pPr>
-      <a:lvl9pPr lvl="8" marR="0" rtl="0" algn="l">
+      <a:lvl9pPr marR="0" lvl="8" algn="l" rtl="0">
         <a:lnSpc>
           <a:spcPct val="100000"/>
         </a:lnSpc>
@@ -7836,7 +8071,7 @@
           <a:srgbClr val="000000"/>
         </a:buClr>
         <a:buFont typeface="Arial"/>
-        <a:defRPr b="0" i="0" sz="1400" u="none" cap="none" strike="noStrike">
+        <a:defRPr sz="1400" b="0" i="0" u="none" strike="noStrike" cap="none">
           <a:solidFill>
             <a:srgbClr val="000000"/>
           </a:solidFill>
@@ -7848,7 +8083,7 @@
       </a:lvl9pPr>
     </p:bodyStyle>
     <p:otherStyle>
-      <a:defPPr lvl="0" marR="0" rtl="0" algn="l">
+      <a:defPPr marR="0" lvl="0" algn="l" rtl="0">
         <a:lnSpc>
           <a:spcPct val="100000"/>
         </a:lnSpc>
@@ -7859,7 +8094,7 @@
           <a:spcPts val="0"/>
         </a:spcAft>
       </a:defPPr>
-      <a:lvl1pPr lvl="0" marR="0" rtl="0" algn="l">
+      <a:lvl1pPr marR="0" lvl="0" algn="l" rtl="0">
         <a:lnSpc>
           <a:spcPct val="100000"/>
         </a:lnSpc>
@@ -7873,7 +8108,7 @@
           <a:srgbClr val="000000"/>
         </a:buClr>
         <a:buFont typeface="Arial"/>
-        <a:defRPr b="0" i="0" sz="1400" u="none" cap="none" strike="noStrike">
+        <a:defRPr sz="1400" b="0" i="0" u="none" strike="noStrike" cap="none">
           <a:solidFill>
             <a:srgbClr val="000000"/>
           </a:solidFill>
@@ -7883,7 +8118,7 @@
           <a:sym typeface="Arial"/>
         </a:defRPr>
       </a:lvl1pPr>
-      <a:lvl2pPr lvl="1" marR="0" rtl="0" algn="l">
+      <a:lvl2pPr marR="0" lvl="1" algn="l" rtl="0">
         <a:lnSpc>
           <a:spcPct val="100000"/>
         </a:lnSpc>
@@ -7897,7 +8132,7 @@
           <a:srgbClr val="000000"/>
         </a:buClr>
         <a:buFont typeface="Arial"/>
-        <a:defRPr b="0" i="0" sz="1400" u="none" cap="none" strike="noStrike">
+        <a:defRPr sz="1400" b="0" i="0" u="none" strike="noStrike" cap="none">
           <a:solidFill>
             <a:srgbClr val="000000"/>
           </a:solidFill>
@@ -7907,7 +8142,7 @@
           <a:sym typeface="Arial"/>
         </a:defRPr>
       </a:lvl2pPr>
-      <a:lvl3pPr lvl="2" marR="0" rtl="0" algn="l">
+      <a:lvl3pPr marR="0" lvl="2" algn="l" rtl="0">
         <a:lnSpc>
           <a:spcPct val="100000"/>
         </a:lnSpc>
@@ -7921,7 +8156,7 @@
           <a:srgbClr val="000000"/>
         </a:buClr>
         <a:buFont typeface="Arial"/>
-        <a:defRPr b="0" i="0" sz="1400" u="none" cap="none" strike="noStrike">
+        <a:defRPr sz="1400" b="0" i="0" u="none" strike="noStrike" cap="none">
           <a:solidFill>
             <a:srgbClr val="000000"/>
           </a:solidFill>
@@ -7931,7 +8166,7 @@
           <a:sym typeface="Arial"/>
         </a:defRPr>
       </a:lvl3pPr>
-      <a:lvl4pPr lvl="3" marR="0" rtl="0" algn="l">
+      <a:lvl4pPr marR="0" lvl="3" algn="l" rtl="0">
         <a:lnSpc>
           <a:spcPct val="100000"/>
         </a:lnSpc>
@@ -7945,7 +8180,7 @@
           <a:srgbClr val="000000"/>
         </a:buClr>
         <a:buFont typeface="Arial"/>
-        <a:defRPr b="0" i="0" sz="1400" u="none" cap="none" strike="noStrike">
+        <a:defRPr sz="1400" b="0" i="0" u="none" strike="noStrike" cap="none">
           <a:solidFill>
             <a:srgbClr val="000000"/>
           </a:solidFill>
@@ -7955,7 +8190,7 @@
           <a:sym typeface="Arial"/>
         </a:defRPr>
       </a:lvl4pPr>
-      <a:lvl5pPr lvl="4" marR="0" rtl="0" algn="l">
+      <a:lvl5pPr marR="0" lvl="4" algn="l" rtl="0">
         <a:lnSpc>
           <a:spcPct val="100000"/>
         </a:lnSpc>
@@ -7969,7 +8204,7 @@
           <a:srgbClr val="000000"/>
         </a:buClr>
         <a:buFont typeface="Arial"/>
-        <a:defRPr b="0" i="0" sz="1400" u="none" cap="none" strike="noStrike">
+        <a:defRPr sz="1400" b="0" i="0" u="none" strike="noStrike" cap="none">
           <a:solidFill>
             <a:srgbClr val="000000"/>
           </a:solidFill>
@@ -7979,7 +8214,7 @@
           <a:sym typeface="Arial"/>
         </a:defRPr>
       </a:lvl5pPr>
-      <a:lvl6pPr lvl="5" marR="0" rtl="0" algn="l">
+      <a:lvl6pPr marR="0" lvl="5" algn="l" rtl="0">
         <a:lnSpc>
           <a:spcPct val="100000"/>
         </a:lnSpc>
@@ -7993,7 +8228,7 @@
           <a:srgbClr val="000000"/>
         </a:buClr>
         <a:buFont typeface="Arial"/>
-        <a:defRPr b="0" i="0" sz="1400" u="none" cap="none" strike="noStrike">
+        <a:defRPr sz="1400" b="0" i="0" u="none" strike="noStrike" cap="none">
           <a:solidFill>
             <a:srgbClr val="000000"/>
           </a:solidFill>
@@ -8003,7 +8238,7 @@
           <a:sym typeface="Arial"/>
         </a:defRPr>
       </a:lvl6pPr>
-      <a:lvl7pPr lvl="6" marR="0" rtl="0" algn="l">
+      <a:lvl7pPr marR="0" lvl="6" algn="l" rtl="0">
         <a:lnSpc>
           <a:spcPct val="100000"/>
         </a:lnSpc>
@@ -8017,7 +8252,7 @@
           <a:srgbClr val="000000"/>
         </a:buClr>
         <a:buFont typeface="Arial"/>
-        <a:defRPr b="0" i="0" sz="1400" u="none" cap="none" strike="noStrike">
+        <a:defRPr sz="1400" b="0" i="0" u="none" strike="noStrike" cap="none">
           <a:solidFill>
             <a:srgbClr val="000000"/>
           </a:solidFill>
@@ -8027,7 +8262,7 @@
           <a:sym typeface="Arial"/>
         </a:defRPr>
       </a:lvl7pPr>
-      <a:lvl8pPr lvl="7" marR="0" rtl="0" algn="l">
+      <a:lvl8pPr marR="0" lvl="7" algn="l" rtl="0">
         <a:lnSpc>
           <a:spcPct val="100000"/>
         </a:lnSpc>
@@ -8041,7 +8276,7 @@
           <a:srgbClr val="000000"/>
         </a:buClr>
         <a:buFont typeface="Arial"/>
-        <a:defRPr b="0" i="0" sz="1400" u="none" cap="none" strike="noStrike">
+        <a:defRPr sz="1400" b="0" i="0" u="none" strike="noStrike" cap="none">
           <a:solidFill>
             <a:srgbClr val="000000"/>
           </a:solidFill>
@@ -8051,7 +8286,7 @@
           <a:sym typeface="Arial"/>
         </a:defRPr>
       </a:lvl8pPr>
-      <a:lvl9pPr lvl="8" marR="0" rtl="0" algn="l">
+      <a:lvl9pPr marR="0" lvl="8" algn="l" rtl="0">
         <a:lnSpc>
           <a:spcPct val="100000"/>
         </a:lnSpc>
@@ -8065,7 +8300,7 @@
           <a:srgbClr val="000000"/>
         </a:buClr>
         <a:buFont typeface="Arial"/>
-        <a:defRPr b="0" i="0" sz="1400" u="none" cap="none" strike="noStrike">
+        <a:defRPr sz="1400" b="0" i="0" u="none" strike="noStrike" cap="none">
           <a:solidFill>
             <a:srgbClr val="000000"/>
           </a:solidFill>
@@ -8081,11 +8316,11 @@
 </file>
 
 <file path=ppt/slides/slide1.xml><?xml version="1.0" encoding="utf-8"?>
-<p:sld xmlns:a="http://schemas.openxmlformats.org/drawingml/2006/main" xmlns:r="http://schemas.openxmlformats.org/officeDocument/2006/relationships" xmlns:mc="http://schemas.openxmlformats.org/markup-compatibility/2006" xmlns:mv="urn:schemas-microsoft-com:mac:vml" xmlns:p="http://schemas.openxmlformats.org/presentationml/2006/main" xmlns:c="http://schemas.openxmlformats.org/drawingml/2006/chart" xmlns:dgm="http://schemas.openxmlformats.org/drawingml/2006/diagram" xmlns:o="urn:schemas-microsoft-com:office:office" xmlns:v="urn:schemas-microsoft-com:vml" xmlns:pvml="urn:schemas-microsoft-com:office:powerpoint" xmlns:com="http://schemas.openxmlformats.org/drawingml/2006/compatibility" xmlns:p14="http://schemas.microsoft.com/office/powerpoint/2010/main" xmlns:p15="http://schemas.microsoft.com/office/powerpoint/2012/main" xmlns:ahyp="http://schemas.microsoft.com/office/drawing/2018/hyperlinkcolor">
+<p:sld xmlns:a="http://schemas.openxmlformats.org/drawingml/2006/main" xmlns:r="http://schemas.openxmlformats.org/officeDocument/2006/relationships" xmlns:p="http://schemas.openxmlformats.org/presentationml/2006/main">
   <p:cSld>
     <p:spTree>
       <p:nvGrpSpPr>
-        <p:cNvPr id="61" name="Shape 61"/>
+        <p:cNvPr id="1" name="Shape 61"/>
         <p:cNvGrpSpPr/>
         <p:nvPr/>
       </p:nvGrpSpPr>
@@ -8100,7 +8335,9 @@
       <p:sp>
         <p:nvSpPr>
           <p:cNvPr id="62" name="Google Shape;62;p13"/>
-          <p:cNvSpPr txBox="1"/>
+          <p:cNvSpPr txBox="1">
+            <a:spLocks noGrp="1"/>
+          </p:cNvSpPr>
           <p:nvPr>
             <p:ph type="ctrTitle"/>
           </p:nvPr>
@@ -8115,12 +8352,12 @@
           </a:prstGeom>
         </p:spPr>
         <p:txBody>
-          <a:bodyPr anchorCtr="0" anchor="b" bIns="91425" lIns="91425" spcFirstLastPara="1" rIns="91425" wrap="square" tIns="91425">
+          <a:bodyPr spcFirstLastPara="1" wrap="square" lIns="91425" tIns="91425" rIns="91425" bIns="91425" anchor="b" anchorCtr="0">
             <a:normAutofit/>
           </a:bodyPr>
           <a:lstStyle/>
           <a:p>
-            <a:pPr indent="0" lvl="0" marL="0" rtl="0" algn="ctr">
+            <a:pPr marL="0" lvl="0" indent="0" algn="ctr" rtl="0">
               <a:spcBef>
                 <a:spcPts val="0"/>
               </a:spcBef>
@@ -8140,9 +8377,11 @@
       <p:sp>
         <p:nvSpPr>
           <p:cNvPr id="63" name="Google Shape;63;p13"/>
-          <p:cNvSpPr txBox="1"/>
+          <p:cNvSpPr txBox="1">
+            <a:spLocks noGrp="1"/>
+          </p:cNvSpPr>
           <p:nvPr>
-            <p:ph idx="1" type="subTitle"/>
+            <p:ph type="subTitle" idx="1"/>
           </p:nvPr>
         </p:nvSpPr>
         <p:spPr>
@@ -8155,12 +8394,12 @@
           </a:prstGeom>
         </p:spPr>
         <p:txBody>
-          <a:bodyPr anchorCtr="0" anchor="t" bIns="91425" lIns="91425" spcFirstLastPara="1" rIns="91425" wrap="square" tIns="91425">
+          <a:bodyPr spcFirstLastPara="1" wrap="square" lIns="91425" tIns="91425" rIns="91425" bIns="91425" anchor="t" anchorCtr="0">
             <a:normAutofit/>
           </a:bodyPr>
           <a:lstStyle/>
           <a:p>
-            <a:pPr indent="0" lvl="0" marL="0" rtl="0" algn="ctr">
+            <a:pPr marL="0" lvl="0" indent="0" algn="ctr" rtl="0">
               <a:spcBef>
                 <a:spcPts val="0"/>
               </a:spcBef>
@@ -8180,9 +8419,11 @@
       <p:sp>
         <p:nvSpPr>
           <p:cNvPr id="64" name="Google Shape;64;p13"/>
-          <p:cNvSpPr txBox="1"/>
+          <p:cNvSpPr txBox="1">
+            <a:spLocks noGrp="1"/>
+          </p:cNvSpPr>
           <p:nvPr>
-            <p:ph idx="2" type="subTitle"/>
+            <p:ph type="subTitle" idx="2"/>
           </p:nvPr>
         </p:nvSpPr>
         <p:spPr>
@@ -8195,12 +8436,12 @@
           </a:prstGeom>
         </p:spPr>
         <p:txBody>
-          <a:bodyPr anchorCtr="0" anchor="t" bIns="91425" lIns="91425" spcFirstLastPara="1" rIns="91425" wrap="square" tIns="91425">
+          <a:bodyPr spcFirstLastPara="1" wrap="square" lIns="91425" tIns="91425" rIns="91425" bIns="91425" anchor="t" anchorCtr="0">
             <a:normAutofit fontScale="77500" lnSpcReduction="20000"/>
           </a:bodyPr>
           <a:lstStyle/>
           <a:p>
-            <a:pPr indent="0" lvl="0" marL="0" rtl="0" algn="ctr">
+            <a:pPr marL="0" lvl="0" indent="0" algn="ctr" rtl="0">
               <a:spcBef>
                 <a:spcPts val="0"/>
               </a:spcBef>
@@ -8215,13 +8456,13 @@
               <a:buNone/>
             </a:pPr>
             <a:r>
-              <a:rPr lang="en"/>
-              <a:t>Melissa Winstanley</a:t>
+              <a:rPr lang="en-US" dirty="0"/>
+              <a:t>Naomi Alterman</a:t>
             </a:r>
-            <a:endParaRPr/>
-          </a:p>
-          <a:p>
-            <a:pPr indent="0" lvl="0" marL="0" rtl="0" algn="ctr">
+            <a:endParaRPr dirty="0"/>
+          </a:p>
+          <a:p>
+            <a:pPr marL="0" lvl="0" indent="0" algn="ctr" rtl="0">
               <a:spcBef>
                 <a:spcPts val="0"/>
               </a:spcBef>
@@ -8236,13 +8477,13 @@
               <a:buNone/>
             </a:pPr>
             <a:r>
-              <a:rPr lang="en"/>
+              <a:rPr lang="en" dirty="0"/>
               <a:t>University of Washington</a:t>
             </a:r>
-            <a:endParaRPr/>
-          </a:p>
-          <a:p>
-            <a:pPr indent="0" lvl="0" marL="0" rtl="0" algn="ctr">
+            <a:endParaRPr dirty="0"/>
+          </a:p>
+          <a:p>
+            <a:pPr marL="0" lvl="0" indent="0" algn="ctr" rtl="0">
               <a:spcBef>
                 <a:spcPts val="0"/>
               </a:spcBef>
@@ -8257,10 +8498,10 @@
               <a:buNone/>
             </a:pPr>
             <a:r>
-              <a:rPr lang="en"/>
-              <a:t>March 6, 2025</a:t>
+              <a:rPr lang="en" dirty="0"/>
+              <a:t>March 3, 2026</a:t>
             </a:r>
-            <a:endParaRPr/>
+            <a:endParaRPr dirty="0"/>
           </a:p>
         </p:txBody>
       </p:sp>
@@ -8273,11 +8514,11 @@
 </file>
 
 <file path=ppt/slides/slide10.xml><?xml version="1.0" encoding="utf-8"?>
-<p:sld xmlns:a="http://schemas.openxmlformats.org/drawingml/2006/main" xmlns:r="http://schemas.openxmlformats.org/officeDocument/2006/relationships" xmlns:mc="http://schemas.openxmlformats.org/markup-compatibility/2006" xmlns:mv="urn:schemas-microsoft-com:mac:vml" xmlns:p="http://schemas.openxmlformats.org/presentationml/2006/main" xmlns:c="http://schemas.openxmlformats.org/drawingml/2006/chart" xmlns:dgm="http://schemas.openxmlformats.org/drawingml/2006/diagram" xmlns:o="urn:schemas-microsoft-com:office:office" xmlns:v="urn:schemas-microsoft-com:vml" xmlns:pvml="urn:schemas-microsoft-com:office:powerpoint" xmlns:com="http://schemas.openxmlformats.org/drawingml/2006/compatibility" xmlns:p14="http://schemas.microsoft.com/office/powerpoint/2010/main" xmlns:p15="http://schemas.microsoft.com/office/powerpoint/2012/main" xmlns:ahyp="http://schemas.microsoft.com/office/drawing/2018/hyperlinkcolor">
+<p:sld xmlns:a="http://schemas.openxmlformats.org/drawingml/2006/main" xmlns:r="http://schemas.openxmlformats.org/officeDocument/2006/relationships" xmlns:p="http://schemas.openxmlformats.org/presentationml/2006/main">
   <p:cSld>
     <p:spTree>
       <p:nvGrpSpPr>
-        <p:cNvPr id="121" name="Shape 121"/>
+        <p:cNvPr id="1" name="Shape 121"/>
         <p:cNvGrpSpPr/>
         <p:nvPr/>
       </p:nvGrpSpPr>
@@ -8292,7 +8533,9 @@
       <p:sp>
         <p:nvSpPr>
           <p:cNvPr id="122" name="Google Shape;122;p22"/>
-          <p:cNvSpPr txBox="1"/>
+          <p:cNvSpPr txBox="1">
+            <a:spLocks noGrp="1"/>
+          </p:cNvSpPr>
           <p:nvPr>
             <p:ph type="title"/>
           </p:nvPr>
@@ -8307,12 +8550,12 @@
           </a:prstGeom>
         </p:spPr>
         <p:txBody>
-          <a:bodyPr anchorCtr="0" anchor="t" bIns="91425" lIns="91425" spcFirstLastPara="1" rIns="91425" wrap="square" tIns="91425">
+          <a:bodyPr spcFirstLastPara="1" wrap="square" lIns="91425" tIns="91425" rIns="91425" bIns="91425" anchor="t" anchorCtr="0">
             <a:normAutofit fontScale="90000"/>
           </a:bodyPr>
           <a:lstStyle/>
           <a:p>
-            <a:pPr indent="0" lvl="0" marL="0" rtl="0" algn="l">
+            <a:pPr marL="0" lvl="0" indent="0" algn="l" rtl="0">
               <a:spcBef>
                 <a:spcPts val="0"/>
               </a:spcBef>
@@ -8332,9 +8575,11 @@
       <p:sp>
         <p:nvSpPr>
           <p:cNvPr id="123" name="Google Shape;123;p22"/>
-          <p:cNvSpPr txBox="1"/>
+          <p:cNvSpPr txBox="1">
+            <a:spLocks noGrp="1"/>
+          </p:cNvSpPr>
           <p:nvPr>
-            <p:ph idx="1" type="body"/>
+            <p:ph type="body" idx="1"/>
           </p:nvPr>
         </p:nvSpPr>
         <p:spPr>
@@ -8347,12 +8592,12 @@
           </a:prstGeom>
         </p:spPr>
         <p:txBody>
-          <a:bodyPr anchorCtr="0" anchor="t" bIns="91425" lIns="91425" spcFirstLastPara="1" rIns="91425" wrap="square" tIns="91425">
+          <a:bodyPr spcFirstLastPara="1" wrap="square" lIns="91425" tIns="91425" rIns="91425" bIns="91425" anchor="t" anchorCtr="0">
             <a:normAutofit/>
           </a:bodyPr>
           <a:lstStyle/>
           <a:p>
-            <a:pPr indent="0" lvl="0" marL="0" rtl="0" algn="l">
+            <a:pPr marL="0" lvl="0" indent="0" algn="l" rtl="0">
               <a:spcBef>
                 <a:spcPts val="0"/>
               </a:spcBef>
@@ -8368,7 +8613,7 @@
             <a:endParaRPr/>
           </a:p>
           <a:p>
-            <a:pPr indent="0" lvl="0" marL="0" rtl="0" algn="l">
+            <a:pPr marL="0" lvl="0" indent="0" algn="l" rtl="0">
               <a:spcBef>
                 <a:spcPts val="1200"/>
               </a:spcBef>
@@ -8378,7 +8623,7 @@
               <a:buNone/>
             </a:pPr>
             <a:r>
-              <a:rPr b="1" lang="en" sz="2200">
+              <a:rPr lang="en" sz="2200" b="1">
                 <a:solidFill>
                   <a:schemeClr val="lt1"/>
                 </a:solidFill>
@@ -8390,39 +8635,9 @@
                 <a:cs typeface="Courier New"/>
                 <a:sym typeface="Courier New"/>
               </a:rPr>
-              <a:t>f</a:t>
+              <a:t>from unittest import mock</a:t>
             </a:r>
-            <a:r>
-              <a:rPr b="1" lang="en" sz="2200">
-                <a:solidFill>
-                  <a:schemeClr val="lt1"/>
-                </a:solidFill>
-                <a:highlight>
-                  <a:schemeClr val="dk1"/>
-                </a:highlight>
-                <a:latin typeface="Courier New"/>
-                <a:ea typeface="Courier New"/>
-                <a:cs typeface="Courier New"/>
-                <a:sym typeface="Courier New"/>
-              </a:rPr>
-              <a:t>rom </a:t>
-            </a:r>
-            <a:r>
-              <a:rPr b="1" lang="en" sz="2200">
-                <a:solidFill>
-                  <a:schemeClr val="lt1"/>
-                </a:solidFill>
-                <a:highlight>
-                  <a:schemeClr val="dk1"/>
-                </a:highlight>
-                <a:latin typeface="Courier New"/>
-                <a:ea typeface="Courier New"/>
-                <a:cs typeface="Courier New"/>
-                <a:sym typeface="Courier New"/>
-              </a:rPr>
-              <a:t>unittest import mock</a:t>
-            </a:r>
-            <a:endParaRPr b="1" sz="2200">
+            <a:endParaRPr sz="2200" b="1">
               <a:solidFill>
                 <a:schemeClr val="lt1"/>
               </a:solidFill>
@@ -8436,7 +8651,7 @@
             </a:endParaRPr>
           </a:p>
           <a:p>
-            <a:pPr indent="0" lvl="0" marL="0" rtl="0" algn="l">
+            <a:pPr marL="0" lvl="0" indent="0" algn="l" rtl="0">
               <a:spcBef>
                 <a:spcPts val="1200"/>
               </a:spcBef>
@@ -8457,7 +8672,7 @@
             <a:endParaRPr/>
           </a:p>
           <a:p>
-            <a:pPr indent="0" lvl="0" marL="0" rtl="0" algn="l">
+            <a:pPr marL="0" lvl="0" indent="0" algn="l" rtl="0">
               <a:spcBef>
                 <a:spcPts val="1200"/>
               </a:spcBef>
@@ -8466,13 +8681,10 @@
               </a:spcAft>
               <a:buNone/>
             </a:pPr>
-            <a:r>
-              <a:t/>
-            </a:r>
             <a:endParaRPr/>
           </a:p>
           <a:p>
-            <a:pPr indent="0" lvl="0" marL="0" rtl="0" algn="l">
+            <a:pPr marL="0" lvl="0" indent="0" algn="l" rtl="0">
               <a:spcBef>
                 <a:spcPts val="1200"/>
               </a:spcBef>
@@ -8486,7 +8698,7 @@
               <a:t>Allows you to provide false </a:t>
             </a:r>
             <a:r>
-              <a:rPr i="1" lang="en"/>
+              <a:rPr lang="en" i="1"/>
               <a:t>implementations</a:t>
             </a:r>
             <a:r>
@@ -8494,7 +8706,7 @@
               <a:t>, </a:t>
             </a:r>
             <a:r>
-              <a:rPr i="1" lang="en"/>
+              <a:rPr lang="en" i="1"/>
               <a:t>return values</a:t>
             </a:r>
             <a:r>
@@ -8502,7 +8714,7 @@
               <a:t>, </a:t>
             </a:r>
             <a:r>
-              <a:rPr i="1" lang="en"/>
+              <a:rPr lang="en" i="1"/>
               <a:t>exceptions</a:t>
             </a:r>
             <a:r>
@@ -8512,7 +8724,7 @@
             <a:endParaRPr/>
           </a:p>
           <a:p>
-            <a:pPr indent="0" lvl="0" marL="0" rtl="0" algn="l">
+            <a:pPr marL="0" lvl="0" indent="0" algn="l" rtl="0">
               <a:spcBef>
                 <a:spcPts val="1200"/>
               </a:spcBef>
@@ -8521,9 +8733,6 @@
               </a:spcAft>
               <a:buNone/>
             </a:pPr>
-            <a:r>
-              <a:t/>
-            </a:r>
             <a:endParaRPr/>
           </a:p>
         </p:txBody>
@@ -8537,11 +8746,11 @@
 </file>
 
 <file path=ppt/slides/slide11.xml><?xml version="1.0" encoding="utf-8"?>
-<p:sld xmlns:a="http://schemas.openxmlformats.org/drawingml/2006/main" xmlns:r="http://schemas.openxmlformats.org/officeDocument/2006/relationships" xmlns:mc="http://schemas.openxmlformats.org/markup-compatibility/2006" xmlns:mv="urn:schemas-microsoft-com:mac:vml" xmlns:p="http://schemas.openxmlformats.org/presentationml/2006/main" xmlns:c="http://schemas.openxmlformats.org/drawingml/2006/chart" xmlns:dgm="http://schemas.openxmlformats.org/drawingml/2006/diagram" xmlns:o="urn:schemas-microsoft-com:office:office" xmlns:v="urn:schemas-microsoft-com:vml" xmlns:pvml="urn:schemas-microsoft-com:office:powerpoint" xmlns:com="http://schemas.openxmlformats.org/drawingml/2006/compatibility" xmlns:p14="http://schemas.microsoft.com/office/powerpoint/2010/main" xmlns:p15="http://schemas.microsoft.com/office/powerpoint/2012/main" xmlns:ahyp="http://schemas.microsoft.com/office/drawing/2018/hyperlinkcolor">
+<p:sld xmlns:a="http://schemas.openxmlformats.org/drawingml/2006/main" xmlns:r="http://schemas.openxmlformats.org/officeDocument/2006/relationships" xmlns:p="http://schemas.openxmlformats.org/presentationml/2006/main">
   <p:cSld>
     <p:spTree>
       <p:nvGrpSpPr>
-        <p:cNvPr id="127" name="Shape 127"/>
+        <p:cNvPr id="1" name="Shape 127"/>
         <p:cNvGrpSpPr/>
         <p:nvPr/>
       </p:nvGrpSpPr>
@@ -8556,7 +8765,9 @@
       <p:sp>
         <p:nvSpPr>
           <p:cNvPr id="128" name="Google Shape;128;p23"/>
-          <p:cNvSpPr txBox="1"/>
+          <p:cNvSpPr txBox="1">
+            <a:spLocks noGrp="1"/>
+          </p:cNvSpPr>
           <p:nvPr>
             <p:ph type="title"/>
           </p:nvPr>
@@ -8571,12 +8782,12 @@
           </a:prstGeom>
         </p:spPr>
         <p:txBody>
-          <a:bodyPr anchorCtr="0" anchor="t" bIns="91425" lIns="91425" spcFirstLastPara="1" rIns="91425" wrap="square" tIns="91425">
+          <a:bodyPr spcFirstLastPara="1" wrap="square" lIns="91425" tIns="91425" rIns="91425" bIns="91425" anchor="t" anchorCtr="0">
             <a:normAutofit fontScale="90000"/>
           </a:bodyPr>
           <a:lstStyle/>
           <a:p>
-            <a:pPr indent="0" lvl="0" marL="0" rtl="0" algn="l">
+            <a:pPr marL="0" lvl="0" indent="0" algn="l" rtl="0">
               <a:spcBef>
                 <a:spcPts val="0"/>
               </a:spcBef>
@@ -8596,9 +8807,11 @@
       <p:sp>
         <p:nvSpPr>
           <p:cNvPr id="129" name="Google Shape;129;p23"/>
-          <p:cNvSpPr txBox="1"/>
+          <p:cNvSpPr txBox="1">
+            <a:spLocks noGrp="1"/>
+          </p:cNvSpPr>
           <p:nvPr>
-            <p:ph idx="1" type="body"/>
+            <p:ph type="body" idx="1"/>
           </p:nvPr>
         </p:nvSpPr>
         <p:spPr>
@@ -8611,12 +8824,12 @@
           </a:prstGeom>
         </p:spPr>
         <p:txBody>
-          <a:bodyPr anchorCtr="0" anchor="t" bIns="91425" lIns="91425" spcFirstLastPara="1" rIns="91425" wrap="square" tIns="91425">
+          <a:bodyPr spcFirstLastPara="1" wrap="square" lIns="91425" tIns="91425" rIns="91425" bIns="91425" anchor="t" anchorCtr="0">
             <a:normAutofit/>
           </a:bodyPr>
           <a:lstStyle/>
           <a:p>
-            <a:pPr indent="0" lvl="0" marL="0" rtl="0" algn="l">
+            <a:pPr marL="0" lvl="0" indent="0" algn="l" rtl="0">
               <a:spcBef>
                 <a:spcPts val="0"/>
               </a:spcBef>
@@ -8625,9 +8838,6 @@
               </a:spcAft>
               <a:buNone/>
             </a:pPr>
-            <a:r>
-              <a:t/>
-            </a:r>
             <a:endParaRPr/>
           </a:p>
         </p:txBody>
@@ -8669,11 +8879,11 @@
 </file>
 
 <file path=ppt/slides/slide12.xml><?xml version="1.0" encoding="utf-8"?>
-<p:sld xmlns:a="http://schemas.openxmlformats.org/drawingml/2006/main" xmlns:r="http://schemas.openxmlformats.org/officeDocument/2006/relationships" xmlns:mc="http://schemas.openxmlformats.org/markup-compatibility/2006" xmlns:mv="urn:schemas-microsoft-com:mac:vml" xmlns:p="http://schemas.openxmlformats.org/presentationml/2006/main" xmlns:c="http://schemas.openxmlformats.org/drawingml/2006/chart" xmlns:dgm="http://schemas.openxmlformats.org/drawingml/2006/diagram" xmlns:o="urn:schemas-microsoft-com:office:office" xmlns:v="urn:schemas-microsoft-com:vml" xmlns:pvml="urn:schemas-microsoft-com:office:powerpoint" xmlns:com="http://schemas.openxmlformats.org/drawingml/2006/compatibility" xmlns:p14="http://schemas.microsoft.com/office/powerpoint/2010/main" xmlns:p15="http://schemas.microsoft.com/office/powerpoint/2012/main" xmlns:ahyp="http://schemas.microsoft.com/office/drawing/2018/hyperlinkcolor">
+<p:sld xmlns:a="http://schemas.openxmlformats.org/drawingml/2006/main" xmlns:r="http://schemas.openxmlformats.org/officeDocument/2006/relationships" xmlns:p="http://schemas.openxmlformats.org/presentationml/2006/main">
   <p:cSld>
     <p:spTree>
       <p:nvGrpSpPr>
-        <p:cNvPr id="134" name="Shape 134"/>
+        <p:cNvPr id="1" name="Shape 134"/>
         <p:cNvGrpSpPr/>
         <p:nvPr/>
       </p:nvGrpSpPr>
@@ -8688,7 +8898,9 @@
       <p:sp>
         <p:nvSpPr>
           <p:cNvPr id="135" name="Google Shape;135;p24"/>
-          <p:cNvSpPr txBox="1"/>
+          <p:cNvSpPr txBox="1">
+            <a:spLocks noGrp="1"/>
+          </p:cNvSpPr>
           <p:nvPr>
             <p:ph type="title"/>
           </p:nvPr>
@@ -8703,12 +8915,12 @@
           </a:prstGeom>
         </p:spPr>
         <p:txBody>
-          <a:bodyPr anchorCtr="0" anchor="t" bIns="91425" lIns="91425" spcFirstLastPara="1" rIns="91425" wrap="square" tIns="91425">
+          <a:bodyPr spcFirstLastPara="1" wrap="square" lIns="91425" tIns="91425" rIns="91425" bIns="91425" anchor="t" anchorCtr="0">
             <a:normAutofit fontScale="90000"/>
           </a:bodyPr>
           <a:lstStyle/>
           <a:p>
-            <a:pPr indent="0" lvl="0" marL="0" rtl="0" algn="l">
+            <a:pPr marL="0" lvl="0" indent="0" algn="l" rtl="0">
               <a:spcBef>
                 <a:spcPts val="0"/>
               </a:spcBef>
@@ -8741,9 +8953,11 @@
       <p:sp>
         <p:nvSpPr>
           <p:cNvPr id="136" name="Google Shape;136;p24"/>
-          <p:cNvSpPr txBox="1"/>
+          <p:cNvSpPr txBox="1">
+            <a:spLocks noGrp="1"/>
+          </p:cNvSpPr>
           <p:nvPr>
-            <p:ph idx="1" type="body"/>
+            <p:ph type="body" idx="1"/>
           </p:nvPr>
         </p:nvSpPr>
         <p:spPr>
@@ -8756,12 +8970,12 @@
           </a:prstGeom>
         </p:spPr>
         <p:txBody>
-          <a:bodyPr anchorCtr="0" anchor="t" bIns="91425" lIns="91425" spcFirstLastPara="1" rIns="91425" wrap="square" tIns="91425">
+          <a:bodyPr spcFirstLastPara="1" wrap="square" lIns="91425" tIns="91425" rIns="91425" bIns="91425" anchor="t" anchorCtr="0">
             <a:normAutofit/>
           </a:bodyPr>
           <a:lstStyle/>
           <a:p>
-            <a:pPr indent="0" lvl="0" marL="0" rtl="0" algn="l">
+            <a:pPr marL="0" lvl="0" indent="0" algn="l" rtl="0">
               <a:spcBef>
                 <a:spcPts val="0"/>
               </a:spcBef>
@@ -8770,9 +8984,6 @@
               </a:spcAft>
               <a:buNone/>
             </a:pPr>
-            <a:r>
-              <a:t/>
-            </a:r>
             <a:endParaRPr/>
           </a:p>
         </p:txBody>
@@ -8820,23 +9031,23 @@
             <a:avLst/>
           </a:prstGeom>
           <a:noFill/>
-          <a:ln cap="flat" cmpd="sng" w="19050">
+          <a:ln w="19050" cap="flat" cmpd="sng">
             <a:solidFill>
               <a:srgbClr val="FF0000"/>
             </a:solidFill>
             <a:prstDash val="solid"/>
             <a:round/>
-            <a:headEnd len="sm" w="sm" type="none"/>
-            <a:tailEnd len="sm" w="sm" type="none"/>
+            <a:headEnd type="none" w="sm" len="sm"/>
+            <a:tailEnd type="none" w="sm" len="sm"/>
           </a:ln>
         </p:spPr>
         <p:txBody>
-          <a:bodyPr anchorCtr="0" anchor="ctr" bIns="91425" lIns="91425" spcFirstLastPara="1" rIns="91425" wrap="square" tIns="91425">
+          <a:bodyPr spcFirstLastPara="1" wrap="square" lIns="91425" tIns="91425" rIns="91425" bIns="91425" anchor="ctr" anchorCtr="0">
             <a:noAutofit/>
           </a:bodyPr>
           <a:lstStyle/>
           <a:p>
-            <a:pPr indent="0" lvl="0" marL="0" rtl="0" algn="ctr">
+            <a:pPr marL="0" lvl="0" indent="0" algn="ctr" rtl="0">
               <a:spcBef>
                 <a:spcPts val="0"/>
               </a:spcBef>
@@ -8845,9 +9056,6 @@
               </a:spcAft>
               <a:buNone/>
             </a:pPr>
-            <a:r>
-              <a:t/>
-            </a:r>
             <a:endParaRPr/>
           </a:p>
         </p:txBody>
@@ -8867,23 +9075,23 @@
             <a:avLst/>
           </a:prstGeom>
           <a:noFill/>
-          <a:ln cap="flat" cmpd="sng" w="19050">
+          <a:ln w="19050" cap="flat" cmpd="sng">
             <a:solidFill>
               <a:srgbClr val="FF0000"/>
             </a:solidFill>
             <a:prstDash val="solid"/>
             <a:round/>
-            <a:headEnd len="sm" w="sm" type="none"/>
-            <a:tailEnd len="sm" w="sm" type="none"/>
+            <a:headEnd type="none" w="sm" len="sm"/>
+            <a:tailEnd type="none" w="sm" len="sm"/>
           </a:ln>
         </p:spPr>
         <p:txBody>
-          <a:bodyPr anchorCtr="0" anchor="ctr" bIns="91425" lIns="91425" spcFirstLastPara="1" rIns="91425" wrap="square" tIns="91425">
+          <a:bodyPr spcFirstLastPara="1" wrap="square" lIns="91425" tIns="91425" rIns="91425" bIns="91425" anchor="ctr" anchorCtr="0">
             <a:noAutofit/>
           </a:bodyPr>
           <a:lstStyle/>
           <a:p>
-            <a:pPr indent="0" lvl="0" marL="0" rtl="0" algn="ctr">
+            <a:pPr marL="0" lvl="0" indent="0" algn="ctr" rtl="0">
               <a:spcBef>
                 <a:spcPts val="0"/>
               </a:spcBef>
@@ -8892,9 +9100,6 @@
               </a:spcAft>
               <a:buNone/>
             </a:pPr>
-            <a:r>
-              <a:t/>
-            </a:r>
             <a:endParaRPr/>
           </a:p>
         </p:txBody>
@@ -8914,23 +9119,23 @@
             <a:avLst/>
           </a:prstGeom>
           <a:noFill/>
-          <a:ln cap="flat" cmpd="sng" w="19050">
+          <a:ln w="19050" cap="flat" cmpd="sng">
             <a:solidFill>
               <a:srgbClr val="FF0000"/>
             </a:solidFill>
             <a:prstDash val="solid"/>
             <a:round/>
-            <a:headEnd len="sm" w="sm" type="none"/>
-            <a:tailEnd len="sm" w="sm" type="none"/>
+            <a:headEnd type="none" w="sm" len="sm"/>
+            <a:tailEnd type="none" w="sm" len="sm"/>
           </a:ln>
         </p:spPr>
         <p:txBody>
-          <a:bodyPr anchorCtr="0" anchor="ctr" bIns="91425" lIns="91425" spcFirstLastPara="1" rIns="91425" wrap="square" tIns="91425">
+          <a:bodyPr spcFirstLastPara="1" wrap="square" lIns="91425" tIns="91425" rIns="91425" bIns="91425" anchor="ctr" anchorCtr="0">
             <a:noAutofit/>
           </a:bodyPr>
           <a:lstStyle/>
           <a:p>
-            <a:pPr indent="0" lvl="0" marL="0" rtl="0" algn="ctr">
+            <a:pPr marL="0" lvl="0" indent="0" algn="ctr" rtl="0">
               <a:spcBef>
                 <a:spcPts val="0"/>
               </a:spcBef>
@@ -8939,9 +9144,6 @@
               </a:spcAft>
               <a:buNone/>
             </a:pPr>
-            <a:r>
-              <a:t/>
-            </a:r>
             <a:endParaRPr/>
           </a:p>
         </p:txBody>
@@ -8954,32 +9156,32 @@
   <p:timing>
     <p:tnLst>
       <p:par>
-        <p:cTn dur="indefinite" nodeType="tmRoot" restart="never">
+        <p:cTn id="1" dur="indefinite" restart="never" nodeType="tmRoot">
           <p:childTnLst>
             <p:seq concurrent="1" nextAc="seek">
-              <p:cTn dur="indefinite" id="2" nodeType="mainSeq">
+              <p:cTn id="2" dur="indefinite" nodeType="mainSeq">
                 <p:childTnLst>
                   <p:par>
-                    <p:cTn fill="hold">
+                    <p:cTn id="3" fill="hold">
                       <p:stCondLst>
                         <p:cond delay="indefinite"/>
                       </p:stCondLst>
                       <p:childTnLst>
                         <p:par>
-                          <p:cTn fill="hold">
+                          <p:cTn id="4" fill="hold">
                             <p:stCondLst>
                               <p:cond delay="0"/>
                             </p:stCondLst>
                             <p:childTnLst>
                               <p:par>
-                                <p:cTn fill="hold" nodeType="clickEffect" presetClass="entr" presetID="1" presetSubtype="0">
+                                <p:cTn id="5" presetID="1" presetClass="entr" presetSubtype="0" fill="hold" nodeType="clickEffect">
                                   <p:stCondLst>
                                     <p:cond delay="0"/>
                                   </p:stCondLst>
                                   <p:childTnLst>
                                     <p:set>
                                       <p:cBhvr>
-                                        <p:cTn dur="1" fill="hold">
+                                        <p:cTn id="6" dur="1" fill="hold">
                                           <p:stCondLst>
                                             <p:cond delay="0"/>
                                           </p:stCondLst>
@@ -9005,26 +9207,26 @@
                     </p:cTn>
                   </p:par>
                   <p:par>
-                    <p:cTn fill="hold">
+                    <p:cTn id="7" fill="hold">
                       <p:stCondLst>
                         <p:cond delay="indefinite"/>
                       </p:stCondLst>
                       <p:childTnLst>
                         <p:par>
-                          <p:cTn fill="hold">
+                          <p:cTn id="8" fill="hold">
                             <p:stCondLst>
                               <p:cond delay="0"/>
                             </p:stCondLst>
                             <p:childTnLst>
                               <p:par>
-                                <p:cTn fill="hold" nodeType="clickEffect" presetClass="entr" presetID="1" presetSubtype="0">
+                                <p:cTn id="9" presetID="1" presetClass="entr" presetSubtype="0" fill="hold" nodeType="clickEffect">
                                   <p:stCondLst>
                                     <p:cond delay="0"/>
                                   </p:stCondLst>
                                   <p:childTnLst>
                                     <p:set>
                                       <p:cBhvr>
-                                        <p:cTn dur="1" fill="hold">
+                                        <p:cTn id="10" dur="1" fill="hold">
                                           <p:stCondLst>
                                             <p:cond delay="0"/>
                                           </p:stCondLst>
@@ -9044,14 +9246,14 @@
                                 </p:cTn>
                               </p:par>
                               <p:par>
-                                <p:cTn fill="hold" nodeType="withEffect" presetClass="exit" presetID="1" presetSubtype="0">
+                                <p:cTn id="11" presetID="1" presetClass="exit" presetSubtype="0" fill="hold" nodeType="withEffect">
                                   <p:stCondLst>
                                     <p:cond delay="0"/>
                                   </p:stCondLst>
                                   <p:childTnLst>
                                     <p:set>
                                       <p:cBhvr>
-                                        <p:cTn dur="1" fill="hold">
+                                        <p:cTn id="12" dur="1" fill="hold">
                                           <p:stCondLst>
                                             <p:cond delay="0"/>
                                           </p:stCondLst>
@@ -9077,26 +9279,26 @@
                     </p:cTn>
                   </p:par>
                   <p:par>
-                    <p:cTn fill="hold">
+                    <p:cTn id="13" fill="hold">
                       <p:stCondLst>
                         <p:cond delay="indefinite"/>
                       </p:stCondLst>
                       <p:childTnLst>
                         <p:par>
-                          <p:cTn fill="hold">
+                          <p:cTn id="14" fill="hold">
                             <p:stCondLst>
                               <p:cond delay="0"/>
                             </p:stCondLst>
                             <p:childTnLst>
                               <p:par>
-                                <p:cTn fill="hold" nodeType="clickEffect" presetClass="entr" presetID="1" presetSubtype="0">
+                                <p:cTn id="15" presetID="1" presetClass="entr" presetSubtype="0" fill="hold" nodeType="clickEffect">
                                   <p:stCondLst>
                                     <p:cond delay="0"/>
                                   </p:stCondLst>
                                   <p:childTnLst>
                                     <p:set>
                                       <p:cBhvr>
-                                        <p:cTn dur="1" fill="hold">
+                                        <p:cTn id="16" dur="1" fill="hold">
                                           <p:stCondLst>
                                             <p:cond delay="0"/>
                                           </p:stCondLst>
@@ -9116,14 +9318,14 @@
                                 </p:cTn>
                               </p:par>
                               <p:par>
-                                <p:cTn fill="hold" nodeType="withEffect" presetClass="exit" presetID="1" presetSubtype="0">
+                                <p:cTn id="17" presetID="1" presetClass="exit" presetSubtype="0" fill="hold" nodeType="withEffect">
                                   <p:stCondLst>
                                     <p:cond delay="0"/>
                                   </p:stCondLst>
                                   <p:childTnLst>
                                     <p:set>
                                       <p:cBhvr>
-                                        <p:cTn dur="1" fill="hold">
+                                        <p:cTn id="18" dur="1" fill="hold">
                                           <p:stCondLst>
                                             <p:cond delay="0"/>
                                           </p:stCondLst>
@@ -9151,14 +9353,14 @@
                 </p:childTnLst>
               </p:cTn>
               <p:prevCondLst>
-                <p:cond evt="onPrev">
+                <p:cond evt="onPrev" delay="0">
                   <p:tgtEl>
                     <p:sldTgt/>
                   </p:tgtEl>
                 </p:cond>
               </p:prevCondLst>
               <p:nextCondLst>
-                <p:cond evt="onNext">
+                <p:cond evt="onNext" delay="0">
                   <p:tgtEl>
                     <p:sldTgt/>
                   </p:tgtEl>
@@ -9174,11 +9376,11 @@
 </file>
 
 <file path=ppt/slides/slide13.xml><?xml version="1.0" encoding="utf-8"?>
-<p:sld xmlns:a="http://schemas.openxmlformats.org/drawingml/2006/main" xmlns:r="http://schemas.openxmlformats.org/officeDocument/2006/relationships" xmlns:mc="http://schemas.openxmlformats.org/markup-compatibility/2006" xmlns:mv="urn:schemas-microsoft-com:mac:vml" xmlns:p="http://schemas.openxmlformats.org/presentationml/2006/main" xmlns:c="http://schemas.openxmlformats.org/drawingml/2006/chart" xmlns:dgm="http://schemas.openxmlformats.org/drawingml/2006/diagram" xmlns:o="urn:schemas-microsoft-com:office:office" xmlns:v="urn:schemas-microsoft-com:vml" xmlns:pvml="urn:schemas-microsoft-com:office:powerpoint" xmlns:com="http://schemas.openxmlformats.org/drawingml/2006/compatibility" xmlns:p14="http://schemas.microsoft.com/office/powerpoint/2010/main" xmlns:p15="http://schemas.microsoft.com/office/powerpoint/2012/main" xmlns:ahyp="http://schemas.microsoft.com/office/drawing/2018/hyperlinkcolor">
+<p:sld xmlns:a="http://schemas.openxmlformats.org/drawingml/2006/main" xmlns:r="http://schemas.openxmlformats.org/officeDocument/2006/relationships" xmlns:p="http://schemas.openxmlformats.org/presentationml/2006/main">
   <p:cSld>
     <p:spTree>
       <p:nvGrpSpPr>
-        <p:cNvPr id="144" name="Shape 144"/>
+        <p:cNvPr id="1" name="Shape 144"/>
         <p:cNvGrpSpPr/>
         <p:nvPr/>
       </p:nvGrpSpPr>
@@ -9193,7 +9395,9 @@
       <p:sp>
         <p:nvSpPr>
           <p:cNvPr id="145" name="Google Shape;145;p25"/>
-          <p:cNvSpPr txBox="1"/>
+          <p:cNvSpPr txBox="1">
+            <a:spLocks noGrp="1"/>
+          </p:cNvSpPr>
           <p:nvPr>
             <p:ph type="title"/>
           </p:nvPr>
@@ -9208,12 +9412,12 @@
           </a:prstGeom>
         </p:spPr>
         <p:txBody>
-          <a:bodyPr anchorCtr="0" anchor="t" bIns="91425" lIns="91425" spcFirstLastPara="1" rIns="91425" wrap="square" tIns="91425">
+          <a:bodyPr spcFirstLastPara="1" wrap="square" lIns="91425" tIns="91425" rIns="91425" bIns="91425" anchor="t" anchorCtr="0">
             <a:normAutofit fontScale="90000"/>
           </a:bodyPr>
           <a:lstStyle/>
           <a:p>
-            <a:pPr indent="0" lvl="0" marL="0" rtl="0" algn="l">
+            <a:pPr marL="0" lvl="0" indent="0" algn="l" rtl="0">
               <a:spcBef>
                 <a:spcPts val="0"/>
               </a:spcBef>
@@ -9247,9 +9451,11 @@
       <p:sp>
         <p:nvSpPr>
           <p:cNvPr id="146" name="Google Shape;146;p25"/>
-          <p:cNvSpPr txBox="1"/>
+          <p:cNvSpPr txBox="1">
+            <a:spLocks noGrp="1"/>
+          </p:cNvSpPr>
           <p:nvPr>
-            <p:ph idx="1" type="body"/>
+            <p:ph type="body" idx="1"/>
           </p:nvPr>
         </p:nvSpPr>
         <p:spPr>
@@ -9262,12 +9468,12 @@
           </a:prstGeom>
         </p:spPr>
         <p:txBody>
-          <a:bodyPr anchorCtr="0" anchor="t" bIns="91425" lIns="91425" spcFirstLastPara="1" rIns="91425" wrap="square" tIns="91425">
+          <a:bodyPr spcFirstLastPara="1" wrap="square" lIns="91425" tIns="91425" rIns="91425" bIns="91425" anchor="t" anchorCtr="0">
             <a:normAutofit/>
           </a:bodyPr>
           <a:lstStyle/>
           <a:p>
-            <a:pPr indent="0" lvl="0" marL="0" rtl="0" algn="l">
+            <a:pPr marL="0" lvl="0" indent="0" algn="l" rtl="0">
               <a:spcBef>
                 <a:spcPts val="0"/>
               </a:spcBef>
@@ -9276,9 +9482,6 @@
               </a:spcAft>
               <a:buNone/>
             </a:pPr>
-            <a:r>
-              <a:t/>
-            </a:r>
             <a:endParaRPr/>
           </a:p>
         </p:txBody>
@@ -9326,23 +9529,23 @@
             <a:avLst/>
           </a:prstGeom>
           <a:noFill/>
-          <a:ln cap="flat" cmpd="sng" w="19050">
+          <a:ln w="19050" cap="flat" cmpd="sng">
             <a:solidFill>
               <a:srgbClr val="FF0000"/>
             </a:solidFill>
             <a:prstDash val="solid"/>
             <a:round/>
-            <a:headEnd len="sm" w="sm" type="none"/>
-            <a:tailEnd len="sm" w="sm" type="none"/>
+            <a:headEnd type="none" w="sm" len="sm"/>
+            <a:tailEnd type="none" w="sm" len="sm"/>
           </a:ln>
         </p:spPr>
         <p:txBody>
-          <a:bodyPr anchorCtr="0" anchor="ctr" bIns="91425" lIns="91425" spcFirstLastPara="1" rIns="91425" wrap="square" tIns="91425">
+          <a:bodyPr spcFirstLastPara="1" wrap="square" lIns="91425" tIns="91425" rIns="91425" bIns="91425" anchor="ctr" anchorCtr="0">
             <a:noAutofit/>
           </a:bodyPr>
           <a:lstStyle/>
           <a:p>
-            <a:pPr indent="0" lvl="0" marL="0" rtl="0" algn="ctr">
+            <a:pPr marL="0" lvl="0" indent="0" algn="ctr" rtl="0">
               <a:spcBef>
                 <a:spcPts val="0"/>
               </a:spcBef>
@@ -9351,9 +9554,6 @@
               </a:spcAft>
               <a:buNone/>
             </a:pPr>
-            <a:r>
-              <a:t/>
-            </a:r>
             <a:endParaRPr/>
           </a:p>
         </p:txBody>
@@ -9366,32 +9566,32 @@
   <p:timing>
     <p:tnLst>
       <p:par>
-        <p:cTn dur="indefinite" nodeType="tmRoot" restart="never">
+        <p:cTn id="1" dur="indefinite" restart="never" nodeType="tmRoot">
           <p:childTnLst>
             <p:seq concurrent="1" nextAc="seek">
-              <p:cTn dur="indefinite" id="2" nodeType="mainSeq">
+              <p:cTn id="2" dur="indefinite" nodeType="mainSeq">
                 <p:childTnLst>
                   <p:par>
-                    <p:cTn fill="hold">
+                    <p:cTn id="3" fill="hold">
                       <p:stCondLst>
                         <p:cond delay="indefinite"/>
                       </p:stCondLst>
                       <p:childTnLst>
                         <p:par>
-                          <p:cTn fill="hold">
+                          <p:cTn id="4" fill="hold">
                             <p:stCondLst>
                               <p:cond delay="0"/>
                             </p:stCondLst>
                             <p:childTnLst>
                               <p:par>
-                                <p:cTn fill="hold" nodeType="clickEffect" presetClass="entr" presetID="1" presetSubtype="0">
+                                <p:cTn id="5" presetID="1" presetClass="entr" presetSubtype="0" fill="hold" nodeType="clickEffect">
                                   <p:stCondLst>
                                     <p:cond delay="0"/>
                                   </p:stCondLst>
                                   <p:childTnLst>
                                     <p:set>
                                       <p:cBhvr>
-                                        <p:cTn dur="1" fill="hold">
+                                        <p:cTn id="6" dur="1" fill="hold">
                                           <p:stCondLst>
                                             <p:cond delay="0"/>
                                           </p:stCondLst>
@@ -9419,14 +9619,14 @@
                 </p:childTnLst>
               </p:cTn>
               <p:prevCondLst>
-                <p:cond evt="onPrev">
+                <p:cond evt="onPrev" delay="0">
                   <p:tgtEl>
                     <p:sldTgt/>
                   </p:tgtEl>
                 </p:cond>
               </p:prevCondLst>
               <p:nextCondLst>
-                <p:cond evt="onNext">
+                <p:cond evt="onNext" delay="0">
                   <p:tgtEl>
                     <p:sldTgt/>
                   </p:tgtEl>
@@ -9442,11 +9642,11 @@
 </file>
 
 <file path=ppt/slides/slide14.xml><?xml version="1.0" encoding="utf-8"?>
-<p:sld xmlns:a="http://schemas.openxmlformats.org/drawingml/2006/main" xmlns:r="http://schemas.openxmlformats.org/officeDocument/2006/relationships" xmlns:mc="http://schemas.openxmlformats.org/markup-compatibility/2006" xmlns:mv="urn:schemas-microsoft-com:mac:vml" xmlns:p="http://schemas.openxmlformats.org/presentationml/2006/main" xmlns:c="http://schemas.openxmlformats.org/drawingml/2006/chart" xmlns:dgm="http://schemas.openxmlformats.org/drawingml/2006/diagram" xmlns:o="urn:schemas-microsoft-com:office:office" xmlns:v="urn:schemas-microsoft-com:vml" xmlns:pvml="urn:schemas-microsoft-com:office:powerpoint" xmlns:com="http://schemas.openxmlformats.org/drawingml/2006/compatibility" xmlns:p14="http://schemas.microsoft.com/office/powerpoint/2010/main" xmlns:p15="http://schemas.microsoft.com/office/powerpoint/2012/main" xmlns:ahyp="http://schemas.microsoft.com/office/drawing/2018/hyperlinkcolor">
+<p:sld xmlns:a="http://schemas.openxmlformats.org/drawingml/2006/main" xmlns:r="http://schemas.openxmlformats.org/officeDocument/2006/relationships" xmlns:p="http://schemas.openxmlformats.org/presentationml/2006/main">
   <p:cSld>
     <p:spTree>
       <p:nvGrpSpPr>
-        <p:cNvPr id="152" name="Shape 152"/>
+        <p:cNvPr id="1" name="Shape 152"/>
         <p:cNvGrpSpPr/>
         <p:nvPr/>
       </p:nvGrpSpPr>
@@ -9461,7 +9661,9 @@
       <p:sp>
         <p:nvSpPr>
           <p:cNvPr id="153" name="Google Shape;153;p26"/>
-          <p:cNvSpPr txBox="1"/>
+          <p:cNvSpPr txBox="1">
+            <a:spLocks noGrp="1"/>
+          </p:cNvSpPr>
           <p:nvPr>
             <p:ph type="title"/>
           </p:nvPr>
@@ -9476,12 +9678,12 @@
           </a:prstGeom>
         </p:spPr>
         <p:txBody>
-          <a:bodyPr anchorCtr="0" anchor="t" bIns="91425" lIns="91425" spcFirstLastPara="1" rIns="91425" wrap="square" tIns="91425">
+          <a:bodyPr spcFirstLastPara="1" wrap="square" lIns="91425" tIns="91425" rIns="91425" bIns="91425" anchor="t" anchorCtr="0">
             <a:normAutofit fontScale="90000"/>
           </a:bodyPr>
           <a:lstStyle/>
           <a:p>
-            <a:pPr indent="0" lvl="0" marL="0" rtl="0" algn="l">
+            <a:pPr marL="0" lvl="0" indent="0" algn="l" rtl="0">
               <a:spcBef>
                 <a:spcPts val="0"/>
               </a:spcBef>
@@ -9514,9 +9716,11 @@
       <p:sp>
         <p:nvSpPr>
           <p:cNvPr id="154" name="Google Shape;154;p26"/>
-          <p:cNvSpPr txBox="1"/>
+          <p:cNvSpPr txBox="1">
+            <a:spLocks noGrp="1"/>
+          </p:cNvSpPr>
           <p:nvPr>
-            <p:ph idx="1" type="body"/>
+            <p:ph type="body" idx="1"/>
           </p:nvPr>
         </p:nvSpPr>
         <p:spPr>
@@ -9529,12 +9733,12 @@
           </a:prstGeom>
         </p:spPr>
         <p:txBody>
-          <a:bodyPr anchorCtr="0" anchor="t" bIns="91425" lIns="91425" spcFirstLastPara="1" rIns="91425" wrap="square" tIns="91425">
+          <a:bodyPr spcFirstLastPara="1" wrap="square" lIns="91425" tIns="91425" rIns="91425" bIns="91425" anchor="t" anchorCtr="0">
             <a:normAutofit/>
           </a:bodyPr>
           <a:lstStyle/>
           <a:p>
-            <a:pPr indent="0" lvl="0" marL="0" rtl="0" algn="l">
+            <a:pPr marL="0" lvl="0" indent="0" algn="l" rtl="0">
               <a:spcBef>
                 <a:spcPts val="0"/>
               </a:spcBef>
@@ -9543,9 +9747,6 @@
               </a:spcAft>
               <a:buNone/>
             </a:pPr>
-            <a:r>
-              <a:t/>
-            </a:r>
             <a:endParaRPr/>
           </a:p>
         </p:txBody>
@@ -9593,23 +9794,23 @@
             <a:avLst/>
           </a:prstGeom>
           <a:noFill/>
-          <a:ln cap="flat" cmpd="sng" w="19050">
+          <a:ln w="19050" cap="flat" cmpd="sng">
             <a:solidFill>
               <a:srgbClr val="FF0000"/>
             </a:solidFill>
             <a:prstDash val="solid"/>
             <a:round/>
-            <a:headEnd len="sm" w="sm" type="none"/>
-            <a:tailEnd len="sm" w="sm" type="none"/>
+            <a:headEnd type="none" w="sm" len="sm"/>
+            <a:tailEnd type="none" w="sm" len="sm"/>
           </a:ln>
         </p:spPr>
         <p:txBody>
-          <a:bodyPr anchorCtr="0" anchor="ctr" bIns="91425" lIns="91425" spcFirstLastPara="1" rIns="91425" wrap="square" tIns="91425">
+          <a:bodyPr spcFirstLastPara="1" wrap="square" lIns="91425" tIns="91425" rIns="91425" bIns="91425" anchor="ctr" anchorCtr="0">
             <a:noAutofit/>
           </a:bodyPr>
           <a:lstStyle/>
           <a:p>
-            <a:pPr indent="0" lvl="0" marL="0" rtl="0" algn="ctr">
+            <a:pPr marL="0" lvl="0" indent="0" algn="ctr" rtl="0">
               <a:spcBef>
                 <a:spcPts val="0"/>
               </a:spcBef>
@@ -9618,9 +9819,6 @@
               </a:spcAft>
               <a:buNone/>
             </a:pPr>
-            <a:r>
-              <a:t/>
-            </a:r>
             <a:endParaRPr/>
           </a:p>
         </p:txBody>
@@ -9633,32 +9831,32 @@
   <p:timing>
     <p:tnLst>
       <p:par>
-        <p:cTn dur="indefinite" nodeType="tmRoot" restart="never">
+        <p:cTn id="1" dur="indefinite" restart="never" nodeType="tmRoot">
           <p:childTnLst>
             <p:seq concurrent="1" nextAc="seek">
-              <p:cTn dur="indefinite" id="2" nodeType="mainSeq">
+              <p:cTn id="2" dur="indefinite" nodeType="mainSeq">
                 <p:childTnLst>
                   <p:par>
-                    <p:cTn fill="hold">
+                    <p:cTn id="3" fill="hold">
                       <p:stCondLst>
                         <p:cond delay="indefinite"/>
                       </p:stCondLst>
                       <p:childTnLst>
                         <p:par>
-                          <p:cTn fill="hold">
+                          <p:cTn id="4" fill="hold">
                             <p:stCondLst>
                               <p:cond delay="0"/>
                             </p:stCondLst>
                             <p:childTnLst>
                               <p:par>
-                                <p:cTn fill="hold" nodeType="clickEffect" presetClass="entr" presetID="1" presetSubtype="0">
+                                <p:cTn id="5" presetID="1" presetClass="entr" presetSubtype="0" fill="hold" nodeType="clickEffect">
                                   <p:stCondLst>
                                     <p:cond delay="0"/>
                                   </p:stCondLst>
                                   <p:childTnLst>
                                     <p:set>
                                       <p:cBhvr>
-                                        <p:cTn dur="1" fill="hold">
+                                        <p:cTn id="6" dur="1" fill="hold">
                                           <p:stCondLst>
                                             <p:cond delay="0"/>
                                           </p:stCondLst>
@@ -9686,14 +9884,14 @@
                 </p:childTnLst>
               </p:cTn>
               <p:prevCondLst>
-                <p:cond evt="onPrev">
+                <p:cond evt="onPrev" delay="0">
                   <p:tgtEl>
                     <p:sldTgt/>
                   </p:tgtEl>
                 </p:cond>
               </p:prevCondLst>
               <p:nextCondLst>
-                <p:cond evt="onNext">
+                <p:cond evt="onNext" delay="0">
                   <p:tgtEl>
                     <p:sldTgt/>
                   </p:tgtEl>
@@ -9709,11 +9907,11 @@
 </file>
 
 <file path=ppt/slides/slide15.xml><?xml version="1.0" encoding="utf-8"?>
-<p:sld xmlns:a="http://schemas.openxmlformats.org/drawingml/2006/main" xmlns:r="http://schemas.openxmlformats.org/officeDocument/2006/relationships" xmlns:mc="http://schemas.openxmlformats.org/markup-compatibility/2006" xmlns:mv="urn:schemas-microsoft-com:mac:vml" xmlns:p="http://schemas.openxmlformats.org/presentationml/2006/main" xmlns:c="http://schemas.openxmlformats.org/drawingml/2006/chart" xmlns:dgm="http://schemas.openxmlformats.org/drawingml/2006/diagram" xmlns:o="urn:schemas-microsoft-com:office:office" xmlns:v="urn:schemas-microsoft-com:vml" xmlns:pvml="urn:schemas-microsoft-com:office:powerpoint" xmlns:com="http://schemas.openxmlformats.org/drawingml/2006/compatibility" xmlns:p14="http://schemas.microsoft.com/office/powerpoint/2010/main" xmlns:p15="http://schemas.microsoft.com/office/powerpoint/2012/main" xmlns:ahyp="http://schemas.microsoft.com/office/drawing/2018/hyperlinkcolor">
+<p:sld xmlns:a="http://schemas.openxmlformats.org/drawingml/2006/main" xmlns:r="http://schemas.openxmlformats.org/officeDocument/2006/relationships" xmlns:p="http://schemas.openxmlformats.org/presentationml/2006/main">
   <p:cSld>
     <p:spTree>
       <p:nvGrpSpPr>
-        <p:cNvPr id="160" name="Shape 160"/>
+        <p:cNvPr id="1" name="Shape 160"/>
         <p:cNvGrpSpPr/>
         <p:nvPr/>
       </p:nvGrpSpPr>
@@ -9728,7 +9926,9 @@
       <p:sp>
         <p:nvSpPr>
           <p:cNvPr id="161" name="Google Shape;161;p27"/>
-          <p:cNvSpPr txBox="1"/>
+          <p:cNvSpPr txBox="1">
+            <a:spLocks noGrp="1"/>
+          </p:cNvSpPr>
           <p:nvPr>
             <p:ph type="title"/>
           </p:nvPr>
@@ -9743,12 +9943,12 @@
           </a:prstGeom>
         </p:spPr>
         <p:txBody>
-          <a:bodyPr anchorCtr="0" anchor="t" bIns="91425" lIns="91425" spcFirstLastPara="1" rIns="91425" wrap="square" tIns="91425">
+          <a:bodyPr spcFirstLastPara="1" wrap="square" lIns="91425" tIns="91425" rIns="91425" bIns="91425" anchor="t" anchorCtr="0">
             <a:normAutofit fontScale="90000"/>
           </a:bodyPr>
           <a:lstStyle/>
           <a:p>
-            <a:pPr indent="0" lvl="0" marL="0" rtl="0" algn="l">
+            <a:pPr marL="0" lvl="0" indent="0" algn="l" rtl="0">
               <a:spcBef>
                 <a:spcPts val="0"/>
               </a:spcBef>
@@ -9768,9 +9968,11 @@
       <p:sp>
         <p:nvSpPr>
           <p:cNvPr id="162" name="Google Shape;162;p27"/>
-          <p:cNvSpPr txBox="1"/>
+          <p:cNvSpPr txBox="1">
+            <a:spLocks noGrp="1"/>
+          </p:cNvSpPr>
           <p:nvPr>
-            <p:ph idx="1" type="body"/>
+            <p:ph type="body" idx="1"/>
           </p:nvPr>
         </p:nvSpPr>
         <p:spPr>
@@ -9783,12 +9985,12 @@
           </a:prstGeom>
         </p:spPr>
         <p:txBody>
-          <a:bodyPr anchorCtr="0" anchor="t" bIns="91425" lIns="91425" spcFirstLastPara="1" rIns="91425" wrap="square" tIns="91425">
+          <a:bodyPr spcFirstLastPara="1" wrap="square" lIns="91425" tIns="91425" rIns="91425" bIns="91425" anchor="t" anchorCtr="0">
             <a:normAutofit/>
           </a:bodyPr>
           <a:lstStyle/>
           <a:p>
-            <a:pPr indent="0" lvl="0" marL="0" rtl="0" algn="l">
+            <a:pPr marL="0" lvl="0" indent="0" algn="l" rtl="0">
               <a:spcBef>
                 <a:spcPts val="0"/>
               </a:spcBef>
@@ -9797,9 +9999,6 @@
               </a:spcAft>
               <a:buNone/>
             </a:pPr>
-            <a:r>
-              <a:t/>
-            </a:r>
             <a:endParaRPr/>
           </a:p>
         </p:txBody>
@@ -9814,7 +10013,7 @@
           <a:blip r:embed="rId3">
             <a:alphaModFix/>
           </a:blip>
-          <a:srcRect b="0" l="4627" r="4636" t="0"/>
+          <a:srcRect l="4627" r="4636"/>
           <a:stretch/>
         </p:blipFill>
         <p:spPr>
@@ -9846,23 +10045,23 @@
             <a:avLst/>
           </a:prstGeom>
           <a:noFill/>
-          <a:ln cap="flat" cmpd="sng" w="19050">
+          <a:ln w="19050" cap="flat" cmpd="sng">
             <a:solidFill>
               <a:srgbClr val="FF0000"/>
             </a:solidFill>
             <a:prstDash val="solid"/>
             <a:round/>
-            <a:headEnd len="sm" w="sm" type="none"/>
-            <a:tailEnd len="sm" w="sm" type="none"/>
+            <a:headEnd type="none" w="sm" len="sm"/>
+            <a:tailEnd type="none" w="sm" len="sm"/>
           </a:ln>
         </p:spPr>
         <p:txBody>
-          <a:bodyPr anchorCtr="0" anchor="ctr" bIns="91425" lIns="91425" spcFirstLastPara="1" rIns="91425" wrap="square" tIns="91425">
+          <a:bodyPr spcFirstLastPara="1" wrap="square" lIns="91425" tIns="91425" rIns="91425" bIns="91425" anchor="ctr" anchorCtr="0">
             <a:noAutofit/>
           </a:bodyPr>
           <a:lstStyle/>
           <a:p>
-            <a:pPr indent="0" lvl="0" marL="0" rtl="0" algn="ctr">
+            <a:pPr marL="0" lvl="0" indent="0" algn="ctr" rtl="0">
               <a:spcBef>
                 <a:spcPts val="0"/>
               </a:spcBef>
@@ -9871,9 +10070,6 @@
               </a:spcAft>
               <a:buNone/>
             </a:pPr>
-            <a:r>
-              <a:t/>
-            </a:r>
             <a:endParaRPr/>
           </a:p>
         </p:txBody>
@@ -9886,32 +10082,32 @@
   <p:timing>
     <p:tnLst>
       <p:par>
-        <p:cTn dur="indefinite" nodeType="tmRoot" restart="never">
+        <p:cTn id="1" dur="indefinite" restart="never" nodeType="tmRoot">
           <p:childTnLst>
             <p:seq concurrent="1" nextAc="seek">
-              <p:cTn dur="indefinite" id="2" nodeType="mainSeq">
+              <p:cTn id="2" dur="indefinite" nodeType="mainSeq">
                 <p:childTnLst>
                   <p:par>
-                    <p:cTn fill="hold">
+                    <p:cTn id="3" fill="hold">
                       <p:stCondLst>
                         <p:cond delay="indefinite"/>
                       </p:stCondLst>
                       <p:childTnLst>
                         <p:par>
-                          <p:cTn fill="hold">
+                          <p:cTn id="4" fill="hold">
                             <p:stCondLst>
                               <p:cond delay="0"/>
                             </p:stCondLst>
                             <p:childTnLst>
                               <p:par>
-                                <p:cTn fill="hold" nodeType="clickEffect" presetClass="entr" presetID="1" presetSubtype="0">
+                                <p:cTn id="5" presetID="1" presetClass="entr" presetSubtype="0" fill="hold" nodeType="clickEffect">
                                   <p:stCondLst>
                                     <p:cond delay="0"/>
                                   </p:stCondLst>
                                   <p:childTnLst>
                                     <p:set>
                                       <p:cBhvr>
-                                        <p:cTn dur="1" fill="hold">
+                                        <p:cTn id="6" dur="1" fill="hold">
                                           <p:stCondLst>
                                             <p:cond delay="0"/>
                                           </p:stCondLst>
@@ -9939,14 +10135,14 @@
                 </p:childTnLst>
               </p:cTn>
               <p:prevCondLst>
-                <p:cond evt="onPrev">
+                <p:cond evt="onPrev" delay="0">
                   <p:tgtEl>
                     <p:sldTgt/>
                   </p:tgtEl>
                 </p:cond>
               </p:prevCondLst>
               <p:nextCondLst>
-                <p:cond evt="onNext">
+                <p:cond evt="onNext" delay="0">
                   <p:tgtEl>
                     <p:sldTgt/>
                   </p:tgtEl>
@@ -9962,11 +10158,11 @@
 </file>
 
 <file path=ppt/slides/slide16.xml><?xml version="1.0" encoding="utf-8"?>
-<p:sld xmlns:a="http://schemas.openxmlformats.org/drawingml/2006/main" xmlns:r="http://schemas.openxmlformats.org/officeDocument/2006/relationships" xmlns:mc="http://schemas.openxmlformats.org/markup-compatibility/2006" xmlns:mv="urn:schemas-microsoft-com:mac:vml" xmlns:p="http://schemas.openxmlformats.org/presentationml/2006/main" xmlns:c="http://schemas.openxmlformats.org/drawingml/2006/chart" xmlns:dgm="http://schemas.openxmlformats.org/drawingml/2006/diagram" xmlns:o="urn:schemas-microsoft-com:office:office" xmlns:v="urn:schemas-microsoft-com:vml" xmlns:pvml="urn:schemas-microsoft-com:office:powerpoint" xmlns:com="http://schemas.openxmlformats.org/drawingml/2006/compatibility" xmlns:p14="http://schemas.microsoft.com/office/powerpoint/2010/main" xmlns:p15="http://schemas.microsoft.com/office/powerpoint/2012/main" xmlns:ahyp="http://schemas.microsoft.com/office/drawing/2018/hyperlinkcolor">
+<p:sld xmlns:a="http://schemas.openxmlformats.org/drawingml/2006/main" xmlns:r="http://schemas.openxmlformats.org/officeDocument/2006/relationships" xmlns:p="http://schemas.openxmlformats.org/presentationml/2006/main">
   <p:cSld>
     <p:spTree>
       <p:nvGrpSpPr>
-        <p:cNvPr id="168" name="Shape 168"/>
+        <p:cNvPr id="1" name="Shape 168"/>
         <p:cNvGrpSpPr/>
         <p:nvPr/>
       </p:nvGrpSpPr>
@@ -9981,7 +10177,9 @@
       <p:sp>
         <p:nvSpPr>
           <p:cNvPr id="169" name="Google Shape;169;p28"/>
-          <p:cNvSpPr txBox="1"/>
+          <p:cNvSpPr txBox="1">
+            <a:spLocks noGrp="1"/>
+          </p:cNvSpPr>
           <p:nvPr>
             <p:ph type="title"/>
           </p:nvPr>
@@ -9996,12 +10194,12 @@
           </a:prstGeom>
         </p:spPr>
         <p:txBody>
-          <a:bodyPr anchorCtr="0" anchor="t" bIns="91425" lIns="91425" spcFirstLastPara="1" rIns="91425" wrap="square" tIns="91425">
+          <a:bodyPr spcFirstLastPara="1" wrap="square" lIns="91425" tIns="91425" rIns="91425" bIns="91425" anchor="t" anchorCtr="0">
             <a:normAutofit fontScale="90000"/>
           </a:bodyPr>
           <a:lstStyle/>
           <a:p>
-            <a:pPr indent="0" lvl="0" marL="0" rtl="0" algn="l">
+            <a:pPr marL="0" lvl="0" indent="0" algn="l" rtl="0">
               <a:spcBef>
                 <a:spcPts val="0"/>
               </a:spcBef>
@@ -10034,9 +10232,11 @@
       <p:sp>
         <p:nvSpPr>
           <p:cNvPr id="170" name="Google Shape;170;p28"/>
-          <p:cNvSpPr txBox="1"/>
+          <p:cNvSpPr txBox="1">
+            <a:spLocks noGrp="1"/>
+          </p:cNvSpPr>
           <p:nvPr>
-            <p:ph idx="1" type="body"/>
+            <p:ph type="body" idx="1"/>
           </p:nvPr>
         </p:nvSpPr>
         <p:spPr>
@@ -10049,12 +10249,12 @@
           </a:prstGeom>
         </p:spPr>
         <p:txBody>
-          <a:bodyPr anchorCtr="0" anchor="t" bIns="91425" lIns="91425" spcFirstLastPara="1" rIns="91425" wrap="square" tIns="91425">
+          <a:bodyPr spcFirstLastPara="1" wrap="square" lIns="91425" tIns="91425" rIns="91425" bIns="91425" anchor="t" anchorCtr="0">
             <a:normAutofit/>
           </a:bodyPr>
           <a:lstStyle/>
           <a:p>
-            <a:pPr indent="0" lvl="0" marL="0" rtl="0" algn="l">
+            <a:pPr marL="0" lvl="0" indent="0" algn="l" rtl="0">
               <a:spcBef>
                 <a:spcPts val="0"/>
               </a:spcBef>
@@ -10063,9 +10263,6 @@
               </a:spcAft>
               <a:buNone/>
             </a:pPr>
-            <a:r>
-              <a:t/>
-            </a:r>
             <a:endParaRPr/>
           </a:p>
         </p:txBody>
@@ -10080,7 +10277,7 @@
           <a:blip r:embed="rId3">
             <a:alphaModFix/>
           </a:blip>
-          <a:srcRect b="357" l="0" r="0" t="367"/>
+          <a:srcRect t="367" b="357"/>
           <a:stretch/>
         </p:blipFill>
         <p:spPr>
@@ -10112,23 +10309,23 @@
             <a:avLst/>
           </a:prstGeom>
           <a:noFill/>
-          <a:ln cap="flat" cmpd="sng" w="19050">
+          <a:ln w="19050" cap="flat" cmpd="sng">
             <a:solidFill>
               <a:srgbClr val="FF0000"/>
             </a:solidFill>
             <a:prstDash val="solid"/>
             <a:round/>
-            <a:headEnd len="sm" w="sm" type="none"/>
-            <a:tailEnd len="sm" w="sm" type="none"/>
+            <a:headEnd type="none" w="sm" len="sm"/>
+            <a:tailEnd type="none" w="sm" len="sm"/>
           </a:ln>
         </p:spPr>
         <p:txBody>
-          <a:bodyPr anchorCtr="0" anchor="ctr" bIns="91425" lIns="91425" spcFirstLastPara="1" rIns="91425" wrap="square" tIns="91425">
+          <a:bodyPr spcFirstLastPara="1" wrap="square" lIns="91425" tIns="91425" rIns="91425" bIns="91425" anchor="ctr" anchorCtr="0">
             <a:noAutofit/>
           </a:bodyPr>
           <a:lstStyle/>
           <a:p>
-            <a:pPr indent="0" lvl="0" marL="0" rtl="0" algn="ctr">
+            <a:pPr marL="0" lvl="0" indent="0" algn="ctr" rtl="0">
               <a:spcBef>
                 <a:spcPts val="0"/>
               </a:spcBef>
@@ -10137,9 +10334,6 @@
               </a:spcAft>
               <a:buNone/>
             </a:pPr>
-            <a:r>
-              <a:t/>
-            </a:r>
             <a:endParaRPr/>
           </a:p>
         </p:txBody>
@@ -10159,23 +10353,23 @@
             <a:avLst/>
           </a:prstGeom>
           <a:noFill/>
-          <a:ln cap="flat" cmpd="sng" w="19050">
+          <a:ln w="19050" cap="flat" cmpd="sng">
             <a:solidFill>
               <a:srgbClr val="FF0000"/>
             </a:solidFill>
             <a:prstDash val="solid"/>
             <a:round/>
-            <a:headEnd len="sm" w="sm" type="none"/>
-            <a:tailEnd len="sm" w="sm" type="none"/>
+            <a:headEnd type="none" w="sm" len="sm"/>
+            <a:tailEnd type="none" w="sm" len="sm"/>
           </a:ln>
         </p:spPr>
         <p:txBody>
-          <a:bodyPr anchorCtr="0" anchor="ctr" bIns="91425" lIns="91425" spcFirstLastPara="1" rIns="91425" wrap="square" tIns="91425">
+          <a:bodyPr spcFirstLastPara="1" wrap="square" lIns="91425" tIns="91425" rIns="91425" bIns="91425" anchor="ctr" anchorCtr="0">
             <a:noAutofit/>
           </a:bodyPr>
           <a:lstStyle/>
           <a:p>
-            <a:pPr indent="0" lvl="0" marL="0" rtl="0" algn="ctr">
+            <a:pPr marL="0" lvl="0" indent="0" algn="ctr" rtl="0">
               <a:spcBef>
                 <a:spcPts val="0"/>
               </a:spcBef>
@@ -10184,9 +10378,6 @@
               </a:spcAft>
               <a:buNone/>
             </a:pPr>
-            <a:r>
-              <a:t/>
-            </a:r>
             <a:endParaRPr/>
           </a:p>
         </p:txBody>
@@ -10199,32 +10390,32 @@
   <p:timing>
     <p:tnLst>
       <p:par>
-        <p:cTn dur="indefinite" nodeType="tmRoot" restart="never">
+        <p:cTn id="1" dur="indefinite" restart="never" nodeType="tmRoot">
           <p:childTnLst>
             <p:seq concurrent="1" nextAc="seek">
-              <p:cTn dur="indefinite" id="2" nodeType="mainSeq">
+              <p:cTn id="2" dur="indefinite" nodeType="mainSeq">
                 <p:childTnLst>
                   <p:par>
-                    <p:cTn fill="hold">
+                    <p:cTn id="3" fill="hold">
                       <p:stCondLst>
                         <p:cond delay="indefinite"/>
                       </p:stCondLst>
                       <p:childTnLst>
                         <p:par>
-                          <p:cTn fill="hold">
+                          <p:cTn id="4" fill="hold">
                             <p:stCondLst>
                               <p:cond delay="0"/>
                             </p:stCondLst>
                             <p:childTnLst>
                               <p:par>
-                                <p:cTn fill="hold" nodeType="clickEffect" presetClass="entr" presetID="1" presetSubtype="0">
+                                <p:cTn id="5" presetID="1" presetClass="entr" presetSubtype="0" fill="hold" nodeType="clickEffect">
                                   <p:stCondLst>
                                     <p:cond delay="0"/>
                                   </p:stCondLst>
                                   <p:childTnLst>
                                     <p:set>
                                       <p:cBhvr>
-                                        <p:cTn dur="1" fill="hold">
+                                        <p:cTn id="6" dur="1" fill="hold">
                                           <p:stCondLst>
                                             <p:cond delay="0"/>
                                           </p:stCondLst>
@@ -10250,26 +10441,26 @@
                     </p:cTn>
                   </p:par>
                   <p:par>
-                    <p:cTn fill="hold">
+                    <p:cTn id="7" fill="hold">
                       <p:stCondLst>
                         <p:cond delay="indefinite"/>
                       </p:stCondLst>
                       <p:childTnLst>
                         <p:par>
-                          <p:cTn fill="hold">
+                          <p:cTn id="8" fill="hold">
                             <p:stCondLst>
                               <p:cond delay="0"/>
                             </p:stCondLst>
                             <p:childTnLst>
                               <p:par>
-                                <p:cTn fill="hold" nodeType="clickEffect" presetClass="entr" presetID="1" presetSubtype="0">
+                                <p:cTn id="9" presetID="1" presetClass="entr" presetSubtype="0" fill="hold" nodeType="clickEffect">
                                   <p:stCondLst>
                                     <p:cond delay="0"/>
                                   </p:stCondLst>
                                   <p:childTnLst>
                                     <p:set>
                                       <p:cBhvr>
-                                        <p:cTn dur="1" fill="hold">
+                                        <p:cTn id="10" dur="1" fill="hold">
                                           <p:stCondLst>
                                             <p:cond delay="0"/>
                                           </p:stCondLst>
@@ -10297,14 +10488,14 @@
                 </p:childTnLst>
               </p:cTn>
               <p:prevCondLst>
-                <p:cond evt="onPrev">
+                <p:cond evt="onPrev" delay="0">
                   <p:tgtEl>
                     <p:sldTgt/>
                   </p:tgtEl>
                 </p:cond>
               </p:prevCondLst>
               <p:nextCondLst>
-                <p:cond evt="onNext">
+                <p:cond evt="onNext" delay="0">
                   <p:tgtEl>
                     <p:sldTgt/>
                   </p:tgtEl>
@@ -10320,11 +10511,11 @@
 </file>
 
 <file path=ppt/slides/slide17.xml><?xml version="1.0" encoding="utf-8"?>
-<p:sld xmlns:a="http://schemas.openxmlformats.org/drawingml/2006/main" xmlns:r="http://schemas.openxmlformats.org/officeDocument/2006/relationships" xmlns:mc="http://schemas.openxmlformats.org/markup-compatibility/2006" xmlns:mv="urn:schemas-microsoft-com:mac:vml" xmlns:p="http://schemas.openxmlformats.org/presentationml/2006/main" xmlns:c="http://schemas.openxmlformats.org/drawingml/2006/chart" xmlns:dgm="http://schemas.openxmlformats.org/drawingml/2006/diagram" xmlns:o="urn:schemas-microsoft-com:office:office" xmlns:v="urn:schemas-microsoft-com:vml" xmlns:pvml="urn:schemas-microsoft-com:office:powerpoint" xmlns:com="http://schemas.openxmlformats.org/drawingml/2006/compatibility" xmlns:p14="http://schemas.microsoft.com/office/powerpoint/2010/main" xmlns:p15="http://schemas.microsoft.com/office/powerpoint/2012/main" xmlns:ahyp="http://schemas.microsoft.com/office/drawing/2018/hyperlinkcolor">
+<p:sld xmlns:a="http://schemas.openxmlformats.org/drawingml/2006/main" xmlns:r="http://schemas.openxmlformats.org/officeDocument/2006/relationships" xmlns:p="http://schemas.openxmlformats.org/presentationml/2006/main">
   <p:cSld>
     <p:spTree>
       <p:nvGrpSpPr>
-        <p:cNvPr id="177" name="Shape 177"/>
+        <p:cNvPr id="1" name="Shape 177"/>
         <p:cNvGrpSpPr/>
         <p:nvPr/>
       </p:nvGrpSpPr>
@@ -10339,7 +10530,9 @@
       <p:sp>
         <p:nvSpPr>
           <p:cNvPr id="178" name="Google Shape;178;p29"/>
-          <p:cNvSpPr txBox="1"/>
+          <p:cNvSpPr txBox="1">
+            <a:spLocks noGrp="1"/>
+          </p:cNvSpPr>
           <p:nvPr>
             <p:ph type="title"/>
           </p:nvPr>
@@ -10354,12 +10547,12 @@
           </a:prstGeom>
         </p:spPr>
         <p:txBody>
-          <a:bodyPr anchorCtr="0" anchor="t" bIns="91425" lIns="91425" spcFirstLastPara="1" rIns="91425" wrap="square" tIns="91425">
+          <a:bodyPr spcFirstLastPara="1" wrap="square" lIns="91425" tIns="91425" rIns="91425" bIns="91425" anchor="t" anchorCtr="0">
             <a:normAutofit fontScale="90000"/>
           </a:bodyPr>
           <a:lstStyle/>
           <a:p>
-            <a:pPr indent="0" lvl="0" marL="0" rtl="0" algn="l">
+            <a:pPr marL="0" lvl="0" indent="0" algn="l" rtl="0">
               <a:spcBef>
                 <a:spcPts val="0"/>
               </a:spcBef>
@@ -10385,11 +10578,11 @@
 </file>
 
 <file path=ppt/slides/slide18.xml><?xml version="1.0" encoding="utf-8"?>
-<p:sld xmlns:a="http://schemas.openxmlformats.org/drawingml/2006/main" xmlns:r="http://schemas.openxmlformats.org/officeDocument/2006/relationships" xmlns:mc="http://schemas.openxmlformats.org/markup-compatibility/2006" xmlns:mv="urn:schemas-microsoft-com:mac:vml" xmlns:p="http://schemas.openxmlformats.org/presentationml/2006/main" xmlns:c="http://schemas.openxmlformats.org/drawingml/2006/chart" xmlns:dgm="http://schemas.openxmlformats.org/drawingml/2006/diagram" xmlns:o="urn:schemas-microsoft-com:office:office" xmlns:v="urn:schemas-microsoft-com:vml" xmlns:pvml="urn:schemas-microsoft-com:office:powerpoint" xmlns:com="http://schemas.openxmlformats.org/drawingml/2006/compatibility" xmlns:p14="http://schemas.microsoft.com/office/powerpoint/2010/main" xmlns:p15="http://schemas.microsoft.com/office/powerpoint/2012/main" xmlns:ahyp="http://schemas.microsoft.com/office/drawing/2018/hyperlinkcolor">
+<p:sld xmlns:a="http://schemas.openxmlformats.org/drawingml/2006/main" xmlns:r="http://schemas.openxmlformats.org/officeDocument/2006/relationships" xmlns:p="http://schemas.openxmlformats.org/presentationml/2006/main">
   <p:cSld>
     <p:spTree>
       <p:nvGrpSpPr>
-        <p:cNvPr id="182" name="Shape 182"/>
+        <p:cNvPr id="1" name="Shape 182"/>
         <p:cNvGrpSpPr/>
         <p:nvPr/>
       </p:nvGrpSpPr>
@@ -10404,7 +10597,9 @@
       <p:sp>
         <p:nvSpPr>
           <p:cNvPr id="183" name="Google Shape;183;p30"/>
-          <p:cNvSpPr txBox="1"/>
+          <p:cNvSpPr txBox="1">
+            <a:spLocks noGrp="1"/>
+          </p:cNvSpPr>
           <p:nvPr>
             <p:ph type="title"/>
           </p:nvPr>
@@ -10419,12 +10614,12 @@
           </a:prstGeom>
         </p:spPr>
         <p:txBody>
-          <a:bodyPr anchorCtr="0" anchor="t" bIns="91425" lIns="91425" spcFirstLastPara="1" rIns="91425" wrap="square" tIns="91425">
+          <a:bodyPr spcFirstLastPara="1" wrap="square" lIns="91425" tIns="91425" rIns="91425" bIns="91425" anchor="t" anchorCtr="0">
             <a:normAutofit fontScale="90000"/>
           </a:bodyPr>
           <a:lstStyle/>
           <a:p>
-            <a:pPr indent="0" lvl="0" marL="0" rtl="0" algn="l">
+            <a:pPr marL="0" lvl="0" indent="0" algn="l" rtl="0">
               <a:spcBef>
                 <a:spcPts val="0"/>
               </a:spcBef>
@@ -10444,9 +10639,11 @@
       <p:sp>
         <p:nvSpPr>
           <p:cNvPr id="184" name="Google Shape;184;p30"/>
-          <p:cNvSpPr txBox="1"/>
+          <p:cNvSpPr txBox="1">
+            <a:spLocks noGrp="1"/>
+          </p:cNvSpPr>
           <p:nvPr>
-            <p:ph idx="1" type="body"/>
+            <p:ph type="body" idx="1"/>
           </p:nvPr>
         </p:nvSpPr>
         <p:spPr>
@@ -10459,12 +10656,12 @@
           </a:prstGeom>
         </p:spPr>
         <p:txBody>
-          <a:bodyPr anchorCtr="0" anchor="t" bIns="91425" lIns="91425" spcFirstLastPara="1" rIns="91425" wrap="square" tIns="91425">
+          <a:bodyPr spcFirstLastPara="1" wrap="square" lIns="91425" tIns="91425" rIns="91425" bIns="91425" anchor="t" anchorCtr="0">
             <a:normAutofit/>
           </a:bodyPr>
           <a:lstStyle/>
           <a:p>
-            <a:pPr indent="-361950" lvl="0" marL="457200" rtl="0" algn="l">
+            <a:pPr marL="457200" lvl="0" indent="-361950" algn="l" rtl="0">
               <a:spcBef>
                 <a:spcPts val="0"/>
               </a:spcBef>
@@ -10476,20 +10673,12 @@
             </a:pPr>
             <a:r>
               <a:rPr lang="en" sz="2100"/>
-              <a:t>Test the </a:t>
-            </a:r>
-            <a:r>
-              <a:rPr lang="en" sz="2100"/>
-              <a:t>user </a:t>
-            </a:r>
-            <a:r>
-              <a:rPr lang="en" sz="2100"/>
-              <a:t>interface</a:t>
+              <a:t>Test the user interface</a:t>
             </a:r>
             <a:endParaRPr sz="2100"/>
           </a:p>
           <a:p>
-            <a:pPr indent="-336550" lvl="1" marL="914400" rtl="0" algn="l">
+            <a:pPr marL="914400" lvl="1" indent="-336550" algn="l" rtl="0">
               <a:spcBef>
                 <a:spcPts val="0"/>
               </a:spcBef>
@@ -10506,7 +10695,7 @@
             <a:endParaRPr sz="1700"/>
           </a:p>
           <a:p>
-            <a:pPr indent="-336550" lvl="1" marL="914400" rtl="0" algn="l">
+            <a:pPr marL="914400" lvl="1" indent="-336550" algn="l" rtl="0">
               <a:spcBef>
                 <a:spcPts val="0"/>
               </a:spcBef>
@@ -10523,7 +10712,7 @@
             <a:endParaRPr sz="1700"/>
           </a:p>
           <a:p>
-            <a:pPr indent="-361950" lvl="0" marL="457200" rtl="0" algn="l">
+            <a:pPr marL="457200" lvl="0" indent="-361950" algn="l" rtl="0">
               <a:spcBef>
                 <a:spcPts val="0"/>
               </a:spcBef>
@@ -10535,36 +10724,12 @@
             </a:pPr>
             <a:r>
               <a:rPr lang="en" sz="2100"/>
-              <a:t>Specifically, the</a:t>
-            </a:r>
-            <a:r>
-              <a:rPr lang="en" sz="2100"/>
-              <a:t> </a:t>
-            </a:r>
-            <a:r>
-              <a:rPr lang="en" sz="2100"/>
-              <a:t>visual elements,</a:t>
-            </a:r>
-            <a:r>
-              <a:rPr lang="en" sz="2100"/>
-              <a:t> </a:t>
-            </a:r>
-            <a:r>
-              <a:rPr lang="en" sz="2100"/>
-              <a:t>layout, and</a:t>
-            </a:r>
-            <a:r>
-              <a:rPr lang="en" sz="2100"/>
-              <a:t> i</a:t>
-            </a:r>
-            <a:r>
-              <a:rPr lang="en" sz="2100"/>
-              <a:t>nteractions</a:t>
+              <a:t>Specifically, the visual elements, layout, and interactions</a:t>
             </a:r>
             <a:endParaRPr sz="2100"/>
           </a:p>
           <a:p>
-            <a:pPr indent="-361950" lvl="0" marL="457200" rtl="0" algn="l">
+            <a:pPr marL="457200" lvl="0" indent="-361950" algn="l" rtl="0">
               <a:spcBef>
                 <a:spcPts val="0"/>
               </a:spcBef>
@@ -10581,7 +10746,7 @@
             <a:endParaRPr sz="2100"/>
           </a:p>
           <a:p>
-            <a:pPr indent="-336550" lvl="1" marL="914400" rtl="0" algn="l">
+            <a:pPr marL="914400" lvl="1" indent="-336550" algn="l" rtl="0">
               <a:spcBef>
                 <a:spcPts val="0"/>
               </a:spcBef>
@@ -10598,7 +10763,7 @@
             <a:endParaRPr sz="1700"/>
           </a:p>
           <a:p>
-            <a:pPr indent="-336550" lvl="1" marL="914400" rtl="0" algn="l">
+            <a:pPr marL="914400" lvl="1" indent="-336550" algn="l" rtl="0">
               <a:spcBef>
                 <a:spcPts val="0"/>
               </a:spcBef>
@@ -10625,11 +10790,11 @@
 </file>
 
 <file path=ppt/slides/slide19.xml><?xml version="1.0" encoding="utf-8"?>
-<p:sld xmlns:a="http://schemas.openxmlformats.org/drawingml/2006/main" xmlns:r="http://schemas.openxmlformats.org/officeDocument/2006/relationships" xmlns:mc="http://schemas.openxmlformats.org/markup-compatibility/2006" xmlns:mv="urn:schemas-microsoft-com:mac:vml" xmlns:p="http://schemas.openxmlformats.org/presentationml/2006/main" xmlns:c="http://schemas.openxmlformats.org/drawingml/2006/chart" xmlns:dgm="http://schemas.openxmlformats.org/drawingml/2006/diagram" xmlns:o="urn:schemas-microsoft-com:office:office" xmlns:v="urn:schemas-microsoft-com:vml" xmlns:pvml="urn:schemas-microsoft-com:office:powerpoint" xmlns:com="http://schemas.openxmlformats.org/drawingml/2006/compatibility" xmlns:p14="http://schemas.microsoft.com/office/powerpoint/2010/main" xmlns:p15="http://schemas.microsoft.com/office/powerpoint/2012/main" xmlns:ahyp="http://schemas.microsoft.com/office/drawing/2018/hyperlinkcolor">
+<p:sld xmlns:a="http://schemas.openxmlformats.org/drawingml/2006/main" xmlns:r="http://schemas.openxmlformats.org/officeDocument/2006/relationships" xmlns:p="http://schemas.openxmlformats.org/presentationml/2006/main">
   <p:cSld>
     <p:spTree>
       <p:nvGrpSpPr>
-        <p:cNvPr id="188" name="Shape 188"/>
+        <p:cNvPr id="1" name="Shape 188"/>
         <p:cNvGrpSpPr/>
         <p:nvPr/>
       </p:nvGrpSpPr>
@@ -10644,7 +10809,9 @@
       <p:sp>
         <p:nvSpPr>
           <p:cNvPr id="189" name="Google Shape;189;p31"/>
-          <p:cNvSpPr txBox="1"/>
+          <p:cNvSpPr txBox="1">
+            <a:spLocks noGrp="1"/>
+          </p:cNvSpPr>
           <p:nvPr>
             <p:ph type="title"/>
           </p:nvPr>
@@ -10659,12 +10826,12 @@
           </a:prstGeom>
         </p:spPr>
         <p:txBody>
-          <a:bodyPr anchorCtr="0" anchor="t" bIns="91425" lIns="91425" spcFirstLastPara="1" rIns="91425" wrap="square" tIns="91425">
+          <a:bodyPr spcFirstLastPara="1" wrap="square" lIns="91425" tIns="91425" rIns="91425" bIns="91425" anchor="t" anchorCtr="0">
             <a:normAutofit fontScale="90000"/>
           </a:bodyPr>
           <a:lstStyle/>
           <a:p>
-            <a:pPr indent="0" lvl="0" marL="0" rtl="0" algn="l">
+            <a:pPr marL="0" lvl="0" indent="0" algn="l" rtl="0">
               <a:spcBef>
                 <a:spcPts val="0"/>
               </a:spcBef>
@@ -10673,9 +10840,6 @@
               </a:spcAft>
               <a:buNone/>
             </a:pPr>
-            <a:r>
-              <a:t/>
-            </a:r>
             <a:endParaRPr/>
           </a:p>
         </p:txBody>
@@ -10683,9 +10847,11 @@
       <p:sp>
         <p:nvSpPr>
           <p:cNvPr id="190" name="Google Shape;190;p31"/>
-          <p:cNvSpPr txBox="1"/>
+          <p:cNvSpPr txBox="1">
+            <a:spLocks noGrp="1"/>
+          </p:cNvSpPr>
           <p:nvPr>
-            <p:ph idx="1" type="body"/>
+            <p:ph type="body" idx="1"/>
           </p:nvPr>
         </p:nvSpPr>
         <p:spPr>
@@ -10698,12 +10864,12 @@
           </a:prstGeom>
         </p:spPr>
         <p:txBody>
-          <a:bodyPr anchorCtr="0" anchor="t" bIns="91425" lIns="91425" spcFirstLastPara="1" rIns="91425" wrap="square" tIns="91425">
+          <a:bodyPr spcFirstLastPara="1" wrap="square" lIns="91425" tIns="91425" rIns="91425" bIns="91425" anchor="t" anchorCtr="0">
             <a:normAutofit/>
           </a:bodyPr>
           <a:lstStyle/>
           <a:p>
-            <a:pPr indent="0" lvl="0" marL="0" rtl="0" algn="l">
+            <a:pPr marL="0" lvl="0" indent="0" algn="l" rtl="0">
               <a:spcBef>
                 <a:spcPts val="0"/>
               </a:spcBef>
@@ -10712,9 +10878,6 @@
               </a:spcAft>
               <a:buNone/>
             </a:pPr>
-            <a:r>
-              <a:t/>
-            </a:r>
             <a:endParaRPr/>
           </a:p>
         </p:txBody>
@@ -10729,7 +10892,7 @@
           <a:blip r:embed="rId3">
             <a:alphaModFix/>
           </a:blip>
-          <a:srcRect b="0" l="0" r="0" t="0"/>
+          <a:srcRect/>
           <a:stretch/>
         </p:blipFill>
         <p:spPr>
@@ -10755,11 +10918,11 @@
 </file>
 
 <file path=ppt/slides/slide2.xml><?xml version="1.0" encoding="utf-8"?>
-<p:sld xmlns:a="http://schemas.openxmlformats.org/drawingml/2006/main" xmlns:r="http://schemas.openxmlformats.org/officeDocument/2006/relationships" xmlns:mc="http://schemas.openxmlformats.org/markup-compatibility/2006" xmlns:mv="urn:schemas-microsoft-com:mac:vml" xmlns:p="http://schemas.openxmlformats.org/presentationml/2006/main" xmlns:c="http://schemas.openxmlformats.org/drawingml/2006/chart" xmlns:dgm="http://schemas.openxmlformats.org/drawingml/2006/diagram" xmlns:o="urn:schemas-microsoft-com:office:office" xmlns:v="urn:schemas-microsoft-com:vml" xmlns:pvml="urn:schemas-microsoft-com:office:powerpoint" xmlns:com="http://schemas.openxmlformats.org/drawingml/2006/compatibility" xmlns:p14="http://schemas.microsoft.com/office/powerpoint/2010/main" xmlns:p15="http://schemas.microsoft.com/office/powerpoint/2012/main" xmlns:ahyp="http://schemas.microsoft.com/office/drawing/2018/hyperlinkcolor">
+<p:sld xmlns:a="http://schemas.openxmlformats.org/drawingml/2006/main" xmlns:r="http://schemas.openxmlformats.org/officeDocument/2006/relationships" xmlns:p="http://schemas.openxmlformats.org/presentationml/2006/main">
   <p:cSld>
     <p:spTree>
       <p:nvGrpSpPr>
-        <p:cNvPr id="68" name="Shape 68"/>
+        <p:cNvPr id="1" name="Shape 68"/>
         <p:cNvGrpSpPr/>
         <p:nvPr/>
       </p:nvGrpSpPr>
@@ -10774,7 +10937,9 @@
       <p:sp>
         <p:nvSpPr>
           <p:cNvPr id="69" name="Google Shape;69;p14"/>
-          <p:cNvSpPr txBox="1"/>
+          <p:cNvSpPr txBox="1">
+            <a:spLocks noGrp="1"/>
+          </p:cNvSpPr>
           <p:nvPr>
             <p:ph type="title"/>
           </p:nvPr>
@@ -10789,12 +10954,12 @@
           </a:prstGeom>
         </p:spPr>
         <p:txBody>
-          <a:bodyPr anchorCtr="0" anchor="t" bIns="91425" lIns="91425" spcFirstLastPara="1" rIns="91425" wrap="square" tIns="91425">
+          <a:bodyPr spcFirstLastPara="1" wrap="square" lIns="91425" tIns="91425" rIns="91425" bIns="91425" anchor="t" anchorCtr="0">
             <a:normAutofit fontScale="90000"/>
           </a:bodyPr>
           <a:lstStyle/>
           <a:p>
-            <a:pPr indent="0" lvl="0" marL="0" rtl="0" algn="l">
+            <a:pPr marL="0" lvl="0" indent="0" algn="l" rtl="0">
               <a:spcBef>
                 <a:spcPts val="0"/>
               </a:spcBef>
@@ -10814,9 +10979,11 @@
       <p:sp>
         <p:nvSpPr>
           <p:cNvPr id="70" name="Google Shape;70;p14"/>
-          <p:cNvSpPr txBox="1"/>
+          <p:cNvSpPr txBox="1">
+            <a:spLocks noGrp="1"/>
+          </p:cNvSpPr>
           <p:nvPr>
-            <p:ph idx="1" type="body"/>
+            <p:ph type="body" idx="1"/>
           </p:nvPr>
         </p:nvSpPr>
         <p:spPr>
@@ -10829,12 +10996,12 @@
           </a:prstGeom>
         </p:spPr>
         <p:txBody>
-          <a:bodyPr anchorCtr="0" anchor="t" bIns="91425" lIns="91425" spcFirstLastPara="1" rIns="91425" wrap="square" tIns="91425">
+          <a:bodyPr spcFirstLastPara="1" wrap="square" lIns="91425" tIns="91425" rIns="91425" bIns="91425" anchor="t" anchorCtr="0">
             <a:normAutofit/>
           </a:bodyPr>
           <a:lstStyle/>
           <a:p>
-            <a:pPr indent="-342900" lvl="0" marL="457200" rtl="0" algn="l">
+            <a:pPr marL="457200" lvl="0" indent="-342900" algn="l" rtl="0">
               <a:spcBef>
                 <a:spcPts val="0"/>
               </a:spcBef>
@@ -10851,7 +11018,7 @@
             <a:endParaRPr/>
           </a:p>
           <a:p>
-            <a:pPr indent="-342900" lvl="0" marL="457200" rtl="0" algn="l">
+            <a:pPr marL="457200" lvl="0" indent="-342900" algn="l" rtl="0">
               <a:spcBef>
                 <a:spcPts val="0"/>
               </a:spcBef>
@@ -10878,11 +11045,11 @@
 </file>
 
 <file path=ppt/slides/slide20.xml><?xml version="1.0" encoding="utf-8"?>
-<p:sld xmlns:a="http://schemas.openxmlformats.org/drawingml/2006/main" xmlns:r="http://schemas.openxmlformats.org/officeDocument/2006/relationships" xmlns:mc="http://schemas.openxmlformats.org/markup-compatibility/2006" xmlns:mv="urn:schemas-microsoft-com:mac:vml" xmlns:p="http://schemas.openxmlformats.org/presentationml/2006/main" xmlns:c="http://schemas.openxmlformats.org/drawingml/2006/chart" xmlns:dgm="http://schemas.openxmlformats.org/drawingml/2006/diagram" xmlns:o="urn:schemas-microsoft-com:office:office" xmlns:v="urn:schemas-microsoft-com:vml" xmlns:pvml="urn:schemas-microsoft-com:office:powerpoint" xmlns:com="http://schemas.openxmlformats.org/drawingml/2006/compatibility" xmlns:p14="http://schemas.microsoft.com/office/powerpoint/2010/main" xmlns:p15="http://schemas.microsoft.com/office/powerpoint/2012/main" xmlns:ahyp="http://schemas.microsoft.com/office/drawing/2018/hyperlinkcolor">
+<p:sld xmlns:a="http://schemas.openxmlformats.org/drawingml/2006/main" xmlns:r="http://schemas.openxmlformats.org/officeDocument/2006/relationships" xmlns:p="http://schemas.openxmlformats.org/presentationml/2006/main">
   <p:cSld>
     <p:spTree>
       <p:nvGrpSpPr>
-        <p:cNvPr id="195" name="Shape 195"/>
+        <p:cNvPr id="1" name="Shape 195"/>
         <p:cNvGrpSpPr/>
         <p:nvPr/>
       </p:nvGrpSpPr>
@@ -10897,7 +11064,9 @@
       <p:sp>
         <p:nvSpPr>
           <p:cNvPr id="196" name="Google Shape;196;p32"/>
-          <p:cNvSpPr txBox="1"/>
+          <p:cNvSpPr txBox="1">
+            <a:spLocks noGrp="1"/>
+          </p:cNvSpPr>
           <p:nvPr>
             <p:ph type="title"/>
           </p:nvPr>
@@ -10912,12 +11081,12 @@
           </a:prstGeom>
         </p:spPr>
         <p:txBody>
-          <a:bodyPr anchorCtr="0" anchor="t" bIns="91425" lIns="91425" spcFirstLastPara="1" rIns="91425" wrap="square" tIns="91425">
+          <a:bodyPr spcFirstLastPara="1" wrap="square" lIns="91425" tIns="91425" rIns="91425" bIns="91425" anchor="t" anchorCtr="0">
             <a:normAutofit fontScale="90000"/>
           </a:bodyPr>
           <a:lstStyle/>
           <a:p>
-            <a:pPr indent="0" lvl="0" marL="0" rtl="0" algn="l">
+            <a:pPr marL="0" lvl="0" indent="0" algn="l" rtl="0">
               <a:spcBef>
                 <a:spcPts val="0"/>
               </a:spcBef>
@@ -10937,9 +11106,11 @@
       <p:sp>
         <p:nvSpPr>
           <p:cNvPr id="197" name="Google Shape;197;p32"/>
-          <p:cNvSpPr txBox="1"/>
+          <p:cNvSpPr txBox="1">
+            <a:spLocks noGrp="1"/>
+          </p:cNvSpPr>
           <p:nvPr>
-            <p:ph idx="1" type="body"/>
+            <p:ph type="body" idx="1"/>
           </p:nvPr>
         </p:nvSpPr>
         <p:spPr>
@@ -10952,12 +11123,12 @@
           </a:prstGeom>
         </p:spPr>
         <p:txBody>
-          <a:bodyPr anchorCtr="0" anchor="t" bIns="91425" lIns="91425" spcFirstLastPara="1" rIns="91425" wrap="square" tIns="91425">
+          <a:bodyPr spcFirstLastPara="1" wrap="square" lIns="91425" tIns="91425" rIns="91425" bIns="91425" anchor="t" anchorCtr="0">
             <a:normAutofit/>
           </a:bodyPr>
           <a:lstStyle/>
           <a:p>
-            <a:pPr indent="0" lvl="0" marL="0" rtl="0" algn="l">
+            <a:pPr marL="0" lvl="0" indent="0" algn="l" rtl="0">
               <a:spcBef>
                 <a:spcPts val="0"/>
               </a:spcBef>
@@ -10966,9 +11137,6 @@
               </a:spcAft>
               <a:buNone/>
             </a:pPr>
-            <a:r>
-              <a:t/>
-            </a:r>
             <a:endParaRPr/>
           </a:p>
         </p:txBody>
@@ -11010,11 +11178,11 @@
 </file>
 
 <file path=ppt/slides/slide21.xml><?xml version="1.0" encoding="utf-8"?>
-<p:sld xmlns:a="http://schemas.openxmlformats.org/drawingml/2006/main" xmlns:r="http://schemas.openxmlformats.org/officeDocument/2006/relationships" xmlns:mc="http://schemas.openxmlformats.org/markup-compatibility/2006" xmlns:mv="urn:schemas-microsoft-com:mac:vml" xmlns:p="http://schemas.openxmlformats.org/presentationml/2006/main" xmlns:c="http://schemas.openxmlformats.org/drawingml/2006/chart" xmlns:dgm="http://schemas.openxmlformats.org/drawingml/2006/diagram" xmlns:o="urn:schemas-microsoft-com:office:office" xmlns:v="urn:schemas-microsoft-com:vml" xmlns:pvml="urn:schemas-microsoft-com:office:powerpoint" xmlns:com="http://schemas.openxmlformats.org/drawingml/2006/compatibility" xmlns:p14="http://schemas.microsoft.com/office/powerpoint/2010/main" xmlns:p15="http://schemas.microsoft.com/office/powerpoint/2012/main" xmlns:ahyp="http://schemas.microsoft.com/office/drawing/2018/hyperlinkcolor">
+<p:sld xmlns:a="http://schemas.openxmlformats.org/drawingml/2006/main" xmlns:r="http://schemas.openxmlformats.org/officeDocument/2006/relationships" xmlns:p="http://schemas.openxmlformats.org/presentationml/2006/main">
   <p:cSld>
     <p:spTree>
       <p:nvGrpSpPr>
-        <p:cNvPr id="202" name="Shape 202"/>
+        <p:cNvPr id="1" name="Shape 202"/>
         <p:cNvGrpSpPr/>
         <p:nvPr/>
       </p:nvGrpSpPr>
@@ -11029,7 +11197,9 @@
       <p:sp>
         <p:nvSpPr>
           <p:cNvPr id="203" name="Google Shape;203;p33"/>
-          <p:cNvSpPr txBox="1"/>
+          <p:cNvSpPr txBox="1">
+            <a:spLocks noGrp="1"/>
+          </p:cNvSpPr>
           <p:nvPr>
             <p:ph type="title"/>
           </p:nvPr>
@@ -11044,12 +11214,12 @@
           </a:prstGeom>
         </p:spPr>
         <p:txBody>
-          <a:bodyPr anchorCtr="0" anchor="t" bIns="91425" lIns="91425" spcFirstLastPara="1" rIns="91425" wrap="square" tIns="91425">
+          <a:bodyPr spcFirstLastPara="1" wrap="square" lIns="91425" tIns="91425" rIns="91425" bIns="91425" anchor="t" anchorCtr="0">
             <a:normAutofit fontScale="90000"/>
           </a:bodyPr>
           <a:lstStyle/>
           <a:p>
-            <a:pPr indent="0" lvl="0" marL="0" rtl="0" algn="l">
+            <a:pPr marL="0" lvl="0" indent="0" algn="l" rtl="0">
               <a:spcBef>
                 <a:spcPts val="0"/>
               </a:spcBef>
@@ -11069,9 +11239,11 @@
       <p:sp>
         <p:nvSpPr>
           <p:cNvPr id="204" name="Google Shape;204;p33"/>
-          <p:cNvSpPr txBox="1"/>
+          <p:cNvSpPr txBox="1">
+            <a:spLocks noGrp="1"/>
+          </p:cNvSpPr>
           <p:nvPr>
-            <p:ph idx="1" type="body"/>
+            <p:ph type="body" idx="1"/>
           </p:nvPr>
         </p:nvSpPr>
         <p:spPr>
@@ -11084,12 +11256,12 @@
           </a:prstGeom>
         </p:spPr>
         <p:txBody>
-          <a:bodyPr anchorCtr="0" anchor="t" bIns="91425" lIns="91425" spcFirstLastPara="1" rIns="91425" wrap="square" tIns="91425">
+          <a:bodyPr spcFirstLastPara="1" wrap="square" lIns="91425" tIns="91425" rIns="91425" bIns="91425" anchor="t" anchorCtr="0">
             <a:normAutofit/>
           </a:bodyPr>
           <a:lstStyle/>
           <a:p>
-            <a:pPr indent="0" lvl="0" marL="0" rtl="0" algn="l">
+            <a:pPr marL="0" lvl="0" indent="0" algn="l" rtl="0">
               <a:spcBef>
                 <a:spcPts val="0"/>
               </a:spcBef>
@@ -11099,13 +11271,13 @@
               <a:buNone/>
             </a:pPr>
             <a:r>
-              <a:rPr lang="en"/>
+              <a:rPr lang="en" dirty="0"/>
               <a:t>In your test function, create an “AppTest”:</a:t>
             </a:r>
-            <a:endParaRPr/>
-          </a:p>
-          <a:p>
-            <a:pPr indent="0" lvl="0" marL="0" rtl="0" algn="l">
+            <a:endParaRPr dirty="0"/>
+          </a:p>
+          <a:p>
+            <a:pPr marL="0" lvl="0" indent="0" algn="l" rtl="0">
               <a:spcBef>
                 <a:spcPts val="1200"/>
               </a:spcBef>
@@ -11115,7 +11287,7 @@
               <a:buNone/>
             </a:pPr>
             <a:r>
-              <a:rPr lang="en" sz="1400">
+              <a:rPr lang="en" sz="1400" dirty="0">
                 <a:solidFill>
                   <a:srgbClr val="188038"/>
                 </a:solidFill>
@@ -11126,10 +11298,22 @@
               </a:rPr>
               <a:t>at = AppTest.from_file("app.py").run()</a:t>
             </a:r>
-            <a:endParaRPr sz="2100"/>
-          </a:p>
-          <a:p>
-            <a:pPr indent="0" lvl="0" marL="0" rtl="0" algn="l">
+            <a:endParaRPr sz="2100" dirty="0"/>
+          </a:p>
+          <a:p>
+            <a:pPr marL="0" lvl="0" indent="0" algn="l" rtl="0">
+              <a:spcBef>
+                <a:spcPts val="1200"/>
+              </a:spcBef>
+              <a:spcAft>
+                <a:spcPts val="0"/>
+              </a:spcAft>
+              <a:buNone/>
+            </a:pPr>
+            <a:endParaRPr sz="1200" dirty="0"/>
+          </a:p>
+          <a:p>
+            <a:pPr marL="0" lvl="0" indent="0" algn="l" rtl="0">
               <a:spcBef>
                 <a:spcPts val="1200"/>
               </a:spcBef>
@@ -11139,12 +11323,13 @@
               <a:buNone/>
             </a:pPr>
             <a:r>
-              <a:t/>
+              <a:rPr lang="en" dirty="0"/>
+              <a:t>Assert that different content is what you expect it to be:</a:t>
             </a:r>
-            <a:endParaRPr sz="1200"/>
-          </a:p>
-          <a:p>
-            <a:pPr indent="0" lvl="0" marL="0" rtl="0" algn="l">
+            <a:endParaRPr dirty="0"/>
+          </a:p>
+          <a:p>
+            <a:pPr marL="0" lvl="0" indent="0" algn="l" rtl="0">
               <a:spcBef>
                 <a:spcPts val="1200"/>
               </a:spcBef>
@@ -11154,23 +11339,7 @@
               <a:buNone/>
             </a:pPr>
             <a:r>
-              <a:rPr lang="en"/>
-              <a:t>Assert that different content is what you expect it to be:</a:t>
-            </a:r>
-            <a:endParaRPr/>
-          </a:p>
-          <a:p>
-            <a:pPr indent="0" lvl="0" marL="0" rtl="0" algn="l">
-              <a:spcBef>
-                <a:spcPts val="1200"/>
-              </a:spcBef>
-              <a:spcAft>
-                <a:spcPts val="0"/>
-              </a:spcAft>
-              <a:buNone/>
-            </a:pPr>
-            <a:r>
-              <a:rPr lang="en" sz="1400">
+              <a:rPr lang="en" sz="1400" dirty="0">
                 <a:solidFill>
                   <a:srgbClr val="188038"/>
                 </a:solidFill>
@@ -11181,10 +11350,22 @@
               </a:rPr>
               <a:t>self.assertEqual(at.text[0].value,"Whatever the content should be")</a:t>
             </a:r>
-            <a:endParaRPr sz="2100"/>
-          </a:p>
-          <a:p>
-            <a:pPr indent="0" lvl="0" marL="0" rtl="0" algn="l">
+            <a:endParaRPr sz="2100" dirty="0"/>
+          </a:p>
+          <a:p>
+            <a:pPr marL="0" lvl="0" indent="0" algn="l" rtl="0">
+              <a:spcBef>
+                <a:spcPts val="1200"/>
+              </a:spcBef>
+              <a:spcAft>
+                <a:spcPts val="0"/>
+              </a:spcAft>
+              <a:buNone/>
+            </a:pPr>
+            <a:endParaRPr sz="1200" dirty="0"/>
+          </a:p>
+          <a:p>
+            <a:pPr marL="0" lvl="0" indent="0" algn="l" rtl="0">
               <a:spcBef>
                 <a:spcPts val="1200"/>
               </a:spcBef>
@@ -11194,38 +11375,23 @@
               <a:buNone/>
             </a:pPr>
             <a:r>
-              <a:t/>
+              <a:rPr lang="en" dirty="0"/>
+              <a:t>Interact with components:</a:t>
             </a:r>
-            <a:endParaRPr sz="1200"/>
-          </a:p>
-          <a:p>
-            <a:pPr indent="0" lvl="0" marL="0" rtl="0" algn="l">
+            <a:endParaRPr dirty="0"/>
+          </a:p>
+          <a:p>
+            <a:pPr marL="0" lvl="0" indent="0" algn="l" rtl="0">
               <a:spcBef>
                 <a:spcPts val="1200"/>
               </a:spcBef>
               <a:spcAft>
-                <a:spcPts val="0"/>
+                <a:spcPts val="1200"/>
               </a:spcAft>
               <a:buNone/>
             </a:pPr>
             <a:r>
-              <a:rPr lang="en"/>
-              <a:t>Interact with components:</a:t>
-            </a:r>
-            <a:endParaRPr/>
-          </a:p>
-          <a:p>
-            <a:pPr indent="0" lvl="0" marL="0" rtl="0" algn="l">
-              <a:spcBef>
-                <a:spcPts val="1200"/>
-              </a:spcBef>
-              <a:spcAft>
-                <a:spcPts val="1200"/>
-              </a:spcAft>
-              <a:buNone/>
-            </a:pPr>
-            <a:r>
-              <a:rPr lang="en" sz="1400">
+              <a:rPr lang="en" sz="1400" dirty="0">
                 <a:solidFill>
                   <a:srgbClr val="188038"/>
                 </a:solidFill>
@@ -11236,7 +11402,7 @@
               </a:rPr>
               <a:t>at.button[0].click().run()</a:t>
             </a:r>
-            <a:endParaRPr sz="2100"/>
+            <a:endParaRPr sz="2100" dirty="0"/>
           </a:p>
         </p:txBody>
       </p:sp>
@@ -11269,23 +11435,23 @@
               <a:avLst/>
             </a:prstGeom>
             <a:noFill/>
-            <a:ln cap="flat" cmpd="sng" w="19050">
+            <a:ln w="19050" cap="flat" cmpd="sng">
               <a:solidFill>
                 <a:srgbClr val="FF0000"/>
               </a:solidFill>
               <a:prstDash val="solid"/>
               <a:round/>
-              <a:headEnd len="sm" w="sm" type="none"/>
-              <a:tailEnd len="sm" w="sm" type="none"/>
+              <a:headEnd type="none" w="sm" len="sm"/>
+              <a:tailEnd type="none" w="sm" len="sm"/>
             </a:ln>
           </p:spPr>
           <p:txBody>
-            <a:bodyPr anchorCtr="0" anchor="ctr" bIns="91425" lIns="91425" spcFirstLastPara="1" rIns="91425" wrap="square" tIns="91425">
+            <a:bodyPr spcFirstLastPara="1" wrap="square" lIns="91425" tIns="91425" rIns="91425" bIns="91425" anchor="ctr" anchorCtr="0">
               <a:noAutofit/>
             </a:bodyPr>
             <a:lstStyle/>
             <a:p>
-              <a:pPr indent="0" lvl="0" marL="0" rtl="0" algn="ctr">
+              <a:pPr marL="0" lvl="0" indent="0" algn="ctr" rtl="0">
                 <a:spcBef>
                   <a:spcPts val="0"/>
                 </a:spcBef>
@@ -11294,9 +11460,6 @@
                 </a:spcAft>
                 <a:buNone/>
               </a:pPr>
-              <a:r>
-                <a:t/>
-              </a:r>
               <a:endParaRPr/>
             </a:p>
           </p:txBody>
@@ -11321,12 +11484,12 @@
             </a:ln>
           </p:spPr>
           <p:txBody>
-            <a:bodyPr anchorCtr="0" anchor="t" bIns="91425" lIns="91425" spcFirstLastPara="1" rIns="91425" wrap="square" tIns="91425">
+            <a:bodyPr spcFirstLastPara="1" wrap="square" lIns="91425" tIns="91425" rIns="91425" bIns="91425" anchor="t" anchorCtr="0">
               <a:noAutofit/>
             </a:bodyPr>
             <a:lstStyle/>
             <a:p>
-              <a:pPr indent="0" lvl="0" marL="0" rtl="0" algn="l">
+              <a:pPr marL="0" lvl="0" indent="0" algn="l" rtl="0">
                 <a:spcBef>
                   <a:spcPts val="0"/>
                 </a:spcBef>
@@ -11385,14 +11548,14 @@
               <a:avLst/>
             </a:prstGeom>
             <a:noFill/>
-            <a:ln cap="flat" cmpd="sng" w="28575">
+            <a:ln w="28575" cap="flat" cmpd="sng">
               <a:solidFill>
                 <a:srgbClr val="FF0000"/>
               </a:solidFill>
               <a:prstDash val="solid"/>
               <a:round/>
-              <a:headEnd len="med" w="med" type="none"/>
-              <a:tailEnd len="med" w="med" type="triangle"/>
+              <a:headEnd type="none" w="med" len="med"/>
+              <a:tailEnd type="triangle" w="med" len="med"/>
             </a:ln>
           </p:spPr>
         </p:cxnSp>
@@ -11431,12 +11594,12 @@
             </a:ln>
           </p:spPr>
           <p:txBody>
-            <a:bodyPr anchorCtr="0" anchor="t" bIns="91425" lIns="91425" spcFirstLastPara="1" rIns="91425" wrap="square" tIns="91425">
+            <a:bodyPr spcFirstLastPara="1" wrap="square" lIns="91425" tIns="91425" rIns="91425" bIns="91425" anchor="t" anchorCtr="0">
               <a:noAutofit/>
             </a:bodyPr>
             <a:lstStyle/>
             <a:p>
-              <a:pPr indent="0" lvl="0" marL="0" rtl="0" algn="l">
+              <a:pPr marL="0" lvl="0" indent="0" algn="l" rtl="0">
                 <a:spcBef>
                   <a:spcPts val="0"/>
                 </a:spcBef>
@@ -11480,23 +11643,23 @@
               <a:avLst/>
             </a:prstGeom>
             <a:noFill/>
-            <a:ln cap="flat" cmpd="sng" w="19050">
+            <a:ln w="19050" cap="flat" cmpd="sng">
               <a:solidFill>
                 <a:srgbClr val="FF0000"/>
               </a:solidFill>
               <a:prstDash val="solid"/>
               <a:round/>
-              <a:headEnd len="sm" w="sm" type="none"/>
-              <a:tailEnd len="sm" w="sm" type="none"/>
+              <a:headEnd type="none" w="sm" len="sm"/>
+              <a:tailEnd type="none" w="sm" len="sm"/>
             </a:ln>
           </p:spPr>
           <p:txBody>
-            <a:bodyPr anchorCtr="0" anchor="ctr" bIns="91425" lIns="91425" spcFirstLastPara="1" rIns="91425" wrap="square" tIns="91425">
+            <a:bodyPr spcFirstLastPara="1" wrap="square" lIns="91425" tIns="91425" rIns="91425" bIns="91425" anchor="ctr" anchorCtr="0">
               <a:noAutofit/>
             </a:bodyPr>
             <a:lstStyle/>
             <a:p>
-              <a:pPr indent="0" lvl="0" marL="0" rtl="0" algn="ctr">
+              <a:pPr marL="0" lvl="0" indent="0" algn="ctr" rtl="0">
                 <a:spcBef>
                   <a:spcPts val="0"/>
                 </a:spcBef>
@@ -11505,9 +11668,6 @@
                 </a:spcAft>
                 <a:buNone/>
               </a:pPr>
-              <a:r>
-                <a:t/>
-              </a:r>
               <a:endParaRPr/>
             </a:p>
           </p:txBody>
@@ -11530,14 +11690,14 @@
               <a:avLst/>
             </a:prstGeom>
             <a:noFill/>
-            <a:ln cap="flat" cmpd="sng" w="28575">
+            <a:ln w="28575" cap="flat" cmpd="sng">
               <a:solidFill>
                 <a:srgbClr val="FF0000"/>
               </a:solidFill>
               <a:prstDash val="solid"/>
               <a:round/>
-              <a:headEnd len="med" w="med" type="none"/>
-              <a:tailEnd len="med" w="med" type="triangle"/>
+              <a:headEnd type="none" w="med" len="med"/>
+              <a:tailEnd type="triangle" w="med" len="med"/>
             </a:ln>
           </p:spPr>
         </p:cxnSp>
@@ -11576,12 +11736,12 @@
             </a:ln>
           </p:spPr>
           <p:txBody>
-            <a:bodyPr anchorCtr="0" anchor="t" bIns="91425" lIns="91425" spcFirstLastPara="1" rIns="91425" wrap="square" tIns="91425">
+            <a:bodyPr spcFirstLastPara="1" wrap="square" lIns="91425" tIns="91425" rIns="91425" bIns="91425" anchor="t" anchorCtr="0">
               <a:noAutofit/>
             </a:bodyPr>
             <a:lstStyle/>
             <a:p>
-              <a:pPr indent="0" lvl="0" marL="0" rtl="0" algn="l">
+              <a:pPr marL="0" lvl="0" indent="0" algn="l" rtl="0">
                 <a:spcBef>
                   <a:spcPts val="0"/>
                 </a:spcBef>
@@ -11625,23 +11785,23 @@
               <a:avLst/>
             </a:prstGeom>
             <a:noFill/>
-            <a:ln cap="flat" cmpd="sng" w="19050">
+            <a:ln w="19050" cap="flat" cmpd="sng">
               <a:solidFill>
                 <a:srgbClr val="FF0000"/>
               </a:solidFill>
               <a:prstDash val="solid"/>
               <a:round/>
-              <a:headEnd len="sm" w="sm" type="none"/>
-              <a:tailEnd len="sm" w="sm" type="none"/>
+              <a:headEnd type="none" w="sm" len="sm"/>
+              <a:tailEnd type="none" w="sm" len="sm"/>
             </a:ln>
           </p:spPr>
           <p:txBody>
-            <a:bodyPr anchorCtr="0" anchor="ctr" bIns="91425" lIns="91425" spcFirstLastPara="1" rIns="91425" wrap="square" tIns="91425">
+            <a:bodyPr spcFirstLastPara="1" wrap="square" lIns="91425" tIns="91425" rIns="91425" bIns="91425" anchor="ctr" anchorCtr="0">
               <a:noAutofit/>
             </a:bodyPr>
             <a:lstStyle/>
             <a:p>
-              <a:pPr indent="0" lvl="0" marL="0" rtl="0" algn="ctr">
+              <a:pPr marL="0" lvl="0" indent="0" algn="ctr" rtl="0">
                 <a:spcBef>
                   <a:spcPts val="0"/>
                 </a:spcBef>
@@ -11650,9 +11810,6 @@
                 </a:spcAft>
                 <a:buNone/>
               </a:pPr>
-              <a:r>
-                <a:t/>
-              </a:r>
               <a:endParaRPr/>
             </a:p>
           </p:txBody>
@@ -11675,14 +11832,14 @@
               <a:avLst/>
             </a:prstGeom>
             <a:noFill/>
-            <a:ln cap="flat" cmpd="sng" w="28575">
+            <a:ln w="28575" cap="flat" cmpd="sng">
               <a:solidFill>
                 <a:srgbClr val="FF0000"/>
               </a:solidFill>
               <a:prstDash val="solid"/>
               <a:round/>
-              <a:headEnd len="med" w="med" type="none"/>
-              <a:tailEnd len="med" w="med" type="triangle"/>
+              <a:headEnd type="none" w="med" len="med"/>
+              <a:tailEnd type="triangle" w="med" len="med"/>
             </a:ln>
           </p:spPr>
         </p:cxnSp>
@@ -11695,32 +11852,32 @@
   <p:timing>
     <p:tnLst>
       <p:par>
-        <p:cTn dur="indefinite" nodeType="tmRoot" restart="never">
+        <p:cTn id="1" dur="indefinite" restart="never" nodeType="tmRoot">
           <p:childTnLst>
             <p:seq concurrent="1" nextAc="seek">
-              <p:cTn dur="indefinite" id="2" nodeType="mainSeq">
+              <p:cTn id="2" dur="indefinite" nodeType="mainSeq">
                 <p:childTnLst>
                   <p:par>
-                    <p:cTn fill="hold">
+                    <p:cTn id="3" fill="hold">
                       <p:stCondLst>
                         <p:cond delay="indefinite"/>
                       </p:stCondLst>
                       <p:childTnLst>
                         <p:par>
-                          <p:cTn fill="hold">
+                          <p:cTn id="4" fill="hold">
                             <p:stCondLst>
                               <p:cond delay="0"/>
                             </p:stCondLst>
                             <p:childTnLst>
                               <p:par>
-                                <p:cTn fill="hold" nodeType="clickEffect" presetClass="entr" presetID="1" presetSubtype="0">
+                                <p:cTn id="5" presetID="1" presetClass="entr" presetSubtype="0" fill="hold" nodeType="clickEffect">
                                   <p:stCondLst>
                                     <p:cond delay="0"/>
                                   </p:stCondLst>
                                   <p:childTnLst>
                                     <p:set>
                                       <p:cBhvr>
-                                        <p:cTn dur="1" fill="hold">
+                                        <p:cTn id="6" dur="1" fill="hold">
                                           <p:stCondLst>
                                             <p:cond delay="0"/>
                                           </p:stCondLst>
@@ -11746,26 +11903,26 @@
                     </p:cTn>
                   </p:par>
                   <p:par>
-                    <p:cTn fill="hold">
+                    <p:cTn id="7" fill="hold">
                       <p:stCondLst>
                         <p:cond delay="indefinite"/>
                       </p:stCondLst>
                       <p:childTnLst>
                         <p:par>
-                          <p:cTn fill="hold">
+                          <p:cTn id="8" fill="hold">
                             <p:stCondLst>
                               <p:cond delay="0"/>
                             </p:stCondLst>
                             <p:childTnLst>
                               <p:par>
-                                <p:cTn fill="hold" nodeType="clickEffect" presetClass="entr" presetID="1" presetSubtype="0">
+                                <p:cTn id="9" presetID="1" presetClass="entr" presetSubtype="0" fill="hold" nodeType="clickEffect">
                                   <p:stCondLst>
                                     <p:cond delay="0"/>
                                   </p:stCondLst>
                                   <p:childTnLst>
                                     <p:set>
                                       <p:cBhvr>
-                                        <p:cTn dur="1" fill="hold">
+                                        <p:cTn id="10" dur="1" fill="hold">
                                           <p:stCondLst>
                                             <p:cond delay="0"/>
                                           </p:stCondLst>
@@ -11791,26 +11948,26 @@
                     </p:cTn>
                   </p:par>
                   <p:par>
-                    <p:cTn fill="hold">
+                    <p:cTn id="11" fill="hold">
                       <p:stCondLst>
                         <p:cond delay="indefinite"/>
                       </p:stCondLst>
                       <p:childTnLst>
                         <p:par>
-                          <p:cTn fill="hold">
+                          <p:cTn id="12" fill="hold">
                             <p:stCondLst>
                               <p:cond delay="0"/>
                             </p:stCondLst>
                             <p:childTnLst>
                               <p:par>
-                                <p:cTn fill="hold" nodeType="clickEffect" presetClass="entr" presetID="1" presetSubtype="0">
+                                <p:cTn id="13" presetID="1" presetClass="entr" presetSubtype="0" fill="hold" nodeType="clickEffect">
                                   <p:stCondLst>
                                     <p:cond delay="0"/>
                                   </p:stCondLst>
                                   <p:childTnLst>
                                     <p:set>
                                       <p:cBhvr>
-                                        <p:cTn dur="1" fill="hold">
+                                        <p:cTn id="14" dur="1" fill="hold">
                                           <p:stCondLst>
                                             <p:cond delay="0"/>
                                           </p:stCondLst>
@@ -11838,14 +11995,14 @@
                 </p:childTnLst>
               </p:cTn>
               <p:prevCondLst>
-                <p:cond evt="onPrev">
+                <p:cond evt="onPrev" delay="0">
                   <p:tgtEl>
                     <p:sldTgt/>
                   </p:tgtEl>
                 </p:cond>
               </p:prevCondLst>
               <p:nextCondLst>
-                <p:cond evt="onNext">
+                <p:cond evt="onNext" delay="0">
                   <p:tgtEl>
                     <p:sldTgt/>
                   </p:tgtEl>
@@ -11861,11 +12018,11 @@
 </file>
 
 <file path=ppt/slides/slide22.xml><?xml version="1.0" encoding="utf-8"?>
-<p:sld xmlns:a="http://schemas.openxmlformats.org/drawingml/2006/main" xmlns:r="http://schemas.openxmlformats.org/officeDocument/2006/relationships" xmlns:mc="http://schemas.openxmlformats.org/markup-compatibility/2006" xmlns:mv="urn:schemas-microsoft-com:mac:vml" xmlns:p="http://schemas.openxmlformats.org/presentationml/2006/main" xmlns:c="http://schemas.openxmlformats.org/drawingml/2006/chart" xmlns:dgm="http://schemas.openxmlformats.org/drawingml/2006/diagram" xmlns:o="urn:schemas-microsoft-com:office:office" xmlns:v="urn:schemas-microsoft-com:vml" xmlns:pvml="urn:schemas-microsoft-com:office:powerpoint" xmlns:com="http://schemas.openxmlformats.org/drawingml/2006/compatibility" xmlns:p14="http://schemas.microsoft.com/office/powerpoint/2010/main" xmlns:p15="http://schemas.microsoft.com/office/powerpoint/2012/main" xmlns:ahyp="http://schemas.microsoft.com/office/drawing/2018/hyperlinkcolor">
+<p:sld xmlns:a="http://schemas.openxmlformats.org/drawingml/2006/main" xmlns:r="http://schemas.openxmlformats.org/officeDocument/2006/relationships" xmlns:p="http://schemas.openxmlformats.org/presentationml/2006/main">
   <p:cSld>
     <p:spTree>
       <p:nvGrpSpPr>
-        <p:cNvPr id="220" name="Shape 220"/>
+        <p:cNvPr id="1" name="Shape 220"/>
         <p:cNvGrpSpPr/>
         <p:nvPr/>
       </p:nvGrpSpPr>
@@ -11880,7 +12037,9 @@
       <p:sp>
         <p:nvSpPr>
           <p:cNvPr id="221" name="Google Shape;221;p34"/>
-          <p:cNvSpPr txBox="1"/>
+          <p:cNvSpPr txBox="1">
+            <a:spLocks noGrp="1"/>
+          </p:cNvSpPr>
           <p:nvPr>
             <p:ph type="title"/>
           </p:nvPr>
@@ -11895,12 +12054,12 @@
           </a:prstGeom>
         </p:spPr>
         <p:txBody>
-          <a:bodyPr anchorCtr="0" anchor="t" bIns="91425" lIns="91425" spcFirstLastPara="1" rIns="91425" wrap="square" tIns="91425">
+          <a:bodyPr spcFirstLastPara="1" wrap="square" lIns="91425" tIns="91425" rIns="91425" bIns="91425" anchor="t" anchorCtr="0">
             <a:normAutofit fontScale="90000"/>
           </a:bodyPr>
           <a:lstStyle/>
           <a:p>
-            <a:pPr indent="0" lvl="0" marL="0" rtl="0" algn="l">
+            <a:pPr marL="0" lvl="0" indent="0" algn="l" rtl="0">
               <a:spcBef>
                 <a:spcPts val="0"/>
               </a:spcBef>
@@ -11920,9 +12079,11 @@
       <p:sp>
         <p:nvSpPr>
           <p:cNvPr id="222" name="Google Shape;222;p34"/>
-          <p:cNvSpPr txBox="1"/>
+          <p:cNvSpPr txBox="1">
+            <a:spLocks noGrp="1"/>
+          </p:cNvSpPr>
           <p:nvPr>
-            <p:ph idx="1" type="body"/>
+            <p:ph type="body" idx="1"/>
           </p:nvPr>
         </p:nvSpPr>
         <p:spPr>
@@ -11935,12 +12096,12 @@
           </a:prstGeom>
         </p:spPr>
         <p:txBody>
-          <a:bodyPr anchorCtr="0" anchor="t" bIns="91425" lIns="91425" spcFirstLastPara="1" rIns="91425" wrap="square" tIns="91425">
+          <a:bodyPr spcFirstLastPara="1" wrap="square" lIns="91425" tIns="91425" rIns="91425" bIns="91425" anchor="t" anchorCtr="0">
             <a:normAutofit/>
           </a:bodyPr>
           <a:lstStyle/>
           <a:p>
-            <a:pPr indent="-342900" lvl="0" marL="457200" rtl="0" algn="l">
+            <a:pPr marL="457200" lvl="0" indent="-342900" algn="l" rtl="0">
               <a:spcBef>
                 <a:spcPts val="0"/>
               </a:spcBef>
@@ -11951,10 +12112,10 @@
               <a:buChar char="●"/>
             </a:pPr>
             <a:r>
-              <a:rPr lang="en"/>
+              <a:rPr lang="en" dirty="0"/>
               <a:t>From the Syllabus, clone the linked repository</a:t>
             </a:r>
-            <a:endParaRPr>
+            <a:endParaRPr dirty="0">
               <a:latin typeface="Courier New"/>
               <a:ea typeface="Courier New"/>
               <a:cs typeface="Courier New"/>
@@ -11962,7 +12123,7 @@
             </a:endParaRPr>
           </a:p>
           <a:p>
-            <a:pPr indent="457200" lvl="0" marL="0" rtl="0" algn="l">
+            <a:pPr marL="0" lvl="0" indent="457200" algn="l" rtl="0">
               <a:spcBef>
                 <a:spcPts val="1200"/>
               </a:spcBef>
@@ -11972,7 +12133,7 @@
               <a:buNone/>
             </a:pPr>
             <a:r>
-              <a:rPr b="1" lang="en" sz="1700">
+              <a:rPr lang="en" sz="1700" b="1" dirty="0">
                 <a:solidFill>
                   <a:schemeClr val="dk1"/>
                 </a:solidFill>
@@ -11981,21 +12142,9 @@
                 <a:cs typeface="Courier New"/>
                 <a:sym typeface="Courier New"/>
               </a:rPr>
-              <a:t>git clone </a:t>
+              <a:t>git clone https://github.com/UWDATA515/testing_example.git</a:t>
             </a:r>
-            <a:r>
-              <a:rPr b="1" lang="en" sz="1700">
-                <a:solidFill>
-                  <a:schemeClr val="dk1"/>
-                </a:solidFill>
-                <a:latin typeface="Courier New"/>
-                <a:ea typeface="Courier New"/>
-                <a:cs typeface="Courier New"/>
-                <a:sym typeface="Courier New"/>
-              </a:rPr>
-              <a:t>https://github.com/UWDATA515/testing_example.git</a:t>
-            </a:r>
-            <a:endParaRPr b="1" sz="1700">
+            <a:endParaRPr sz="1700" b="1" dirty="0">
               <a:solidFill>
                 <a:schemeClr val="dk1"/>
               </a:solidFill>
@@ -12006,7 +12155,7 @@
             </a:endParaRPr>
           </a:p>
           <a:p>
-            <a:pPr indent="-342900" lvl="0" marL="457200" rtl="0" algn="l">
+            <a:pPr marL="457200" lvl="0" indent="-342900" algn="l" rtl="0">
               <a:spcBef>
                 <a:spcPts val="1200"/>
               </a:spcBef>
@@ -12017,13 +12166,13 @@
               <a:buChar char="●"/>
             </a:pPr>
             <a:r>
-              <a:rPr lang="en"/>
+              <a:rPr lang="en" dirty="0"/>
               <a:t>Cd into the mocking_example directory</a:t>
             </a:r>
-            <a:endParaRPr/>
-          </a:p>
-          <a:p>
-            <a:pPr indent="-342900" lvl="0" marL="457200" rtl="0" algn="l">
+            <a:endParaRPr dirty="0"/>
+          </a:p>
+          <a:p>
+            <a:pPr marL="457200" lvl="0" indent="-342900" algn="l" rtl="0">
               <a:spcBef>
                 <a:spcPts val="0"/>
               </a:spcBef>
@@ -12034,10 +12183,10 @@
               <a:buChar char="●"/>
             </a:pPr>
             <a:r>
-              <a:rPr lang="en"/>
+              <a:rPr lang="en" dirty="0"/>
               <a:t>Look at the README and follow the directions to try mocking</a:t>
             </a:r>
-            <a:endParaRPr/>
+            <a:endParaRPr dirty="0"/>
           </a:p>
         </p:txBody>
       </p:sp>
@@ -12050,11 +12199,11 @@
 </file>
 
 <file path=ppt/slides/slide23.xml><?xml version="1.0" encoding="utf-8"?>
-<p:sld xmlns:a="http://schemas.openxmlformats.org/drawingml/2006/main" xmlns:r="http://schemas.openxmlformats.org/officeDocument/2006/relationships" xmlns:mc="http://schemas.openxmlformats.org/markup-compatibility/2006" xmlns:mv="urn:schemas-microsoft-com:mac:vml" xmlns:p="http://schemas.openxmlformats.org/presentationml/2006/main" xmlns:c="http://schemas.openxmlformats.org/drawingml/2006/chart" xmlns:dgm="http://schemas.openxmlformats.org/drawingml/2006/diagram" xmlns:o="urn:schemas-microsoft-com:office:office" xmlns:v="urn:schemas-microsoft-com:vml" xmlns:pvml="urn:schemas-microsoft-com:office:powerpoint" xmlns:com="http://schemas.openxmlformats.org/drawingml/2006/compatibility" xmlns:p14="http://schemas.microsoft.com/office/powerpoint/2010/main" xmlns:p15="http://schemas.microsoft.com/office/powerpoint/2012/main" xmlns:ahyp="http://schemas.microsoft.com/office/drawing/2018/hyperlinkcolor">
+<p:sld xmlns:a="http://schemas.openxmlformats.org/drawingml/2006/main" xmlns:r="http://schemas.openxmlformats.org/officeDocument/2006/relationships" xmlns:p="http://schemas.openxmlformats.org/presentationml/2006/main">
   <p:cSld>
     <p:spTree>
       <p:nvGrpSpPr>
-        <p:cNvPr id="226" name="Shape 226"/>
+        <p:cNvPr id="1" name="Shape 226"/>
         <p:cNvGrpSpPr/>
         <p:nvPr/>
       </p:nvGrpSpPr>
@@ -12069,7 +12218,9 @@
       <p:sp>
         <p:nvSpPr>
           <p:cNvPr id="227" name="Google Shape;227;p35"/>
-          <p:cNvSpPr txBox="1"/>
+          <p:cNvSpPr txBox="1">
+            <a:spLocks noGrp="1"/>
+          </p:cNvSpPr>
           <p:nvPr>
             <p:ph type="title"/>
           </p:nvPr>
@@ -12084,12 +12235,12 @@
           </a:prstGeom>
         </p:spPr>
         <p:txBody>
-          <a:bodyPr anchorCtr="0" anchor="t" bIns="91425" lIns="91425" spcFirstLastPara="1" rIns="91425" wrap="square" tIns="91425">
+          <a:bodyPr spcFirstLastPara="1" wrap="square" lIns="91425" tIns="91425" rIns="91425" bIns="91425" anchor="t" anchorCtr="0">
             <a:normAutofit fontScale="90000"/>
           </a:bodyPr>
           <a:lstStyle/>
           <a:p>
-            <a:pPr indent="0" lvl="0" marL="0" rtl="0" algn="l">
+            <a:pPr marL="0" lvl="0" indent="0" algn="l" rtl="0">
               <a:spcBef>
                 <a:spcPts val="0"/>
               </a:spcBef>
@@ -12109,9 +12260,11 @@
       <p:sp>
         <p:nvSpPr>
           <p:cNvPr id="228" name="Google Shape;228;p35"/>
-          <p:cNvSpPr txBox="1"/>
+          <p:cNvSpPr txBox="1">
+            <a:spLocks noGrp="1"/>
+          </p:cNvSpPr>
           <p:nvPr>
-            <p:ph idx="1" type="body"/>
+            <p:ph type="body" idx="1"/>
           </p:nvPr>
         </p:nvSpPr>
         <p:spPr>
@@ -12124,12 +12277,12 @@
           </a:prstGeom>
         </p:spPr>
         <p:txBody>
-          <a:bodyPr anchorCtr="0" anchor="t" bIns="91425" lIns="91425" spcFirstLastPara="1" rIns="91425" wrap="square" tIns="91425">
+          <a:bodyPr spcFirstLastPara="1" wrap="square" lIns="91425" tIns="91425" rIns="91425" bIns="91425" anchor="t" anchorCtr="0">
             <a:normAutofit/>
           </a:bodyPr>
           <a:lstStyle/>
           <a:p>
-            <a:pPr indent="-342900" lvl="0" marL="457200" rtl="0" algn="l">
+            <a:pPr marL="457200" lvl="0" indent="-342900" algn="l" rtl="0">
               <a:spcBef>
                 <a:spcPts val="0"/>
               </a:spcBef>
@@ -12146,7 +12299,7 @@
             <a:endParaRPr/>
           </a:p>
           <a:p>
-            <a:pPr indent="-342900" lvl="0" marL="457200" rtl="0" algn="l">
+            <a:pPr marL="457200" lvl="0" indent="-342900" algn="l" rtl="0">
               <a:spcBef>
                 <a:spcPts val="0"/>
               </a:spcBef>
@@ -12163,7 +12316,7 @@
             <a:endParaRPr/>
           </a:p>
           <a:p>
-            <a:pPr indent="-342900" lvl="0" marL="457200" rtl="0" algn="l">
+            <a:pPr marL="457200" lvl="0" indent="-342900" algn="l" rtl="0">
               <a:spcBef>
                 <a:spcPts val="0"/>
               </a:spcBef>
@@ -12180,7 +12333,7 @@
             <a:endParaRPr/>
           </a:p>
           <a:p>
-            <a:pPr indent="0" lvl="0" marL="0" rtl="0" algn="l">
+            <a:pPr marL="0" lvl="0" indent="0" algn="l" rtl="0">
               <a:spcBef>
                 <a:spcPts val="1200"/>
               </a:spcBef>
@@ -12189,13 +12342,10 @@
               </a:spcAft>
               <a:buNone/>
             </a:pPr>
-            <a:r>
-              <a:t/>
-            </a:r>
             <a:endParaRPr/>
           </a:p>
           <a:p>
-            <a:pPr indent="0" lvl="0" marL="0" rtl="0" algn="l">
+            <a:pPr marL="0" lvl="0" indent="0" algn="l" rtl="0">
               <a:spcBef>
                 <a:spcPts val="1200"/>
               </a:spcBef>
@@ -12221,11 +12371,11 @@
 </file>
 
 <file path=ppt/slides/slide3.xml><?xml version="1.0" encoding="utf-8"?>
-<p:sld xmlns:a="http://schemas.openxmlformats.org/drawingml/2006/main" xmlns:r="http://schemas.openxmlformats.org/officeDocument/2006/relationships" xmlns:mc="http://schemas.openxmlformats.org/markup-compatibility/2006" xmlns:mv="urn:schemas-microsoft-com:mac:vml" xmlns:p="http://schemas.openxmlformats.org/presentationml/2006/main" xmlns:c="http://schemas.openxmlformats.org/drawingml/2006/chart" xmlns:dgm="http://schemas.openxmlformats.org/drawingml/2006/diagram" xmlns:o="urn:schemas-microsoft-com:office:office" xmlns:v="urn:schemas-microsoft-com:vml" xmlns:pvml="urn:schemas-microsoft-com:office:powerpoint" xmlns:com="http://schemas.openxmlformats.org/drawingml/2006/compatibility" xmlns:p14="http://schemas.microsoft.com/office/powerpoint/2010/main" xmlns:p15="http://schemas.microsoft.com/office/powerpoint/2012/main" xmlns:ahyp="http://schemas.microsoft.com/office/drawing/2018/hyperlinkcolor">
+<p:sld xmlns:a="http://schemas.openxmlformats.org/drawingml/2006/main" xmlns:r="http://schemas.openxmlformats.org/officeDocument/2006/relationships" xmlns:p="http://schemas.openxmlformats.org/presentationml/2006/main">
   <p:cSld>
     <p:spTree>
       <p:nvGrpSpPr>
-        <p:cNvPr id="74" name="Shape 74"/>
+        <p:cNvPr id="1" name="Shape 74"/>
         <p:cNvGrpSpPr/>
         <p:nvPr/>
       </p:nvGrpSpPr>
@@ -12240,7 +12390,9 @@
       <p:sp>
         <p:nvSpPr>
           <p:cNvPr id="75" name="Google Shape;75;p15"/>
-          <p:cNvSpPr txBox="1"/>
+          <p:cNvSpPr txBox="1">
+            <a:spLocks noGrp="1"/>
+          </p:cNvSpPr>
           <p:nvPr>
             <p:ph type="title"/>
           </p:nvPr>
@@ -12255,12 +12407,12 @@
           </a:prstGeom>
         </p:spPr>
         <p:txBody>
-          <a:bodyPr anchorCtr="0" anchor="t" bIns="91425" lIns="91425" spcFirstLastPara="1" rIns="91425" wrap="square" tIns="91425">
+          <a:bodyPr spcFirstLastPara="1" wrap="square" lIns="91425" tIns="91425" rIns="91425" bIns="91425" anchor="t" anchorCtr="0">
             <a:normAutofit fontScale="90000"/>
           </a:bodyPr>
           <a:lstStyle/>
           <a:p>
-            <a:pPr indent="0" lvl="0" marL="0" rtl="0" algn="l">
+            <a:pPr marL="0" lvl="0" indent="0" algn="l" rtl="0">
               <a:spcBef>
                 <a:spcPts val="0"/>
               </a:spcBef>
@@ -12280,9 +12432,11 @@
       <p:sp>
         <p:nvSpPr>
           <p:cNvPr id="76" name="Google Shape;76;p15"/>
-          <p:cNvSpPr txBox="1"/>
+          <p:cNvSpPr txBox="1">
+            <a:spLocks noGrp="1"/>
+          </p:cNvSpPr>
           <p:nvPr>
-            <p:ph idx="1" type="body"/>
+            <p:ph type="body" idx="1"/>
           </p:nvPr>
         </p:nvSpPr>
         <p:spPr>
@@ -12295,12 +12449,12 @@
           </a:prstGeom>
         </p:spPr>
         <p:txBody>
-          <a:bodyPr anchorCtr="0" anchor="t" bIns="91425" lIns="91425" spcFirstLastPara="1" rIns="91425" wrap="square" tIns="91425">
+          <a:bodyPr spcFirstLastPara="1" wrap="square" lIns="91425" tIns="91425" rIns="91425" bIns="91425" anchor="t" anchorCtr="0">
             <a:normAutofit fontScale="85000" lnSpcReduction="20000"/>
           </a:bodyPr>
           <a:lstStyle/>
           <a:p>
-            <a:pPr indent="-325755" lvl="0" marL="457200" rtl="0" algn="l">
+            <a:pPr marL="457200" lvl="0" indent="-325755" algn="l" rtl="0">
               <a:spcBef>
                 <a:spcPts val="0"/>
               </a:spcBef>
@@ -12317,7 +12471,7 @@
             <a:endParaRPr/>
           </a:p>
           <a:p>
-            <a:pPr indent="-325755" lvl="0" marL="457200" rtl="0" algn="l">
+            <a:pPr marL="457200" lvl="0" indent="-325755" algn="l" rtl="0">
               <a:spcBef>
                 <a:spcPts val="0"/>
               </a:spcBef>
@@ -12334,7 +12488,7 @@
             <a:endParaRPr/>
           </a:p>
           <a:p>
-            <a:pPr indent="-325755" lvl="0" marL="457200" rtl="0" algn="l">
+            <a:pPr marL="457200" lvl="0" indent="-325755" algn="l" rtl="0">
               <a:spcBef>
                 <a:spcPts val="0"/>
               </a:spcBef>
@@ -12351,7 +12505,7 @@
             <a:endParaRPr/>
           </a:p>
           <a:p>
-            <a:pPr indent="-325755" lvl="0" marL="457200" rtl="0" algn="l">
+            <a:pPr marL="457200" lvl="0" indent="-325755" algn="l" rtl="0">
               <a:spcBef>
                 <a:spcPts val="0"/>
               </a:spcBef>
@@ -12368,7 +12522,7 @@
             <a:endParaRPr/>
           </a:p>
           <a:p>
-            <a:pPr indent="-325755" lvl="0" marL="457200" rtl="0" algn="l">
+            <a:pPr marL="457200" lvl="0" indent="-325755" algn="l" rtl="0">
               <a:spcBef>
                 <a:spcPts val="0"/>
               </a:spcBef>
@@ -12385,7 +12539,7 @@
             <a:endParaRPr/>
           </a:p>
           <a:p>
-            <a:pPr indent="-325755" lvl="0" marL="457200" rtl="0" algn="l">
+            <a:pPr marL="457200" lvl="0" indent="-325755" algn="l" rtl="0">
               <a:spcBef>
                 <a:spcPts val="0"/>
               </a:spcBef>
@@ -12402,7 +12556,7 @@
             <a:endParaRPr/>
           </a:p>
           <a:p>
-            <a:pPr indent="-325755" lvl="0" marL="457200" rtl="0" algn="l">
+            <a:pPr marL="457200" lvl="0" indent="-325755" algn="l" rtl="0">
               <a:spcBef>
                 <a:spcPts val="0"/>
               </a:spcBef>
@@ -12419,7 +12573,7 @@
             <a:endParaRPr/>
           </a:p>
           <a:p>
-            <a:pPr indent="-325755" lvl="0" marL="457200" rtl="0" algn="l">
+            <a:pPr marL="457200" lvl="0" indent="-325755" algn="l" rtl="0">
               <a:spcBef>
                 <a:spcPts val="0"/>
               </a:spcBef>
@@ -12436,7 +12590,7 @@
             <a:endParaRPr/>
           </a:p>
           <a:p>
-            <a:pPr indent="-325755" lvl="0" marL="457200" rtl="0" algn="l">
+            <a:pPr marL="457200" lvl="0" indent="-325755" algn="l" rtl="0">
               <a:spcBef>
                 <a:spcPts val="0"/>
               </a:spcBef>
@@ -12453,7 +12607,7 @@
             <a:endParaRPr/>
           </a:p>
           <a:p>
-            <a:pPr indent="-325755" lvl="0" marL="457200" rtl="0" algn="l">
+            <a:pPr marL="457200" lvl="0" indent="-325755" algn="l" rtl="0">
               <a:spcBef>
                 <a:spcPts val="0"/>
               </a:spcBef>
@@ -12470,7 +12624,7 @@
             <a:endParaRPr/>
           </a:p>
           <a:p>
-            <a:pPr indent="-325755" lvl="0" marL="457200" rtl="0" algn="l">
+            <a:pPr marL="457200" lvl="0" indent="-325755" algn="l" rtl="0">
               <a:spcBef>
                 <a:spcPts val="0"/>
               </a:spcBef>
@@ -12487,7 +12641,7 @@
             <a:endParaRPr/>
           </a:p>
           <a:p>
-            <a:pPr indent="-325755" lvl="0" marL="457200" rtl="0" algn="l">
+            <a:pPr marL="457200" lvl="0" indent="-325755" algn="l" rtl="0">
               <a:spcBef>
                 <a:spcPts val="0"/>
               </a:spcBef>
@@ -12499,16 +12653,12 @@
             </a:pPr>
             <a:r>
               <a:rPr lang="en"/>
-              <a:t>Accessibility</a:t>
-            </a:r>
-            <a:r>
-              <a:rPr lang="en"/>
-              <a:t> testing</a:t>
+              <a:t>Accessibility testing</a:t>
             </a:r>
             <a:endParaRPr/>
           </a:p>
           <a:p>
-            <a:pPr indent="-325755" lvl="0" marL="457200" rtl="0" algn="l">
+            <a:pPr marL="457200" lvl="0" indent="-325755" algn="l" rtl="0">
               <a:spcBef>
                 <a:spcPts val="0"/>
               </a:spcBef>
@@ -12525,7 +12675,7 @@
             <a:endParaRPr/>
           </a:p>
           <a:p>
-            <a:pPr indent="-325755" lvl="0" marL="457200" rtl="0" algn="l">
+            <a:pPr marL="457200" lvl="0" indent="-325755" algn="l" rtl="0">
               <a:spcBef>
                 <a:spcPts val="0"/>
               </a:spcBef>
@@ -12552,11 +12702,11 @@
 </file>
 
 <file path=ppt/slides/slide4.xml><?xml version="1.0" encoding="utf-8"?>
-<p:sld xmlns:a="http://schemas.openxmlformats.org/drawingml/2006/main" xmlns:r="http://schemas.openxmlformats.org/officeDocument/2006/relationships" xmlns:mc="http://schemas.openxmlformats.org/markup-compatibility/2006" xmlns:mv="urn:schemas-microsoft-com:mac:vml" xmlns:p="http://schemas.openxmlformats.org/presentationml/2006/main" xmlns:c="http://schemas.openxmlformats.org/drawingml/2006/chart" xmlns:dgm="http://schemas.openxmlformats.org/drawingml/2006/diagram" xmlns:o="urn:schemas-microsoft-com:office:office" xmlns:v="urn:schemas-microsoft-com:vml" xmlns:pvml="urn:schemas-microsoft-com:office:powerpoint" xmlns:com="http://schemas.openxmlformats.org/drawingml/2006/compatibility" xmlns:p14="http://schemas.microsoft.com/office/powerpoint/2010/main" xmlns:p15="http://schemas.microsoft.com/office/powerpoint/2012/main" xmlns:ahyp="http://schemas.microsoft.com/office/drawing/2018/hyperlinkcolor">
+<p:sld xmlns:a="http://schemas.openxmlformats.org/drawingml/2006/main" xmlns:r="http://schemas.openxmlformats.org/officeDocument/2006/relationships" xmlns:p="http://schemas.openxmlformats.org/presentationml/2006/main">
   <p:cSld>
     <p:spTree>
       <p:nvGrpSpPr>
-        <p:cNvPr id="80" name="Shape 80"/>
+        <p:cNvPr id="1" name="Shape 80"/>
         <p:cNvGrpSpPr/>
         <p:nvPr/>
       </p:nvGrpSpPr>
@@ -12571,7 +12721,9 @@
       <p:sp>
         <p:nvSpPr>
           <p:cNvPr id="81" name="Google Shape;81;p16"/>
-          <p:cNvSpPr txBox="1"/>
+          <p:cNvSpPr txBox="1">
+            <a:spLocks noGrp="1"/>
+          </p:cNvSpPr>
           <p:nvPr>
             <p:ph type="title"/>
           </p:nvPr>
@@ -12586,12 +12738,12 @@
           </a:prstGeom>
         </p:spPr>
         <p:txBody>
-          <a:bodyPr anchorCtr="0" anchor="t" bIns="91425" lIns="91425" spcFirstLastPara="1" rIns="91425" wrap="square" tIns="91425">
+          <a:bodyPr spcFirstLastPara="1" wrap="square" lIns="91425" tIns="91425" rIns="91425" bIns="91425" anchor="t" anchorCtr="0">
             <a:normAutofit fontScale="90000"/>
           </a:bodyPr>
           <a:lstStyle/>
           <a:p>
-            <a:pPr indent="0" lvl="0" marL="0" rtl="0" algn="l">
+            <a:pPr marL="0" lvl="0" indent="0" algn="l" rtl="0">
               <a:spcBef>
                 <a:spcPts val="0"/>
               </a:spcBef>
@@ -12611,9 +12763,11 @@
       <p:sp>
         <p:nvSpPr>
           <p:cNvPr id="82" name="Google Shape;82;p16"/>
-          <p:cNvSpPr txBox="1"/>
+          <p:cNvSpPr txBox="1">
+            <a:spLocks noGrp="1"/>
+          </p:cNvSpPr>
           <p:nvPr>
-            <p:ph idx="1" type="body"/>
+            <p:ph type="body" idx="1"/>
           </p:nvPr>
         </p:nvSpPr>
         <p:spPr>
@@ -12626,12 +12780,12 @@
           </a:prstGeom>
         </p:spPr>
         <p:txBody>
-          <a:bodyPr anchorCtr="0" anchor="ctr" bIns="91425" lIns="91425" spcFirstLastPara="1" rIns="91425" wrap="square" tIns="91425">
+          <a:bodyPr spcFirstLastPara="1" wrap="square" lIns="91425" tIns="91425" rIns="91425" bIns="91425" anchor="ctr" anchorCtr="0">
             <a:normAutofit/>
           </a:bodyPr>
           <a:lstStyle/>
           <a:p>
-            <a:pPr indent="0" lvl="0" marL="0" rtl="0" algn="ctr">
+            <a:pPr marL="0" lvl="0" indent="0" algn="ctr" rtl="0">
               <a:spcBef>
                 <a:spcPts val="0"/>
               </a:spcBef>
@@ -12647,7 +12801,7 @@
             <a:endParaRPr sz="2600"/>
           </a:p>
           <a:p>
-            <a:pPr indent="0" lvl="0" marL="0" rtl="0" algn="ctr">
+            <a:pPr marL="0" lvl="0" indent="0" algn="ctr" rtl="0">
               <a:spcBef>
                 <a:spcPts val="1200"/>
               </a:spcBef>
@@ -12673,11 +12827,11 @@
 </file>
 
 <file path=ppt/slides/slide5.xml><?xml version="1.0" encoding="utf-8"?>
-<p:sld xmlns:a="http://schemas.openxmlformats.org/drawingml/2006/main" xmlns:r="http://schemas.openxmlformats.org/officeDocument/2006/relationships" xmlns:mc="http://schemas.openxmlformats.org/markup-compatibility/2006" xmlns:mv="urn:schemas-microsoft-com:mac:vml" xmlns:p="http://schemas.openxmlformats.org/presentationml/2006/main" xmlns:c="http://schemas.openxmlformats.org/drawingml/2006/chart" xmlns:dgm="http://schemas.openxmlformats.org/drawingml/2006/diagram" xmlns:o="urn:schemas-microsoft-com:office:office" xmlns:v="urn:schemas-microsoft-com:vml" xmlns:pvml="urn:schemas-microsoft-com:office:powerpoint" xmlns:com="http://schemas.openxmlformats.org/drawingml/2006/compatibility" xmlns:p14="http://schemas.microsoft.com/office/powerpoint/2010/main" xmlns:p15="http://schemas.microsoft.com/office/powerpoint/2012/main" xmlns:ahyp="http://schemas.microsoft.com/office/drawing/2018/hyperlinkcolor">
+<p:sld xmlns:a="http://schemas.openxmlformats.org/drawingml/2006/main" xmlns:r="http://schemas.openxmlformats.org/officeDocument/2006/relationships" xmlns:p="http://schemas.openxmlformats.org/presentationml/2006/main">
   <p:cSld>
     <p:spTree>
       <p:nvGrpSpPr>
-        <p:cNvPr id="86" name="Shape 86"/>
+        <p:cNvPr id="1" name="Shape 86"/>
         <p:cNvGrpSpPr/>
         <p:nvPr/>
       </p:nvGrpSpPr>
@@ -12692,7 +12846,9 @@
       <p:sp>
         <p:nvSpPr>
           <p:cNvPr id="87" name="Google Shape;87;p17"/>
-          <p:cNvSpPr txBox="1"/>
+          <p:cNvSpPr txBox="1">
+            <a:spLocks noGrp="1"/>
+          </p:cNvSpPr>
           <p:nvPr>
             <p:ph type="title"/>
           </p:nvPr>
@@ -12707,12 +12863,12 @@
           </a:prstGeom>
         </p:spPr>
         <p:txBody>
-          <a:bodyPr anchorCtr="0" anchor="t" bIns="91425" lIns="91425" spcFirstLastPara="1" rIns="91425" wrap="square" tIns="91425">
+          <a:bodyPr spcFirstLastPara="1" wrap="square" lIns="91425" tIns="91425" rIns="91425" bIns="91425" anchor="t" anchorCtr="0">
             <a:normAutofit fontScale="90000"/>
           </a:bodyPr>
           <a:lstStyle/>
           <a:p>
-            <a:pPr indent="0" lvl="0" marL="0" rtl="0" algn="l">
+            <a:pPr marL="0" lvl="0" indent="0" algn="l" rtl="0">
               <a:spcBef>
                 <a:spcPts val="0"/>
               </a:spcBef>
@@ -12738,11 +12894,11 @@
 </file>
 
 <file path=ppt/slides/slide6.xml><?xml version="1.0" encoding="utf-8"?>
-<p:sld xmlns:a="http://schemas.openxmlformats.org/drawingml/2006/main" xmlns:r="http://schemas.openxmlformats.org/officeDocument/2006/relationships" xmlns:mc="http://schemas.openxmlformats.org/markup-compatibility/2006" xmlns:mv="urn:schemas-microsoft-com:mac:vml" xmlns:p="http://schemas.openxmlformats.org/presentationml/2006/main" xmlns:c="http://schemas.openxmlformats.org/drawingml/2006/chart" xmlns:dgm="http://schemas.openxmlformats.org/drawingml/2006/diagram" xmlns:o="urn:schemas-microsoft-com:office:office" xmlns:v="urn:schemas-microsoft-com:vml" xmlns:pvml="urn:schemas-microsoft-com:office:powerpoint" xmlns:com="http://schemas.openxmlformats.org/drawingml/2006/compatibility" xmlns:p14="http://schemas.microsoft.com/office/powerpoint/2010/main" xmlns:p15="http://schemas.microsoft.com/office/powerpoint/2012/main" xmlns:ahyp="http://schemas.microsoft.com/office/drawing/2018/hyperlinkcolor">
+<p:sld xmlns:a="http://schemas.openxmlformats.org/drawingml/2006/main" xmlns:r="http://schemas.openxmlformats.org/officeDocument/2006/relationships" xmlns:p="http://schemas.openxmlformats.org/presentationml/2006/main">
   <p:cSld>
     <p:spTree>
       <p:nvGrpSpPr>
-        <p:cNvPr id="91" name="Shape 91"/>
+        <p:cNvPr id="1" name="Shape 91"/>
         <p:cNvGrpSpPr/>
         <p:nvPr/>
       </p:nvGrpSpPr>
@@ -12757,7 +12913,9 @@
       <p:sp>
         <p:nvSpPr>
           <p:cNvPr id="92" name="Google Shape;92;p18"/>
-          <p:cNvSpPr txBox="1"/>
+          <p:cNvSpPr txBox="1">
+            <a:spLocks noGrp="1"/>
+          </p:cNvSpPr>
           <p:nvPr>
             <p:ph type="title"/>
           </p:nvPr>
@@ -12772,12 +12930,12 @@
           </a:prstGeom>
         </p:spPr>
         <p:txBody>
-          <a:bodyPr anchorCtr="0" anchor="t" bIns="91425" lIns="91425" spcFirstLastPara="1" rIns="91425" wrap="square" tIns="91425">
+          <a:bodyPr spcFirstLastPara="1" wrap="square" lIns="91425" tIns="91425" rIns="91425" bIns="91425" anchor="t" anchorCtr="0">
             <a:normAutofit fontScale="90000"/>
           </a:bodyPr>
           <a:lstStyle/>
           <a:p>
-            <a:pPr indent="0" lvl="0" marL="0" rtl="0" algn="l">
+            <a:pPr marL="0" lvl="0" indent="0" algn="l" rtl="0">
               <a:spcBef>
                 <a:spcPts val="0"/>
               </a:spcBef>
@@ -12797,9 +12955,11 @@
       <p:sp>
         <p:nvSpPr>
           <p:cNvPr id="93" name="Google Shape;93;p18"/>
-          <p:cNvSpPr txBox="1"/>
+          <p:cNvSpPr txBox="1">
+            <a:spLocks noGrp="1"/>
+          </p:cNvSpPr>
           <p:nvPr>
-            <p:ph idx="1" type="body"/>
+            <p:ph type="body" idx="1"/>
           </p:nvPr>
         </p:nvSpPr>
         <p:spPr>
@@ -12812,12 +12972,12 @@
           </a:prstGeom>
         </p:spPr>
         <p:txBody>
-          <a:bodyPr anchorCtr="0" anchor="t" bIns="91425" lIns="91425" spcFirstLastPara="1" rIns="91425" wrap="square" tIns="91425">
+          <a:bodyPr spcFirstLastPara="1" wrap="square" lIns="91425" tIns="91425" rIns="91425" bIns="91425" anchor="t" anchorCtr="0">
             <a:normAutofit/>
           </a:bodyPr>
           <a:lstStyle/>
           <a:p>
-            <a:pPr indent="-355600" lvl="0" marL="457200" rtl="0" algn="l">
+            <a:pPr marL="457200" lvl="0" indent="-355600" algn="l" rtl="0">
               <a:spcBef>
                 <a:spcPts val="0"/>
               </a:spcBef>
@@ -12828,13 +12988,13 @@
               <a:buChar char="●"/>
             </a:pPr>
             <a:r>
-              <a:rPr lang="en" sz="2000"/>
+              <a:rPr lang="en" sz="2000" dirty="0"/>
               <a:t>Your code makes an HTTP request to a website, which may return data that varies over time.</a:t>
             </a:r>
-            <a:endParaRPr sz="2000"/>
-          </a:p>
-          <a:p>
-            <a:pPr indent="-355600" lvl="0" marL="457200" rtl="0" algn="l">
+            <a:endParaRPr sz="2000" dirty="0"/>
+          </a:p>
+          <a:p>
+            <a:pPr marL="457200" lvl="0" indent="-355600" algn="l" rtl="0">
               <a:spcBef>
                 <a:spcPts val="0"/>
               </a:spcBef>
@@ -12845,13 +13005,13 @@
               <a:buChar char="●"/>
             </a:pPr>
             <a:r>
-              <a:rPr lang="en" sz="2000"/>
+              <a:rPr lang="en" sz="2000" dirty="0"/>
               <a:t>How to write a test that validates…</a:t>
             </a:r>
-            <a:endParaRPr sz="2000"/>
-          </a:p>
-          <a:p>
-            <a:pPr indent="-330200" lvl="1" marL="914400" rtl="0" algn="l">
+            <a:endParaRPr sz="2000" dirty="0"/>
+          </a:p>
+          <a:p>
+            <a:pPr marL="914400" lvl="1" indent="-330200" algn="l" rtl="0">
               <a:spcBef>
                 <a:spcPts val="0"/>
               </a:spcBef>
@@ -12862,13 +13022,13 @@
               <a:buChar char="○"/>
             </a:pPr>
             <a:r>
-              <a:rPr lang="en" sz="1600"/>
+              <a:rPr lang="en" sz="1600" dirty="0"/>
               <a:t>…that your code works if there are HTTP errors?</a:t>
             </a:r>
-            <a:endParaRPr sz="1600"/>
-          </a:p>
-          <a:p>
-            <a:pPr indent="-330200" lvl="1" marL="914400" rtl="0" algn="l">
+            <a:endParaRPr sz="1600" dirty="0"/>
+          </a:p>
+          <a:p>
+            <a:pPr marL="914400" lvl="1" indent="-330200" algn="l" rtl="0">
               <a:spcBef>
                 <a:spcPts val="0"/>
               </a:spcBef>
@@ -12879,13 +13039,13 @@
               <a:buChar char="○"/>
             </a:pPr>
             <a:r>
-              <a:rPr lang="en" sz="1600"/>
+              <a:rPr lang="en" sz="1600" dirty="0"/>
               <a:t>…that your code works if the data changes?</a:t>
             </a:r>
-            <a:endParaRPr sz="1600"/>
-          </a:p>
-          <a:p>
-            <a:pPr indent="-330200" lvl="1" marL="914400" rtl="0" algn="l">
+            <a:endParaRPr sz="1600" dirty="0"/>
+          </a:p>
+          <a:p>
+            <a:pPr marL="914400" lvl="1" indent="-330200" algn="l" rtl="0">
               <a:spcBef>
                 <a:spcPts val="0"/>
               </a:spcBef>
@@ -12896,13 +13056,13 @@
               <a:buChar char="○"/>
             </a:pPr>
             <a:r>
-              <a:rPr lang="en" sz="1600"/>
+              <a:rPr lang="en" sz="1600" dirty="0"/>
               <a:t>…that your code works in normal cases?</a:t>
             </a:r>
-            <a:endParaRPr sz="1600"/>
-          </a:p>
-          <a:p>
-            <a:pPr indent="-355600" lvl="0" marL="457200" rtl="0" algn="l">
+            <a:endParaRPr sz="1600" dirty="0"/>
+          </a:p>
+          <a:p>
+            <a:pPr marL="457200" lvl="0" indent="-355600" algn="l" rtl="0">
               <a:spcBef>
                 <a:spcPts val="0"/>
               </a:spcBef>
@@ -12913,10 +13073,10 @@
               <a:buChar char="●"/>
             </a:pPr>
             <a:r>
-              <a:rPr lang="en" sz="2000"/>
+              <a:rPr lang="en" sz="2000" dirty="0"/>
               <a:t>…given that you don’t control the network or the other website?</a:t>
             </a:r>
-            <a:endParaRPr sz="2000"/>
+            <a:endParaRPr sz="2000" dirty="0"/>
           </a:p>
         </p:txBody>
       </p:sp>
@@ -12928,32 +13088,32 @@
   <p:timing>
     <p:tnLst>
       <p:par>
-        <p:cTn dur="indefinite" nodeType="tmRoot" restart="never">
+        <p:cTn id="1" dur="indefinite" restart="never" nodeType="tmRoot">
           <p:childTnLst>
             <p:seq concurrent="1" nextAc="seek">
-              <p:cTn dur="indefinite" id="2" nodeType="mainSeq">
+              <p:cTn id="2" dur="indefinite" nodeType="mainSeq">
                 <p:childTnLst>
                   <p:par>
-                    <p:cTn fill="hold">
+                    <p:cTn id="3" fill="hold">
                       <p:stCondLst>
                         <p:cond delay="indefinite"/>
                       </p:stCondLst>
                       <p:childTnLst>
                         <p:par>
-                          <p:cTn fill="hold">
+                          <p:cTn id="4" fill="hold">
                             <p:stCondLst>
                               <p:cond delay="0"/>
                             </p:stCondLst>
                             <p:childTnLst>
                               <p:par>
-                                <p:cTn fill="hold" nodeType="clickEffect" presetClass="entr" presetID="1" presetSubtype="0">
+                                <p:cTn id="5" presetID="1" presetClass="entr" presetSubtype="0" fill="hold" nodeType="clickEffect">
                                   <p:stCondLst>
                                     <p:cond delay="0"/>
                                   </p:stCondLst>
                                   <p:childTnLst>
                                     <p:set>
                                       <p:cBhvr>
-                                        <p:cTn dur="1" fill="hold">
+                                        <p:cTn id="6" dur="1" fill="hold">
                                           <p:stCondLst>
                                             <p:cond delay="0"/>
                                           </p:stCondLst>
@@ -12961,7 +13121,7 @@
                                         <p:tgtEl>
                                           <p:spTgt spid="93">
                                             <p:txEl>
-                                              <p:pRg end="0" st="0"/>
+                                              <p:pRg st="0" end="0"/>
                                             </p:txEl>
                                           </p:spTgt>
                                         </p:tgtEl>
@@ -12983,26 +13143,26 @@
                     </p:cTn>
                   </p:par>
                   <p:par>
-                    <p:cTn fill="hold">
+                    <p:cTn id="7" fill="hold">
                       <p:stCondLst>
                         <p:cond delay="indefinite"/>
                       </p:stCondLst>
                       <p:childTnLst>
                         <p:par>
-                          <p:cTn fill="hold">
+                          <p:cTn id="8" fill="hold">
                             <p:stCondLst>
                               <p:cond delay="0"/>
                             </p:stCondLst>
                             <p:childTnLst>
                               <p:par>
-                                <p:cTn fill="hold" nodeType="clickEffect" presetClass="entr" presetID="1" presetSubtype="0">
+                                <p:cTn id="9" presetID="1" presetClass="entr" presetSubtype="0" fill="hold" nodeType="clickEffect">
                                   <p:stCondLst>
                                     <p:cond delay="0"/>
                                   </p:stCondLst>
                                   <p:childTnLst>
                                     <p:set>
                                       <p:cBhvr>
-                                        <p:cTn dur="1" fill="hold">
+                                        <p:cTn id="10" dur="1" fill="hold">
                                           <p:stCondLst>
                                             <p:cond delay="0"/>
                                           </p:stCondLst>
@@ -13010,7 +13170,7 @@
                                         <p:tgtEl>
                                           <p:spTgt spid="93">
                                             <p:txEl>
-                                              <p:pRg end="1" st="1"/>
+                                              <p:pRg st="1" end="1"/>
                                             </p:txEl>
                                           </p:spTgt>
                                         </p:tgtEl>
@@ -13032,26 +13192,26 @@
                     </p:cTn>
                   </p:par>
                   <p:par>
-                    <p:cTn fill="hold">
+                    <p:cTn id="11" fill="hold">
                       <p:stCondLst>
                         <p:cond delay="indefinite"/>
                       </p:stCondLst>
                       <p:childTnLst>
                         <p:par>
-                          <p:cTn fill="hold">
+                          <p:cTn id="12" fill="hold">
                             <p:stCondLst>
                               <p:cond delay="0"/>
                             </p:stCondLst>
                             <p:childTnLst>
                               <p:par>
-                                <p:cTn fill="hold" nodeType="clickEffect" presetClass="entr" presetID="1" presetSubtype="0">
+                                <p:cTn id="13" presetID="1" presetClass="entr" presetSubtype="0" fill="hold" nodeType="clickEffect">
                                   <p:stCondLst>
                                     <p:cond delay="0"/>
                                   </p:stCondLst>
                                   <p:childTnLst>
                                     <p:set>
                                       <p:cBhvr>
-                                        <p:cTn dur="1" fill="hold">
+                                        <p:cTn id="14" dur="1" fill="hold">
                                           <p:stCondLst>
                                             <p:cond delay="0"/>
                                           </p:stCondLst>
@@ -13059,7 +13219,7 @@
                                         <p:tgtEl>
                                           <p:spTgt spid="93">
                                             <p:txEl>
-                                              <p:pRg end="2" st="2"/>
+                                              <p:pRg st="2" end="2"/>
                                             </p:txEl>
                                           </p:spTgt>
                                         </p:tgtEl>
@@ -13081,26 +13241,26 @@
                     </p:cTn>
                   </p:par>
                   <p:par>
-                    <p:cTn fill="hold">
+                    <p:cTn id="15" fill="hold">
                       <p:stCondLst>
                         <p:cond delay="indefinite"/>
                       </p:stCondLst>
                       <p:childTnLst>
                         <p:par>
-                          <p:cTn fill="hold">
+                          <p:cTn id="16" fill="hold">
                             <p:stCondLst>
                               <p:cond delay="0"/>
                             </p:stCondLst>
                             <p:childTnLst>
                               <p:par>
-                                <p:cTn fill="hold" nodeType="clickEffect" presetClass="entr" presetID="1" presetSubtype="0">
+                                <p:cTn id="17" presetID="1" presetClass="entr" presetSubtype="0" fill="hold" nodeType="clickEffect">
                                   <p:stCondLst>
                                     <p:cond delay="0"/>
                                   </p:stCondLst>
                                   <p:childTnLst>
                                     <p:set>
                                       <p:cBhvr>
-                                        <p:cTn dur="1" fill="hold">
+                                        <p:cTn id="18" dur="1" fill="hold">
                                           <p:stCondLst>
                                             <p:cond delay="0"/>
                                           </p:stCondLst>
@@ -13108,7 +13268,7 @@
                                         <p:tgtEl>
                                           <p:spTgt spid="93">
                                             <p:txEl>
-                                              <p:pRg end="3" st="3"/>
+                                              <p:pRg st="3" end="3"/>
                                             </p:txEl>
                                           </p:spTgt>
                                         </p:tgtEl>
@@ -13130,26 +13290,26 @@
                     </p:cTn>
                   </p:par>
                   <p:par>
-                    <p:cTn fill="hold">
+                    <p:cTn id="19" fill="hold">
                       <p:stCondLst>
                         <p:cond delay="indefinite"/>
                       </p:stCondLst>
                       <p:childTnLst>
                         <p:par>
-                          <p:cTn fill="hold">
+                          <p:cTn id="20" fill="hold">
                             <p:stCondLst>
                               <p:cond delay="0"/>
                             </p:stCondLst>
                             <p:childTnLst>
                               <p:par>
-                                <p:cTn fill="hold" nodeType="clickEffect" presetClass="entr" presetID="1" presetSubtype="0">
+                                <p:cTn id="21" presetID="1" presetClass="entr" presetSubtype="0" fill="hold" nodeType="clickEffect">
                                   <p:stCondLst>
                                     <p:cond delay="0"/>
                                   </p:stCondLst>
                                   <p:childTnLst>
                                     <p:set>
                                       <p:cBhvr>
-                                        <p:cTn dur="1" fill="hold">
+                                        <p:cTn id="22" dur="1" fill="hold">
                                           <p:stCondLst>
                                             <p:cond delay="0"/>
                                           </p:stCondLst>
@@ -13157,7 +13317,7 @@
                                         <p:tgtEl>
                                           <p:spTgt spid="93">
                                             <p:txEl>
-                                              <p:pRg end="4" st="4"/>
+                                              <p:pRg st="4" end="4"/>
                                             </p:txEl>
                                           </p:spTgt>
                                         </p:tgtEl>
@@ -13179,26 +13339,26 @@
                     </p:cTn>
                   </p:par>
                   <p:par>
-                    <p:cTn fill="hold">
+                    <p:cTn id="23" fill="hold">
                       <p:stCondLst>
                         <p:cond delay="indefinite"/>
                       </p:stCondLst>
                       <p:childTnLst>
                         <p:par>
-                          <p:cTn fill="hold">
+                          <p:cTn id="24" fill="hold">
                             <p:stCondLst>
                               <p:cond delay="0"/>
                             </p:stCondLst>
                             <p:childTnLst>
                               <p:par>
-                                <p:cTn fill="hold" nodeType="clickEffect" presetClass="entr" presetID="1" presetSubtype="0">
+                                <p:cTn id="25" presetID="1" presetClass="entr" presetSubtype="0" fill="hold" nodeType="clickEffect">
                                   <p:stCondLst>
                                     <p:cond delay="0"/>
                                   </p:stCondLst>
                                   <p:childTnLst>
                                     <p:set>
                                       <p:cBhvr>
-                                        <p:cTn dur="1" fill="hold">
+                                        <p:cTn id="26" dur="1" fill="hold">
                                           <p:stCondLst>
                                             <p:cond delay="0"/>
                                           </p:stCondLst>
@@ -13206,7 +13366,7 @@
                                         <p:tgtEl>
                                           <p:spTgt spid="93">
                                             <p:txEl>
-                                              <p:pRg end="5" st="5"/>
+                                              <p:pRg st="5" end="5"/>
                                             </p:txEl>
                                           </p:spTgt>
                                         </p:tgtEl>
@@ -13230,14 +13390,14 @@
                 </p:childTnLst>
               </p:cTn>
               <p:prevCondLst>
-                <p:cond evt="onPrev">
+                <p:cond evt="onPrev" delay="0">
                   <p:tgtEl>
                     <p:sldTgt/>
                   </p:tgtEl>
                 </p:cond>
               </p:prevCondLst>
               <p:nextCondLst>
-                <p:cond evt="onNext">
+                <p:cond evt="onNext" delay="0">
                   <p:tgtEl>
                     <p:sldTgt/>
                   </p:tgtEl>
@@ -13253,11 +13413,11 @@
 </file>
 
 <file path=ppt/slides/slide7.xml><?xml version="1.0" encoding="utf-8"?>
-<p:sld xmlns:a="http://schemas.openxmlformats.org/drawingml/2006/main" xmlns:r="http://schemas.openxmlformats.org/officeDocument/2006/relationships" xmlns:mc="http://schemas.openxmlformats.org/markup-compatibility/2006" xmlns:mv="urn:schemas-microsoft-com:mac:vml" xmlns:p="http://schemas.openxmlformats.org/presentationml/2006/main" xmlns:c="http://schemas.openxmlformats.org/drawingml/2006/chart" xmlns:dgm="http://schemas.openxmlformats.org/drawingml/2006/diagram" xmlns:o="urn:schemas-microsoft-com:office:office" xmlns:v="urn:schemas-microsoft-com:vml" xmlns:pvml="urn:schemas-microsoft-com:office:powerpoint" xmlns:com="http://schemas.openxmlformats.org/drawingml/2006/compatibility" xmlns:p14="http://schemas.microsoft.com/office/powerpoint/2010/main" xmlns:p15="http://schemas.microsoft.com/office/powerpoint/2012/main" xmlns:ahyp="http://schemas.microsoft.com/office/drawing/2018/hyperlinkcolor">
+<p:sld xmlns:a="http://schemas.openxmlformats.org/drawingml/2006/main" xmlns:r="http://schemas.openxmlformats.org/officeDocument/2006/relationships" xmlns:p="http://schemas.openxmlformats.org/presentationml/2006/main">
   <p:cSld>
     <p:spTree>
       <p:nvGrpSpPr>
-        <p:cNvPr id="97" name="Shape 97"/>
+        <p:cNvPr id="1" name="Shape 97"/>
         <p:cNvGrpSpPr/>
         <p:nvPr/>
       </p:nvGrpSpPr>
@@ -13272,7 +13432,9 @@
       <p:sp>
         <p:nvSpPr>
           <p:cNvPr id="98" name="Google Shape;98;p19"/>
-          <p:cNvSpPr txBox="1"/>
+          <p:cNvSpPr txBox="1">
+            <a:spLocks noGrp="1"/>
+          </p:cNvSpPr>
           <p:nvPr>
             <p:ph type="title"/>
           </p:nvPr>
@@ -13287,12 +13449,12 @@
           </a:prstGeom>
         </p:spPr>
         <p:txBody>
-          <a:bodyPr anchorCtr="0" anchor="t" bIns="91425" lIns="91425" spcFirstLastPara="1" rIns="91425" wrap="square" tIns="91425">
+          <a:bodyPr spcFirstLastPara="1" wrap="square" lIns="91425" tIns="91425" rIns="91425" bIns="91425" anchor="t" anchorCtr="0">
             <a:normAutofit fontScale="90000"/>
           </a:bodyPr>
           <a:lstStyle/>
           <a:p>
-            <a:pPr indent="0" lvl="0" marL="0" rtl="0" algn="l">
+            <a:pPr marL="0" lvl="0" indent="0" algn="l" rtl="0">
               <a:spcBef>
                 <a:spcPts val="0"/>
               </a:spcBef>
@@ -13312,9 +13474,11 @@
       <p:sp>
         <p:nvSpPr>
           <p:cNvPr id="99" name="Google Shape;99;p19"/>
-          <p:cNvSpPr txBox="1"/>
+          <p:cNvSpPr txBox="1">
+            <a:spLocks noGrp="1"/>
+          </p:cNvSpPr>
           <p:nvPr>
-            <p:ph idx="1" type="body"/>
+            <p:ph type="body" idx="1"/>
           </p:nvPr>
         </p:nvSpPr>
         <p:spPr>
@@ -13327,12 +13491,12 @@
           </a:prstGeom>
         </p:spPr>
         <p:txBody>
-          <a:bodyPr anchorCtr="0" anchor="t" bIns="91425" lIns="91425" spcFirstLastPara="1" rIns="91425" wrap="square" tIns="91425">
+          <a:bodyPr spcFirstLastPara="1" wrap="square" lIns="91425" tIns="91425" rIns="91425" bIns="91425" anchor="t" anchorCtr="0">
             <a:noAutofit/>
           </a:bodyPr>
           <a:lstStyle/>
           <a:p>
-            <a:pPr indent="0" lvl="0" marL="0" rtl="0" algn="l">
+            <a:pPr marL="0" lvl="0" indent="0" algn="l" rtl="0">
               <a:spcBef>
                 <a:spcPts val="0"/>
               </a:spcBef>
@@ -13348,7 +13512,7 @@
             <a:endParaRPr sz="2000"/>
           </a:p>
           <a:p>
-            <a:pPr indent="-342900" lvl="0" marL="457200" rtl="0" algn="l">
+            <a:pPr marL="457200" lvl="0" indent="-342900" algn="l" rtl="0">
               <a:spcBef>
                 <a:spcPts val="1200"/>
               </a:spcBef>
@@ -13363,7 +13527,7 @@
               <a:t>In HW3, you wrote </a:t>
             </a:r>
             <a:r>
-              <a:rPr b="1" lang="en" sz="1600">
+              <a:rPr lang="en" sz="1600" b="1">
                 <a:solidFill>
                   <a:srgbClr val="188038"/>
                 </a:solidFill>
@@ -13379,7 +13543,7 @@
               <a:t> and </a:t>
             </a:r>
             <a:r>
-              <a:rPr b="1" lang="en" sz="1600">
+              <a:rPr lang="en" sz="1600" b="1">
                 <a:solidFill>
                   <a:srgbClr val="188038"/>
                 </a:solidFill>
@@ -13397,7 +13561,7 @@
             <a:endParaRPr sz="2000"/>
           </a:p>
           <a:p>
-            <a:pPr indent="-355600" lvl="0" marL="457200" rtl="0" algn="l">
+            <a:pPr marL="457200" lvl="0" indent="-355600" algn="l" rtl="0">
               <a:spcBef>
                 <a:spcPts val="0"/>
               </a:spcBef>
@@ -13414,7 +13578,7 @@
             <a:endParaRPr sz="2000"/>
           </a:p>
           <a:p>
-            <a:pPr indent="-317500" lvl="1" marL="914400" rtl="0" algn="l">
+            <a:pPr marL="914400" lvl="1" indent="-317500" algn="l" rtl="0">
               <a:spcBef>
                 <a:spcPts val="0"/>
               </a:spcBef>
@@ -13429,7 +13593,7 @@
               <a:t>If your </a:t>
             </a:r>
             <a:r>
-              <a:rPr b="1" lang="en">
+              <a:rPr lang="en" b="1">
                 <a:solidFill>
                   <a:srgbClr val="188038"/>
                 </a:solidFill>
@@ -13445,7 +13609,7 @@
               <a:t> is wrong, you should not ALSO lose points for </a:t>
             </a:r>
             <a:r>
-              <a:rPr b="1" lang="en">
+              <a:rPr lang="en" b="1">
                 <a:solidFill>
                   <a:srgbClr val="188038"/>
                 </a:solidFill>
@@ -13463,7 +13627,7 @@
             <a:endParaRPr sz="1600"/>
           </a:p>
           <a:p>
-            <a:pPr indent="-342900" lvl="0" marL="457200" rtl="0" algn="l">
+            <a:pPr marL="457200" lvl="0" indent="-342900" algn="l" rtl="0">
               <a:spcBef>
                 <a:spcPts val="0"/>
               </a:spcBef>
@@ -13478,7 +13642,7 @@
               <a:t>One solution: run OUR implementation of </a:t>
             </a:r>
             <a:r>
-              <a:rPr b="1" lang="en" sz="1600">
+              <a:rPr lang="en" sz="1600" b="1">
                 <a:solidFill>
                   <a:srgbClr val="188038"/>
                 </a:solidFill>
@@ -13494,7 +13658,7 @@
               <a:t> with YOUR implementation of </a:t>
             </a:r>
             <a:r>
-              <a:rPr b="1" lang="en" sz="1600">
+              <a:rPr lang="en" sz="1600" b="1">
                 <a:solidFill>
                   <a:srgbClr val="188038"/>
                 </a:solidFill>
@@ -13508,7 +13672,7 @@
             <a:endParaRPr sz="2000"/>
           </a:p>
           <a:p>
-            <a:pPr indent="-342900" lvl="0" marL="457200" rtl="0" algn="l">
+            <a:pPr marL="457200" lvl="0" indent="-342900" algn="l" rtl="0">
               <a:spcBef>
                 <a:spcPts val="0"/>
               </a:spcBef>
@@ -13534,32 +13698,32 @@
   <p:timing>
     <p:tnLst>
       <p:par>
-        <p:cTn dur="indefinite" nodeType="tmRoot" restart="never">
+        <p:cTn id="1" dur="indefinite" restart="never" nodeType="tmRoot">
           <p:childTnLst>
             <p:seq concurrent="1" nextAc="seek">
-              <p:cTn dur="indefinite" id="2" nodeType="mainSeq">
+              <p:cTn id="2" dur="indefinite" nodeType="mainSeq">
                 <p:childTnLst>
                   <p:par>
-                    <p:cTn fill="hold">
+                    <p:cTn id="3" fill="hold">
                       <p:stCondLst>
                         <p:cond delay="indefinite"/>
                       </p:stCondLst>
                       <p:childTnLst>
                         <p:par>
-                          <p:cTn fill="hold">
+                          <p:cTn id="4" fill="hold">
                             <p:stCondLst>
                               <p:cond delay="0"/>
                             </p:stCondLst>
                             <p:childTnLst>
                               <p:par>
-                                <p:cTn fill="hold" nodeType="clickEffect" presetClass="entr" presetID="1" presetSubtype="0">
+                                <p:cTn id="5" presetID="1" presetClass="entr" presetSubtype="0" fill="hold" nodeType="clickEffect">
                                   <p:stCondLst>
                                     <p:cond delay="0"/>
                                   </p:stCondLst>
                                   <p:childTnLst>
                                     <p:set>
                                       <p:cBhvr>
-                                        <p:cTn dur="1" fill="hold">
+                                        <p:cTn id="6" dur="1" fill="hold">
                                           <p:stCondLst>
                                             <p:cond delay="0"/>
                                           </p:stCondLst>
@@ -13567,7 +13731,7 @@
                                         <p:tgtEl>
                                           <p:spTgt spid="99">
                                             <p:txEl>
-                                              <p:pRg end="0" st="0"/>
+                                              <p:pRg st="0" end="0"/>
                                             </p:txEl>
                                           </p:spTgt>
                                         </p:tgtEl>
@@ -13589,26 +13753,26 @@
                     </p:cTn>
                   </p:par>
                   <p:par>
-                    <p:cTn fill="hold">
+                    <p:cTn id="7" fill="hold">
                       <p:stCondLst>
                         <p:cond delay="indefinite"/>
                       </p:stCondLst>
                       <p:childTnLst>
                         <p:par>
-                          <p:cTn fill="hold">
+                          <p:cTn id="8" fill="hold">
                             <p:stCondLst>
                               <p:cond delay="0"/>
                             </p:stCondLst>
                             <p:childTnLst>
                               <p:par>
-                                <p:cTn fill="hold" nodeType="clickEffect" presetClass="entr" presetID="1" presetSubtype="0">
+                                <p:cTn id="9" presetID="1" presetClass="entr" presetSubtype="0" fill="hold" nodeType="clickEffect">
                                   <p:stCondLst>
                                     <p:cond delay="0"/>
                                   </p:stCondLst>
                                   <p:childTnLst>
                                     <p:set>
                                       <p:cBhvr>
-                                        <p:cTn dur="1" fill="hold">
+                                        <p:cTn id="10" dur="1" fill="hold">
                                           <p:stCondLst>
                                             <p:cond delay="0"/>
                                           </p:stCondLst>
@@ -13616,7 +13780,7 @@
                                         <p:tgtEl>
                                           <p:spTgt spid="99">
                                             <p:txEl>
-                                              <p:pRg end="1" st="1"/>
+                                              <p:pRg st="1" end="1"/>
                                             </p:txEl>
                                           </p:spTgt>
                                         </p:tgtEl>
@@ -13638,26 +13802,26 @@
                     </p:cTn>
                   </p:par>
                   <p:par>
-                    <p:cTn fill="hold">
+                    <p:cTn id="11" fill="hold">
                       <p:stCondLst>
                         <p:cond delay="indefinite"/>
                       </p:stCondLst>
                       <p:childTnLst>
                         <p:par>
-                          <p:cTn fill="hold">
+                          <p:cTn id="12" fill="hold">
                             <p:stCondLst>
                               <p:cond delay="0"/>
                             </p:stCondLst>
                             <p:childTnLst>
                               <p:par>
-                                <p:cTn fill="hold" nodeType="clickEffect" presetClass="entr" presetID="1" presetSubtype="0">
+                                <p:cTn id="13" presetID="1" presetClass="entr" presetSubtype="0" fill="hold" nodeType="clickEffect">
                                   <p:stCondLst>
                                     <p:cond delay="0"/>
                                   </p:stCondLst>
                                   <p:childTnLst>
                                     <p:set>
                                       <p:cBhvr>
-                                        <p:cTn dur="1" fill="hold">
+                                        <p:cTn id="14" dur="1" fill="hold">
                                           <p:stCondLst>
                                             <p:cond delay="0"/>
                                           </p:stCondLst>
@@ -13665,7 +13829,7 @@
                                         <p:tgtEl>
                                           <p:spTgt spid="99">
                                             <p:txEl>
-                                              <p:pRg end="2" st="2"/>
+                                              <p:pRg st="2" end="2"/>
                                             </p:txEl>
                                           </p:spTgt>
                                         </p:tgtEl>
@@ -13687,26 +13851,26 @@
                     </p:cTn>
                   </p:par>
                   <p:par>
-                    <p:cTn fill="hold">
+                    <p:cTn id="15" fill="hold">
                       <p:stCondLst>
                         <p:cond delay="indefinite"/>
                       </p:stCondLst>
                       <p:childTnLst>
                         <p:par>
-                          <p:cTn fill="hold">
+                          <p:cTn id="16" fill="hold">
                             <p:stCondLst>
                               <p:cond delay="0"/>
                             </p:stCondLst>
                             <p:childTnLst>
                               <p:par>
-                                <p:cTn fill="hold" nodeType="clickEffect" presetClass="entr" presetID="1" presetSubtype="0">
+                                <p:cTn id="17" presetID="1" presetClass="entr" presetSubtype="0" fill="hold" nodeType="clickEffect">
                                   <p:stCondLst>
                                     <p:cond delay="0"/>
                                   </p:stCondLst>
                                   <p:childTnLst>
                                     <p:set>
                                       <p:cBhvr>
-                                        <p:cTn dur="1" fill="hold">
+                                        <p:cTn id="18" dur="1" fill="hold">
                                           <p:stCondLst>
                                             <p:cond delay="0"/>
                                           </p:stCondLst>
@@ -13714,7 +13878,7 @@
                                         <p:tgtEl>
                                           <p:spTgt spid="99">
                                             <p:txEl>
-                                              <p:pRg end="3" st="3"/>
+                                              <p:pRg st="3" end="3"/>
                                             </p:txEl>
                                           </p:spTgt>
                                         </p:tgtEl>
@@ -13736,26 +13900,26 @@
                     </p:cTn>
                   </p:par>
                   <p:par>
-                    <p:cTn fill="hold">
+                    <p:cTn id="19" fill="hold">
                       <p:stCondLst>
                         <p:cond delay="indefinite"/>
                       </p:stCondLst>
                       <p:childTnLst>
                         <p:par>
-                          <p:cTn fill="hold">
+                          <p:cTn id="20" fill="hold">
                             <p:stCondLst>
                               <p:cond delay="0"/>
                             </p:stCondLst>
                             <p:childTnLst>
                               <p:par>
-                                <p:cTn fill="hold" nodeType="clickEffect" presetClass="entr" presetID="1" presetSubtype="0">
+                                <p:cTn id="21" presetID="1" presetClass="entr" presetSubtype="0" fill="hold" nodeType="clickEffect">
                                   <p:stCondLst>
                                     <p:cond delay="0"/>
                                   </p:stCondLst>
                                   <p:childTnLst>
                                     <p:set>
                                       <p:cBhvr>
-                                        <p:cTn dur="1" fill="hold">
+                                        <p:cTn id="22" dur="1" fill="hold">
                                           <p:stCondLst>
                                             <p:cond delay="0"/>
                                           </p:stCondLst>
@@ -13763,7 +13927,7 @@
                                         <p:tgtEl>
                                           <p:spTgt spid="99">
                                             <p:txEl>
-                                              <p:pRg end="4" st="4"/>
+                                              <p:pRg st="4" end="4"/>
                                             </p:txEl>
                                           </p:spTgt>
                                         </p:tgtEl>
@@ -13785,26 +13949,26 @@
                     </p:cTn>
                   </p:par>
                   <p:par>
-                    <p:cTn fill="hold">
+                    <p:cTn id="23" fill="hold">
                       <p:stCondLst>
                         <p:cond delay="indefinite"/>
                       </p:stCondLst>
                       <p:childTnLst>
                         <p:par>
-                          <p:cTn fill="hold">
+                          <p:cTn id="24" fill="hold">
                             <p:stCondLst>
                               <p:cond delay="0"/>
                             </p:stCondLst>
                             <p:childTnLst>
                               <p:par>
-                                <p:cTn fill="hold" nodeType="clickEffect" presetClass="entr" presetID="1" presetSubtype="0">
+                                <p:cTn id="25" presetID="1" presetClass="entr" presetSubtype="0" fill="hold" nodeType="clickEffect">
                                   <p:stCondLst>
                                     <p:cond delay="0"/>
                                   </p:stCondLst>
                                   <p:childTnLst>
                                     <p:set>
                                       <p:cBhvr>
-                                        <p:cTn dur="1" fill="hold">
+                                        <p:cTn id="26" dur="1" fill="hold">
                                           <p:stCondLst>
                                             <p:cond delay="0"/>
                                           </p:stCondLst>
@@ -13812,7 +13976,7 @@
                                         <p:tgtEl>
                                           <p:spTgt spid="99">
                                             <p:txEl>
-                                              <p:pRg end="5" st="5"/>
+                                              <p:pRg st="5" end="5"/>
                                             </p:txEl>
                                           </p:spTgt>
                                         </p:tgtEl>
@@ -13836,14 +14000,14 @@
                 </p:childTnLst>
               </p:cTn>
               <p:prevCondLst>
-                <p:cond evt="onPrev">
+                <p:cond evt="onPrev" delay="0">
                   <p:tgtEl>
                     <p:sldTgt/>
                   </p:tgtEl>
                 </p:cond>
               </p:prevCondLst>
               <p:nextCondLst>
-                <p:cond evt="onNext">
+                <p:cond evt="onNext" delay="0">
                   <p:tgtEl>
                     <p:sldTgt/>
                   </p:tgtEl>
@@ -13859,11 +14023,11 @@
 </file>
 
 <file path=ppt/slides/slide8.xml><?xml version="1.0" encoding="utf-8"?>
-<p:sld xmlns:a="http://schemas.openxmlformats.org/drawingml/2006/main" xmlns:r="http://schemas.openxmlformats.org/officeDocument/2006/relationships" xmlns:mc="http://schemas.openxmlformats.org/markup-compatibility/2006" xmlns:mv="urn:schemas-microsoft-com:mac:vml" xmlns:p="http://schemas.openxmlformats.org/presentationml/2006/main" xmlns:c="http://schemas.openxmlformats.org/drawingml/2006/chart" xmlns:dgm="http://schemas.openxmlformats.org/drawingml/2006/diagram" xmlns:o="urn:schemas-microsoft-com:office:office" xmlns:v="urn:schemas-microsoft-com:vml" xmlns:pvml="urn:schemas-microsoft-com:office:powerpoint" xmlns:com="http://schemas.openxmlformats.org/drawingml/2006/compatibility" xmlns:p14="http://schemas.microsoft.com/office/powerpoint/2010/main" xmlns:p15="http://schemas.microsoft.com/office/powerpoint/2012/main" xmlns:ahyp="http://schemas.microsoft.com/office/drawing/2018/hyperlinkcolor">
+<p:sld xmlns:a="http://schemas.openxmlformats.org/drawingml/2006/main" xmlns:r="http://schemas.openxmlformats.org/officeDocument/2006/relationships" xmlns:p="http://schemas.openxmlformats.org/presentationml/2006/main">
   <p:cSld>
     <p:spTree>
       <p:nvGrpSpPr>
-        <p:cNvPr id="103" name="Shape 103"/>
+        <p:cNvPr id="1" name="Shape 103"/>
         <p:cNvGrpSpPr/>
         <p:nvPr/>
       </p:nvGrpSpPr>
@@ -13878,7 +14042,9 @@
       <p:sp>
         <p:nvSpPr>
           <p:cNvPr id="104" name="Google Shape;104;p20"/>
-          <p:cNvSpPr txBox="1"/>
+          <p:cNvSpPr txBox="1">
+            <a:spLocks noGrp="1"/>
+          </p:cNvSpPr>
           <p:nvPr>
             <p:ph type="title"/>
           </p:nvPr>
@@ -13893,12 +14059,12 @@
           </a:prstGeom>
         </p:spPr>
         <p:txBody>
-          <a:bodyPr anchorCtr="0" anchor="t" bIns="91425" lIns="91425" spcFirstLastPara="1" rIns="91425" wrap="square" tIns="91425">
+          <a:bodyPr spcFirstLastPara="1" wrap="square" lIns="91425" tIns="91425" rIns="91425" bIns="91425" anchor="t" anchorCtr="0">
             <a:normAutofit fontScale="90000"/>
           </a:bodyPr>
           <a:lstStyle/>
           <a:p>
-            <a:pPr indent="0" lvl="0" marL="0" rtl="0" algn="l">
+            <a:pPr marL="0" lvl="0" indent="0" algn="l" rtl="0">
               <a:spcBef>
                 <a:spcPts val="0"/>
               </a:spcBef>
@@ -13918,9 +14084,11 @@
       <p:sp>
         <p:nvSpPr>
           <p:cNvPr id="105" name="Google Shape;105;p20"/>
-          <p:cNvSpPr txBox="1"/>
+          <p:cNvSpPr txBox="1">
+            <a:spLocks noGrp="1"/>
+          </p:cNvSpPr>
           <p:nvPr>
-            <p:ph idx="1" type="body"/>
+            <p:ph type="body" idx="1"/>
           </p:nvPr>
         </p:nvSpPr>
         <p:spPr>
@@ -13933,12 +14101,12 @@
           </a:prstGeom>
         </p:spPr>
         <p:txBody>
-          <a:bodyPr anchorCtr="0" anchor="t" bIns="91425" lIns="91425" spcFirstLastPara="1" rIns="91425" wrap="square" tIns="91425">
+          <a:bodyPr spcFirstLastPara="1" wrap="square" lIns="91425" tIns="91425" rIns="91425" bIns="91425" anchor="t" anchorCtr="0">
             <a:normAutofit/>
           </a:bodyPr>
           <a:lstStyle/>
           <a:p>
-            <a:pPr indent="0" lvl="0" marL="0" rtl="0" algn="l">
+            <a:pPr marL="0" lvl="0" indent="0" algn="l" rtl="0">
               <a:spcBef>
                 <a:spcPts val="0"/>
               </a:spcBef>
@@ -13992,11 +14160,11 @@
 </file>
 
 <file path=ppt/slides/slide9.xml><?xml version="1.0" encoding="utf-8"?>
-<p:sld xmlns:a="http://schemas.openxmlformats.org/drawingml/2006/main" xmlns:r="http://schemas.openxmlformats.org/officeDocument/2006/relationships" xmlns:mc="http://schemas.openxmlformats.org/markup-compatibility/2006" xmlns:mv="urn:schemas-microsoft-com:mac:vml" xmlns:p="http://schemas.openxmlformats.org/presentationml/2006/main" xmlns:c="http://schemas.openxmlformats.org/drawingml/2006/chart" xmlns:dgm="http://schemas.openxmlformats.org/drawingml/2006/diagram" xmlns:o="urn:schemas-microsoft-com:office:office" xmlns:v="urn:schemas-microsoft-com:vml" xmlns:pvml="urn:schemas-microsoft-com:office:powerpoint" xmlns:com="http://schemas.openxmlformats.org/drawingml/2006/compatibility" xmlns:p14="http://schemas.microsoft.com/office/powerpoint/2010/main" xmlns:p15="http://schemas.microsoft.com/office/powerpoint/2012/main" xmlns:ahyp="http://schemas.microsoft.com/office/drawing/2018/hyperlinkcolor">
+<p:sld xmlns:a="http://schemas.openxmlformats.org/drawingml/2006/main" xmlns:r="http://schemas.openxmlformats.org/officeDocument/2006/relationships" xmlns:p="http://schemas.openxmlformats.org/presentationml/2006/main">
   <p:cSld>
     <p:spTree>
       <p:nvGrpSpPr>
-        <p:cNvPr id="110" name="Shape 110"/>
+        <p:cNvPr id="1" name="Shape 110"/>
         <p:cNvGrpSpPr/>
         <p:nvPr/>
       </p:nvGrpSpPr>
@@ -14011,7 +14179,9 @@
       <p:sp>
         <p:nvSpPr>
           <p:cNvPr id="111" name="Google Shape;111;p21"/>
-          <p:cNvSpPr txBox="1"/>
+          <p:cNvSpPr txBox="1">
+            <a:spLocks noGrp="1"/>
+          </p:cNvSpPr>
           <p:nvPr>
             <p:ph type="title"/>
           </p:nvPr>
@@ -14026,12 +14196,12 @@
           </a:prstGeom>
         </p:spPr>
         <p:txBody>
-          <a:bodyPr anchorCtr="0" anchor="t" bIns="91425" lIns="91425" spcFirstLastPara="1" rIns="91425" wrap="square" tIns="91425">
+          <a:bodyPr spcFirstLastPara="1" wrap="square" lIns="91425" tIns="91425" rIns="91425" bIns="91425" anchor="t" anchorCtr="0">
             <a:normAutofit fontScale="90000"/>
           </a:bodyPr>
           <a:lstStyle/>
           <a:p>
-            <a:pPr indent="0" lvl="0" marL="0" rtl="0" algn="l">
+            <a:pPr marL="0" lvl="0" indent="0" algn="l" rtl="0">
               <a:spcBef>
                 <a:spcPts val="0"/>
               </a:spcBef>
@@ -14051,9 +14221,11 @@
       <p:sp>
         <p:nvSpPr>
           <p:cNvPr id="112" name="Google Shape;112;p21"/>
-          <p:cNvSpPr txBox="1"/>
+          <p:cNvSpPr txBox="1">
+            <a:spLocks noGrp="1"/>
+          </p:cNvSpPr>
           <p:nvPr>
-            <p:ph idx="1" type="body"/>
+            <p:ph type="body" idx="1"/>
           </p:nvPr>
         </p:nvSpPr>
         <p:spPr>
@@ -14066,12 +14238,12 @@
           </a:prstGeom>
         </p:spPr>
         <p:txBody>
-          <a:bodyPr anchorCtr="0" anchor="t" bIns="91425" lIns="91425" spcFirstLastPara="1" rIns="91425" wrap="square" tIns="91425">
+          <a:bodyPr spcFirstLastPara="1" wrap="square" lIns="91425" tIns="91425" rIns="91425" bIns="91425" anchor="t" anchorCtr="0">
             <a:normAutofit/>
           </a:bodyPr>
           <a:lstStyle/>
           <a:p>
-            <a:pPr indent="0" lvl="0" marL="0" rtl="0" algn="l">
+            <a:pPr marL="0" lvl="0" indent="0" algn="l" rtl="0">
               <a:spcBef>
                 <a:spcPts val="0"/>
               </a:spcBef>
@@ -14080,9 +14252,6 @@
               </a:spcAft>
               <a:buNone/>
             </a:pPr>
-            <a:r>
-              <a:t/>
-            </a:r>
             <a:endParaRPr/>
           </a:p>
         </p:txBody>
@@ -14151,12 +14320,12 @@
             </a:ln>
           </p:spPr>
           <p:txBody>
-            <a:bodyPr anchorCtr="0" anchor="t" bIns="91425" lIns="91425" spcFirstLastPara="1" rIns="91425" wrap="square" tIns="91425">
+            <a:bodyPr spcFirstLastPara="1" wrap="square" lIns="91425" tIns="91425" rIns="91425" bIns="91425" anchor="t" anchorCtr="0">
               <a:noAutofit/>
             </a:bodyPr>
             <a:lstStyle/>
             <a:p>
-              <a:pPr indent="0" lvl="0" marL="0" rtl="0" algn="l">
+              <a:pPr marL="0" lvl="0" indent="0" algn="l" rtl="0">
                 <a:spcBef>
                   <a:spcPts val="0"/>
                 </a:spcBef>
@@ -14198,14 +14367,14 @@
               <a:avLst/>
             </a:prstGeom>
             <a:noFill/>
-            <a:ln cap="flat" cmpd="sng" w="28575">
+            <a:ln w="28575" cap="flat" cmpd="sng">
               <a:solidFill>
                 <a:srgbClr val="FF0000"/>
               </a:solidFill>
               <a:prstDash val="solid"/>
               <a:round/>
-              <a:headEnd len="med" w="med" type="none"/>
-              <a:tailEnd len="med" w="med" type="triangle"/>
+              <a:headEnd type="none" w="med" len="med"/>
+              <a:tailEnd type="triangle" w="med" len="med"/>
             </a:ln>
           </p:spPr>
         </p:cxnSp>
@@ -14230,12 +14399,12 @@
           </a:ln>
         </p:spPr>
         <p:txBody>
-          <a:bodyPr anchorCtr="0" anchor="t" bIns="91425" lIns="91425" spcFirstLastPara="1" rIns="91425" wrap="square" tIns="91425">
+          <a:bodyPr spcFirstLastPara="1" wrap="square" lIns="91425" tIns="91425" rIns="91425" bIns="91425" anchor="t" anchorCtr="0">
             <a:noAutofit/>
           </a:bodyPr>
           <a:lstStyle/>
           <a:p>
-            <a:pPr indent="0" lvl="0" marL="0" rtl="0" algn="l">
+            <a:pPr marL="0" lvl="0" indent="0" algn="l" rtl="0">
               <a:spcBef>
                 <a:spcPts val="0"/>
               </a:spcBef>
@@ -14268,32 +14437,32 @@
   <p:timing>
     <p:tnLst>
       <p:par>
-        <p:cTn dur="indefinite" nodeType="tmRoot" restart="never">
+        <p:cTn id="1" dur="indefinite" restart="never" nodeType="tmRoot">
           <p:childTnLst>
             <p:seq concurrent="1" nextAc="seek">
-              <p:cTn dur="indefinite" id="2" nodeType="mainSeq">
+              <p:cTn id="2" dur="indefinite" nodeType="mainSeq">
                 <p:childTnLst>
                   <p:par>
-                    <p:cTn fill="hold">
+                    <p:cTn id="3" fill="hold">
                       <p:stCondLst>
                         <p:cond delay="indefinite"/>
                       </p:stCondLst>
                       <p:childTnLst>
                         <p:par>
-                          <p:cTn fill="hold">
+                          <p:cTn id="4" fill="hold">
                             <p:stCondLst>
                               <p:cond delay="0"/>
                             </p:stCondLst>
                             <p:childTnLst>
                               <p:par>
-                                <p:cTn fill="hold" nodeType="clickEffect" presetClass="entr" presetID="1" presetSubtype="0">
+                                <p:cTn id="5" presetID="1" presetClass="entr" presetSubtype="0" fill="hold" nodeType="clickEffect">
                                   <p:stCondLst>
                                     <p:cond delay="0"/>
                                   </p:stCondLst>
                                   <p:childTnLst>
                                     <p:set>
                                       <p:cBhvr>
-                                        <p:cTn dur="1" fill="hold">
+                                        <p:cTn id="6" dur="1" fill="hold">
                                           <p:stCondLst>
                                             <p:cond delay="0"/>
                                           </p:stCondLst>
@@ -14321,14 +14490,14 @@
                 </p:childTnLst>
               </p:cTn>
               <p:prevCondLst>
-                <p:cond evt="onPrev">
+                <p:cond evt="onPrev" delay="0">
                   <p:tgtEl>
                     <p:sldTgt/>
                   </p:tgtEl>
                 </p:cond>
               </p:prevCondLst>
               <p:nextCondLst>
-                <p:cond evt="onNext">
+                <p:cond evt="onNext" delay="0">
                   <p:tgtEl>
                     <p:sldTgt/>
                   </p:tgtEl>
@@ -14344,7 +14513,288 @@
 </file>
 
 <file path=ppt/theme/theme1.xml><?xml version="1.0" encoding="utf-8"?>
-<a:theme xmlns:a="http://schemas.openxmlformats.org/drawingml/2006/main" xmlns:r="http://schemas.openxmlformats.org/officeDocument/2006/relationships">
+<a:theme xmlns:a="http://schemas.openxmlformats.org/drawingml/2006/main" name="Simple Light">
+  <a:themeElements>
+    <a:clrScheme name="Simple Light">
+      <a:dk1>
+        <a:srgbClr val="000000"/>
+      </a:dk1>
+      <a:lt1>
+        <a:srgbClr val="FFFFFF"/>
+      </a:lt1>
+      <a:dk2>
+        <a:srgbClr val="595959"/>
+      </a:dk2>
+      <a:lt2>
+        <a:srgbClr val="EEEEEE"/>
+      </a:lt2>
+      <a:accent1>
+        <a:srgbClr val="4285F4"/>
+      </a:accent1>
+      <a:accent2>
+        <a:srgbClr val="212121"/>
+      </a:accent2>
+      <a:accent3>
+        <a:srgbClr val="78909C"/>
+      </a:accent3>
+      <a:accent4>
+        <a:srgbClr val="FFAB40"/>
+      </a:accent4>
+      <a:accent5>
+        <a:srgbClr val="0097A7"/>
+      </a:accent5>
+      <a:accent6>
+        <a:srgbClr val="EEFF41"/>
+      </a:accent6>
+      <a:hlink>
+        <a:srgbClr val="0097A7"/>
+      </a:hlink>
+      <a:folHlink>
+        <a:srgbClr val="0097A7"/>
+      </a:folHlink>
+    </a:clrScheme>
+    <a:fontScheme name="Office">
+      <a:majorFont>
+        <a:latin typeface="Arial"/>
+        <a:ea typeface=""/>
+        <a:cs typeface=""/>
+        <a:font script="Jpan" typeface="ＭＳ Ｐゴシック"/>
+        <a:font script="Hang" typeface="맑은 고딕"/>
+        <a:font script="Hans" typeface="宋体"/>
+        <a:font script="Hant" typeface="新細明體"/>
+        <a:font script="Arab" typeface="Times New Roman"/>
+        <a:font script="Hebr" typeface="Times New Roman"/>
+        <a:font script="Thai" typeface="Angsana New"/>
+        <a:font script="Ethi" typeface="Nyala"/>
+        <a:font script="Beng" typeface="Vrinda"/>
+        <a:font script="Gujr" typeface="Shruti"/>
+        <a:font script="Khmr" typeface="MoolBoran"/>
+        <a:font script="Knda" typeface="Tunga"/>
+        <a:font script="Guru" typeface="Raavi"/>
+        <a:font script="Cans" typeface="Euphemia"/>
+        <a:font script="Cher" typeface="Plantagenet Cherokee"/>
+        <a:font script="Yiii" typeface="Microsoft Yi Baiti"/>
+        <a:font script="Tibt" typeface="Microsoft Himalaya"/>
+        <a:font script="Thaa" typeface="MV Boli"/>
+        <a:font script="Deva" typeface="Mangal"/>
+        <a:font script="Telu" typeface="Gautami"/>
+        <a:font script="Taml" typeface="Latha"/>
+        <a:font script="Syrc" typeface="Estrangelo Edessa"/>
+        <a:font script="Orya" typeface="Kalinga"/>
+        <a:font script="Mlym" typeface="Kartika"/>
+        <a:font script="Laoo" typeface="DokChampa"/>
+        <a:font script="Sinh" typeface="Iskoola Pota"/>
+        <a:font script="Mong" typeface="Mongolian Baiti"/>
+        <a:font script="Viet" typeface="Times New Roman"/>
+        <a:font script="Uigh" typeface="Microsoft Uighur"/>
+        <a:font script="Geor" typeface="Sylfaen"/>
+      </a:majorFont>
+      <a:minorFont>
+        <a:latin typeface="Arial"/>
+        <a:ea typeface=""/>
+        <a:cs typeface=""/>
+        <a:font script="Jpan" typeface="ＭＳ Ｐゴシック"/>
+        <a:font script="Hang" typeface="맑은 고딕"/>
+        <a:font script="Hans" typeface="宋体"/>
+        <a:font script="Hant" typeface="新細明體"/>
+        <a:font script="Arab" typeface="Arial"/>
+        <a:font script="Hebr" typeface="Arial"/>
+        <a:font script="Thai" typeface="Cordia New"/>
+        <a:font script="Ethi" typeface="Nyala"/>
+        <a:font script="Beng" typeface="Vrinda"/>
+        <a:font script="Gujr" typeface="Shruti"/>
+        <a:font script="Khmr" typeface="DaunPenh"/>
+        <a:font script="Knda" typeface="Tunga"/>
+        <a:font script="Guru" typeface="Raavi"/>
+        <a:font script="Cans" typeface="Euphemia"/>
+        <a:font script="Cher" typeface="Plantagenet Cherokee"/>
+        <a:font script="Yiii" typeface="Microsoft Yi Baiti"/>
+        <a:font script="Tibt" typeface="Microsoft Himalaya"/>
+        <a:font script="Thaa" typeface="MV Boli"/>
+        <a:font script="Deva" typeface="Mangal"/>
+        <a:font script="Telu" typeface="Gautami"/>
+        <a:font script="Taml" typeface="Latha"/>
+        <a:font script="Syrc" typeface="Estrangelo Edessa"/>
+        <a:font script="Orya" typeface="Kalinga"/>
+        <a:font script="Mlym" typeface="Kartika"/>
+        <a:font script="Laoo" typeface="DokChampa"/>
+        <a:font script="Sinh" typeface="Iskoola Pota"/>
+        <a:font script="Mong" typeface="Mongolian Baiti"/>
+        <a:font script="Viet" typeface="Arial"/>
+        <a:font script="Uigh" typeface="Microsoft Uighur"/>
+        <a:font script="Geor" typeface="Sylfaen"/>
+      </a:minorFont>
+    </a:fontScheme>
+    <a:fmtScheme name="Office">
+      <a:fillStyleLst>
+        <a:solidFill>
+          <a:schemeClr val="phClr"/>
+        </a:solidFill>
+        <a:gradFill rotWithShape="1">
+          <a:gsLst>
+            <a:gs pos="0">
+              <a:schemeClr val="phClr">
+                <a:tint val="50000"/>
+                <a:satMod val="300000"/>
+              </a:schemeClr>
+            </a:gs>
+            <a:gs pos="35000">
+              <a:schemeClr val="phClr">
+                <a:tint val="37000"/>
+                <a:satMod val="300000"/>
+              </a:schemeClr>
+            </a:gs>
+            <a:gs pos="100000">
+              <a:schemeClr val="phClr">
+                <a:tint val="15000"/>
+                <a:satMod val="350000"/>
+              </a:schemeClr>
+            </a:gs>
+          </a:gsLst>
+          <a:lin ang="16200000" scaled="1"/>
+        </a:gradFill>
+        <a:gradFill rotWithShape="1">
+          <a:gsLst>
+            <a:gs pos="0">
+              <a:schemeClr val="phClr">
+                <a:tint val="100000"/>
+                <a:shade val="100000"/>
+                <a:satMod val="130000"/>
+              </a:schemeClr>
+            </a:gs>
+            <a:gs pos="100000">
+              <a:schemeClr val="phClr">
+                <a:tint val="50000"/>
+                <a:shade val="100000"/>
+                <a:satMod val="350000"/>
+              </a:schemeClr>
+            </a:gs>
+          </a:gsLst>
+          <a:lin ang="16200000" scaled="0"/>
+        </a:gradFill>
+      </a:fillStyleLst>
+      <a:lnStyleLst>
+        <a:ln w="9525" cap="flat" cmpd="sng" algn="ctr">
+          <a:solidFill>
+            <a:schemeClr val="phClr">
+              <a:shade val="95000"/>
+              <a:satMod val="105000"/>
+            </a:schemeClr>
+          </a:solidFill>
+          <a:prstDash val="solid"/>
+        </a:ln>
+        <a:ln w="25400" cap="flat" cmpd="sng" algn="ctr">
+          <a:solidFill>
+            <a:schemeClr val="phClr"/>
+          </a:solidFill>
+          <a:prstDash val="solid"/>
+        </a:ln>
+        <a:ln w="38100" cap="flat" cmpd="sng" algn="ctr">
+          <a:solidFill>
+            <a:schemeClr val="phClr"/>
+          </a:solidFill>
+          <a:prstDash val="solid"/>
+        </a:ln>
+      </a:lnStyleLst>
+      <a:effectStyleLst>
+        <a:effectStyle>
+          <a:effectLst>
+            <a:outerShdw blurRad="40000" dist="20000" dir="5400000" rotWithShape="0">
+              <a:srgbClr val="000000">
+                <a:alpha val="38000"/>
+              </a:srgbClr>
+            </a:outerShdw>
+          </a:effectLst>
+        </a:effectStyle>
+        <a:effectStyle>
+          <a:effectLst>
+            <a:outerShdw blurRad="40000" dist="23000" dir="5400000" rotWithShape="0">
+              <a:srgbClr val="000000">
+                <a:alpha val="35000"/>
+              </a:srgbClr>
+            </a:outerShdw>
+          </a:effectLst>
+        </a:effectStyle>
+        <a:effectStyle>
+          <a:effectLst>
+            <a:outerShdw blurRad="40000" dist="23000" dir="5400000" rotWithShape="0">
+              <a:srgbClr val="000000">
+                <a:alpha val="35000"/>
+              </a:srgbClr>
+            </a:outerShdw>
+          </a:effectLst>
+          <a:scene3d>
+            <a:camera prst="orthographicFront">
+              <a:rot lat="0" lon="0" rev="0"/>
+            </a:camera>
+            <a:lightRig rig="threePt" dir="t">
+              <a:rot lat="0" lon="0" rev="1200000"/>
+            </a:lightRig>
+          </a:scene3d>
+          <a:sp3d>
+            <a:bevelT w="63500" h="25400"/>
+          </a:sp3d>
+        </a:effectStyle>
+      </a:effectStyleLst>
+      <a:bgFillStyleLst>
+        <a:solidFill>
+          <a:schemeClr val="phClr"/>
+        </a:solidFill>
+        <a:gradFill rotWithShape="1">
+          <a:gsLst>
+            <a:gs pos="0">
+              <a:schemeClr val="phClr">
+                <a:tint val="40000"/>
+                <a:satMod val="350000"/>
+              </a:schemeClr>
+            </a:gs>
+            <a:gs pos="40000">
+              <a:schemeClr val="phClr">
+                <a:tint val="45000"/>
+                <a:shade val="99000"/>
+                <a:satMod val="350000"/>
+              </a:schemeClr>
+            </a:gs>
+            <a:gs pos="100000">
+              <a:schemeClr val="phClr">
+                <a:shade val="20000"/>
+                <a:satMod val="255000"/>
+              </a:schemeClr>
+            </a:gs>
+          </a:gsLst>
+          <a:path path="circle">
+            <a:fillToRect l="50000" t="-80000" r="50000" b="180000"/>
+          </a:path>
+        </a:gradFill>
+        <a:gradFill rotWithShape="1">
+          <a:gsLst>
+            <a:gs pos="0">
+              <a:schemeClr val="phClr">
+                <a:tint val="80000"/>
+                <a:satMod val="300000"/>
+              </a:schemeClr>
+            </a:gs>
+            <a:gs pos="100000">
+              <a:schemeClr val="phClr">
+                <a:shade val="30000"/>
+                <a:satMod val="200000"/>
+              </a:schemeClr>
+            </a:gs>
+          </a:gsLst>
+          <a:path path="circle">
+            <a:fillToRect l="50000" t="50000" r="50000" b="50000"/>
+          </a:path>
+        </a:gradFill>
+      </a:bgFillStyleLst>
+    </a:fmtScheme>
+  </a:themeElements>
+  <a:objectDefaults/>
+  <a:extraClrSchemeLst/>
+</a:theme>
+</file>
+
+<file path=ppt/theme/theme2.xml><?xml version="1.0" encoding="utf-8"?>
+<a:theme xmlns:a="http://schemas.openxmlformats.org/drawingml/2006/main">
   <a:themeElements>
     <a:clrScheme name="Default">
       <a:dk1>
@@ -14619,284 +15069,7 @@
       </a:bgFillStyleLst>
     </a:fmtScheme>
   </a:themeElements>
-</a:theme>
-</file>
-
-<file path=ppt/theme/theme2.xml><?xml version="1.0" encoding="utf-8"?>
-<a:theme xmlns:a="http://schemas.openxmlformats.org/drawingml/2006/main" xmlns:r="http://schemas.openxmlformats.org/officeDocument/2006/relationships" name="Simple Light">
-  <a:themeElements>
-    <a:clrScheme name="Simple Light">
-      <a:dk1>
-        <a:srgbClr val="000000"/>
-      </a:dk1>
-      <a:lt1>
-        <a:srgbClr val="FFFFFF"/>
-      </a:lt1>
-      <a:dk2>
-        <a:srgbClr val="595959"/>
-      </a:dk2>
-      <a:lt2>
-        <a:srgbClr val="EEEEEE"/>
-      </a:lt2>
-      <a:accent1>
-        <a:srgbClr val="4285F4"/>
-      </a:accent1>
-      <a:accent2>
-        <a:srgbClr val="212121"/>
-      </a:accent2>
-      <a:accent3>
-        <a:srgbClr val="78909C"/>
-      </a:accent3>
-      <a:accent4>
-        <a:srgbClr val="FFAB40"/>
-      </a:accent4>
-      <a:accent5>
-        <a:srgbClr val="0097A7"/>
-      </a:accent5>
-      <a:accent6>
-        <a:srgbClr val="EEFF41"/>
-      </a:accent6>
-      <a:hlink>
-        <a:srgbClr val="0097A7"/>
-      </a:hlink>
-      <a:folHlink>
-        <a:srgbClr val="0097A7"/>
-      </a:folHlink>
-    </a:clrScheme>
-    <a:fontScheme name="Office">
-      <a:majorFont>
-        <a:latin typeface="Arial"/>
-        <a:ea typeface=""/>
-        <a:cs typeface=""/>
-        <a:font script="Jpan" typeface="ＭＳ Ｐゴシック"/>
-        <a:font script="Hang" typeface="맑은 고딕"/>
-        <a:font script="Hans" typeface="宋体"/>
-        <a:font script="Hant" typeface="新細明體"/>
-        <a:font script="Arab" typeface="Times New Roman"/>
-        <a:font script="Hebr" typeface="Times New Roman"/>
-        <a:font script="Thai" typeface="Angsana New"/>
-        <a:font script="Ethi" typeface="Nyala"/>
-        <a:font script="Beng" typeface="Vrinda"/>
-        <a:font script="Gujr" typeface="Shruti"/>
-        <a:font script="Khmr" typeface="MoolBoran"/>
-        <a:font script="Knda" typeface="Tunga"/>
-        <a:font script="Guru" typeface="Raavi"/>
-        <a:font script="Cans" typeface="Euphemia"/>
-        <a:font script="Cher" typeface="Plantagenet Cherokee"/>
-        <a:font script="Yiii" typeface="Microsoft Yi Baiti"/>
-        <a:font script="Tibt" typeface="Microsoft Himalaya"/>
-        <a:font script="Thaa" typeface="MV Boli"/>
-        <a:font script="Deva" typeface="Mangal"/>
-        <a:font script="Telu" typeface="Gautami"/>
-        <a:font script="Taml" typeface="Latha"/>
-        <a:font script="Syrc" typeface="Estrangelo Edessa"/>
-        <a:font script="Orya" typeface="Kalinga"/>
-        <a:font script="Mlym" typeface="Kartika"/>
-        <a:font script="Laoo" typeface="DokChampa"/>
-        <a:font script="Sinh" typeface="Iskoola Pota"/>
-        <a:font script="Mong" typeface="Mongolian Baiti"/>
-        <a:font script="Viet" typeface="Times New Roman"/>
-        <a:font script="Uigh" typeface="Microsoft Uighur"/>
-        <a:font script="Geor" typeface="Sylfaen"/>
-      </a:majorFont>
-      <a:minorFont>
-        <a:latin typeface="Arial"/>
-        <a:ea typeface=""/>
-        <a:cs typeface=""/>
-        <a:font script="Jpan" typeface="ＭＳ Ｐゴシック"/>
-        <a:font script="Hang" typeface="맑은 고딕"/>
-        <a:font script="Hans" typeface="宋体"/>
-        <a:font script="Hant" typeface="新細明體"/>
-        <a:font script="Arab" typeface="Arial"/>
-        <a:font script="Hebr" typeface="Arial"/>
-        <a:font script="Thai" typeface="Cordia New"/>
-        <a:font script="Ethi" typeface="Nyala"/>
-        <a:font script="Beng" typeface="Vrinda"/>
-        <a:font script="Gujr" typeface="Shruti"/>
-        <a:font script="Khmr" typeface="DaunPenh"/>
-        <a:font script="Knda" typeface="Tunga"/>
-        <a:font script="Guru" typeface="Raavi"/>
-        <a:font script="Cans" typeface="Euphemia"/>
-        <a:font script="Cher" typeface="Plantagenet Cherokee"/>
-        <a:font script="Yiii" typeface="Microsoft Yi Baiti"/>
-        <a:font script="Tibt" typeface="Microsoft Himalaya"/>
-        <a:font script="Thaa" typeface="MV Boli"/>
-        <a:font script="Deva" typeface="Mangal"/>
-        <a:font script="Telu" typeface="Gautami"/>
-        <a:font script="Taml" typeface="Latha"/>
-        <a:font script="Syrc" typeface="Estrangelo Edessa"/>
-        <a:font script="Orya" typeface="Kalinga"/>
-        <a:font script="Mlym" typeface="Kartika"/>
-        <a:font script="Laoo" typeface="DokChampa"/>
-        <a:font script="Sinh" typeface="Iskoola Pota"/>
-        <a:font script="Mong" typeface="Mongolian Baiti"/>
-        <a:font script="Viet" typeface="Arial"/>
-        <a:font script="Uigh" typeface="Microsoft Uighur"/>
-        <a:font script="Geor" typeface="Sylfaen"/>
-      </a:minorFont>
-    </a:fontScheme>
-    <a:fmtScheme name="Office">
-      <a:fillStyleLst>
-        <a:solidFill>
-          <a:schemeClr val="phClr"/>
-        </a:solidFill>
-        <a:gradFill rotWithShape="1">
-          <a:gsLst>
-            <a:gs pos="0">
-              <a:schemeClr val="phClr">
-                <a:tint val="50000"/>
-                <a:satMod val="300000"/>
-              </a:schemeClr>
-            </a:gs>
-            <a:gs pos="35000">
-              <a:schemeClr val="phClr">
-                <a:tint val="37000"/>
-                <a:satMod val="300000"/>
-              </a:schemeClr>
-            </a:gs>
-            <a:gs pos="100000">
-              <a:schemeClr val="phClr">
-                <a:tint val="15000"/>
-                <a:satMod val="350000"/>
-              </a:schemeClr>
-            </a:gs>
-          </a:gsLst>
-          <a:lin ang="16200000" scaled="1"/>
-        </a:gradFill>
-        <a:gradFill rotWithShape="1">
-          <a:gsLst>
-            <a:gs pos="0">
-              <a:schemeClr val="phClr">
-                <a:tint val="100000"/>
-                <a:shade val="100000"/>
-                <a:satMod val="130000"/>
-              </a:schemeClr>
-            </a:gs>
-            <a:gs pos="100000">
-              <a:schemeClr val="phClr">
-                <a:tint val="50000"/>
-                <a:shade val="100000"/>
-                <a:satMod val="350000"/>
-              </a:schemeClr>
-            </a:gs>
-          </a:gsLst>
-          <a:lin ang="16200000" scaled="0"/>
-        </a:gradFill>
-      </a:fillStyleLst>
-      <a:lnStyleLst>
-        <a:ln w="9525" cap="flat" cmpd="sng" algn="ctr">
-          <a:solidFill>
-            <a:schemeClr val="phClr">
-              <a:shade val="95000"/>
-              <a:satMod val="105000"/>
-            </a:schemeClr>
-          </a:solidFill>
-          <a:prstDash val="solid"/>
-        </a:ln>
-        <a:ln w="25400" cap="flat" cmpd="sng" algn="ctr">
-          <a:solidFill>
-            <a:schemeClr val="phClr"/>
-          </a:solidFill>
-          <a:prstDash val="solid"/>
-        </a:ln>
-        <a:ln w="38100" cap="flat" cmpd="sng" algn="ctr">
-          <a:solidFill>
-            <a:schemeClr val="phClr"/>
-          </a:solidFill>
-          <a:prstDash val="solid"/>
-        </a:ln>
-      </a:lnStyleLst>
-      <a:effectStyleLst>
-        <a:effectStyle>
-          <a:effectLst>
-            <a:outerShdw blurRad="40000" dist="20000" dir="5400000" rotWithShape="0">
-              <a:srgbClr val="000000">
-                <a:alpha val="38000"/>
-              </a:srgbClr>
-            </a:outerShdw>
-          </a:effectLst>
-        </a:effectStyle>
-        <a:effectStyle>
-          <a:effectLst>
-            <a:outerShdw blurRad="40000" dist="23000" dir="5400000" rotWithShape="0">
-              <a:srgbClr val="000000">
-                <a:alpha val="35000"/>
-              </a:srgbClr>
-            </a:outerShdw>
-          </a:effectLst>
-        </a:effectStyle>
-        <a:effectStyle>
-          <a:effectLst>
-            <a:outerShdw blurRad="40000" dist="23000" dir="5400000" rotWithShape="0">
-              <a:srgbClr val="000000">
-                <a:alpha val="35000"/>
-              </a:srgbClr>
-            </a:outerShdw>
-          </a:effectLst>
-          <a:scene3d>
-            <a:camera prst="orthographicFront">
-              <a:rot lat="0" lon="0" rev="0"/>
-            </a:camera>
-            <a:lightRig rig="threePt" dir="t">
-              <a:rot lat="0" lon="0" rev="1200000"/>
-            </a:lightRig>
-          </a:scene3d>
-          <a:sp3d>
-            <a:bevelT w="63500" h="25400"/>
-          </a:sp3d>
-        </a:effectStyle>
-      </a:effectStyleLst>
-      <a:bgFillStyleLst>
-        <a:solidFill>
-          <a:schemeClr val="phClr"/>
-        </a:solidFill>
-        <a:gradFill rotWithShape="1">
-          <a:gsLst>
-            <a:gs pos="0">
-              <a:schemeClr val="phClr">
-                <a:tint val="40000"/>
-                <a:satMod val="350000"/>
-              </a:schemeClr>
-            </a:gs>
-            <a:gs pos="40000">
-              <a:schemeClr val="phClr">
-                <a:tint val="45000"/>
-                <a:shade val="99000"/>
-                <a:satMod val="350000"/>
-              </a:schemeClr>
-            </a:gs>
-            <a:gs pos="100000">
-              <a:schemeClr val="phClr">
-                <a:shade val="20000"/>
-                <a:satMod val="255000"/>
-              </a:schemeClr>
-            </a:gs>
-          </a:gsLst>
-          <a:path path="circle">
-            <a:fillToRect l="50000" t="-80000" r="50000" b="180000"/>
-          </a:path>
-        </a:gradFill>
-        <a:gradFill rotWithShape="1">
-          <a:gsLst>
-            <a:gs pos="0">
-              <a:schemeClr val="phClr">
-                <a:tint val="80000"/>
-                <a:satMod val="300000"/>
-              </a:schemeClr>
-            </a:gs>
-            <a:gs pos="100000">
-              <a:schemeClr val="phClr">
-                <a:shade val="30000"/>
-                <a:satMod val="200000"/>
-              </a:schemeClr>
-            </a:gs>
-          </a:gsLst>
-          <a:path path="circle">
-            <a:fillToRect l="50000" t="50000" r="50000" b="50000"/>
-          </a:path>
-        </a:gradFill>
-      </a:bgFillStyleLst>
-    </a:fmtScheme>
-  </a:themeElements>
+  <a:objectDefaults/>
+  <a:extraClrSchemeLst/>
 </a:theme>
 </file>